--- a/lecons/LSA/Geomorphology/12_LSA_GEOMO_L10_Intensity_and_Factors_of_Weathering.pptx
+++ b/lecons/LSA/Geomorphology/12_LSA_GEOMO_L10_Intensity_and_Factors_of_Weathering.pptx
@@ -58,9 +58,14 @@
     <p:sldId id="306" r:id="rId52"/>
     <p:sldId id="307" r:id="rId53"/>
     <p:sldId id="308" r:id="rId54"/>
+    <p:sldId id="309" r:id="rId55"/>
+    <p:sldId id="310" r:id="rId56"/>
+    <p:sldId id="311" r:id="rId57"/>
+    <p:sldId id="312" r:id="rId58"/>
+    <p:sldId id="313" r:id="rId59"/>
   </p:sldIdLst>
   <p:notesMasterIdLst>
-    <p:notesMasterId r:id="rId55"/>
+    <p:notesMasterId r:id="rId60"/>
   </p:notesMasterIdLst>
   <p:sldSz cx="12192000" cy="6858000"/>
   <p:notesSz cx="6858000" cy="12192000"/>
@@ -642,7 +647,7 @@
           <a:p>
             <a:r>
               <a:rPr lang="en-US" dirty="0"/>
-              <a:t>Listen carefully to this situation from real life. In Douala, road cuttings show red soil tens of metres deep. In the Far North, bare granite rocks stand on the surface with only a thin layer of soil. Think about it, because I am going to ask you some questions.</a:t>
+              <a:t>Take your time to copy this part; we will continue together.</a:t>
             </a:r>
             <a:endParaRPr lang="en-US" dirty="0"/>
           </a:p>
@@ -730,7 +735,7 @@
           <a:p>
             <a:r>
               <a:rPr lang="en-US" dirty="0"/>
-              <a:t>Question 1: What is the problem in the situation? Think for a moment, then raise your hand to answer.</a:t>
+              <a:t>Listen carefully to this situation from real life. In an old quarter of Garoua, you see two stone walls. One was built last year: its stones are sharp and bright. The other, about 100 years old, has rounded, cracked stones covered with green algae, and its surface is crumbly. Both are made of the same local rock. You ask: "Why has the old wall weathered so much, and what controls the speed of weathering?" Think about it, because I am going to ask you some questions.</a:t>
             </a:r>
             <a:endParaRPr lang="en-US" dirty="0"/>
           </a:p>
@@ -818,7 +823,7 @@
           <a:p>
             <a:r>
               <a:rPr lang="en-US" dirty="0"/>
-              <a:t>Good. We want to know why weathering is deeper in Douala.</a:t>
+              <a:t>Question 1: What is the problem in the situation? Think for a moment, then raise your hand to answer.</a:t>
             </a:r>
             <a:endParaRPr lang="en-US" dirty="0"/>
           </a:p>
@@ -906,7 +911,7 @@
           <a:p>
             <a:r>
               <a:rPr lang="en-US" dirty="0"/>
-              <a:t>Question 2: What is the difference between the two climates? Think for a moment, then raise your hand to answer.</a:t>
+              <a:t>Good. The learner does not know the factors that control the intensity of weathering.</a:t>
             </a:r>
             <a:endParaRPr lang="en-US" dirty="0"/>
           </a:p>
@@ -994,7 +999,7 @@
           <a:p>
             <a:r>
               <a:rPr lang="en-US" dirty="0"/>
-              <a:t>Good. Douala is hot and very wet; the Far North is hot and dry.</a:t>
+              <a:t>Question 2: Which process has worn the old wall? Think for a moment, then raise your hand to answer.</a:t>
             </a:r>
             <a:endParaRPr lang="en-US" dirty="0"/>
           </a:p>
@@ -1082,7 +1087,7 @@
           <a:p>
             <a:r>
               <a:rPr lang="en-US" dirty="0"/>
-              <a:t>Question 3: Which type of weathering is strong in Douala? Think for a moment, then raise your hand to answer.</a:t>
+              <a:t>Good. Weathering.</a:t>
             </a:r>
             <a:endParaRPr lang="en-US" dirty="0"/>
           </a:p>
@@ -1170,7 +1175,7 @@
           <a:p>
             <a:r>
               <a:rPr lang="en-US" dirty="0"/>
-              <a:t>Good. Chemical weathering.</a:t>
+              <a:t>Question 3: What is the most important factor of weathering in Garoua? Think for a moment, then raise your hand to answer.</a:t>
             </a:r>
             <a:endParaRPr lang="en-US" dirty="0"/>
           </a:p>
@@ -1258,7 +1263,7 @@
           <a:p>
             <a:r>
               <a:rPr lang="en-US" dirty="0"/>
-              <a:t>From this situation, the action we are working towards in this lesson is the following: predict where rocks weather deeply and use this in building and farming.</a:t>
+              <a:t>Good. Climate: strong heat and seasonal heavy rain.</a:t>
             </a:r>
             <a:endParaRPr lang="en-US" dirty="0"/>
           </a:p>
@@ -1346,7 +1351,7 @@
           <a:p>
             <a:r>
               <a:rPr lang="en-US" dirty="0"/>
-              <a:t>Why is this lesson important for you? This lesson helps us to understand why soils and landscapes differ from place to place.</a:t>
+              <a:t>From this situation, the action we are working towards in this lesson is the following: choose resistant rocks and protect buildings from water to slow down weathering.</a:t>
             </a:r>
             <a:endParaRPr lang="en-US" dirty="0"/>
           </a:p>
@@ -1434,7 +1439,7 @@
           <a:p>
             <a:r>
               <a:rPr lang="en-US" dirty="0"/>
-              <a:t>Activity 1. Look carefully at this diagram: peltier's graph: climate and weathering. Observe every detail before I ask the question.</a:t>
+              <a:t>Why is this lesson important for you? This lesson helps us to understand the soils and landscapes of our region and to choose durable building materials.</a:t>
             </a:r>
             <a:endParaRPr lang="en-US" dirty="0"/>
           </a:p>
@@ -1610,7 +1615,7 @@
           <a:p>
             <a:r>
               <a:rPr lang="en-US" dirty="0"/>
-              <a:t>Here is the question for Activity 1: Where is chemical weathering strongest? Where is frost action strongest? Take one minute to think and write your answer in your rough notebook.</a:t>
+              <a:t>Activity 1. Look carefully at this diagram: peltier's diagram. Observe every detail before I ask the question.</a:t>
             </a:r>
             <a:endParaRPr lang="en-US" dirty="0"/>
           </a:p>
@@ -1698,7 +1703,7 @@
           <a:p>
             <a:r>
               <a:rPr lang="en-US" dirty="0"/>
-              <a:t>Let us check the answer together. Chemical: hot and wet climates. Frost action: cold and wet climates.</a:t>
+              <a:t>Here is the question for Activity 1: In which climate is chemical weathering strongest? Take one minute to think and write your answer in your rough notebook.</a:t>
             </a:r>
             <a:endParaRPr lang="en-US" dirty="0"/>
           </a:p>
@@ -1786,7 +1791,7 @@
           <a:p>
             <a:r>
               <a:rPr lang="en-US" dirty="0"/>
-              <a:t>Activity 2. Look carefully at this picture: a deep red weathered soil. Observe every detail before I ask the question.</a:t>
+              <a:t>Let us check the answer together. In hot, wet climates.</a:t>
             </a:r>
             <a:endParaRPr lang="en-US" dirty="0"/>
           </a:p>
@@ -1874,7 +1879,7 @@
           <a:p>
             <a:r>
               <a:rPr lang="en-US" dirty="0"/>
-              <a:t>Here is the question for Activity 2: Why is the weathered layer very deep in humid tropical areas? Take one minute to think and write your answer in your rough notebook.</a:t>
+              <a:t>Activity 2. Look carefully at this picture: red laterite. Observe every detail before I ask the question.</a:t>
             </a:r>
             <a:endParaRPr lang="en-US" dirty="0"/>
           </a:p>
@@ -1962,7 +1967,7 @@
           <a:p>
             <a:r>
               <a:rPr lang="en-US" dirty="0"/>
-              <a:t>Let us check the answer together. Heat and water speed up chemical reactions all year.</a:t>
+              <a:t>Here is the question for Activity 2: Why are soils around Garoua red? Take one minute to think and write your answer in your rough notebook.</a:t>
             </a:r>
             <a:endParaRPr lang="en-US" dirty="0"/>
           </a:p>
@@ -2050,7 +2055,7 @@
           <a:p>
             <a:r>
               <a:rPr lang="en-US" dirty="0"/>
-              <a:t>Activity 3. Look carefully at this picture: a cave in limestone. Observe every detail before I ask the question.</a:t>
+              <a:t>Let us check the answer together. Iron minerals are oxidised in the hot, seasonally wet climate.</a:t>
             </a:r>
             <a:endParaRPr lang="en-US" dirty="0"/>
           </a:p>
@@ -2138,7 +2143,7 @@
           <a:p>
             <a:r>
               <a:rPr lang="en-US" dirty="0"/>
-              <a:t>Here is the question for Activity 3: Why is limestone quickly weathered by rain water? Take one minute to think and write your answer in your rough notebook.</a:t>
+              <a:t>Activity 3. Look carefully at this picture: limestone dissolved by water. Observe every detail before I ask the question.</a:t>
             </a:r>
             <a:endParaRPr lang="en-US" dirty="0"/>
           </a:p>
@@ -2226,7 +2231,7 @@
           <a:p>
             <a:r>
               <a:rPr lang="en-US" dirty="0"/>
-              <a:t>Let us check the answer together. It is dissolved by weak acid in rain (carbonation).</a:t>
+              <a:t>Here is the question for Activity 3: Which weathers faster: limestone or granite? Take one minute to think and write your answer in your rough notebook.</a:t>
             </a:r>
             <a:endParaRPr lang="en-US" dirty="0"/>
           </a:p>
@@ -2314,7 +2319,7 @@
           <a:p>
             <a:r>
               <a:rPr lang="en-US" dirty="0"/>
-              <a:t>Activity 4. Look carefully at this picture: broken rocks on a steep mountain slope. Observe every detail before I ask the question.</a:t>
+              <a:t>Let us check the answer together. Limestone.</a:t>
             </a:r>
             <a:endParaRPr lang="en-US" dirty="0"/>
           </a:p>
@@ -2402,7 +2407,7 @@
           <a:p>
             <a:r>
               <a:rPr lang="en-US" dirty="0"/>
-              <a:t>Here is the question for Activity 4: Why are there many broken rocks on steep mountain slopes? Take one minute to think and write your answer in your rough notebook.</a:t>
+              <a:t>Activity 4. Look carefully at this picture: scree on a steep slope. Observe every detail before I ask the question.</a:t>
             </a:r>
             <a:endParaRPr lang="en-US" dirty="0"/>
           </a:p>
@@ -2490,7 +2495,7 @@
           <a:p>
             <a:r>
               <a:rPr lang="en-US" dirty="0"/>
-              <a:t>Our topic is Denudational Processes on Slopes, and the sub-topic is Weathering. The key notions we shall use today are: peltier's graph, regolith, lithology, joints. At the end, you should be able to do this: learners are able to explain why weathering is stronger in some places than in others.</a:t>
+              <a:t>Our topic is Denudational Processes on Slopes, and the sub-topic is Weathering. The key notions we shall use today are: intensity of weathering, climate, Peltier's diagram, rock hardness, joints, relief, vegetation, human activities, acid rain. At the end, you should be able to do this: learners are able to explain why weathering is faster in some places and apply this to Garoua.</a:t>
             </a:r>
             <a:endParaRPr lang="en-US" dirty="0"/>
           </a:p>
@@ -2578,7 +2583,7 @@
           <a:p>
             <a:r>
               <a:rPr lang="en-US" dirty="0"/>
-              <a:t>Let us check the answer together. Freezing and heating break the rocks, and the pieces fall down the steep slope.</a:t>
+              <a:t>Here is the question for Activity 4: Why is fresh rock often exposed on steep slopes? Take one minute to think and write your answer in your rough notebook.</a:t>
             </a:r>
             <a:endParaRPr lang="en-US" dirty="0"/>
           </a:p>
@@ -2666,7 +2671,7 @@
           <a:p>
             <a:r>
               <a:rPr lang="en-US" dirty="0"/>
-              <a:t>Activity 5. Look carefully at this picture: a quarry. Observe every detail before I ask the question.</a:t>
+              <a:t>Let us check the answer together. Weathered material is quickly washed away.</a:t>
             </a:r>
             <a:endParaRPr lang="en-US" dirty="0"/>
           </a:p>
@@ -2754,7 +2759,7 @@
           <a:p>
             <a:r>
               <a:rPr lang="en-US" dirty="0"/>
-              <a:t>Here is the question for Activity 5: How do people speed up weathering? Take one minute to think and write your answer in your rough notebook.</a:t>
+              <a:t>Activity 5. Look carefully at this picture: a weathered stone surface. Observe every detail before I ask the question.</a:t>
             </a:r>
             <a:endParaRPr lang="en-US" dirty="0"/>
           </a:p>
@@ -2842,7 +2847,7 @@
           <a:p>
             <a:r>
               <a:rPr lang="en-US" dirty="0"/>
-              <a:t>Let us check the answer together. Quarries, roads and deforestation expose fresh rock; pollution makes acid rain.</a:t>
+              <a:t>Here is the question for Activity 5: How does acid rain speed up weathering? Take one minute to think and write your answer in your rough notebook.</a:t>
             </a:r>
             <a:endParaRPr lang="en-US" dirty="0"/>
           </a:p>
@@ -2930,7 +2935,7 @@
           <a:p>
             <a:r>
               <a:rPr lang="en-US" dirty="0"/>
-              <a:t>Now we are going to copy the board summary. Write the title and the headings neatly in your notebooks. I will give you enough time for each slide, so do not rush.</a:t>
+              <a:t>Let us check the answer together. Its acids dissolve and weaken rocks and buildings.</a:t>
             </a:r>
             <a:endParaRPr lang="en-US" dirty="0"/>
           </a:p>
@@ -3018,7 +3023,7 @@
           <a:p>
             <a:r>
               <a:rPr lang="en-US" dirty="0"/>
-              <a:t>Let us copy the definitions. The key terms of this lesson are defined as follows. On this slide we have Intensity of weathering and Regolith. Write each point on a new line, with the key term first, and explain it in your own words when we revise.</a:t>
+              <a:t>Now we are going to copy the board summary. Write the title and the headings neatly in your notebooks. I will give you enough time for each slide, so do not rush.</a:t>
             </a:r>
             <a:endParaRPr lang="en-US" dirty="0"/>
           </a:p>
@@ -3106,7 +3111,7 @@
           <a:p>
             <a:r>
               <a:rPr lang="en-US" dirty="0"/>
-              <a:t>Let us copy Climate. Climate is the main factor of weathering. On this slide we have Temperature and rainfall. Write each point on a new line, with the key term first, and explain it in your own words when we revise. When you finish, we go to the next slide.</a:t>
+              <a:t>Let us copy the definitions. The key terms of this lesson are defined as follows. On this slide we have Intensity of weathering and Peltier's diagram. Write each point on a new line, with the key term first, and explain it in your own words when we revise. When you finish, we go to the next slide.</a:t>
             </a:r>
             <a:endParaRPr lang="en-US" dirty="0"/>
           </a:p>
@@ -3194,7 +3199,7 @@
           <a:p>
             <a:r>
               <a:rPr lang="en-US" dirty="0"/>
-              <a:t>We continue with Climate. On this slide we have Peltier's graph. Write each point on a new line, with the key term first, and explain it in your own words when we revise.</a:t>
+              <a:t>We continue with the definitions. On this slide we have Joints. Write each point on a new line, with the key term first, and explain it in your own words when we revise.</a:t>
             </a:r>
             <a:endParaRPr lang="en-US" dirty="0"/>
           </a:p>
@@ -3282,7 +3287,7 @@
           <a:p>
             <a:r>
               <a:rPr lang="en-US" dirty="0"/>
-              <a:t>Now draw this illustration in your notebook: peltier's weathering regions. Give it a title and label it clearly.</a:t>
+              <a:t>Let us copy Climate. Climate influences weathering as follows. Copy the point on The most important factor on the left, then draw the diagram on the right: peltier's diagram. Give it a title and label it clearly.</a:t>
             </a:r>
             <a:endParaRPr lang="en-US" dirty="0"/>
           </a:p>
@@ -3370,7 +3375,7 @@
           <a:p>
             <a:r>
               <a:rPr lang="en-US" dirty="0"/>
-              <a:t>Let us copy Geology, Relief, Vegetation and Man. Other factors of weathering are. On this slide we have Geology (rock characteristics). Write each point on a new line, with the key term first, and explain it in your own words when we revise. When you finish, we go to the next slide.</a:t>
+              <a:t>We continue with Climate. On this slide we have Temperature and Moisture. Write each point on a new line, with the key term first, and explain it in your own words when we revise. When you finish, we go to the next slide.</a:t>
             </a:r>
             <a:endParaRPr lang="en-US" dirty="0"/>
           </a:p>
@@ -3458,7 +3463,7 @@
           <a:p>
             <a:r>
               <a:rPr lang="en-US" dirty="0"/>
-              <a:t>Before we start the new lesson, let us correct the homework I gave you at the end of Lesson 9: Denudation and Weathering. The question was: Compare rocks in the dry North and in the wet South of Cameroon. Where are they more deeply weathered? Why? Take out your exercise books.</a:t>
+              <a:t>Before we start the new lesson, let us correct the homework I gave you at the end of Lesson 9: Denudation and Weathering. The question was: Name the most important factor of weathering. Take out your exercise books.</a:t>
             </a:r>
             <a:endParaRPr lang="en-US" dirty="0"/>
           </a:p>
@@ -3546,7 +3551,7 @@
           <a:p>
             <a:r>
               <a:rPr lang="en-US" dirty="0"/>
-              <a:t>We continue with Geology, Relief, Vegetation and Man. On this slide we have Relief and Vegetation. Write each point on a new line, with the key term first, and explain it in your own words when we revise. When you finish, we go to the next slide.</a:t>
+              <a:t>We continue with Climate. On this slide we have Peltier's diagram. Write each point on a new line, with the key term first, and explain it in your own words when we revise.</a:t>
             </a:r>
             <a:endParaRPr lang="en-US" dirty="0"/>
           </a:p>
@@ -3634,7 +3639,7 @@
           <a:p>
             <a:r>
               <a:rPr lang="en-US" dirty="0"/>
-              <a:t>We continue with Geology, Relief, Vegetation and Man. On this slide we have Human activities. Write each point on a new line, with the key term first, and explain it in your own words when we revise.</a:t>
+              <a:t>Copy the point on Garoua on the left, then draw the diagram on the right: red laterite. Give it a title and label it clearly.</a:t>
             </a:r>
             <a:endParaRPr lang="en-US" dirty="0"/>
           </a:p>
@@ -3722,7 +3727,7 @@
           <a:p>
             <a:r>
               <a:rPr lang="en-US" dirty="0"/>
-              <a:t>Now let us check what you have understood. Question 1: According to Peltier, where is chemical weathering strongest? Answer in your exercise book.</a:t>
+              <a:t>Let us copy Geology (Rock Characteristics). Rock characteristics influence weathering as follows. Copy the point on Hardness and minerals on the left, then draw the diagram on the right: dissolved limestone. Give it a title and label it clearly.</a:t>
             </a:r>
             <a:endParaRPr lang="en-US" dirty="0"/>
           </a:p>
@@ -3810,7 +3815,7 @@
           <a:p>
             <a:r>
               <a:rPr lang="en-US" dirty="0"/>
-              <a:t>The expected answer is: in hot and wet climates. If you got it right, well done.</a:t>
+              <a:t>We continue with Geology (Rock Characteristics). On this slide we have Structure and Colour. Write each point on a new line, with the key term first, and explain it in your own words when we revise.</a:t>
             </a:r>
             <a:endParaRPr lang="en-US" dirty="0"/>
           </a:p>
@@ -3898,7 +3903,7 @@
           <a:p>
             <a:r>
               <a:rPr lang="en-US" dirty="0"/>
-              <a:t>Now let us check what you have understood. Question 2: Give two factors of weathering other than climate. Answer in your exercise book.</a:t>
+              <a:t>Let us copy Relief, Vegetation and Human Activities. Relief, vegetation and human activities influence weathering as follows. Copy the point on Steep slopes on the left, then draw the diagram on the right: scree on a slope. Give it a title and label it clearly.</a:t>
             </a:r>
             <a:endParaRPr lang="en-US" dirty="0"/>
           </a:p>
@@ -3986,7 +3991,7 @@
           <a:p>
             <a:r>
               <a:rPr lang="en-US" dirty="0"/>
-              <a:t>The expected answer is: rock type (geology) and vegetation. If you got it right, well done.</a:t>
+              <a:t>We continue with Relief, Vegetation and Human Activities. On this slide we have Gentle slopes and plains and Vegetation. Write each point on a new line, with the key term first, and explain it in your own words when we revise. When you finish, we go to the next slide.</a:t>
             </a:r>
             <a:endParaRPr lang="en-US" dirty="0"/>
           </a:p>
@@ -4074,7 +4079,7 @@
           <a:p>
             <a:r>
               <a:rPr lang="en-US" dirty="0"/>
-              <a:t>For those who need more practice, fill in the blanks in your exercise book. The answers are: number 1, regolith; number 2, joints; number 3, carbonation (solution).</a:t>
+              <a:t>We continue with Relief, Vegetation and Human Activities. On this slide we have Human activities. Write each point on a new line, with the key term first, and explain it in your own words when we revise.</a:t>
             </a:r>
             <a:endParaRPr lang="en-US" dirty="0"/>
           </a:p>
@@ -4162,7 +4167,7 @@
           <a:p>
             <a:r>
               <a:rPr lang="en-US" dirty="0"/>
-              <a:t>For your homework: List three useful materials that come from weathered rock (for example sand, clay, laterite). We shall correct it at the beginning of our next lesson.</a:t>
+              <a:t>Now let us check what you have understood. Question 1: Why is climate the most important factor of weathering in North Cameroon? Answer in your exercise book.</a:t>
             </a:r>
             <a:endParaRPr lang="en-US" dirty="0"/>
           </a:p>
@@ -4250,7 +4255,7 @@
           <a:p>
             <a:r>
               <a:rPr lang="en-US" dirty="0"/>
-              <a:t>Our next lesson will be on Lesson 11: The Impact of Weathering. Thank you for your attention, and see you next time.</a:t>
+              <a:t>The expected answer is: strong heat causes exfoliation and speeds up chemical reactions, while the heavy rains provide water for chemical weathering. If you got it right, well done.</a:t>
             </a:r>
             <a:endParaRPr lang="en-US" dirty="0"/>
           </a:p>
@@ -4338,7 +4343,7 @@
           <a:p>
             <a:r>
               <a:rPr lang="en-US" dirty="0"/>
-              <a:t>Let us play the bilingual game. I say a word in English, and you give me the French word. Then we do the reverse.</a:t>
+              <a:t>Now let us check what you have understood. Question 2: How can vegetation both increase and reduce weathering? Answer in your exercise book.</a:t>
             </a:r>
             <a:endParaRPr lang="en-US" dirty="0"/>
           </a:p>
@@ -4426,7 +4431,7 @@
           <a:p>
             <a:r>
               <a:rPr lang="en-US" dirty="0"/>
-              <a:t>Here is a good answer. Rocks in the wet South are more deeply weathered, because heat and water speed up chemical weathering. In the dry North, weathering is mainly physical and shallow. Compare it with your own answer and correct your work in red.</a:t>
+              <a:t>Here is a good answer. Climate (temperature and rainfall). Compare it with your own answer and correct your work in red.</a:t>
             </a:r>
             <a:endParaRPr lang="en-US" dirty="0"/>
           </a:p>
@@ -4514,7 +4519,7 @@
           <a:p>
             <a:r>
               <a:rPr lang="en-US" dirty="0"/>
-              <a:t>I record this information in the official logbook of the class after the lesson.</a:t>
+              <a:t>The expected answer is: roots split rocks, but a dense cover protects rocks from sun and rain. If you got it right, well done.</a:t>
             </a:r>
             <a:endParaRPr lang="en-US" dirty="0"/>
           </a:p>
@@ -4602,7 +4607,7 @@
           <a:p>
             <a:r>
               <a:rPr lang="en-US" dirty="0"/>
-              <a:t>I complete the second page of the logbook: the matter taught, the evaluation, the homework and the attendance.</a:t>
+              <a:t>For those who need more practice, fill in the blanks in your exercise book. The answers are: number 1, Peltier; number 2, granite; number 3, chemical.</a:t>
             </a:r>
             <a:endParaRPr lang="en-US" dirty="0"/>
           </a:p>
@@ -4690,7 +4695,7 @@
           <a:p>
             <a:r>
               <a:rPr lang="en-US" dirty="0"/>
-              <a:t>This slide is for me, the teacher: it gives the timing of the lesson and what to do if the projector is not available.</a:t>
+              <a:t>For your homework: Define regolith. We shall correct it at the beginning of our next lesson.</a:t>
             </a:r>
             <a:endParaRPr lang="en-US" dirty="0"/>
           </a:p>
@@ -4778,7 +4783,7 @@
           <a:p>
             <a:r>
               <a:rPr lang="en-US" dirty="0"/>
-              <a:t>These are the references and picture credits used to prepare this lesson.</a:t>
+              <a:t>Our next lesson will be on Lesson 11: The Impact of Weathering. Thank you for your attention, and see you next time.</a:t>
             </a:r>
             <a:endParaRPr lang="en-US" dirty="0"/>
           </a:p>
@@ -4802,6 +4807,446 @@
             <a:fld id="{F7021451-1387-4CA6-816F-3879F97B5CBC}" type="slidenum">
               <a:rPr lang="en-US"/>
               <a:t>53</a:t>
+            </a:fld>
+            <a:endParaRPr lang="en-US"/>
+          </a:p>
+        </p:txBody>
+      </p:sp>
+    </p:spTree>
+    <p:extLst>
+      <p:ext uri="{BB962C8B-B14F-4D97-AF65-F5344CB8AC3E}">
+        <p14:creationId xmlns:p14="http://schemas.microsoft.com/office/powerpoint/2010/main" val="1024086991"/>
+      </p:ext>
+    </p:extLst>
+  </p:cSld>
+  <p:clrMapOvr>
+    <a:masterClrMapping/>
+  </p:clrMapOvr>
+</p:notes>
+</file>
+
+<file path=ppt/notesSlides/notesSlide54.xml><?xml version="1.0" encoding="utf-8"?>
+<p:notes xmlns:a="http://schemas.openxmlformats.org/drawingml/2006/main" xmlns:r="http://schemas.openxmlformats.org/officeDocument/2006/relationships" xmlns:p="http://schemas.openxmlformats.org/presentationml/2006/main">
+  <p:cSld>
+    <p:spTree>
+      <p:nvGrpSpPr>
+        <p:cNvPr id="1" name=""/>
+        <p:cNvGrpSpPr/>
+        <p:nvPr/>
+      </p:nvGrpSpPr>
+      <p:grpSpPr>
+        <a:xfrm>
+          <a:off x="0" y="0"/>
+          <a:ext cx="0" cy="0"/>
+          <a:chOff x="0" y="0"/>
+          <a:chExt cx="0" cy="0"/>
+        </a:xfrm>
+      </p:grpSpPr>
+      <p:sp>
+        <p:nvSpPr>
+          <p:cNvPr id="2" name="Slide Image Placeholder 1"/>
+          <p:cNvSpPr>
+            <a:spLocks noGrp="1" noRot="1" noChangeAspect="1"/>
+          </p:cNvSpPr>
+          <p:nvPr>
+            <p:ph type="sldImg"/>
+          </p:nvPr>
+        </p:nvSpPr>
+        <p:spPr/>
+      </p:sp>
+      <p:sp>
+        <p:nvSpPr>
+          <p:cNvPr id="3" name="Notes Placeholder 2"/>
+          <p:cNvSpPr>
+            <a:spLocks noGrp="1"/>
+          </p:cNvSpPr>
+          <p:nvPr>
+            <p:ph type="body" idx="1"/>
+          </p:nvPr>
+        </p:nvSpPr>
+        <p:spPr/>
+        <p:txBody>
+          <a:bodyPr/>
+          <a:lstStyle/>
+          <a:p>
+            <a:r>
+              <a:rPr lang="en-US" dirty="0"/>
+              <a:t>Let us play the bilingual game. I say a word in English, and you give me the French word. Then we do the reverse.</a:t>
+            </a:r>
+            <a:endParaRPr lang="en-US" dirty="0"/>
+          </a:p>
+        </p:txBody>
+      </p:sp>
+      <p:sp>
+        <p:nvSpPr>
+          <p:cNvPr id="4" name="Slide Number Placeholder 3"/>
+          <p:cNvSpPr>
+            <a:spLocks noGrp="1"/>
+          </p:cNvSpPr>
+          <p:nvPr>
+            <p:ph type="sldNum" sz="quarter" idx="10"/>
+          </p:nvPr>
+        </p:nvSpPr>
+        <p:spPr/>
+        <p:txBody>
+          <a:bodyPr/>
+          <a:lstStyle/>
+          <a:p>
+            <a:fld id="{F7021451-1387-4CA6-816F-3879F97B5CBC}" type="slidenum">
+              <a:rPr lang="en-US"/>
+              <a:t>54</a:t>
+            </a:fld>
+            <a:endParaRPr lang="en-US"/>
+          </a:p>
+        </p:txBody>
+      </p:sp>
+    </p:spTree>
+    <p:extLst>
+      <p:ext uri="{BB962C8B-B14F-4D97-AF65-F5344CB8AC3E}">
+        <p14:creationId xmlns:p14="http://schemas.microsoft.com/office/powerpoint/2010/main" val="1024086991"/>
+      </p:ext>
+    </p:extLst>
+  </p:cSld>
+  <p:clrMapOvr>
+    <a:masterClrMapping/>
+  </p:clrMapOvr>
+</p:notes>
+</file>
+
+<file path=ppt/notesSlides/notesSlide55.xml><?xml version="1.0" encoding="utf-8"?>
+<p:notes xmlns:a="http://schemas.openxmlformats.org/drawingml/2006/main" xmlns:r="http://schemas.openxmlformats.org/officeDocument/2006/relationships" xmlns:p="http://schemas.openxmlformats.org/presentationml/2006/main">
+  <p:cSld>
+    <p:spTree>
+      <p:nvGrpSpPr>
+        <p:cNvPr id="1" name=""/>
+        <p:cNvGrpSpPr/>
+        <p:nvPr/>
+      </p:nvGrpSpPr>
+      <p:grpSpPr>
+        <a:xfrm>
+          <a:off x="0" y="0"/>
+          <a:ext cx="0" cy="0"/>
+          <a:chOff x="0" y="0"/>
+          <a:chExt cx="0" cy="0"/>
+        </a:xfrm>
+      </p:grpSpPr>
+      <p:sp>
+        <p:nvSpPr>
+          <p:cNvPr id="2" name="Slide Image Placeholder 1"/>
+          <p:cNvSpPr>
+            <a:spLocks noGrp="1" noRot="1" noChangeAspect="1"/>
+          </p:cNvSpPr>
+          <p:nvPr>
+            <p:ph type="sldImg"/>
+          </p:nvPr>
+        </p:nvSpPr>
+        <p:spPr/>
+      </p:sp>
+      <p:sp>
+        <p:nvSpPr>
+          <p:cNvPr id="3" name="Notes Placeholder 2"/>
+          <p:cNvSpPr>
+            <a:spLocks noGrp="1"/>
+          </p:cNvSpPr>
+          <p:nvPr>
+            <p:ph type="body" idx="1"/>
+          </p:nvPr>
+        </p:nvSpPr>
+        <p:spPr/>
+        <p:txBody>
+          <a:bodyPr/>
+          <a:lstStyle/>
+          <a:p>
+            <a:r>
+              <a:rPr lang="en-US" dirty="0"/>
+              <a:t>I record this information in the official logbook of the class after the lesson.</a:t>
+            </a:r>
+            <a:endParaRPr lang="en-US" dirty="0"/>
+          </a:p>
+        </p:txBody>
+      </p:sp>
+      <p:sp>
+        <p:nvSpPr>
+          <p:cNvPr id="4" name="Slide Number Placeholder 3"/>
+          <p:cNvSpPr>
+            <a:spLocks noGrp="1"/>
+          </p:cNvSpPr>
+          <p:nvPr>
+            <p:ph type="sldNum" sz="quarter" idx="10"/>
+          </p:nvPr>
+        </p:nvSpPr>
+        <p:spPr/>
+        <p:txBody>
+          <a:bodyPr/>
+          <a:lstStyle/>
+          <a:p>
+            <a:fld id="{F7021451-1387-4CA6-816F-3879F97B5CBC}" type="slidenum">
+              <a:rPr lang="en-US"/>
+              <a:t>55</a:t>
+            </a:fld>
+            <a:endParaRPr lang="en-US"/>
+          </a:p>
+        </p:txBody>
+      </p:sp>
+    </p:spTree>
+    <p:extLst>
+      <p:ext uri="{BB962C8B-B14F-4D97-AF65-F5344CB8AC3E}">
+        <p14:creationId xmlns:p14="http://schemas.microsoft.com/office/powerpoint/2010/main" val="1024086991"/>
+      </p:ext>
+    </p:extLst>
+  </p:cSld>
+  <p:clrMapOvr>
+    <a:masterClrMapping/>
+  </p:clrMapOvr>
+</p:notes>
+</file>
+
+<file path=ppt/notesSlides/notesSlide56.xml><?xml version="1.0" encoding="utf-8"?>
+<p:notes xmlns:a="http://schemas.openxmlformats.org/drawingml/2006/main" xmlns:r="http://schemas.openxmlformats.org/officeDocument/2006/relationships" xmlns:p="http://schemas.openxmlformats.org/presentationml/2006/main">
+  <p:cSld>
+    <p:spTree>
+      <p:nvGrpSpPr>
+        <p:cNvPr id="1" name=""/>
+        <p:cNvGrpSpPr/>
+        <p:nvPr/>
+      </p:nvGrpSpPr>
+      <p:grpSpPr>
+        <a:xfrm>
+          <a:off x="0" y="0"/>
+          <a:ext cx="0" cy="0"/>
+          <a:chOff x="0" y="0"/>
+          <a:chExt cx="0" cy="0"/>
+        </a:xfrm>
+      </p:grpSpPr>
+      <p:sp>
+        <p:nvSpPr>
+          <p:cNvPr id="2" name="Slide Image Placeholder 1"/>
+          <p:cNvSpPr>
+            <a:spLocks noGrp="1" noRot="1" noChangeAspect="1"/>
+          </p:cNvSpPr>
+          <p:nvPr>
+            <p:ph type="sldImg"/>
+          </p:nvPr>
+        </p:nvSpPr>
+        <p:spPr/>
+      </p:sp>
+      <p:sp>
+        <p:nvSpPr>
+          <p:cNvPr id="3" name="Notes Placeholder 2"/>
+          <p:cNvSpPr>
+            <a:spLocks noGrp="1"/>
+          </p:cNvSpPr>
+          <p:nvPr>
+            <p:ph type="body" idx="1"/>
+          </p:nvPr>
+        </p:nvSpPr>
+        <p:spPr/>
+        <p:txBody>
+          <a:bodyPr/>
+          <a:lstStyle/>
+          <a:p>
+            <a:r>
+              <a:rPr lang="en-US" dirty="0"/>
+              <a:t>I complete the second page of the logbook: the matter taught, the evaluation, the homework and the attendance.</a:t>
+            </a:r>
+            <a:endParaRPr lang="en-US" dirty="0"/>
+          </a:p>
+        </p:txBody>
+      </p:sp>
+      <p:sp>
+        <p:nvSpPr>
+          <p:cNvPr id="4" name="Slide Number Placeholder 3"/>
+          <p:cNvSpPr>
+            <a:spLocks noGrp="1"/>
+          </p:cNvSpPr>
+          <p:nvPr>
+            <p:ph type="sldNum" sz="quarter" idx="10"/>
+          </p:nvPr>
+        </p:nvSpPr>
+        <p:spPr/>
+        <p:txBody>
+          <a:bodyPr/>
+          <a:lstStyle/>
+          <a:p>
+            <a:fld id="{F7021451-1387-4CA6-816F-3879F97B5CBC}" type="slidenum">
+              <a:rPr lang="en-US"/>
+              <a:t>56</a:t>
+            </a:fld>
+            <a:endParaRPr lang="en-US"/>
+          </a:p>
+        </p:txBody>
+      </p:sp>
+    </p:spTree>
+    <p:extLst>
+      <p:ext uri="{BB962C8B-B14F-4D97-AF65-F5344CB8AC3E}">
+        <p14:creationId xmlns:p14="http://schemas.microsoft.com/office/powerpoint/2010/main" val="1024086991"/>
+      </p:ext>
+    </p:extLst>
+  </p:cSld>
+  <p:clrMapOvr>
+    <a:masterClrMapping/>
+  </p:clrMapOvr>
+</p:notes>
+</file>
+
+<file path=ppt/notesSlides/notesSlide57.xml><?xml version="1.0" encoding="utf-8"?>
+<p:notes xmlns:a="http://schemas.openxmlformats.org/drawingml/2006/main" xmlns:r="http://schemas.openxmlformats.org/officeDocument/2006/relationships" xmlns:p="http://schemas.openxmlformats.org/presentationml/2006/main">
+  <p:cSld>
+    <p:spTree>
+      <p:nvGrpSpPr>
+        <p:cNvPr id="1" name=""/>
+        <p:cNvGrpSpPr/>
+        <p:nvPr/>
+      </p:nvGrpSpPr>
+      <p:grpSpPr>
+        <a:xfrm>
+          <a:off x="0" y="0"/>
+          <a:ext cx="0" cy="0"/>
+          <a:chOff x="0" y="0"/>
+          <a:chExt cx="0" cy="0"/>
+        </a:xfrm>
+      </p:grpSpPr>
+      <p:sp>
+        <p:nvSpPr>
+          <p:cNvPr id="2" name="Slide Image Placeholder 1"/>
+          <p:cNvSpPr>
+            <a:spLocks noGrp="1" noRot="1" noChangeAspect="1"/>
+          </p:cNvSpPr>
+          <p:nvPr>
+            <p:ph type="sldImg"/>
+          </p:nvPr>
+        </p:nvSpPr>
+        <p:spPr/>
+      </p:sp>
+      <p:sp>
+        <p:nvSpPr>
+          <p:cNvPr id="3" name="Notes Placeholder 2"/>
+          <p:cNvSpPr>
+            <a:spLocks noGrp="1"/>
+          </p:cNvSpPr>
+          <p:nvPr>
+            <p:ph type="body" idx="1"/>
+          </p:nvPr>
+        </p:nvSpPr>
+        <p:spPr/>
+        <p:txBody>
+          <a:bodyPr/>
+          <a:lstStyle/>
+          <a:p>
+            <a:r>
+              <a:rPr lang="en-US" dirty="0"/>
+              <a:t>This slide is for me, the teacher: it gives the timing of the lesson and what to do if the projector is not available.</a:t>
+            </a:r>
+            <a:endParaRPr lang="en-US" dirty="0"/>
+          </a:p>
+        </p:txBody>
+      </p:sp>
+      <p:sp>
+        <p:nvSpPr>
+          <p:cNvPr id="4" name="Slide Number Placeholder 3"/>
+          <p:cNvSpPr>
+            <a:spLocks noGrp="1"/>
+          </p:cNvSpPr>
+          <p:nvPr>
+            <p:ph type="sldNum" sz="quarter" idx="10"/>
+          </p:nvPr>
+        </p:nvSpPr>
+        <p:spPr/>
+        <p:txBody>
+          <a:bodyPr/>
+          <a:lstStyle/>
+          <a:p>
+            <a:fld id="{F7021451-1387-4CA6-816F-3879F97B5CBC}" type="slidenum">
+              <a:rPr lang="en-US"/>
+              <a:t>57</a:t>
+            </a:fld>
+            <a:endParaRPr lang="en-US"/>
+          </a:p>
+        </p:txBody>
+      </p:sp>
+    </p:spTree>
+    <p:extLst>
+      <p:ext uri="{BB962C8B-B14F-4D97-AF65-F5344CB8AC3E}">
+        <p14:creationId xmlns:p14="http://schemas.microsoft.com/office/powerpoint/2010/main" val="1024086991"/>
+      </p:ext>
+    </p:extLst>
+  </p:cSld>
+  <p:clrMapOvr>
+    <a:masterClrMapping/>
+  </p:clrMapOvr>
+</p:notes>
+</file>
+
+<file path=ppt/notesSlides/notesSlide58.xml><?xml version="1.0" encoding="utf-8"?>
+<p:notes xmlns:a="http://schemas.openxmlformats.org/drawingml/2006/main" xmlns:r="http://schemas.openxmlformats.org/officeDocument/2006/relationships" xmlns:p="http://schemas.openxmlformats.org/presentationml/2006/main">
+  <p:cSld>
+    <p:spTree>
+      <p:nvGrpSpPr>
+        <p:cNvPr id="1" name=""/>
+        <p:cNvGrpSpPr/>
+        <p:nvPr/>
+      </p:nvGrpSpPr>
+      <p:grpSpPr>
+        <a:xfrm>
+          <a:off x="0" y="0"/>
+          <a:ext cx="0" cy="0"/>
+          <a:chOff x="0" y="0"/>
+          <a:chExt cx="0" cy="0"/>
+        </a:xfrm>
+      </p:grpSpPr>
+      <p:sp>
+        <p:nvSpPr>
+          <p:cNvPr id="2" name="Slide Image Placeholder 1"/>
+          <p:cNvSpPr>
+            <a:spLocks noGrp="1" noRot="1" noChangeAspect="1"/>
+          </p:cNvSpPr>
+          <p:nvPr>
+            <p:ph type="sldImg"/>
+          </p:nvPr>
+        </p:nvSpPr>
+        <p:spPr/>
+      </p:sp>
+      <p:sp>
+        <p:nvSpPr>
+          <p:cNvPr id="3" name="Notes Placeholder 2"/>
+          <p:cNvSpPr>
+            <a:spLocks noGrp="1"/>
+          </p:cNvSpPr>
+          <p:nvPr>
+            <p:ph type="body" idx="1"/>
+          </p:nvPr>
+        </p:nvSpPr>
+        <p:spPr/>
+        <p:txBody>
+          <a:bodyPr/>
+          <a:lstStyle/>
+          <a:p>
+            <a:r>
+              <a:rPr lang="en-US" dirty="0"/>
+              <a:t>These are the references and picture credits used to prepare this lesson.</a:t>
+            </a:r>
+            <a:endParaRPr lang="en-US" dirty="0"/>
+          </a:p>
+        </p:txBody>
+      </p:sp>
+      <p:sp>
+        <p:nvSpPr>
+          <p:cNvPr id="4" name="Slide Number Placeholder 3"/>
+          <p:cNvSpPr>
+            <a:spLocks noGrp="1"/>
+          </p:cNvSpPr>
+          <p:nvPr>
+            <p:ph type="sldNum" sz="quarter" idx="10"/>
+          </p:nvPr>
+        </p:nvSpPr>
+        <p:spPr/>
+        <p:txBody>
+          <a:bodyPr/>
+          <a:lstStyle/>
+          <a:p>
+            <a:fld id="{F7021451-1387-4CA6-816F-3879F97B5CBC}" type="slidenum">
+              <a:rPr lang="en-US"/>
+              <a:t>58</a:t>
             </a:fld>
             <a:endParaRPr lang="en-US"/>
           </a:p>
@@ -5042,7 +5487,7 @@
           <a:p>
             <a:r>
               <a:rPr lang="en-US" dirty="0"/>
-              <a:t>By the end of this lesson, you should be able to do three things. Number 1: use Peltier's graph to explain the effect of climate. Number 2: explain the influence of rock type and relief. Number 3: explain the role of vegetation and people.</a:t>
+              <a:t>By the end of this lesson, you should be able to do four things. Number 1: explain the role of climate and read Peltier's diagram. Number 2: explain the role of rock characteristics. Number 3: explain the role of relief. Number 4: explain the roles of vegetation and human activities.</a:t>
             </a:r>
             <a:endParaRPr lang="en-US" dirty="0"/>
           </a:p>
@@ -5130,7 +5575,7 @@
           <a:p>
             <a:r>
               <a:rPr lang="en-US" dirty="0"/>
-              <a:t>Let us first remember what you already know. There are physical, chemical and biological weathering. Weathering breaks rocks in place. Keep this in mind, because we shall build on it today.</a:t>
+              <a:t>Let us first remember what you already know. Weathering can be mechanical, chemical or biological. Chemical weathering is fastest where it is hot and wet. Oxidation gives red soils. Keep this in mind, because we shall build on it today.</a:t>
             </a:r>
             <a:endParaRPr lang="en-US" dirty="0"/>
           </a:p>
@@ -6510,7 +6955,7 @@
         <p:spPr>
           <a:xfrm>
             <a:off x="0" y="658368"/>
-            <a:ext cx="5120640" cy="5833872"/>
+            <a:ext cx="2468880" cy="5833872"/>
           </a:xfrm>
           <a:prstGeom prst="rect">
             <a:avLst/>
@@ -6525,8 +6970,8 @@
         </p:nvSpPr>
         <p:spPr>
           <a:xfrm>
-            <a:off x="5349240" y="1005840"/>
-            <a:ext cx="6522415" cy="731520"/>
+            <a:off x="2697480" y="1005840"/>
+            <a:ext cx="9174175" cy="731520"/>
           </a:xfrm>
           <a:prstGeom prst="rect">
             <a:avLst/>
@@ -6566,8 +7011,8 @@
         </p:nvSpPr>
         <p:spPr>
           <a:xfrm>
-            <a:off x="5349240" y="1783080"/>
-            <a:ext cx="6522415" cy="4663440"/>
+            <a:off x="2697480" y="1783080"/>
+            <a:ext cx="9174175" cy="4663440"/>
           </a:xfrm>
           <a:prstGeom prst="rect">
             <a:avLst/>
@@ -6594,7 +7039,47 @@
                 <a:ea typeface="Times New Roman" pitchFamily="34" charset="-122"/>
                 <a:cs typeface="Times New Roman" pitchFamily="34" charset="-120"/>
               </a:rPr>
-              <a:t>In Douala, road cuttings show red soil tens of metres deep. In the Far North, bare granite rocks stand on the surface with only a thin layer of soil.</a:t>
+              <a:t>In an old quarter of Garoua, you see two stone walls.</a:t>
+            </a:r>
+            <a:endParaRPr lang="en-US" sz="4000" dirty="0"/>
+          </a:p>
+          <a:p>
+            <a:pPr algn="l" indent="0" marL="0">
+              <a:spcAft>
+                <a:spcPts val="800"/>
+              </a:spcAft>
+              <a:buNone/>
+            </a:pPr>
+            <a:r>
+              <a:rPr lang="en-US" sz="4000" dirty="0">
+                <a:solidFill>
+                  <a:srgbClr val="111111"/>
+                </a:solidFill>
+                <a:latin typeface="Times New Roman" pitchFamily="34" charset="0"/>
+                <a:ea typeface="Times New Roman" pitchFamily="34" charset="-122"/>
+                <a:cs typeface="Times New Roman" pitchFamily="34" charset="-120"/>
+              </a:rPr>
+              <a:t>One was built last year: its stones are sharp and bright.</a:t>
+            </a:r>
+            <a:endParaRPr lang="en-US" sz="4000" dirty="0"/>
+          </a:p>
+          <a:p>
+            <a:pPr algn="l" indent="0" marL="0">
+              <a:spcAft>
+                <a:spcPts val="800"/>
+              </a:spcAft>
+              <a:buNone/>
+            </a:pPr>
+            <a:r>
+              <a:rPr lang="en-US" sz="4000" dirty="0">
+                <a:solidFill>
+                  <a:srgbClr val="111111"/>
+                </a:solidFill>
+                <a:latin typeface="Times New Roman" pitchFamily="34" charset="0"/>
+                <a:ea typeface="Times New Roman" pitchFamily="34" charset="-122"/>
+                <a:cs typeface="Times New Roman" pitchFamily="34" charset="-120"/>
+              </a:rPr>
+              <a:t>The other, about 100 years old, has rounded, cracked stones covered with green algae, and its surface is crumbly.</a:t>
             </a:r>
             <a:endParaRPr lang="en-US" sz="4000" dirty="0"/>
           </a:p>
@@ -6771,7 +7256,7 @@
                 <a:ea typeface="Times New Roman" pitchFamily="34" charset="-122"/>
                 <a:cs typeface="Times New Roman" pitchFamily="34" charset="-120"/>
               </a:rPr>
-              <a:t>Situation: Question 1</a:t>
+              <a:t>Situation in Real Life (continued)</a:t>
             </a:r>
             <a:endParaRPr lang="en-US" sz="3600" dirty="0"/>
           </a:p>
@@ -6813,7 +7298,27 @@
                 <a:ea typeface="Times New Roman" pitchFamily="34" charset="-122"/>
                 <a:cs typeface="Times New Roman" pitchFamily="34" charset="-120"/>
               </a:rPr>
-              <a:t>What is the problem in the situation?</a:t>
+              <a:t>Both are made of the same local rock.</a:t>
+            </a:r>
+            <a:endParaRPr lang="en-US" sz="4000" dirty="0"/>
+          </a:p>
+          <a:p>
+            <a:pPr algn="l" indent="0" marL="0">
+              <a:spcAft>
+                <a:spcPts val="800"/>
+              </a:spcAft>
+              <a:buNone/>
+            </a:pPr>
+            <a:r>
+              <a:rPr lang="en-US" sz="4000" dirty="0">
+                <a:solidFill>
+                  <a:srgbClr val="111111"/>
+                </a:solidFill>
+                <a:latin typeface="Times New Roman" pitchFamily="34" charset="0"/>
+                <a:ea typeface="Times New Roman" pitchFamily="34" charset="-122"/>
+                <a:cs typeface="Times New Roman" pitchFamily="34" charset="-120"/>
+              </a:rPr>
+              <a:t>You ask: "Why has the old wall weathered so much, and what controls the speed of weathering?"</a:t>
             </a:r>
             <a:endParaRPr lang="en-US" sz="4000" dirty="0"/>
           </a:p>
@@ -6990,7 +7495,7 @@
                 <a:ea typeface="Times New Roman" pitchFamily="34" charset="-122"/>
                 <a:cs typeface="Times New Roman" pitchFamily="34" charset="-120"/>
               </a:rPr>
-              <a:t>Answer</a:t>
+              <a:t>Situation: Question 1</a:t>
             </a:r>
             <a:endParaRPr lang="en-US" sz="3600" dirty="0"/>
           </a:p>
@@ -7032,7 +7537,7 @@
                 <a:ea typeface="Times New Roman" pitchFamily="34" charset="-122"/>
                 <a:cs typeface="Times New Roman" pitchFamily="34" charset="-120"/>
               </a:rPr>
-              <a:t>We want to know why weathering is deeper in Douala.</a:t>
+              <a:t>What is the problem in the situation?</a:t>
             </a:r>
             <a:endParaRPr lang="en-US" sz="4000" dirty="0"/>
           </a:p>
@@ -7209,7 +7714,7 @@
                 <a:ea typeface="Times New Roman" pitchFamily="34" charset="-122"/>
                 <a:cs typeface="Times New Roman" pitchFamily="34" charset="-120"/>
               </a:rPr>
-              <a:t>Situation: Question 2</a:t>
+              <a:t>Answer</a:t>
             </a:r>
             <a:endParaRPr lang="en-US" sz="3600" dirty="0"/>
           </a:p>
@@ -7251,7 +7756,7 @@
                 <a:ea typeface="Times New Roman" pitchFamily="34" charset="-122"/>
                 <a:cs typeface="Times New Roman" pitchFamily="34" charset="-120"/>
               </a:rPr>
-              <a:t>What is the difference between the two climates?</a:t>
+              <a:t>The learner does not know the factors that control the intensity of weathering.</a:t>
             </a:r>
             <a:endParaRPr lang="en-US" sz="4000" dirty="0"/>
           </a:p>
@@ -7428,7 +7933,7 @@
                 <a:ea typeface="Times New Roman" pitchFamily="34" charset="-122"/>
                 <a:cs typeface="Times New Roman" pitchFamily="34" charset="-120"/>
               </a:rPr>
-              <a:t>Answer</a:t>
+              <a:t>Situation: Question 2</a:t>
             </a:r>
             <a:endParaRPr lang="en-US" sz="3600" dirty="0"/>
           </a:p>
@@ -7470,7 +7975,7 @@
                 <a:ea typeface="Times New Roman" pitchFamily="34" charset="-122"/>
                 <a:cs typeface="Times New Roman" pitchFamily="34" charset="-120"/>
               </a:rPr>
-              <a:t>Douala is hot and very wet; the Far North is hot and dry.</a:t>
+              <a:t>Which process has worn the old wall?</a:t>
             </a:r>
             <a:endParaRPr lang="en-US" sz="4000" dirty="0"/>
           </a:p>
@@ -7647,7 +8152,7 @@
                 <a:ea typeface="Times New Roman" pitchFamily="34" charset="-122"/>
                 <a:cs typeface="Times New Roman" pitchFamily="34" charset="-120"/>
               </a:rPr>
-              <a:t>Situation: Question 3</a:t>
+              <a:t>Answer</a:t>
             </a:r>
             <a:endParaRPr lang="en-US" sz="3600" dirty="0"/>
           </a:p>
@@ -7689,7 +8194,7 @@
                 <a:ea typeface="Times New Roman" pitchFamily="34" charset="-122"/>
                 <a:cs typeface="Times New Roman" pitchFamily="34" charset="-120"/>
               </a:rPr>
-              <a:t>Which type of weathering is strong in Douala?</a:t>
+              <a:t>Weathering.</a:t>
             </a:r>
             <a:endParaRPr lang="en-US" sz="4000" dirty="0"/>
           </a:p>
@@ -7866,7 +8371,7 @@
                 <a:ea typeface="Times New Roman" pitchFamily="34" charset="-122"/>
                 <a:cs typeface="Times New Roman" pitchFamily="34" charset="-120"/>
               </a:rPr>
-              <a:t>Possible Answer</a:t>
+              <a:t>Situation: Question 3</a:t>
             </a:r>
             <a:endParaRPr lang="en-US" sz="3600" dirty="0"/>
           </a:p>
@@ -7908,7 +8413,7 @@
                 <a:ea typeface="Times New Roman" pitchFamily="34" charset="-122"/>
                 <a:cs typeface="Times New Roman" pitchFamily="34" charset="-120"/>
               </a:rPr>
-              <a:t>Chemical weathering.</a:t>
+              <a:t>What is the most important factor of weathering in Garoua?</a:t>
             </a:r>
             <a:endParaRPr lang="en-US" sz="4000" dirty="0"/>
           </a:p>
@@ -8020,7 +8525,7 @@
                 <a:ea typeface="Calibri" pitchFamily="34" charset="-122"/>
                 <a:cs typeface="Calibri" pitchFamily="34" charset="-120"/>
               </a:rPr>
-              <a:t>ACTION TO TAKE</a:t>
+              <a:t>REAL-LIFE SITUATION</a:t>
             </a:r>
             <a:endParaRPr lang="en-US" sz="1400" dirty="0"/>
           </a:p>
@@ -8085,7 +8590,7 @@
                 <a:ea typeface="Times New Roman" pitchFamily="34" charset="-122"/>
                 <a:cs typeface="Times New Roman" pitchFamily="34" charset="-120"/>
               </a:rPr>
-              <a:t>Action to Take</a:t>
+              <a:t>Possible Answer</a:t>
             </a:r>
             <a:endParaRPr lang="en-US" sz="3600" dirty="0"/>
           </a:p>
@@ -8127,7 +8632,7 @@
                 <a:ea typeface="Times New Roman" pitchFamily="34" charset="-122"/>
                 <a:cs typeface="Times New Roman" pitchFamily="34" charset="-120"/>
               </a:rPr>
-              <a:t>Predict where rocks weather deeply and use this in building and farming.</a:t>
+              <a:t>Climate: strong heat and seasonal heavy rain.</a:t>
             </a:r>
             <a:endParaRPr lang="en-US" sz="4000" dirty="0"/>
           </a:p>
@@ -8239,7 +8744,7 @@
                 <a:ea typeface="Calibri" pitchFamily="34" charset="-122"/>
                 <a:cs typeface="Calibri" pitchFamily="34" charset="-120"/>
               </a:rPr>
-              <a:t>JUSTIFICATION</a:t>
+              <a:t>ACTION TO TAKE</a:t>
             </a:r>
             <a:endParaRPr lang="en-US" sz="1400" dirty="0"/>
           </a:p>
@@ -8304,7 +8809,7 @@
                 <a:ea typeface="Times New Roman" pitchFamily="34" charset="-122"/>
                 <a:cs typeface="Times New Roman" pitchFamily="34" charset="-120"/>
               </a:rPr>
-              <a:t>Justification of the Lesson</a:t>
+              <a:t>Action to Take</a:t>
             </a:r>
             <a:endParaRPr lang="en-US" sz="3600" dirty="0"/>
           </a:p>
@@ -8346,7 +8851,7 @@
                 <a:ea typeface="Times New Roman" pitchFamily="34" charset="-122"/>
                 <a:cs typeface="Times New Roman" pitchFamily="34" charset="-120"/>
               </a:rPr>
-              <a:t>This lesson helps us to understand why soils and landscapes differ from place to place.</a:t>
+              <a:t>Choose resistant rocks and protect buildings from water to slow down weathering.</a:t>
             </a:r>
             <a:endParaRPr lang="en-US" sz="4000" dirty="0"/>
           </a:p>
@@ -8458,54 +8963,15 @@
                 <a:ea typeface="Calibri" pitchFamily="34" charset="-122"/>
                 <a:cs typeface="Calibri" pitchFamily="34" charset="-120"/>
               </a:rPr>
-              <a:t>1. CLIMATE: PELTIER'S GRAPH</a:t>
+              <a:t>JUSTIFICATION</a:t>
             </a:r>
             <a:endParaRPr lang="en-US" sz="1400" dirty="0"/>
-          </a:p>
-        </p:txBody>
-      </p:sp>
-      <p:sp>
-        <p:nvSpPr>
-          <p:cNvPr id="3" name="Text 1"/>
-          <p:cNvSpPr/>
-          <p:nvPr/>
-        </p:nvSpPr>
-        <p:spPr>
-          <a:xfrm>
-            <a:off x="457200" y="1005840"/>
-            <a:ext cx="11277295" cy="731520"/>
-          </a:xfrm>
-          <a:prstGeom prst="rect">
-            <a:avLst/>
-          </a:prstGeom>
-          <a:noFill/>
-          <a:ln/>
-        </p:spPr>
-        <p:txBody>
-          <a:bodyPr wrap="square" lIns="0" tIns="0" rIns="0" bIns="0" rtlCol="0" anchor="ctr"/>
-          <a:lstStyle/>
-          <a:p>
-            <a:pPr algn="ctr" indent="0" marL="0">
-              <a:buNone/>
-            </a:pPr>
-            <a:r>
-              <a:rPr lang="en-US" sz="3600" b="1" dirty="0">
-                <a:solidFill>
-                  <a:srgbClr val="990011"/>
-                </a:solidFill>
-                <a:latin typeface="Times New Roman" pitchFamily="34" charset="0"/>
-                <a:ea typeface="Times New Roman" pitchFamily="34" charset="-122"/>
-                <a:cs typeface="Times New Roman" pitchFamily="34" charset="-120"/>
-              </a:rPr>
-              <a:t>Activity 1</a:t>
-            </a:r>
-            <a:endParaRPr lang="en-US" sz="3600" dirty="0"/>
           </a:p>
         </p:txBody>
       </p:sp>
       <p:pic>
         <p:nvPicPr>
-          <p:cNvPr id="4" name="Image 0" descr="/home/claude/f4/img/v2/peltier_big.png">    </p:cNvPr>
+          <p:cNvPr id="3" name="Image 0" descr="/home/claude/f4/img/minesec_sheet.png">    </p:cNvPr>
           <p:cNvPicPr>
             <a:picLocks noChangeAspect="1"/>
           </p:cNvPicPr>
@@ -8519,8 +8985,8 @@
         </p:blipFill>
         <p:spPr>
           <a:xfrm>
-            <a:off x="1383850" y="1783080"/>
-            <a:ext cx="9423996" cy="4270248"/>
+            <a:off x="0" y="658368"/>
+            <a:ext cx="5120640" cy="5833872"/>
           </a:xfrm>
           <a:prstGeom prst="rect">
             <a:avLst/>
@@ -8529,14 +8995,14 @@
       </p:pic>
       <p:sp>
         <p:nvSpPr>
-          <p:cNvPr id="5" name="Text 2"/>
+          <p:cNvPr id="4" name="Text 1"/>
           <p:cNvSpPr/>
           <p:nvPr/>
         </p:nvSpPr>
         <p:spPr>
           <a:xfrm>
-            <a:off x="457200" y="6089904"/>
-            <a:ext cx="11277295" cy="347472"/>
+            <a:off x="5349240" y="1005840"/>
+            <a:ext cx="6522415" cy="731520"/>
           </a:xfrm>
           <a:prstGeom prst="rect">
             <a:avLst/>
@@ -8545,24 +9011,68 @@
           <a:ln/>
         </p:spPr>
         <p:txBody>
-          <a:bodyPr wrap="square" lIns="0" tIns="0" rIns="0" bIns="0" rtlCol="0" anchor="ctr"/>
+          <a:bodyPr wrap="square" lIns="0" tIns="0" rIns="0" bIns="0" rtlCol="0" anchor="ctr">
+            <a:normAutofit/>
+          </a:bodyPr>
           <a:lstStyle/>
           <a:p>
             <a:pPr algn="ctr" indent="0" marL="0">
               <a:buNone/>
             </a:pPr>
             <a:r>
-              <a:rPr lang="en-US" sz="1800" i="1" dirty="0">
-                <a:solidFill>
-                  <a:srgbClr val="555555"/>
+              <a:rPr lang="en-US" sz="3600" b="1" dirty="0">
+                <a:solidFill>
+                  <a:srgbClr val="990011"/>
                 </a:solidFill>
                 <a:latin typeface="Times New Roman" pitchFamily="34" charset="0"/>
                 <a:ea typeface="Times New Roman" pitchFamily="34" charset="-122"/>
                 <a:cs typeface="Times New Roman" pitchFamily="34" charset="-120"/>
               </a:rPr>
-              <a:t>Peltier's graph: climate and weathering.</a:t>
-            </a:r>
-            <a:endParaRPr lang="en-US" sz="1800" dirty="0"/>
+              <a:t>Justification of the Lesson</a:t>
+            </a:r>
+            <a:endParaRPr lang="en-US" sz="3600" dirty="0"/>
+          </a:p>
+        </p:txBody>
+      </p:sp>
+      <p:sp>
+        <p:nvSpPr>
+          <p:cNvPr id="5" name="Text 2"/>
+          <p:cNvSpPr/>
+          <p:nvPr/>
+        </p:nvSpPr>
+        <p:spPr>
+          <a:xfrm>
+            <a:off x="5349240" y="1783080"/>
+            <a:ext cx="6522415" cy="4663440"/>
+          </a:xfrm>
+          <a:prstGeom prst="rect">
+            <a:avLst/>
+          </a:prstGeom>
+          <a:noFill/>
+          <a:ln/>
+        </p:spPr>
+        <p:txBody>
+          <a:bodyPr wrap="square" lIns="0" tIns="0" rIns="0" bIns="0" rtlCol="0" anchor="t"/>
+          <a:lstStyle/>
+          <a:p>
+            <a:pPr algn="l" indent="0" marL="0">
+              <a:spcAft>
+                <a:spcPts val="800"/>
+              </a:spcAft>
+              <a:buNone/>
+            </a:pPr>
+            <a:r>
+              <a:rPr lang="en-US" sz="4000" dirty="0">
+                <a:solidFill>
+                  <a:srgbClr val="111111"/>
+                </a:solidFill>
+                <a:latin typeface="Times New Roman" pitchFamily="34" charset="0"/>
+                <a:ea typeface="Times New Roman" pitchFamily="34" charset="-122"/>
+                <a:cs typeface="Times New Roman" pitchFamily="34" charset="-120"/>
+              </a:rPr>
+              <a:t>This lesson helps us to understand the soils and landscapes of our region and to choose durable building materials.</a:t>
+            </a:r>
+            <a:endParaRPr lang="en-US" sz="4000" dirty="0"/>
           </a:p>
         </p:txBody>
       </p:sp>
@@ -9267,15 +9777,54 @@
                 <a:ea typeface="Calibri" pitchFamily="34" charset="-122"/>
                 <a:cs typeface="Calibri" pitchFamily="34" charset="-120"/>
               </a:rPr>
-              <a:t>1. CLIMATE: PELTIER'S GRAPH</a:t>
+              <a:t>1. CLIMATE</a:t>
             </a:r>
             <a:endParaRPr lang="en-US" sz="1400" dirty="0"/>
+          </a:p>
+        </p:txBody>
+      </p:sp>
+      <p:sp>
+        <p:nvSpPr>
+          <p:cNvPr id="3" name="Text 1"/>
+          <p:cNvSpPr/>
+          <p:nvPr/>
+        </p:nvSpPr>
+        <p:spPr>
+          <a:xfrm>
+            <a:off x="457200" y="1005840"/>
+            <a:ext cx="11277295" cy="731520"/>
+          </a:xfrm>
+          <a:prstGeom prst="rect">
+            <a:avLst/>
+          </a:prstGeom>
+          <a:noFill/>
+          <a:ln/>
+        </p:spPr>
+        <p:txBody>
+          <a:bodyPr wrap="square" lIns="0" tIns="0" rIns="0" bIns="0" rtlCol="0" anchor="ctr"/>
+          <a:lstStyle/>
+          <a:p>
+            <a:pPr algn="ctr" indent="0" marL="0">
+              <a:buNone/>
+            </a:pPr>
+            <a:r>
+              <a:rPr lang="en-US" sz="3600" b="1" dirty="0">
+                <a:solidFill>
+                  <a:srgbClr val="990011"/>
+                </a:solidFill>
+                <a:latin typeface="Times New Roman" pitchFamily="34" charset="0"/>
+                <a:ea typeface="Times New Roman" pitchFamily="34" charset="-122"/>
+                <a:cs typeface="Times New Roman" pitchFamily="34" charset="-120"/>
+              </a:rPr>
+              <a:t>Activity 1</a:t>
+            </a:r>
+            <a:endParaRPr lang="en-US" sz="3600" dirty="0"/>
           </a:p>
         </p:txBody>
       </p:sp>
       <p:pic>
         <p:nvPicPr>
-          <p:cNvPr id="3" name="Image 0" descr="/home/claude/f4/img/minesec_sheet.png">    </p:cNvPr>
+          <p:cNvPr id="4" name="Image 0" descr="/home/claude/f4/img/v2/peltier_big.png">    </p:cNvPr>
           <p:cNvPicPr>
             <a:picLocks noChangeAspect="1"/>
           </p:cNvPicPr>
@@ -9289,8 +9838,8 @@
         </p:blipFill>
         <p:spPr>
           <a:xfrm>
-            <a:off x="0" y="658368"/>
-            <a:ext cx="5120640" cy="5833872"/>
+            <a:off x="1383850" y="1783080"/>
+            <a:ext cx="9423996" cy="4270248"/>
           </a:xfrm>
           <a:prstGeom prst="rect">
             <a:avLst/>
@@ -9299,14 +9848,14 @@
       </p:pic>
       <p:sp>
         <p:nvSpPr>
-          <p:cNvPr id="4" name="Text 1"/>
+          <p:cNvPr id="5" name="Text 2"/>
           <p:cNvSpPr/>
           <p:nvPr/>
         </p:nvSpPr>
         <p:spPr>
           <a:xfrm>
-            <a:off x="5349240" y="1005840"/>
-            <a:ext cx="6522415" cy="731520"/>
+            <a:off x="457200" y="6089904"/>
+            <a:ext cx="11277295" cy="347472"/>
           </a:xfrm>
           <a:prstGeom prst="rect">
             <a:avLst/>
@@ -9315,68 +9864,24 @@
           <a:ln/>
         </p:spPr>
         <p:txBody>
-          <a:bodyPr wrap="square" lIns="0" tIns="0" rIns="0" bIns="0" rtlCol="0" anchor="ctr">
-            <a:normAutofit/>
-          </a:bodyPr>
+          <a:bodyPr wrap="square" lIns="0" tIns="0" rIns="0" bIns="0" rtlCol="0" anchor="ctr"/>
           <a:lstStyle/>
           <a:p>
             <a:pPr algn="ctr" indent="0" marL="0">
               <a:buNone/>
             </a:pPr>
             <a:r>
-              <a:rPr lang="en-US" sz="3600" b="1" dirty="0">
-                <a:solidFill>
-                  <a:srgbClr val="990011"/>
+              <a:rPr lang="en-US" sz="1800" i="1" dirty="0">
+                <a:solidFill>
+                  <a:srgbClr val="555555"/>
                 </a:solidFill>
                 <a:latin typeface="Times New Roman" pitchFamily="34" charset="0"/>
                 <a:ea typeface="Times New Roman" pitchFamily="34" charset="-122"/>
                 <a:cs typeface="Times New Roman" pitchFamily="34" charset="-120"/>
               </a:rPr>
-              <a:t>Activity 1: Question</a:t>
-            </a:r>
-            <a:endParaRPr lang="en-US" sz="3600" dirty="0"/>
-          </a:p>
-        </p:txBody>
-      </p:sp>
-      <p:sp>
-        <p:nvSpPr>
-          <p:cNvPr id="5" name="Text 2"/>
-          <p:cNvSpPr/>
-          <p:nvPr/>
-        </p:nvSpPr>
-        <p:spPr>
-          <a:xfrm>
-            <a:off x="5349240" y="1783080"/>
-            <a:ext cx="6522415" cy="4663440"/>
-          </a:xfrm>
-          <a:prstGeom prst="rect">
-            <a:avLst/>
-          </a:prstGeom>
-          <a:noFill/>
-          <a:ln/>
-        </p:spPr>
-        <p:txBody>
-          <a:bodyPr wrap="square" lIns="0" tIns="0" rIns="0" bIns="0" rtlCol="0" anchor="t"/>
-          <a:lstStyle/>
-          <a:p>
-            <a:pPr algn="l" indent="0" marL="0">
-              <a:spcAft>
-                <a:spcPts val="800"/>
-              </a:spcAft>
-              <a:buNone/>
-            </a:pPr>
-            <a:r>
-              <a:rPr lang="en-US" sz="4000" dirty="0">
-                <a:solidFill>
-                  <a:srgbClr val="111111"/>
-                </a:solidFill>
-                <a:latin typeface="Times New Roman" pitchFamily="34" charset="0"/>
-                <a:ea typeface="Times New Roman" pitchFamily="34" charset="-122"/>
-                <a:cs typeface="Times New Roman" pitchFamily="34" charset="-120"/>
-              </a:rPr>
-              <a:t>Where is chemical weathering strongest? Where is frost action strongest?</a:t>
-            </a:r>
-            <a:endParaRPr lang="en-US" sz="4000" dirty="0"/>
+              <a:t>Peltier's diagram.</a:t>
+            </a:r>
+            <a:endParaRPr lang="en-US" sz="1800" dirty="0"/>
           </a:p>
         </p:txBody>
       </p:sp>
@@ -9486,7 +9991,7 @@
                 <a:ea typeface="Calibri" pitchFamily="34" charset="-122"/>
                 <a:cs typeface="Calibri" pitchFamily="34" charset="-120"/>
               </a:rPr>
-              <a:t>1. CLIMATE: PELTIER'S GRAPH</a:t>
+              <a:t>1. CLIMATE</a:t>
             </a:r>
             <a:endParaRPr lang="en-US" sz="1400" dirty="0"/>
           </a:p>
@@ -9551,7 +10056,7 @@
                 <a:ea typeface="Times New Roman" pitchFamily="34" charset="-122"/>
                 <a:cs typeface="Times New Roman" pitchFamily="34" charset="-120"/>
               </a:rPr>
-              <a:t>Activity 1: Answer</a:t>
+              <a:t>Activity 1: Question</a:t>
             </a:r>
             <a:endParaRPr lang="en-US" sz="3600" dirty="0"/>
           </a:p>
@@ -9593,7 +10098,7 @@
                 <a:ea typeface="Times New Roman" pitchFamily="34" charset="-122"/>
                 <a:cs typeface="Times New Roman" pitchFamily="34" charset="-120"/>
               </a:rPr>
-              <a:t>Chemical: hot and wet climates. Frost action: cold and wet climates.</a:t>
+              <a:t>In which climate is chemical weathering strongest?</a:t>
             </a:r>
             <a:endParaRPr lang="en-US" sz="4000" dirty="0"/>
           </a:p>
@@ -9711,48 +10216,9 @@
           </a:p>
         </p:txBody>
       </p:sp>
-      <p:sp>
-        <p:nvSpPr>
-          <p:cNvPr id="3" name="Text 1"/>
-          <p:cNvSpPr/>
-          <p:nvPr/>
-        </p:nvSpPr>
-        <p:spPr>
-          <a:xfrm>
-            <a:off x="457200" y="1005840"/>
-            <a:ext cx="11277295" cy="731520"/>
-          </a:xfrm>
-          <a:prstGeom prst="rect">
-            <a:avLst/>
-          </a:prstGeom>
-          <a:noFill/>
-          <a:ln/>
-        </p:spPr>
-        <p:txBody>
-          <a:bodyPr wrap="square" lIns="0" tIns="0" rIns="0" bIns="0" rtlCol="0" anchor="ctr"/>
-          <a:lstStyle/>
-          <a:p>
-            <a:pPr algn="ctr" indent="0" marL="0">
-              <a:buNone/>
-            </a:pPr>
-            <a:r>
-              <a:rPr lang="en-US" sz="3600" b="1" dirty="0">
-                <a:solidFill>
-                  <a:srgbClr val="990011"/>
-                </a:solidFill>
-                <a:latin typeface="Times New Roman" pitchFamily="34" charset="0"/>
-                <a:ea typeface="Times New Roman" pitchFamily="34" charset="-122"/>
-                <a:cs typeface="Times New Roman" pitchFamily="34" charset="-120"/>
-              </a:rPr>
-              <a:t>Activity 2</a:t>
-            </a:r>
-            <a:endParaRPr lang="en-US" sz="3600" dirty="0"/>
-          </a:p>
-        </p:txBody>
-      </p:sp>
       <p:pic>
         <p:nvPicPr>
-          <p:cNvPr id="4" name="Image 0" descr="/home/claude/f4/img/v2/f4_redsoil.jpg">    </p:cNvPr>
+          <p:cNvPr id="3" name="Image 0" descr="/home/claude/f4/img/minesec_sheet.png">    </p:cNvPr>
           <p:cNvPicPr>
             <a:picLocks noChangeAspect="1"/>
           </p:cNvPicPr>
@@ -9766,8 +10232,8 @@
         </p:blipFill>
         <p:spPr>
           <a:xfrm>
-            <a:off x="2246610" y="1783080"/>
-            <a:ext cx="7698475" cy="4270248"/>
+            <a:off x="0" y="658368"/>
+            <a:ext cx="5120640" cy="5833872"/>
           </a:xfrm>
           <a:prstGeom prst="rect">
             <a:avLst/>
@@ -9776,14 +10242,14 @@
       </p:pic>
       <p:sp>
         <p:nvSpPr>
-          <p:cNvPr id="5" name="Text 2"/>
+          <p:cNvPr id="4" name="Text 1"/>
           <p:cNvSpPr/>
           <p:nvPr/>
         </p:nvSpPr>
         <p:spPr>
           <a:xfrm>
-            <a:off x="457200" y="6089904"/>
-            <a:ext cx="11277295" cy="347472"/>
+            <a:off x="5349240" y="1005840"/>
+            <a:ext cx="6522415" cy="731520"/>
           </a:xfrm>
           <a:prstGeom prst="rect">
             <a:avLst/>
@@ -9792,24 +10258,68 @@
           <a:ln/>
         </p:spPr>
         <p:txBody>
-          <a:bodyPr wrap="square" lIns="0" tIns="0" rIns="0" bIns="0" rtlCol="0" anchor="ctr"/>
+          <a:bodyPr wrap="square" lIns="0" tIns="0" rIns="0" bIns="0" rtlCol="0" anchor="ctr">
+            <a:normAutofit/>
+          </a:bodyPr>
           <a:lstStyle/>
           <a:p>
             <a:pPr algn="ctr" indent="0" marL="0">
               <a:buNone/>
             </a:pPr>
             <a:r>
-              <a:rPr lang="en-US" sz="1800" i="1" dirty="0">
-                <a:solidFill>
-                  <a:srgbClr val="555555"/>
+              <a:rPr lang="en-US" sz="3600" b="1" dirty="0">
+                <a:solidFill>
+                  <a:srgbClr val="990011"/>
                 </a:solidFill>
                 <a:latin typeface="Times New Roman" pitchFamily="34" charset="0"/>
                 <a:ea typeface="Times New Roman" pitchFamily="34" charset="-122"/>
                 <a:cs typeface="Times New Roman" pitchFamily="34" charset="-120"/>
               </a:rPr>
-              <a:t>A deep red weathered soil.</a:t>
-            </a:r>
-            <a:endParaRPr lang="en-US" sz="1800" dirty="0"/>
+              <a:t>Activity 1: Answer</a:t>
+            </a:r>
+            <a:endParaRPr lang="en-US" sz="3600" dirty="0"/>
+          </a:p>
+        </p:txBody>
+      </p:sp>
+      <p:sp>
+        <p:nvSpPr>
+          <p:cNvPr id="5" name="Text 2"/>
+          <p:cNvSpPr/>
+          <p:nvPr/>
+        </p:nvSpPr>
+        <p:spPr>
+          <a:xfrm>
+            <a:off x="5349240" y="1783080"/>
+            <a:ext cx="6522415" cy="4663440"/>
+          </a:xfrm>
+          <a:prstGeom prst="rect">
+            <a:avLst/>
+          </a:prstGeom>
+          <a:noFill/>
+          <a:ln/>
+        </p:spPr>
+        <p:txBody>
+          <a:bodyPr wrap="square" lIns="0" tIns="0" rIns="0" bIns="0" rtlCol="0" anchor="t"/>
+          <a:lstStyle/>
+          <a:p>
+            <a:pPr algn="l" indent="0" marL="0">
+              <a:spcAft>
+                <a:spcPts val="800"/>
+              </a:spcAft>
+              <a:buNone/>
+            </a:pPr>
+            <a:r>
+              <a:rPr lang="en-US" sz="4000" dirty="0">
+                <a:solidFill>
+                  <a:srgbClr val="111111"/>
+                </a:solidFill>
+                <a:latin typeface="Times New Roman" pitchFamily="34" charset="0"/>
+                <a:ea typeface="Times New Roman" pitchFamily="34" charset="-122"/>
+                <a:cs typeface="Times New Roman" pitchFamily="34" charset="-120"/>
+              </a:rPr>
+              <a:t>In hot, wet climates.</a:t>
+            </a:r>
+            <a:endParaRPr lang="en-US" sz="4000" dirty="0"/>
           </a:p>
         </p:txBody>
       </p:sp>
@@ -9925,9 +10435,48 @@
           </a:p>
         </p:txBody>
       </p:sp>
+      <p:sp>
+        <p:nvSpPr>
+          <p:cNvPr id="3" name="Text 1"/>
+          <p:cNvSpPr/>
+          <p:nvPr/>
+        </p:nvSpPr>
+        <p:spPr>
+          <a:xfrm>
+            <a:off x="457200" y="1005840"/>
+            <a:ext cx="11277295" cy="731520"/>
+          </a:xfrm>
+          <a:prstGeom prst="rect">
+            <a:avLst/>
+          </a:prstGeom>
+          <a:noFill/>
+          <a:ln/>
+        </p:spPr>
+        <p:txBody>
+          <a:bodyPr wrap="square" lIns="0" tIns="0" rIns="0" bIns="0" rtlCol="0" anchor="ctr"/>
+          <a:lstStyle/>
+          <a:p>
+            <a:pPr algn="ctr" indent="0" marL="0">
+              <a:buNone/>
+            </a:pPr>
+            <a:r>
+              <a:rPr lang="en-US" sz="3600" b="1" dirty="0">
+                <a:solidFill>
+                  <a:srgbClr val="990011"/>
+                </a:solidFill>
+                <a:latin typeface="Times New Roman" pitchFamily="34" charset="0"/>
+                <a:ea typeface="Times New Roman" pitchFamily="34" charset="-122"/>
+                <a:cs typeface="Times New Roman" pitchFamily="34" charset="-120"/>
+              </a:rPr>
+              <a:t>Activity 2</a:t>
+            </a:r>
+            <a:endParaRPr lang="en-US" sz="3600" dirty="0"/>
+          </a:p>
+        </p:txBody>
+      </p:sp>
       <p:pic>
         <p:nvPicPr>
-          <p:cNvPr id="3" name="Image 0" descr="/home/claude/f4/img/minesec_sheet.png">    </p:cNvPr>
+          <p:cNvPr id="4" name="Image 0" descr="/home/claude/f4/img/v2/f2t_laterite.jpg">    </p:cNvPr>
           <p:cNvPicPr>
             <a:picLocks noChangeAspect="1"/>
           </p:cNvPicPr>
@@ -9941,8 +10490,8 @@
         </p:blipFill>
         <p:spPr>
           <a:xfrm>
-            <a:off x="0" y="658368"/>
-            <a:ext cx="5120640" cy="5833872"/>
+            <a:off x="2248777" y="1783080"/>
+            <a:ext cx="7694141" cy="4270248"/>
           </a:xfrm>
           <a:prstGeom prst="rect">
             <a:avLst/>
@@ -9951,14 +10500,14 @@
       </p:pic>
       <p:sp>
         <p:nvSpPr>
-          <p:cNvPr id="4" name="Text 1"/>
+          <p:cNvPr id="5" name="Text 2"/>
           <p:cNvSpPr/>
           <p:nvPr/>
         </p:nvSpPr>
         <p:spPr>
           <a:xfrm>
-            <a:off x="5349240" y="1005840"/>
-            <a:ext cx="6522415" cy="731520"/>
+            <a:off x="457200" y="6089904"/>
+            <a:ext cx="11277295" cy="347472"/>
           </a:xfrm>
           <a:prstGeom prst="rect">
             <a:avLst/>
@@ -9967,68 +10516,24 @@
           <a:ln/>
         </p:spPr>
         <p:txBody>
-          <a:bodyPr wrap="square" lIns="0" tIns="0" rIns="0" bIns="0" rtlCol="0" anchor="ctr">
-            <a:normAutofit/>
-          </a:bodyPr>
+          <a:bodyPr wrap="square" lIns="0" tIns="0" rIns="0" bIns="0" rtlCol="0" anchor="ctr"/>
           <a:lstStyle/>
           <a:p>
             <a:pPr algn="ctr" indent="0" marL="0">
               <a:buNone/>
             </a:pPr>
             <a:r>
-              <a:rPr lang="en-US" sz="3600" b="1" dirty="0">
-                <a:solidFill>
-                  <a:srgbClr val="990011"/>
+              <a:rPr lang="en-US" sz="1800" i="1" dirty="0">
+                <a:solidFill>
+                  <a:srgbClr val="555555"/>
                 </a:solidFill>
                 <a:latin typeface="Times New Roman" pitchFamily="34" charset="0"/>
                 <a:ea typeface="Times New Roman" pitchFamily="34" charset="-122"/>
                 <a:cs typeface="Times New Roman" pitchFamily="34" charset="-120"/>
               </a:rPr>
-              <a:t>Activity 2: Question</a:t>
-            </a:r>
-            <a:endParaRPr lang="en-US" sz="3600" dirty="0"/>
-          </a:p>
-        </p:txBody>
-      </p:sp>
-      <p:sp>
-        <p:nvSpPr>
-          <p:cNvPr id="5" name="Text 2"/>
-          <p:cNvSpPr/>
-          <p:nvPr/>
-        </p:nvSpPr>
-        <p:spPr>
-          <a:xfrm>
-            <a:off x="5349240" y="1783080"/>
-            <a:ext cx="6522415" cy="4663440"/>
-          </a:xfrm>
-          <a:prstGeom prst="rect">
-            <a:avLst/>
-          </a:prstGeom>
-          <a:noFill/>
-          <a:ln/>
-        </p:spPr>
-        <p:txBody>
-          <a:bodyPr wrap="square" lIns="0" tIns="0" rIns="0" bIns="0" rtlCol="0" anchor="t"/>
-          <a:lstStyle/>
-          <a:p>
-            <a:pPr algn="l" indent="0" marL="0">
-              <a:spcAft>
-                <a:spcPts val="800"/>
-              </a:spcAft>
-              <a:buNone/>
-            </a:pPr>
-            <a:r>
-              <a:rPr lang="en-US" sz="4000" dirty="0">
-                <a:solidFill>
-                  <a:srgbClr val="111111"/>
-                </a:solidFill>
-                <a:latin typeface="Times New Roman" pitchFamily="34" charset="0"/>
-                <a:ea typeface="Times New Roman" pitchFamily="34" charset="-122"/>
-                <a:cs typeface="Times New Roman" pitchFamily="34" charset="-120"/>
-              </a:rPr>
-              <a:t>Why is the weathered layer very deep in humid tropical areas?</a:t>
-            </a:r>
-            <a:endParaRPr lang="en-US" sz="4000" dirty="0"/>
+              <a:t>Red laterite.</a:t>
+            </a:r>
+            <a:endParaRPr lang="en-US" sz="1800" dirty="0"/>
           </a:p>
         </p:txBody>
       </p:sp>
@@ -10203,7 +10708,7 @@
                 <a:ea typeface="Times New Roman" pitchFamily="34" charset="-122"/>
                 <a:cs typeface="Times New Roman" pitchFamily="34" charset="-120"/>
               </a:rPr>
-              <a:t>Activity 2: Answer</a:t>
+              <a:t>Activity 2: Question</a:t>
             </a:r>
             <a:endParaRPr lang="en-US" sz="3600" dirty="0"/>
           </a:p>
@@ -10245,7 +10750,7 @@
                 <a:ea typeface="Times New Roman" pitchFamily="34" charset="-122"/>
                 <a:cs typeface="Times New Roman" pitchFamily="34" charset="-120"/>
               </a:rPr>
-              <a:t>Heat and water speed up chemical reactions all year.</a:t>
+              <a:t>Why are soils around Garoua red?</a:t>
             </a:r>
             <a:endParaRPr lang="en-US" sz="4000" dirty="0"/>
           </a:p>
@@ -10357,54 +10862,15 @@
                 <a:ea typeface="Calibri" pitchFamily="34" charset="-122"/>
                 <a:cs typeface="Calibri" pitchFamily="34" charset="-120"/>
               </a:rPr>
-              <a:t>2. GEOLOGY</a:t>
+              <a:t>1. CLIMATE</a:t>
             </a:r>
             <a:endParaRPr lang="en-US" sz="1400" dirty="0"/>
-          </a:p>
-        </p:txBody>
-      </p:sp>
-      <p:sp>
-        <p:nvSpPr>
-          <p:cNvPr id="3" name="Text 1"/>
-          <p:cNvSpPr/>
-          <p:nvPr/>
-        </p:nvSpPr>
-        <p:spPr>
-          <a:xfrm>
-            <a:off x="457200" y="1005840"/>
-            <a:ext cx="11277295" cy="731520"/>
-          </a:xfrm>
-          <a:prstGeom prst="rect">
-            <a:avLst/>
-          </a:prstGeom>
-          <a:noFill/>
-          <a:ln/>
-        </p:spPr>
-        <p:txBody>
-          <a:bodyPr wrap="square" lIns="0" tIns="0" rIns="0" bIns="0" rtlCol="0" anchor="ctr"/>
-          <a:lstStyle/>
-          <a:p>
-            <a:pPr algn="ctr" indent="0" marL="0">
-              <a:buNone/>
-            </a:pPr>
-            <a:r>
-              <a:rPr lang="en-US" sz="3600" b="1" dirty="0">
-                <a:solidFill>
-                  <a:srgbClr val="990011"/>
-                </a:solidFill>
-                <a:latin typeface="Times New Roman" pitchFamily="34" charset="0"/>
-                <a:ea typeface="Times New Roman" pitchFamily="34" charset="-122"/>
-                <a:cs typeface="Times New Roman" pitchFamily="34" charset="-120"/>
-              </a:rPr>
-              <a:t>Activity 3</a:t>
-            </a:r>
-            <a:endParaRPr lang="en-US" sz="3600" dirty="0"/>
           </a:p>
         </p:txBody>
       </p:sp>
       <p:pic>
         <p:nvPicPr>
-          <p:cNvPr id="4" name="Image 0" descr="/home/claude/f4/img/v2/f4_karst.jpg">    </p:cNvPr>
+          <p:cNvPr id="3" name="Image 0" descr="/home/claude/f4/img/minesec_sheet.png">    </p:cNvPr>
           <p:cNvPicPr>
             <a:picLocks noChangeAspect="1"/>
           </p:cNvPicPr>
@@ -10418,8 +10884,8 @@
         </p:blipFill>
         <p:spPr>
           <a:xfrm>
-            <a:off x="2246610" y="1783080"/>
-            <a:ext cx="7698475" cy="4270248"/>
+            <a:off x="0" y="658368"/>
+            <a:ext cx="5120640" cy="5833872"/>
           </a:xfrm>
           <a:prstGeom prst="rect">
             <a:avLst/>
@@ -10428,14 +10894,14 @@
       </p:pic>
       <p:sp>
         <p:nvSpPr>
-          <p:cNvPr id="5" name="Text 2"/>
+          <p:cNvPr id="4" name="Text 1"/>
           <p:cNvSpPr/>
           <p:nvPr/>
         </p:nvSpPr>
         <p:spPr>
           <a:xfrm>
-            <a:off x="457200" y="6089904"/>
-            <a:ext cx="11277295" cy="347472"/>
+            <a:off x="5349240" y="1005840"/>
+            <a:ext cx="6522415" cy="731520"/>
           </a:xfrm>
           <a:prstGeom prst="rect">
             <a:avLst/>
@@ -10444,24 +10910,68 @@
           <a:ln/>
         </p:spPr>
         <p:txBody>
-          <a:bodyPr wrap="square" lIns="0" tIns="0" rIns="0" bIns="0" rtlCol="0" anchor="ctr"/>
+          <a:bodyPr wrap="square" lIns="0" tIns="0" rIns="0" bIns="0" rtlCol="0" anchor="ctr">
+            <a:normAutofit/>
+          </a:bodyPr>
           <a:lstStyle/>
           <a:p>
             <a:pPr algn="ctr" indent="0" marL="0">
               <a:buNone/>
             </a:pPr>
             <a:r>
-              <a:rPr lang="en-US" sz="1800" i="1" dirty="0">
-                <a:solidFill>
-                  <a:srgbClr val="555555"/>
+              <a:rPr lang="en-US" sz="3600" b="1" dirty="0">
+                <a:solidFill>
+                  <a:srgbClr val="990011"/>
                 </a:solidFill>
                 <a:latin typeface="Times New Roman" pitchFamily="34" charset="0"/>
                 <a:ea typeface="Times New Roman" pitchFamily="34" charset="-122"/>
                 <a:cs typeface="Times New Roman" pitchFamily="34" charset="-120"/>
               </a:rPr>
-              <a:t>A cave in limestone.</a:t>
-            </a:r>
-            <a:endParaRPr lang="en-US" sz="1800" dirty="0"/>
+              <a:t>Activity 2: Answer</a:t>
+            </a:r>
+            <a:endParaRPr lang="en-US" sz="3600" dirty="0"/>
+          </a:p>
+        </p:txBody>
+      </p:sp>
+      <p:sp>
+        <p:nvSpPr>
+          <p:cNvPr id="5" name="Text 2"/>
+          <p:cNvSpPr/>
+          <p:nvPr/>
+        </p:nvSpPr>
+        <p:spPr>
+          <a:xfrm>
+            <a:off x="5349240" y="1783080"/>
+            <a:ext cx="6522415" cy="4663440"/>
+          </a:xfrm>
+          <a:prstGeom prst="rect">
+            <a:avLst/>
+          </a:prstGeom>
+          <a:noFill/>
+          <a:ln/>
+        </p:spPr>
+        <p:txBody>
+          <a:bodyPr wrap="square" lIns="0" tIns="0" rIns="0" bIns="0" rtlCol="0" anchor="t"/>
+          <a:lstStyle/>
+          <a:p>
+            <a:pPr algn="l" indent="0" marL="0">
+              <a:spcAft>
+                <a:spcPts val="800"/>
+              </a:spcAft>
+              <a:buNone/>
+            </a:pPr>
+            <a:r>
+              <a:rPr lang="en-US" sz="4000" dirty="0">
+                <a:solidFill>
+                  <a:srgbClr val="111111"/>
+                </a:solidFill>
+                <a:latin typeface="Times New Roman" pitchFamily="34" charset="0"/>
+                <a:ea typeface="Times New Roman" pitchFamily="34" charset="-122"/>
+                <a:cs typeface="Times New Roman" pitchFamily="34" charset="-120"/>
+              </a:rPr>
+              <a:t>Iron minerals are oxidised in the hot, seasonally wet climate.</a:t>
+            </a:r>
+            <a:endParaRPr lang="en-US" sz="4000" dirty="0"/>
           </a:p>
         </p:txBody>
       </p:sp>
@@ -10571,15 +11081,54 @@
                 <a:ea typeface="Calibri" pitchFamily="34" charset="-122"/>
                 <a:cs typeface="Calibri" pitchFamily="34" charset="-120"/>
               </a:rPr>
-              <a:t>2. GEOLOGY</a:t>
+              <a:t>2. ROCK</a:t>
             </a:r>
             <a:endParaRPr lang="en-US" sz="1400" dirty="0"/>
+          </a:p>
+        </p:txBody>
+      </p:sp>
+      <p:sp>
+        <p:nvSpPr>
+          <p:cNvPr id="3" name="Text 1"/>
+          <p:cNvSpPr/>
+          <p:nvPr/>
+        </p:nvSpPr>
+        <p:spPr>
+          <a:xfrm>
+            <a:off x="457200" y="1005840"/>
+            <a:ext cx="11277295" cy="731520"/>
+          </a:xfrm>
+          <a:prstGeom prst="rect">
+            <a:avLst/>
+          </a:prstGeom>
+          <a:noFill/>
+          <a:ln/>
+        </p:spPr>
+        <p:txBody>
+          <a:bodyPr wrap="square" lIns="0" tIns="0" rIns="0" bIns="0" rtlCol="0" anchor="ctr"/>
+          <a:lstStyle/>
+          <a:p>
+            <a:pPr algn="ctr" indent="0" marL="0">
+              <a:buNone/>
+            </a:pPr>
+            <a:r>
+              <a:rPr lang="en-US" sz="3600" b="1" dirty="0">
+                <a:solidFill>
+                  <a:srgbClr val="990011"/>
+                </a:solidFill>
+                <a:latin typeface="Times New Roman" pitchFamily="34" charset="0"/>
+                <a:ea typeface="Times New Roman" pitchFamily="34" charset="-122"/>
+                <a:cs typeface="Times New Roman" pitchFamily="34" charset="-120"/>
+              </a:rPr>
+              <a:t>Activity 3</a:t>
+            </a:r>
+            <a:endParaRPr lang="en-US" sz="3600" dirty="0"/>
           </a:p>
         </p:txBody>
       </p:sp>
       <p:pic>
         <p:nvPicPr>
-          <p:cNvPr id="3" name="Image 0" descr="/home/claude/f4/img/minesec_sheet.png">    </p:cNvPr>
+          <p:cNvPr id="4" name="Image 0" descr="/home/claude/f4/img/v2/f4_karst.jpg">    </p:cNvPr>
           <p:cNvPicPr>
             <a:picLocks noChangeAspect="1"/>
           </p:cNvPicPr>
@@ -10593,8 +11142,8 @@
         </p:blipFill>
         <p:spPr>
           <a:xfrm>
-            <a:off x="0" y="658368"/>
-            <a:ext cx="5120640" cy="5833872"/>
+            <a:off x="2246610" y="1783080"/>
+            <a:ext cx="7698475" cy="4270248"/>
           </a:xfrm>
           <a:prstGeom prst="rect">
             <a:avLst/>
@@ -10603,14 +11152,14 @@
       </p:pic>
       <p:sp>
         <p:nvSpPr>
-          <p:cNvPr id="4" name="Text 1"/>
+          <p:cNvPr id="5" name="Text 2"/>
           <p:cNvSpPr/>
           <p:nvPr/>
         </p:nvSpPr>
         <p:spPr>
           <a:xfrm>
-            <a:off x="5349240" y="1005840"/>
-            <a:ext cx="6522415" cy="731520"/>
+            <a:off x="457200" y="6089904"/>
+            <a:ext cx="11277295" cy="347472"/>
           </a:xfrm>
           <a:prstGeom prst="rect">
             <a:avLst/>
@@ -10619,68 +11168,24 @@
           <a:ln/>
         </p:spPr>
         <p:txBody>
-          <a:bodyPr wrap="square" lIns="0" tIns="0" rIns="0" bIns="0" rtlCol="0" anchor="ctr">
-            <a:normAutofit/>
-          </a:bodyPr>
+          <a:bodyPr wrap="square" lIns="0" tIns="0" rIns="0" bIns="0" rtlCol="0" anchor="ctr"/>
           <a:lstStyle/>
           <a:p>
             <a:pPr algn="ctr" indent="0" marL="0">
               <a:buNone/>
             </a:pPr>
             <a:r>
-              <a:rPr lang="en-US" sz="3600" b="1" dirty="0">
-                <a:solidFill>
-                  <a:srgbClr val="990011"/>
+              <a:rPr lang="en-US" sz="1800" i="1" dirty="0">
+                <a:solidFill>
+                  <a:srgbClr val="555555"/>
                 </a:solidFill>
                 <a:latin typeface="Times New Roman" pitchFamily="34" charset="0"/>
                 <a:ea typeface="Times New Roman" pitchFamily="34" charset="-122"/>
                 <a:cs typeface="Times New Roman" pitchFamily="34" charset="-120"/>
               </a:rPr>
-              <a:t>Activity 3: Question</a:t>
-            </a:r>
-            <a:endParaRPr lang="en-US" sz="3600" dirty="0"/>
-          </a:p>
-        </p:txBody>
-      </p:sp>
-      <p:sp>
-        <p:nvSpPr>
-          <p:cNvPr id="5" name="Text 2"/>
-          <p:cNvSpPr/>
-          <p:nvPr/>
-        </p:nvSpPr>
-        <p:spPr>
-          <a:xfrm>
-            <a:off x="5349240" y="1783080"/>
-            <a:ext cx="6522415" cy="4663440"/>
-          </a:xfrm>
-          <a:prstGeom prst="rect">
-            <a:avLst/>
-          </a:prstGeom>
-          <a:noFill/>
-          <a:ln/>
-        </p:spPr>
-        <p:txBody>
-          <a:bodyPr wrap="square" lIns="0" tIns="0" rIns="0" bIns="0" rtlCol="0" anchor="t"/>
-          <a:lstStyle/>
-          <a:p>
-            <a:pPr algn="l" indent="0" marL="0">
-              <a:spcAft>
-                <a:spcPts val="800"/>
-              </a:spcAft>
-              <a:buNone/>
-            </a:pPr>
-            <a:r>
-              <a:rPr lang="en-US" sz="4000" dirty="0">
-                <a:solidFill>
-                  <a:srgbClr val="111111"/>
-                </a:solidFill>
-                <a:latin typeface="Times New Roman" pitchFamily="34" charset="0"/>
-                <a:ea typeface="Times New Roman" pitchFamily="34" charset="-122"/>
-                <a:cs typeface="Times New Roman" pitchFamily="34" charset="-120"/>
-              </a:rPr>
-              <a:t>Why is limestone quickly weathered by rain water?</a:t>
-            </a:r>
-            <a:endParaRPr lang="en-US" sz="4000" dirty="0"/>
+              <a:t>Limestone dissolved by water.</a:t>
+            </a:r>
+            <a:endParaRPr lang="en-US" sz="1800" dirty="0"/>
           </a:p>
         </p:txBody>
       </p:sp>
@@ -10790,7 +11295,7 @@
                 <a:ea typeface="Calibri" pitchFamily="34" charset="-122"/>
                 <a:cs typeface="Calibri" pitchFamily="34" charset="-120"/>
               </a:rPr>
-              <a:t>2. GEOLOGY</a:t>
+              <a:t>2. ROCK</a:t>
             </a:r>
             <a:endParaRPr lang="en-US" sz="1400" dirty="0"/>
           </a:p>
@@ -10855,7 +11360,7 @@
                 <a:ea typeface="Times New Roman" pitchFamily="34" charset="-122"/>
                 <a:cs typeface="Times New Roman" pitchFamily="34" charset="-120"/>
               </a:rPr>
-              <a:t>Activity 3: Answer</a:t>
+              <a:t>Activity 3: Question</a:t>
             </a:r>
             <a:endParaRPr lang="en-US" sz="3600" dirty="0"/>
           </a:p>
@@ -10897,7 +11402,7 @@
                 <a:ea typeface="Times New Roman" pitchFamily="34" charset="-122"/>
                 <a:cs typeface="Times New Roman" pitchFamily="34" charset="-120"/>
               </a:rPr>
-              <a:t>It is dissolved by weak acid in rain (carbonation).</a:t>
+              <a:t>Which weathers faster: limestone or granite?</a:t>
             </a:r>
             <a:endParaRPr lang="en-US" sz="4000" dirty="0"/>
           </a:p>
@@ -11009,54 +11514,15 @@
                 <a:ea typeface="Calibri" pitchFamily="34" charset="-122"/>
                 <a:cs typeface="Calibri" pitchFamily="34" charset="-120"/>
               </a:rPr>
-              <a:t>3. RELIEF AND VEGETATION</a:t>
+              <a:t>2. ROCK</a:t>
             </a:r>
             <a:endParaRPr lang="en-US" sz="1400" dirty="0"/>
-          </a:p>
-        </p:txBody>
-      </p:sp>
-      <p:sp>
-        <p:nvSpPr>
-          <p:cNvPr id="3" name="Text 1"/>
-          <p:cNvSpPr/>
-          <p:nvPr/>
-        </p:nvSpPr>
-        <p:spPr>
-          <a:xfrm>
-            <a:off x="457200" y="1005840"/>
-            <a:ext cx="11277295" cy="731520"/>
-          </a:xfrm>
-          <a:prstGeom prst="rect">
-            <a:avLst/>
-          </a:prstGeom>
-          <a:noFill/>
-          <a:ln/>
-        </p:spPr>
-        <p:txBody>
-          <a:bodyPr wrap="square" lIns="0" tIns="0" rIns="0" bIns="0" rtlCol="0" anchor="ctr"/>
-          <a:lstStyle/>
-          <a:p>
-            <a:pPr algn="ctr" indent="0" marL="0">
-              <a:buNone/>
-            </a:pPr>
-            <a:r>
-              <a:rPr lang="en-US" sz="3600" b="1" dirty="0">
-                <a:solidFill>
-                  <a:srgbClr val="990011"/>
-                </a:solidFill>
-                <a:latin typeface="Times New Roman" pitchFamily="34" charset="0"/>
-                <a:ea typeface="Times New Roman" pitchFamily="34" charset="-122"/>
-                <a:cs typeface="Times New Roman" pitchFamily="34" charset="-120"/>
-              </a:rPr>
-              <a:t>Activity 4</a:t>
-            </a:r>
-            <a:endParaRPr lang="en-US" sz="3600" dirty="0"/>
           </a:p>
         </p:txBody>
       </p:sp>
       <p:pic>
         <p:nvPicPr>
-          <p:cNvPr id="4" name="Image 0" descr="/home/claude/f4/img/v2/lsa_scree.jpg">    </p:cNvPr>
+          <p:cNvPr id="3" name="Image 0" descr="/home/claude/f4/img/minesec_sheet.png">    </p:cNvPr>
           <p:cNvPicPr>
             <a:picLocks noChangeAspect="1"/>
           </p:cNvPicPr>
@@ -11070,8 +11536,8 @@
         </p:blipFill>
         <p:spPr>
           <a:xfrm>
-            <a:off x="2246610" y="1783080"/>
-            <a:ext cx="7698475" cy="4270248"/>
+            <a:off x="0" y="658368"/>
+            <a:ext cx="5120640" cy="5833872"/>
           </a:xfrm>
           <a:prstGeom prst="rect">
             <a:avLst/>
@@ -11080,14 +11546,14 @@
       </p:pic>
       <p:sp>
         <p:nvSpPr>
-          <p:cNvPr id="5" name="Text 2"/>
+          <p:cNvPr id="4" name="Text 1"/>
           <p:cNvSpPr/>
           <p:nvPr/>
         </p:nvSpPr>
         <p:spPr>
           <a:xfrm>
-            <a:off x="457200" y="6089904"/>
-            <a:ext cx="11277295" cy="347472"/>
+            <a:off x="5349240" y="1005840"/>
+            <a:ext cx="6522415" cy="731520"/>
           </a:xfrm>
           <a:prstGeom prst="rect">
             <a:avLst/>
@@ -11096,24 +11562,68 @@
           <a:ln/>
         </p:spPr>
         <p:txBody>
-          <a:bodyPr wrap="square" lIns="0" tIns="0" rIns="0" bIns="0" rtlCol="0" anchor="ctr"/>
+          <a:bodyPr wrap="square" lIns="0" tIns="0" rIns="0" bIns="0" rtlCol="0" anchor="ctr">
+            <a:normAutofit/>
+          </a:bodyPr>
           <a:lstStyle/>
           <a:p>
             <a:pPr algn="ctr" indent="0" marL="0">
               <a:buNone/>
             </a:pPr>
             <a:r>
-              <a:rPr lang="en-US" sz="1800" i="1" dirty="0">
-                <a:solidFill>
-                  <a:srgbClr val="555555"/>
+              <a:rPr lang="en-US" sz="3600" b="1" dirty="0">
+                <a:solidFill>
+                  <a:srgbClr val="990011"/>
                 </a:solidFill>
                 <a:latin typeface="Times New Roman" pitchFamily="34" charset="0"/>
                 <a:ea typeface="Times New Roman" pitchFamily="34" charset="-122"/>
                 <a:cs typeface="Times New Roman" pitchFamily="34" charset="-120"/>
               </a:rPr>
-              <a:t>Broken rocks on a steep mountain slope.</a:t>
-            </a:r>
-            <a:endParaRPr lang="en-US" sz="1800" dirty="0"/>
+              <a:t>Activity 3: Answer</a:t>
+            </a:r>
+            <a:endParaRPr lang="en-US" sz="3600" dirty="0"/>
+          </a:p>
+        </p:txBody>
+      </p:sp>
+      <p:sp>
+        <p:nvSpPr>
+          <p:cNvPr id="5" name="Text 2"/>
+          <p:cNvSpPr/>
+          <p:nvPr/>
+        </p:nvSpPr>
+        <p:spPr>
+          <a:xfrm>
+            <a:off x="5349240" y="1783080"/>
+            <a:ext cx="6522415" cy="4663440"/>
+          </a:xfrm>
+          <a:prstGeom prst="rect">
+            <a:avLst/>
+          </a:prstGeom>
+          <a:noFill/>
+          <a:ln/>
+        </p:spPr>
+        <p:txBody>
+          <a:bodyPr wrap="square" lIns="0" tIns="0" rIns="0" bIns="0" rtlCol="0" anchor="t"/>
+          <a:lstStyle/>
+          <a:p>
+            <a:pPr algn="l" indent="0" marL="0">
+              <a:spcAft>
+                <a:spcPts val="800"/>
+              </a:spcAft>
+              <a:buNone/>
+            </a:pPr>
+            <a:r>
+              <a:rPr lang="en-US" sz="4000" dirty="0">
+                <a:solidFill>
+                  <a:srgbClr val="111111"/>
+                </a:solidFill>
+                <a:latin typeface="Times New Roman" pitchFamily="34" charset="0"/>
+                <a:ea typeface="Times New Roman" pitchFamily="34" charset="-122"/>
+                <a:cs typeface="Times New Roman" pitchFamily="34" charset="-120"/>
+              </a:rPr>
+              <a:t>Limestone.</a:t>
+            </a:r>
+            <a:endParaRPr lang="en-US" sz="4000" dirty="0"/>
           </a:p>
         </p:txBody>
       </p:sp>
@@ -11223,15 +11733,54 @@
                 <a:ea typeface="Calibri" pitchFamily="34" charset="-122"/>
                 <a:cs typeface="Calibri" pitchFamily="34" charset="-120"/>
               </a:rPr>
-              <a:t>3. RELIEF AND VEGETATION</a:t>
+              <a:t>3. RELIEF</a:t>
             </a:r>
             <a:endParaRPr lang="en-US" sz="1400" dirty="0"/>
+          </a:p>
+        </p:txBody>
+      </p:sp>
+      <p:sp>
+        <p:nvSpPr>
+          <p:cNvPr id="3" name="Text 1"/>
+          <p:cNvSpPr/>
+          <p:nvPr/>
+        </p:nvSpPr>
+        <p:spPr>
+          <a:xfrm>
+            <a:off x="457200" y="1005840"/>
+            <a:ext cx="11277295" cy="731520"/>
+          </a:xfrm>
+          <a:prstGeom prst="rect">
+            <a:avLst/>
+          </a:prstGeom>
+          <a:noFill/>
+          <a:ln/>
+        </p:spPr>
+        <p:txBody>
+          <a:bodyPr wrap="square" lIns="0" tIns="0" rIns="0" bIns="0" rtlCol="0" anchor="ctr"/>
+          <a:lstStyle/>
+          <a:p>
+            <a:pPr algn="ctr" indent="0" marL="0">
+              <a:buNone/>
+            </a:pPr>
+            <a:r>
+              <a:rPr lang="en-US" sz="3600" b="1" dirty="0">
+                <a:solidFill>
+                  <a:srgbClr val="990011"/>
+                </a:solidFill>
+                <a:latin typeface="Times New Roman" pitchFamily="34" charset="0"/>
+                <a:ea typeface="Times New Roman" pitchFamily="34" charset="-122"/>
+                <a:cs typeface="Times New Roman" pitchFamily="34" charset="-120"/>
+              </a:rPr>
+              <a:t>Activity 4</a:t>
+            </a:r>
+            <a:endParaRPr lang="en-US" sz="3600" dirty="0"/>
           </a:p>
         </p:txBody>
       </p:sp>
       <p:pic>
         <p:nvPicPr>
-          <p:cNvPr id="3" name="Image 0" descr="/home/claude/f4/img/minesec_sheet.png">    </p:cNvPr>
+          <p:cNvPr id="4" name="Image 0" descr="/home/claude/f4/img/v2/lsa_scree.jpg">    </p:cNvPr>
           <p:cNvPicPr>
             <a:picLocks noChangeAspect="1"/>
           </p:cNvPicPr>
@@ -11245,8 +11794,8 @@
         </p:blipFill>
         <p:spPr>
           <a:xfrm>
-            <a:off x="0" y="658368"/>
-            <a:ext cx="5120640" cy="5833872"/>
+            <a:off x="2246610" y="1783080"/>
+            <a:ext cx="7698475" cy="4270248"/>
           </a:xfrm>
           <a:prstGeom prst="rect">
             <a:avLst/>
@@ -11255,14 +11804,14 @@
       </p:pic>
       <p:sp>
         <p:nvSpPr>
-          <p:cNvPr id="4" name="Text 1"/>
+          <p:cNvPr id="5" name="Text 2"/>
           <p:cNvSpPr/>
           <p:nvPr/>
         </p:nvSpPr>
         <p:spPr>
           <a:xfrm>
-            <a:off x="5349240" y="1005840"/>
-            <a:ext cx="6522415" cy="731520"/>
+            <a:off x="457200" y="6089904"/>
+            <a:ext cx="11277295" cy="347472"/>
           </a:xfrm>
           <a:prstGeom prst="rect">
             <a:avLst/>
@@ -11271,68 +11820,24 @@
           <a:ln/>
         </p:spPr>
         <p:txBody>
-          <a:bodyPr wrap="square" lIns="0" tIns="0" rIns="0" bIns="0" rtlCol="0" anchor="ctr">
-            <a:normAutofit/>
-          </a:bodyPr>
+          <a:bodyPr wrap="square" lIns="0" tIns="0" rIns="0" bIns="0" rtlCol="0" anchor="ctr"/>
           <a:lstStyle/>
           <a:p>
             <a:pPr algn="ctr" indent="0" marL="0">
               <a:buNone/>
             </a:pPr>
             <a:r>
-              <a:rPr lang="en-US" sz="3600" b="1" dirty="0">
-                <a:solidFill>
-                  <a:srgbClr val="990011"/>
+              <a:rPr lang="en-US" sz="1800" i="1" dirty="0">
+                <a:solidFill>
+                  <a:srgbClr val="555555"/>
                 </a:solidFill>
                 <a:latin typeface="Times New Roman" pitchFamily="34" charset="0"/>
                 <a:ea typeface="Times New Roman" pitchFamily="34" charset="-122"/>
                 <a:cs typeface="Times New Roman" pitchFamily="34" charset="-120"/>
               </a:rPr>
-              <a:t>Activity 4: Question</a:t>
-            </a:r>
-            <a:endParaRPr lang="en-US" sz="3600" dirty="0"/>
-          </a:p>
-        </p:txBody>
-      </p:sp>
-      <p:sp>
-        <p:nvSpPr>
-          <p:cNvPr id="5" name="Text 2"/>
-          <p:cNvSpPr/>
-          <p:nvPr/>
-        </p:nvSpPr>
-        <p:spPr>
-          <a:xfrm>
-            <a:off x="5349240" y="1783080"/>
-            <a:ext cx="6522415" cy="4663440"/>
-          </a:xfrm>
-          <a:prstGeom prst="rect">
-            <a:avLst/>
-          </a:prstGeom>
-          <a:noFill/>
-          <a:ln/>
-        </p:spPr>
-        <p:txBody>
-          <a:bodyPr wrap="square" lIns="0" tIns="0" rIns="0" bIns="0" rtlCol="0" anchor="t"/>
-          <a:lstStyle/>
-          <a:p>
-            <a:pPr algn="l" indent="0" marL="0">
-              <a:spcAft>
-                <a:spcPts val="800"/>
-              </a:spcAft>
-              <a:buNone/>
-            </a:pPr>
-            <a:r>
-              <a:rPr lang="en-US" sz="4000" dirty="0">
-                <a:solidFill>
-                  <a:srgbClr val="111111"/>
-                </a:solidFill>
-                <a:latin typeface="Times New Roman" pitchFamily="34" charset="0"/>
-                <a:ea typeface="Times New Roman" pitchFamily="34" charset="-122"/>
-                <a:cs typeface="Times New Roman" pitchFamily="34" charset="-120"/>
-              </a:rPr>
-              <a:t>Why are there many broken rocks on steep mountain slopes?</a:t>
-            </a:r>
-            <a:endParaRPr lang="en-US" sz="4000" dirty="0"/>
+              <a:t>Scree on a steep slope.</a:t>
+            </a:r>
+            <a:endParaRPr lang="en-US" sz="1800" dirty="0"/>
           </a:p>
         </p:txBody>
       </p:sp>
@@ -12013,7 +12518,7 @@
                           <a:ea typeface="Calibri" pitchFamily="34" charset="-122"/>
                           <a:cs typeface="Calibri" pitchFamily="34" charset="-120"/>
                         </a:rPr>
-                        <a:t>Peltier's graph, regolith, lithology, joints.</a:t>
+                        <a:t>Intensity of weathering, climate, Peltier's diagram, rock hardness, joints, relief, vegetation, human activities, acid rain.</a:t>
                       </a:r>
                       <a:endParaRPr lang="en-US" sz="1700" dirty="0">
                         <a:latin typeface="Calibri" charset="0"/>
@@ -12151,7 +12656,7 @@
                           <a:ea typeface="Calibri" pitchFamily="34" charset="-122"/>
                           <a:cs typeface="Calibri" pitchFamily="34" charset="-120"/>
                         </a:rPr>
-                        <a:t>Factors of weathering: climate (Peltier), geology, relief, vegetation, human activities.</a:t>
+                        <a:t>Factors of the intensity of weathering: climate (Peltier's diagram), geology, relief, vegetation and human activities.</a:t>
                       </a:r>
                       <a:endParaRPr lang="en-US" sz="1700" dirty="0">
                         <a:latin typeface="Calibri" charset="0"/>
@@ -12289,7 +12794,7 @@
                           <a:ea typeface="Calibri" pitchFamily="34" charset="-122"/>
                           <a:cs typeface="Calibri" pitchFamily="34" charset="-120"/>
                         </a:rPr>
-                        <a:t>Learners are able to explain why weathering is stronger in some places than in others.</a:t>
+                        <a:t>Learners are able to explain why weathering is faster in some places and apply this to Garoua.</a:t>
                       </a:r>
                       <a:endParaRPr lang="en-US" sz="1700" dirty="0">
                         <a:latin typeface="Calibri" charset="0"/>
@@ -12451,7 +12956,7 @@
                 <a:ea typeface="Calibri" pitchFamily="34" charset="-122"/>
                 <a:cs typeface="Calibri" pitchFamily="34" charset="-120"/>
               </a:rPr>
-              <a:t>3. RELIEF AND VEGETATION</a:t>
+              <a:t>3. RELIEF</a:t>
             </a:r>
             <a:endParaRPr lang="en-US" sz="1400" dirty="0"/>
           </a:p>
@@ -12516,7 +13021,7 @@
                 <a:ea typeface="Times New Roman" pitchFamily="34" charset="-122"/>
                 <a:cs typeface="Times New Roman" pitchFamily="34" charset="-120"/>
               </a:rPr>
-              <a:t>Activity 4: Answer</a:t>
+              <a:t>Activity 4: Question</a:t>
             </a:r>
             <a:endParaRPr lang="en-US" sz="3600" dirty="0"/>
           </a:p>
@@ -12558,7 +13063,7 @@
                 <a:ea typeface="Times New Roman" pitchFamily="34" charset="-122"/>
                 <a:cs typeface="Times New Roman" pitchFamily="34" charset="-120"/>
               </a:rPr>
-              <a:t>Freezing and heating break the rocks, and the pieces fall down the steep slope.</a:t>
+              <a:t>Why is fresh rock often exposed on steep slopes?</a:t>
             </a:r>
             <a:endParaRPr lang="en-US" sz="4000" dirty="0"/>
           </a:p>
@@ -12670,54 +13175,15 @@
                 <a:ea typeface="Calibri" pitchFamily="34" charset="-122"/>
                 <a:cs typeface="Calibri" pitchFamily="34" charset="-120"/>
               </a:rPr>
-              <a:t>4. HUMAN ACTIVITIES</a:t>
+              <a:t>3. RELIEF</a:t>
             </a:r>
             <a:endParaRPr lang="en-US" sz="1400" dirty="0"/>
-          </a:p>
-        </p:txBody>
-      </p:sp>
-      <p:sp>
-        <p:nvSpPr>
-          <p:cNvPr id="3" name="Text 1"/>
-          <p:cNvSpPr/>
-          <p:nvPr/>
-        </p:nvSpPr>
-        <p:spPr>
-          <a:xfrm>
-            <a:off x="457200" y="1005840"/>
-            <a:ext cx="11277295" cy="731520"/>
-          </a:xfrm>
-          <a:prstGeom prst="rect">
-            <a:avLst/>
-          </a:prstGeom>
-          <a:noFill/>
-          <a:ln/>
-        </p:spPr>
-        <p:txBody>
-          <a:bodyPr wrap="square" lIns="0" tIns="0" rIns="0" bIns="0" rtlCol="0" anchor="ctr"/>
-          <a:lstStyle/>
-          <a:p>
-            <a:pPr algn="ctr" indent="0" marL="0">
-              <a:buNone/>
-            </a:pPr>
-            <a:r>
-              <a:rPr lang="en-US" sz="3600" b="1" dirty="0">
-                <a:solidFill>
-                  <a:srgbClr val="990011"/>
-                </a:solidFill>
-                <a:latin typeface="Times New Roman" pitchFamily="34" charset="0"/>
-                <a:ea typeface="Times New Roman" pitchFamily="34" charset="-122"/>
-                <a:cs typeface="Times New Roman" pitchFamily="34" charset="-120"/>
-              </a:rPr>
-              <a:t>Activity 5</a:t>
-            </a:r>
-            <a:endParaRPr lang="en-US" sz="3600" dirty="0"/>
           </a:p>
         </p:txBody>
       </p:sp>
       <p:pic>
         <p:nvPicPr>
-          <p:cNvPr id="4" name="Image 0" descr="/home/claude/f4/img/v2/f4_marble.jpg">    </p:cNvPr>
+          <p:cNvPr id="3" name="Image 0" descr="/home/claude/f4/img/minesec_sheet.png">    </p:cNvPr>
           <p:cNvPicPr>
             <a:picLocks noChangeAspect="1"/>
           </p:cNvPicPr>
@@ -12731,8 +13197,8 @@
         </p:blipFill>
         <p:spPr>
           <a:xfrm>
-            <a:off x="2246610" y="1783080"/>
-            <a:ext cx="7698475" cy="4270248"/>
+            <a:off x="0" y="658368"/>
+            <a:ext cx="5120640" cy="5833872"/>
           </a:xfrm>
           <a:prstGeom prst="rect">
             <a:avLst/>
@@ -12741,14 +13207,14 @@
       </p:pic>
       <p:sp>
         <p:nvSpPr>
-          <p:cNvPr id="5" name="Text 2"/>
+          <p:cNvPr id="4" name="Text 1"/>
           <p:cNvSpPr/>
           <p:nvPr/>
         </p:nvSpPr>
         <p:spPr>
           <a:xfrm>
-            <a:off x="457200" y="6089904"/>
-            <a:ext cx="11277295" cy="347472"/>
+            <a:off x="5349240" y="1005840"/>
+            <a:ext cx="6522415" cy="731520"/>
           </a:xfrm>
           <a:prstGeom prst="rect">
             <a:avLst/>
@@ -12757,24 +13223,68 @@
           <a:ln/>
         </p:spPr>
         <p:txBody>
-          <a:bodyPr wrap="square" lIns="0" tIns="0" rIns="0" bIns="0" rtlCol="0" anchor="ctr"/>
+          <a:bodyPr wrap="square" lIns="0" tIns="0" rIns="0" bIns="0" rtlCol="0" anchor="ctr">
+            <a:normAutofit/>
+          </a:bodyPr>
           <a:lstStyle/>
           <a:p>
             <a:pPr algn="ctr" indent="0" marL="0">
               <a:buNone/>
             </a:pPr>
             <a:r>
-              <a:rPr lang="en-US" sz="1800" i="1" dirty="0">
-                <a:solidFill>
-                  <a:srgbClr val="555555"/>
+              <a:rPr lang="en-US" sz="3600" b="1" dirty="0">
+                <a:solidFill>
+                  <a:srgbClr val="990011"/>
                 </a:solidFill>
                 <a:latin typeface="Times New Roman" pitchFamily="34" charset="0"/>
                 <a:ea typeface="Times New Roman" pitchFamily="34" charset="-122"/>
                 <a:cs typeface="Times New Roman" pitchFamily="34" charset="-120"/>
               </a:rPr>
-              <a:t>A quarry.</a:t>
-            </a:r>
-            <a:endParaRPr lang="en-US" sz="1800" dirty="0"/>
+              <a:t>Activity 4: Answer</a:t>
+            </a:r>
+            <a:endParaRPr lang="en-US" sz="3600" dirty="0"/>
+          </a:p>
+        </p:txBody>
+      </p:sp>
+      <p:sp>
+        <p:nvSpPr>
+          <p:cNvPr id="5" name="Text 2"/>
+          <p:cNvSpPr/>
+          <p:nvPr/>
+        </p:nvSpPr>
+        <p:spPr>
+          <a:xfrm>
+            <a:off x="5349240" y="1783080"/>
+            <a:ext cx="6522415" cy="4663440"/>
+          </a:xfrm>
+          <a:prstGeom prst="rect">
+            <a:avLst/>
+          </a:prstGeom>
+          <a:noFill/>
+          <a:ln/>
+        </p:spPr>
+        <p:txBody>
+          <a:bodyPr wrap="square" lIns="0" tIns="0" rIns="0" bIns="0" rtlCol="0" anchor="t"/>
+          <a:lstStyle/>
+          <a:p>
+            <a:pPr algn="l" indent="0" marL="0">
+              <a:spcAft>
+                <a:spcPts val="800"/>
+              </a:spcAft>
+              <a:buNone/>
+            </a:pPr>
+            <a:r>
+              <a:rPr lang="en-US" sz="4000" dirty="0">
+                <a:solidFill>
+                  <a:srgbClr val="111111"/>
+                </a:solidFill>
+                <a:latin typeface="Times New Roman" pitchFamily="34" charset="0"/>
+                <a:ea typeface="Times New Roman" pitchFamily="34" charset="-122"/>
+                <a:cs typeface="Times New Roman" pitchFamily="34" charset="-120"/>
+              </a:rPr>
+              <a:t>Weathered material is quickly washed away.</a:t>
+            </a:r>
+            <a:endParaRPr lang="en-US" sz="4000" dirty="0"/>
           </a:p>
         </p:txBody>
       </p:sp>
@@ -12884,15 +13394,54 @@
                 <a:ea typeface="Calibri" pitchFamily="34" charset="-122"/>
                 <a:cs typeface="Calibri" pitchFamily="34" charset="-120"/>
               </a:rPr>
-              <a:t>4. HUMAN ACTIVITIES</a:t>
+              <a:t>4. HUMANS</a:t>
             </a:r>
             <a:endParaRPr lang="en-US" sz="1400" dirty="0"/>
+          </a:p>
+        </p:txBody>
+      </p:sp>
+      <p:sp>
+        <p:nvSpPr>
+          <p:cNvPr id="3" name="Text 1"/>
+          <p:cNvSpPr/>
+          <p:nvPr/>
+        </p:nvSpPr>
+        <p:spPr>
+          <a:xfrm>
+            <a:off x="457200" y="1005840"/>
+            <a:ext cx="11277295" cy="731520"/>
+          </a:xfrm>
+          <a:prstGeom prst="rect">
+            <a:avLst/>
+          </a:prstGeom>
+          <a:noFill/>
+          <a:ln/>
+        </p:spPr>
+        <p:txBody>
+          <a:bodyPr wrap="square" lIns="0" tIns="0" rIns="0" bIns="0" rtlCol="0" anchor="ctr"/>
+          <a:lstStyle/>
+          <a:p>
+            <a:pPr algn="ctr" indent="0" marL="0">
+              <a:buNone/>
+            </a:pPr>
+            <a:r>
+              <a:rPr lang="en-US" sz="3600" b="1" dirty="0">
+                <a:solidFill>
+                  <a:srgbClr val="990011"/>
+                </a:solidFill>
+                <a:latin typeface="Times New Roman" pitchFamily="34" charset="0"/>
+                <a:ea typeface="Times New Roman" pitchFamily="34" charset="-122"/>
+                <a:cs typeface="Times New Roman" pitchFamily="34" charset="-120"/>
+              </a:rPr>
+              <a:t>Activity 5</a:t>
+            </a:r>
+            <a:endParaRPr lang="en-US" sz="3600" dirty="0"/>
           </a:p>
         </p:txBody>
       </p:sp>
       <p:pic>
         <p:nvPicPr>
-          <p:cNvPr id="3" name="Image 0" descr="/home/claude/f4/img/minesec_sheet.png">    </p:cNvPr>
+          <p:cNvPr id="4" name="Image 0" descr="/home/claude/f4/img/v2/lsa_weathered.jpg">    </p:cNvPr>
           <p:cNvPicPr>
             <a:picLocks noChangeAspect="1"/>
           </p:cNvPicPr>
@@ -12906,8 +13455,8 @@
         </p:blipFill>
         <p:spPr>
           <a:xfrm>
-            <a:off x="0" y="658368"/>
-            <a:ext cx="5120640" cy="5833872"/>
+            <a:off x="2246610" y="1783080"/>
+            <a:ext cx="7698475" cy="4270248"/>
           </a:xfrm>
           <a:prstGeom prst="rect">
             <a:avLst/>
@@ -12916,14 +13465,14 @@
       </p:pic>
       <p:sp>
         <p:nvSpPr>
-          <p:cNvPr id="4" name="Text 1"/>
+          <p:cNvPr id="5" name="Text 2"/>
           <p:cNvSpPr/>
           <p:nvPr/>
         </p:nvSpPr>
         <p:spPr>
           <a:xfrm>
-            <a:off x="5349240" y="1005840"/>
-            <a:ext cx="6522415" cy="731520"/>
+            <a:off x="457200" y="6089904"/>
+            <a:ext cx="11277295" cy="347472"/>
           </a:xfrm>
           <a:prstGeom prst="rect">
             <a:avLst/>
@@ -12932,68 +13481,24 @@
           <a:ln/>
         </p:spPr>
         <p:txBody>
-          <a:bodyPr wrap="square" lIns="0" tIns="0" rIns="0" bIns="0" rtlCol="0" anchor="ctr">
-            <a:normAutofit/>
-          </a:bodyPr>
+          <a:bodyPr wrap="square" lIns="0" tIns="0" rIns="0" bIns="0" rtlCol="0" anchor="ctr"/>
           <a:lstStyle/>
           <a:p>
             <a:pPr algn="ctr" indent="0" marL="0">
               <a:buNone/>
             </a:pPr>
             <a:r>
-              <a:rPr lang="en-US" sz="3600" b="1" dirty="0">
-                <a:solidFill>
-                  <a:srgbClr val="990011"/>
+              <a:rPr lang="en-US" sz="1800" i="1" dirty="0">
+                <a:solidFill>
+                  <a:srgbClr val="555555"/>
                 </a:solidFill>
                 <a:latin typeface="Times New Roman" pitchFamily="34" charset="0"/>
                 <a:ea typeface="Times New Roman" pitchFamily="34" charset="-122"/>
                 <a:cs typeface="Times New Roman" pitchFamily="34" charset="-120"/>
               </a:rPr>
-              <a:t>Activity 5: Question</a:t>
-            </a:r>
-            <a:endParaRPr lang="en-US" sz="3600" dirty="0"/>
-          </a:p>
-        </p:txBody>
-      </p:sp>
-      <p:sp>
-        <p:nvSpPr>
-          <p:cNvPr id="5" name="Text 2"/>
-          <p:cNvSpPr/>
-          <p:nvPr/>
-        </p:nvSpPr>
-        <p:spPr>
-          <a:xfrm>
-            <a:off x="5349240" y="1783080"/>
-            <a:ext cx="6522415" cy="4663440"/>
-          </a:xfrm>
-          <a:prstGeom prst="rect">
-            <a:avLst/>
-          </a:prstGeom>
-          <a:noFill/>
-          <a:ln/>
-        </p:spPr>
-        <p:txBody>
-          <a:bodyPr wrap="square" lIns="0" tIns="0" rIns="0" bIns="0" rtlCol="0" anchor="t"/>
-          <a:lstStyle/>
-          <a:p>
-            <a:pPr algn="l" indent="0" marL="0">
-              <a:spcAft>
-                <a:spcPts val="800"/>
-              </a:spcAft>
-              <a:buNone/>
-            </a:pPr>
-            <a:r>
-              <a:rPr lang="en-US" sz="4000" dirty="0">
-                <a:solidFill>
-                  <a:srgbClr val="111111"/>
-                </a:solidFill>
-                <a:latin typeface="Times New Roman" pitchFamily="34" charset="0"/>
-                <a:ea typeface="Times New Roman" pitchFamily="34" charset="-122"/>
-                <a:cs typeface="Times New Roman" pitchFamily="34" charset="-120"/>
-              </a:rPr>
-              <a:t>How do people speed up weathering?</a:t>
-            </a:r>
-            <a:endParaRPr lang="en-US" sz="4000" dirty="0"/>
+              <a:t>A weathered stone surface.</a:t>
+            </a:r>
+            <a:endParaRPr lang="en-US" sz="1800" dirty="0"/>
           </a:p>
         </p:txBody>
       </p:sp>
@@ -13103,7 +13608,7 @@
                 <a:ea typeface="Calibri" pitchFamily="34" charset="-122"/>
                 <a:cs typeface="Calibri" pitchFamily="34" charset="-120"/>
               </a:rPr>
-              <a:t>4. HUMAN ACTIVITIES</a:t>
+              <a:t>4. HUMANS</a:t>
             </a:r>
             <a:endParaRPr lang="en-US" sz="1400" dirty="0"/>
           </a:p>
@@ -13168,7 +13673,7 @@
                 <a:ea typeface="Times New Roman" pitchFamily="34" charset="-122"/>
                 <a:cs typeface="Times New Roman" pitchFamily="34" charset="-120"/>
               </a:rPr>
-              <a:t>Activity 5: Answer</a:t>
+              <a:t>Activity 5: Question</a:t>
             </a:r>
             <a:endParaRPr lang="en-US" sz="3600" dirty="0"/>
           </a:p>
@@ -13210,7 +13715,7 @@
                 <a:ea typeface="Times New Roman" pitchFamily="34" charset="-122"/>
                 <a:cs typeface="Times New Roman" pitchFamily="34" charset="-120"/>
               </a:rPr>
-              <a:t>Quarries, roads and deforestation expose fresh rock; pollution makes acid rain.</a:t>
+              <a:t>How does acid rain speed up weathering?</a:t>
             </a:r>
             <a:endParaRPr lang="en-US" sz="4000" dirty="0"/>
           </a:p>
@@ -13322,7 +13827,7 @@
                 <a:ea typeface="Calibri" pitchFamily="34" charset="-122"/>
                 <a:cs typeface="Calibri" pitchFamily="34" charset="-120"/>
               </a:rPr>
-              <a:t>BOARD SUMMARY</a:t>
+              <a:t>4. HUMANS</a:t>
             </a:r>
             <a:endParaRPr lang="en-US" sz="1400" dirty="0"/>
           </a:p>
@@ -13387,7 +13892,7 @@
                 <a:ea typeface="Times New Roman" pitchFamily="34" charset="-122"/>
                 <a:cs typeface="Times New Roman" pitchFamily="34" charset="-120"/>
               </a:rPr>
-              <a:t>Board Summary</a:t>
+              <a:t>Activity 5: Answer</a:t>
             </a:r>
             <a:endParaRPr lang="en-US" sz="3600" dirty="0"/>
           </a:p>
@@ -13421,7 +13926,7 @@
               <a:buNone/>
             </a:pPr>
             <a:r>
-              <a:rPr lang="en-US" sz="4000" b="1" dirty="0">
+              <a:rPr lang="en-US" sz="4000" dirty="0">
                 <a:solidFill>
                   <a:srgbClr val="111111"/>
                 </a:solidFill>
@@ -13429,47 +13934,7 @@
                 <a:ea typeface="Times New Roman" pitchFamily="34" charset="-122"/>
                 <a:cs typeface="Times New Roman" pitchFamily="34" charset="-120"/>
               </a:rPr>
-              <a:t>Topic: Denudational Processes on Slopes</a:t>
-            </a:r>
-            <a:endParaRPr lang="en-US" sz="4000" dirty="0"/>
-          </a:p>
-          <a:p>
-            <a:pPr algn="l" indent="0" marL="0">
-              <a:spcAft>
-                <a:spcPts val="800"/>
-              </a:spcAft>
-              <a:buNone/>
-            </a:pPr>
-            <a:r>
-              <a:rPr lang="en-US" sz="4000" b="1" dirty="0">
-                <a:solidFill>
-                  <a:srgbClr val="111111"/>
-                </a:solidFill>
-                <a:latin typeface="Times New Roman" pitchFamily="34" charset="0"/>
-                <a:ea typeface="Times New Roman" pitchFamily="34" charset="-122"/>
-                <a:cs typeface="Times New Roman" pitchFamily="34" charset="-120"/>
-              </a:rPr>
-              <a:t>Sub-topic: Weathering</a:t>
-            </a:r>
-            <a:endParaRPr lang="en-US" sz="4000" dirty="0"/>
-          </a:p>
-          <a:p>
-            <a:pPr algn="l" indent="0" marL="0">
-              <a:spcAft>
-                <a:spcPts val="800"/>
-              </a:spcAft>
-              <a:buNone/>
-            </a:pPr>
-            <a:r>
-              <a:rPr lang="en-US" sz="4000" b="1" dirty="0">
-                <a:solidFill>
-                  <a:srgbClr val="990011"/>
-                </a:solidFill>
-                <a:latin typeface="Times New Roman" pitchFamily="34" charset="0"/>
-                <a:ea typeface="Times New Roman" pitchFamily="34" charset="-122"/>
-                <a:cs typeface="Times New Roman" pitchFamily="34" charset="-120"/>
-              </a:rPr>
-              <a:t>Lesson 10: Intensity and Factors of Weathering</a:t>
+              <a:t>Its acids dissolve and weaken rocks and buildings.</a:t>
             </a:r>
             <a:endParaRPr lang="en-US" sz="4000" dirty="0"/>
           </a:p>
@@ -13604,7 +14069,7 @@
         <p:spPr>
           <a:xfrm>
             <a:off x="0" y="658368"/>
-            <a:ext cx="2468880" cy="5833872"/>
+            <a:ext cx="5120640" cy="5833872"/>
           </a:xfrm>
           <a:prstGeom prst="rect">
             <a:avLst/>
@@ -13619,8 +14084,8 @@
         </p:nvSpPr>
         <p:spPr>
           <a:xfrm>
-            <a:off x="2697480" y="1005840"/>
-            <a:ext cx="9174175" cy="731520"/>
+            <a:off x="5349240" y="1005840"/>
+            <a:ext cx="6522415" cy="731520"/>
           </a:xfrm>
           <a:prstGeom prst="rect">
             <a:avLst/>
@@ -13646,7 +14111,7 @@
                 <a:ea typeface="Times New Roman" pitchFamily="34" charset="-122"/>
                 <a:cs typeface="Times New Roman" pitchFamily="34" charset="-120"/>
               </a:rPr>
-              <a:t>DEFINITIONS</a:t>
+              <a:t>Board Summary</a:t>
             </a:r>
             <a:endParaRPr lang="en-US" sz="3600" dirty="0"/>
           </a:p>
@@ -13660,8 +14125,8 @@
         </p:nvSpPr>
         <p:spPr>
           <a:xfrm>
-            <a:off x="2697480" y="1783080"/>
-            <a:ext cx="9174175" cy="4663440"/>
+            <a:off x="5349240" y="1783080"/>
+            <a:ext cx="6522415" cy="4663440"/>
           </a:xfrm>
           <a:prstGeom prst="rect">
             <a:avLst/>
@@ -13680,7 +14145,7 @@
               <a:buNone/>
             </a:pPr>
             <a:r>
-              <a:rPr lang="en-US" sz="4000" i="1" dirty="0">
+              <a:rPr lang="en-US" sz="4000" b="1" dirty="0">
                 <a:solidFill>
                   <a:srgbClr val="111111"/>
                 </a:solidFill>
@@ -13688,7 +14153,7 @@
                 <a:ea typeface="Times New Roman" pitchFamily="34" charset="-122"/>
                 <a:cs typeface="Times New Roman" pitchFamily="34" charset="-120"/>
               </a:rPr>
-              <a:t>The key terms of this lesson are defined as follows:</a:t>
+              <a:t>Topic: Denudational Processes on Slopes</a:t>
             </a:r>
             <a:endParaRPr lang="en-US" sz="4000" dirty="0"/>
           </a:p>
@@ -13708,8 +14173,11 @@
                 <a:ea typeface="Times New Roman" pitchFamily="34" charset="-122"/>
                 <a:cs typeface="Times New Roman" pitchFamily="34" charset="-120"/>
               </a:rPr>
-              <a:t>Intensity of weathering: </a:t>
-            </a:r>
+              <a:t>Sub-topic: Weathering</a:t>
+            </a:r>
+            <a:endParaRPr lang="en-US" sz="4000" dirty="0"/>
+          </a:p>
+          <a:p>
             <a:pPr algn="l" indent="0" marL="0">
               <a:spcAft>
                 <a:spcPts val="800"/>
@@ -13717,52 +14185,15 @@
               <a:buNone/>
             </a:pPr>
             <a:r>
-              <a:rPr lang="en-US" sz="4000" dirty="0">
-                <a:solidFill>
-                  <a:srgbClr val="111111"/>
+              <a:rPr lang="en-US" sz="4000" b="1" dirty="0">
+                <a:solidFill>
+                  <a:srgbClr val="990011"/>
                 </a:solidFill>
                 <a:latin typeface="Times New Roman" pitchFamily="34" charset="0"/>
                 <a:ea typeface="Times New Roman" pitchFamily="34" charset="-122"/>
                 <a:cs typeface="Times New Roman" pitchFamily="34" charset="-120"/>
               </a:rPr>
-              <a:t>It is the speed and depth at which rocks break down.</a:t>
-            </a:r>
-            <a:endParaRPr lang="en-US" sz="4000" dirty="0"/>
-          </a:p>
-          <a:p>
-            <a:pPr algn="l" indent="0" marL="0">
-              <a:spcAft>
-                <a:spcPts val="800"/>
-              </a:spcAft>
-              <a:buNone/>
-            </a:pPr>
-            <a:r>
-              <a:rPr lang="en-US" sz="4000" b="1" dirty="0">
-                <a:solidFill>
-                  <a:srgbClr val="111111"/>
-                </a:solidFill>
-                <a:latin typeface="Times New Roman" pitchFamily="34" charset="0"/>
-                <a:ea typeface="Times New Roman" pitchFamily="34" charset="-122"/>
-                <a:cs typeface="Times New Roman" pitchFamily="34" charset="-120"/>
-              </a:rPr>
-              <a:t>Regolith: </a:t>
-            </a:r>
-            <a:pPr algn="l" indent="0" marL="0">
-              <a:spcAft>
-                <a:spcPts val="800"/>
-              </a:spcAft>
-              <a:buNone/>
-            </a:pPr>
-            <a:r>
-              <a:rPr lang="en-US" sz="4000" dirty="0">
-                <a:solidFill>
-                  <a:srgbClr val="111111"/>
-                </a:solidFill>
-                <a:latin typeface="Times New Roman" pitchFamily="34" charset="0"/>
-                <a:ea typeface="Times New Roman" pitchFamily="34" charset="-122"/>
-                <a:cs typeface="Times New Roman" pitchFamily="34" charset="-120"/>
-              </a:rPr>
-              <a:t>It is the layer of loose weathered material above solid rock.</a:t>
+              <a:t>Lesson 10: Intensity and Factors of Weathering</a:t>
             </a:r>
             <a:endParaRPr lang="en-US" sz="4000" dirty="0"/>
           </a:p>
@@ -13897,7 +14328,7 @@
         <p:spPr>
           <a:xfrm>
             <a:off x="0" y="658368"/>
-            <a:ext cx="2468880" cy="5833872"/>
+            <a:ext cx="1463040" cy="5833872"/>
           </a:xfrm>
           <a:prstGeom prst="rect">
             <a:avLst/>
@@ -13912,8 +14343,8 @@
         </p:nvSpPr>
         <p:spPr>
           <a:xfrm>
-            <a:off x="2697480" y="1005840"/>
-            <a:ext cx="9174175" cy="731520"/>
+            <a:off x="1691640" y="1005840"/>
+            <a:ext cx="10180015" cy="731520"/>
           </a:xfrm>
           <a:prstGeom prst="rect">
             <a:avLst/>
@@ -13939,7 +14370,7 @@
                 <a:ea typeface="Times New Roman" pitchFamily="34" charset="-122"/>
                 <a:cs typeface="Times New Roman" pitchFamily="34" charset="-120"/>
               </a:rPr>
-              <a:t>1. Factors of Weathering</a:t>
+              <a:t>DEFINITIONS</a:t>
             </a:r>
             <a:endParaRPr lang="en-US" sz="3600" dirty="0"/>
           </a:p>
@@ -13953,47 +14384,8 @@
         </p:nvSpPr>
         <p:spPr>
           <a:xfrm>
-            <a:off x="2697480" y="1737360"/>
-            <a:ext cx="9174175" cy="457200"/>
-          </a:xfrm>
-          <a:prstGeom prst="rect">
-            <a:avLst/>
-          </a:prstGeom>
-          <a:noFill/>
-          <a:ln/>
-        </p:spPr>
-        <p:txBody>
-          <a:bodyPr wrap="square" lIns="0" tIns="0" rIns="0" bIns="0" rtlCol="0" anchor="ctr"/>
-          <a:lstStyle/>
-          <a:p>
-            <a:pPr algn="l" indent="0" marL="0">
-              <a:buNone/>
-            </a:pPr>
-            <a:r>
-              <a:rPr lang="en-US" sz="3200" b="1" dirty="0">
-                <a:solidFill>
-                  <a:srgbClr val="990011"/>
-                </a:solidFill>
-                <a:latin typeface="Times New Roman" pitchFamily="34" charset="0"/>
-                <a:ea typeface="Times New Roman" pitchFamily="34" charset="-122"/>
-                <a:cs typeface="Times New Roman" pitchFamily="34" charset="-120"/>
-              </a:rPr>
-              <a:t>A) Climate</a:t>
-            </a:r>
-            <a:endParaRPr lang="en-US" sz="3200" dirty="0"/>
-          </a:p>
-        </p:txBody>
-      </p:sp>
-      <p:sp>
-        <p:nvSpPr>
-          <p:cNvPr id="6" name="Text 3"/>
-          <p:cNvSpPr/>
-          <p:nvPr/>
-        </p:nvSpPr>
-        <p:spPr>
-          <a:xfrm>
-            <a:off x="2697480" y="2240280"/>
-            <a:ext cx="9174175" cy="4206240"/>
+            <a:off x="1691640" y="1783080"/>
+            <a:ext cx="10180015" cy="4663440"/>
           </a:xfrm>
           <a:prstGeom prst="rect">
             <a:avLst/>
@@ -14020,7 +14412,7 @@
                 <a:ea typeface="Times New Roman" pitchFamily="34" charset="-122"/>
                 <a:cs typeface="Times New Roman" pitchFamily="34" charset="-120"/>
               </a:rPr>
-              <a:t>Climate is the main factor of weathering:</a:t>
+              <a:t>The key terms of this lesson are defined as follows:</a:t>
             </a:r>
             <a:endParaRPr lang="en-US" sz="4000" dirty="0"/>
           </a:p>
@@ -14040,7 +14432,7 @@
                 <a:ea typeface="Times New Roman" pitchFamily="34" charset="-122"/>
                 <a:cs typeface="Times New Roman" pitchFamily="34" charset="-120"/>
               </a:rPr>
-              <a:t>Temperature and rainfall: </a:t>
+              <a:t>Intensity of weathering: </a:t>
             </a:r>
             <a:pPr algn="l" indent="0" marL="0">
               <a:spcAft>
@@ -14057,7 +14449,44 @@
                 <a:ea typeface="Times New Roman" pitchFamily="34" charset="-122"/>
                 <a:cs typeface="Times New Roman" pitchFamily="34" charset="-120"/>
               </a:rPr>
-              <a:t>Chemical weathering is strongest where it is hot and wet, as in equatorial regions, where regolith can be 60 m deep.</a:t>
+              <a:t>It is the speed and depth at which rocks are broken down.</a:t>
+            </a:r>
+            <a:endParaRPr lang="en-US" sz="4000" dirty="0"/>
+          </a:p>
+          <a:p>
+            <a:pPr algn="l" indent="0" marL="0">
+              <a:spcAft>
+                <a:spcPts val="800"/>
+              </a:spcAft>
+              <a:buNone/>
+            </a:pPr>
+            <a:r>
+              <a:rPr lang="en-US" sz="4000" b="1" dirty="0">
+                <a:solidFill>
+                  <a:srgbClr val="111111"/>
+                </a:solidFill>
+                <a:latin typeface="Times New Roman" pitchFamily="34" charset="0"/>
+                <a:ea typeface="Times New Roman" pitchFamily="34" charset="-122"/>
+                <a:cs typeface="Times New Roman" pitchFamily="34" charset="-120"/>
+              </a:rPr>
+              <a:t>Peltier's diagram: </a:t>
+            </a:r>
+            <a:pPr algn="l" indent="0" marL="0">
+              <a:spcAft>
+                <a:spcPts val="800"/>
+              </a:spcAft>
+              <a:buNone/>
+            </a:pPr>
+            <a:r>
+              <a:rPr lang="en-US" sz="4000" dirty="0">
+                <a:solidFill>
+                  <a:srgbClr val="111111"/>
+                </a:solidFill>
+                <a:latin typeface="Times New Roman" pitchFamily="34" charset="0"/>
+                <a:ea typeface="Times New Roman" pitchFamily="34" charset="-122"/>
+                <a:cs typeface="Times New Roman" pitchFamily="34" charset="-120"/>
+              </a:rPr>
+              <a:t>It is a graph linking mean annual temperature and rainfall to the dominant type of weathering.</a:t>
             </a:r>
             <a:endParaRPr lang="en-US" sz="4000" dirty="0"/>
           </a:p>
@@ -14192,7 +14621,7 @@
         <p:spPr>
           <a:xfrm>
             <a:off x="0" y="658368"/>
-            <a:ext cx="1463040" cy="5833872"/>
+            <a:ext cx="5120640" cy="5833872"/>
           </a:xfrm>
           <a:prstGeom prst="rect">
             <a:avLst/>
@@ -14207,8 +14636,8 @@
         </p:nvSpPr>
         <p:spPr>
           <a:xfrm>
-            <a:off x="1691640" y="1005840"/>
-            <a:ext cx="10180015" cy="731520"/>
+            <a:off x="5349240" y="1005840"/>
+            <a:ext cx="6522415" cy="731520"/>
           </a:xfrm>
           <a:prstGeom prst="rect">
             <a:avLst/>
@@ -14234,7 +14663,7 @@
                 <a:ea typeface="Times New Roman" pitchFamily="34" charset="-122"/>
                 <a:cs typeface="Times New Roman" pitchFamily="34" charset="-120"/>
               </a:rPr>
-              <a:t>1. Factors of Weathering</a:t>
+              <a:t>DEFINITIONS (continued)</a:t>
             </a:r>
             <a:endParaRPr lang="en-US" sz="3600" dirty="0"/>
           </a:p>
@@ -14248,47 +14677,8 @@
         </p:nvSpPr>
         <p:spPr>
           <a:xfrm>
-            <a:off x="1691640" y="1737360"/>
-            <a:ext cx="10180015" cy="457200"/>
-          </a:xfrm>
-          <a:prstGeom prst="rect">
-            <a:avLst/>
-          </a:prstGeom>
-          <a:noFill/>
-          <a:ln/>
-        </p:spPr>
-        <p:txBody>
-          <a:bodyPr wrap="square" lIns="0" tIns="0" rIns="0" bIns="0" rtlCol="0" anchor="ctr"/>
-          <a:lstStyle/>
-          <a:p>
-            <a:pPr algn="l" indent="0" marL="0">
-              <a:buNone/>
-            </a:pPr>
-            <a:r>
-              <a:rPr lang="en-US" sz="3200" b="1" dirty="0">
-                <a:solidFill>
-                  <a:srgbClr val="990011"/>
-                </a:solidFill>
-                <a:latin typeface="Times New Roman" pitchFamily="34" charset="0"/>
-                <a:ea typeface="Times New Roman" pitchFamily="34" charset="-122"/>
-                <a:cs typeface="Times New Roman" pitchFamily="34" charset="-120"/>
-              </a:rPr>
-              <a:t>A) Climate (continued)</a:t>
-            </a:r>
-            <a:endParaRPr lang="en-US" sz="3200" dirty="0"/>
-          </a:p>
-        </p:txBody>
-      </p:sp>
-      <p:sp>
-        <p:nvSpPr>
-          <p:cNvPr id="6" name="Text 3"/>
-          <p:cNvSpPr/>
-          <p:nvPr/>
-        </p:nvSpPr>
-        <p:spPr>
-          <a:xfrm>
-            <a:off x="1691640" y="2240280"/>
-            <a:ext cx="10180015" cy="4206240"/>
+            <a:off x="5349240" y="1783080"/>
+            <a:ext cx="6522415" cy="4663440"/>
           </a:xfrm>
           <a:prstGeom prst="rect">
             <a:avLst/>
@@ -14307,7 +14697,7 @@
               <a:buNone/>
             </a:pPr>
             <a:r>
-              <a:rPr lang="en-US" sz="4000" dirty="0">
+              <a:rPr lang="en-US" sz="4000" b="1" dirty="0">
                 <a:solidFill>
                   <a:srgbClr val="111111"/>
                 </a:solidFill>
@@ -14315,11 +14705,8 @@
                 <a:ea typeface="Times New Roman" pitchFamily="34" charset="-122"/>
                 <a:cs typeface="Times New Roman" pitchFamily="34" charset="-120"/>
               </a:rPr>
-              <a:t>Frost weathering is strongest where temperatures cross 0 °C often.</a:t>
-            </a:r>
-            <a:endParaRPr lang="en-US" sz="4000" dirty="0"/>
-          </a:p>
-          <a:p>
+              <a:t>Joints: </a:t>
+            </a:r>
             <a:pPr algn="l" indent="0" marL="0">
               <a:spcAft>
                 <a:spcPts val="800"/>
@@ -14327,7 +14714,7 @@
               <a:buNone/>
             </a:pPr>
             <a:r>
-              <a:rPr lang="en-US" sz="4000" b="1" dirty="0">
+              <a:rPr lang="en-US" sz="4000" dirty="0">
                 <a:solidFill>
                   <a:srgbClr val="111111"/>
                 </a:solidFill>
@@ -14335,24 +14722,7 @@
                 <a:ea typeface="Times New Roman" pitchFamily="34" charset="-122"/>
                 <a:cs typeface="Times New Roman" pitchFamily="34" charset="-120"/>
               </a:rPr>
-              <a:t>Peltier's graph: </a:t>
-            </a:r>
-            <a:pPr algn="l" indent="0" marL="0">
-              <a:spcAft>
-                <a:spcPts val="800"/>
-              </a:spcAft>
-              <a:buNone/>
-            </a:pPr>
-            <a:r>
-              <a:rPr lang="en-US" sz="4000" dirty="0">
-                <a:solidFill>
-                  <a:srgbClr val="111111"/>
-                </a:solidFill>
-                <a:latin typeface="Times New Roman" pitchFamily="34" charset="0"/>
-                <a:ea typeface="Times New Roman" pitchFamily="34" charset="-122"/>
-                <a:cs typeface="Times New Roman" pitchFamily="34" charset="-120"/>
-              </a:rPr>
-              <a:t>It shows weathering regions according to mean annual temperature and rainfall. Deserts have weak weathering, and humid tropics strong chemical weathering.</a:t>
+              <a:t>They are natural cracks in rocks that let water in.</a:t>
             </a:r>
             <a:endParaRPr lang="en-US" sz="4000" dirty="0"/>
           </a:p>
@@ -14478,8 +14848,8 @@
         </p:nvSpPr>
         <p:spPr>
           <a:xfrm>
-            <a:off x="457200" y="1005840"/>
-            <a:ext cx="11277295" cy="731520"/>
+            <a:off x="365760" y="1005840"/>
+            <a:ext cx="11460175" cy="731520"/>
           </a:xfrm>
           <a:prstGeom prst="rect">
             <a:avLst/>
@@ -14488,7 +14858,9 @@
           <a:ln/>
         </p:spPr>
         <p:txBody>
-          <a:bodyPr wrap="square" lIns="0" tIns="0" rIns="0" bIns="0" rtlCol="0" anchor="ctr"/>
+          <a:bodyPr wrap="square" lIns="0" tIns="0" rIns="0" bIns="0" rtlCol="0" anchor="ctr">
+            <a:normAutofit/>
+          </a:bodyPr>
           <a:lstStyle/>
           <a:p>
             <a:pPr algn="ctr" indent="0" marL="0">
@@ -14503,7 +14875,86 @@
                 <a:ea typeface="Times New Roman" pitchFamily="34" charset="-122"/>
                 <a:cs typeface="Times New Roman" pitchFamily="34" charset="-120"/>
               </a:rPr>
-              <a:t>1. Factors of Weathering</a:t>
+              <a:t>1. Climate</a:t>
+            </a:r>
+            <a:endParaRPr lang="en-US" sz="3600" dirty="0"/>
+          </a:p>
+        </p:txBody>
+      </p:sp>
+      <p:sp>
+        <p:nvSpPr>
+          <p:cNvPr id="4" name="Text 2"/>
+          <p:cNvSpPr/>
+          <p:nvPr/>
+        </p:nvSpPr>
+        <p:spPr>
+          <a:xfrm>
+            <a:off x="365760" y="1783080"/>
+            <a:ext cx="4846320" cy="4617720"/>
+          </a:xfrm>
+          <a:prstGeom prst="rect">
+            <a:avLst/>
+          </a:prstGeom>
+          <a:noFill/>
+          <a:ln/>
+        </p:spPr>
+        <p:txBody>
+          <a:bodyPr wrap="square" lIns="0" tIns="0" rIns="0" bIns="0" rtlCol="0" anchor="t"/>
+          <a:lstStyle/>
+          <a:p>
+            <a:pPr algn="l" indent="0" marL="0">
+              <a:spcAft>
+                <a:spcPts val="800"/>
+              </a:spcAft>
+              <a:buNone/>
+            </a:pPr>
+            <a:r>
+              <a:rPr lang="en-US" sz="3600" i="1" dirty="0">
+                <a:solidFill>
+                  <a:srgbClr val="111111"/>
+                </a:solidFill>
+                <a:latin typeface="Times New Roman" pitchFamily="34" charset="0"/>
+                <a:ea typeface="Times New Roman" pitchFamily="34" charset="-122"/>
+                <a:cs typeface="Times New Roman" pitchFamily="34" charset="-120"/>
+              </a:rPr>
+              <a:t>Climate influences weathering as follows:</a:t>
+            </a:r>
+            <a:endParaRPr lang="en-US" sz="3600" dirty="0"/>
+          </a:p>
+          <a:p>
+            <a:pPr algn="l" indent="0" marL="0">
+              <a:spcAft>
+                <a:spcPts val="800"/>
+              </a:spcAft>
+              <a:buNone/>
+            </a:pPr>
+            <a:r>
+              <a:rPr lang="en-US" sz="3600" b="1" dirty="0">
+                <a:solidFill>
+                  <a:srgbClr val="111111"/>
+                </a:solidFill>
+                <a:latin typeface="Times New Roman" pitchFamily="34" charset="0"/>
+                <a:ea typeface="Times New Roman" pitchFamily="34" charset="-122"/>
+                <a:cs typeface="Times New Roman" pitchFamily="34" charset="-120"/>
+              </a:rPr>
+              <a:t>The most important factor: </a:t>
+            </a:r>
+            <a:pPr algn="l" indent="0" marL="0">
+              <a:spcAft>
+                <a:spcPts val="800"/>
+              </a:spcAft>
+              <a:buNone/>
+            </a:pPr>
+            <a:r>
+              <a:rPr lang="en-US" sz="3600" dirty="0">
+                <a:solidFill>
+                  <a:srgbClr val="111111"/>
+                </a:solidFill>
+                <a:latin typeface="Times New Roman" pitchFamily="34" charset="0"/>
+                <a:ea typeface="Times New Roman" pitchFamily="34" charset="-122"/>
+                <a:cs typeface="Times New Roman" pitchFamily="34" charset="-120"/>
+              </a:rPr>
+              <a:t>Temperature and rainfall control both the type and the speed of weathering.</a:t>
             </a:r>
             <a:endParaRPr lang="en-US" sz="3600" dirty="0"/>
           </a:p>
@@ -14511,7 +14962,7 @@
       </p:sp>
       <p:pic>
         <p:nvPicPr>
-          <p:cNvPr id="4" name="Image 0" descr="/home/claude/f4/img/v2/peltier_big.png">    </p:cNvPr>
+          <p:cNvPr id="5" name="Image 0" descr="/home/claude/f4/img/v2/peltier_big.png">    </p:cNvPr>
           <p:cNvPicPr>
             <a:picLocks noChangeAspect="1"/>
           </p:cNvPicPr>
@@ -14525,8 +14976,8 @@
         </p:blipFill>
         <p:spPr>
           <a:xfrm>
-            <a:off x="1383850" y="1783080"/>
-            <a:ext cx="9423996" cy="4270248"/>
+            <a:off x="5349240" y="2409394"/>
+            <a:ext cx="6659575" cy="3017620"/>
           </a:xfrm>
           <a:prstGeom prst="rect">
             <a:avLst/>
@@ -14535,14 +14986,14 @@
       </p:pic>
       <p:sp>
         <p:nvSpPr>
-          <p:cNvPr id="5" name="Text 2"/>
+          <p:cNvPr id="6" name="Text 3"/>
           <p:cNvSpPr/>
           <p:nvPr/>
         </p:nvSpPr>
         <p:spPr>
           <a:xfrm>
-            <a:off x="457200" y="6089904"/>
-            <a:ext cx="11277295" cy="347472"/>
+            <a:off x="5349240" y="6089904"/>
+            <a:ext cx="6659575" cy="347472"/>
           </a:xfrm>
           <a:prstGeom prst="rect">
             <a:avLst/>
@@ -14558,7 +15009,7 @@
               <a:buNone/>
             </a:pPr>
             <a:r>
-              <a:rPr lang="en-US" sz="1800" i="1" dirty="0">
+              <a:rPr lang="en-US" sz="1600" i="1" dirty="0">
                 <a:solidFill>
                   <a:srgbClr val="555555"/>
                 </a:solidFill>
@@ -14566,9 +15017,9 @@
                 <a:ea typeface="Times New Roman" pitchFamily="34" charset="-122"/>
                 <a:cs typeface="Times New Roman" pitchFamily="34" charset="-120"/>
               </a:rPr>
-              <a:t>Illustration: Peltier's weathering regions</a:t>
-            </a:r>
-            <a:endParaRPr lang="en-US" sz="1800" dirty="0"/>
+              <a:t>Illustration: Peltier's diagram</a:t>
+            </a:r>
+            <a:endParaRPr lang="en-US" sz="1600" dirty="0"/>
           </a:p>
         </p:txBody>
       </p:sp>
@@ -14701,7 +15152,7 @@
         <p:spPr>
           <a:xfrm>
             <a:off x="0" y="658368"/>
-            <a:ext cx="3840480" cy="5833872"/>
+            <a:ext cx="2468880" cy="5833872"/>
           </a:xfrm>
           <a:prstGeom prst="rect">
             <a:avLst/>
@@ -14716,8 +15167,8 @@
         </p:nvSpPr>
         <p:spPr>
           <a:xfrm>
-            <a:off x="4069080" y="1005840"/>
-            <a:ext cx="7802575" cy="731520"/>
+            <a:off x="2697480" y="1005840"/>
+            <a:ext cx="9174175" cy="731520"/>
           </a:xfrm>
           <a:prstGeom prst="rect">
             <a:avLst/>
@@ -14743,7 +15194,7 @@
                 <a:ea typeface="Times New Roman" pitchFamily="34" charset="-122"/>
                 <a:cs typeface="Times New Roman" pitchFamily="34" charset="-120"/>
               </a:rPr>
-              <a:t>1. Factors of Weathering</a:t>
+              <a:t>1. Climate</a:t>
             </a:r>
             <a:endParaRPr lang="en-US" sz="3600" dirty="0"/>
           </a:p>
@@ -14757,47 +15208,8 @@
         </p:nvSpPr>
         <p:spPr>
           <a:xfrm>
-            <a:off x="4069080" y="1737360"/>
-            <a:ext cx="7802575" cy="457200"/>
-          </a:xfrm>
-          <a:prstGeom prst="rect">
-            <a:avLst/>
-          </a:prstGeom>
-          <a:noFill/>
-          <a:ln/>
-        </p:spPr>
-        <p:txBody>
-          <a:bodyPr wrap="square" lIns="0" tIns="0" rIns="0" bIns="0" rtlCol="0" anchor="ctr"/>
-          <a:lstStyle/>
-          <a:p>
-            <a:pPr algn="l" indent="0" marL="0">
-              <a:buNone/>
-            </a:pPr>
-            <a:r>
-              <a:rPr lang="en-US" sz="3200" b="1" dirty="0">
-                <a:solidFill>
-                  <a:srgbClr val="990011"/>
-                </a:solidFill>
-                <a:latin typeface="Times New Roman" pitchFamily="34" charset="0"/>
-                <a:ea typeface="Times New Roman" pitchFamily="34" charset="-122"/>
-                <a:cs typeface="Times New Roman" pitchFamily="34" charset="-120"/>
-              </a:rPr>
-              <a:t>B) Geology, Relief, Vegetation and Man</a:t>
-            </a:r>
-            <a:endParaRPr lang="en-US" sz="3200" dirty="0"/>
-          </a:p>
-        </p:txBody>
-      </p:sp>
-      <p:sp>
-        <p:nvSpPr>
-          <p:cNvPr id="6" name="Text 3"/>
-          <p:cNvSpPr/>
-          <p:nvPr/>
-        </p:nvSpPr>
-        <p:spPr>
-          <a:xfrm>
-            <a:off x="4069080" y="2240280"/>
-            <a:ext cx="7802575" cy="4206240"/>
+            <a:off x="2697480" y="1783080"/>
+            <a:ext cx="9174175" cy="4663440"/>
           </a:xfrm>
           <a:prstGeom prst="rect">
             <a:avLst/>
@@ -14816,7 +15228,7 @@
               <a:buNone/>
             </a:pPr>
             <a:r>
-              <a:rPr lang="en-US" sz="4000" i="1" dirty="0">
+              <a:rPr lang="en-US" sz="4000" b="1" dirty="0">
                 <a:solidFill>
                   <a:srgbClr val="111111"/>
                 </a:solidFill>
@@ -14824,11 +15236,8 @@
                 <a:ea typeface="Times New Roman" pitchFamily="34" charset="-122"/>
                 <a:cs typeface="Times New Roman" pitchFamily="34" charset="-120"/>
               </a:rPr>
-              <a:t>Other factors of weathering are:</a:t>
-            </a:r>
-            <a:endParaRPr lang="en-US" sz="4000" dirty="0"/>
-          </a:p>
-          <a:p>
+              <a:t>Temperature: </a:t>
+            </a:r>
             <a:pPr algn="l" indent="0" marL="0">
               <a:spcAft>
                 <a:spcPts val="800"/>
@@ -14836,7 +15245,7 @@
               <a:buNone/>
             </a:pPr>
             <a:r>
-              <a:rPr lang="en-US" sz="4000" b="1" dirty="0">
+              <a:rPr lang="en-US" sz="4000" dirty="0">
                 <a:solidFill>
                   <a:srgbClr val="111111"/>
                 </a:solidFill>
@@ -14844,8 +15253,11 @@
                 <a:ea typeface="Times New Roman" pitchFamily="34" charset="-122"/>
                 <a:cs typeface="Times New Roman" pitchFamily="34" charset="-120"/>
               </a:rPr>
-              <a:t>Geology (rock characteristics): </a:t>
-            </a:r>
+              <a:t>Large daily ranges cause expansion and contraction (exfoliation), and high temperatures speed up chemical reactions.</a:t>
+            </a:r>
+            <a:endParaRPr lang="en-US" sz="4000" dirty="0"/>
+          </a:p>
+          <a:p>
             <a:pPr algn="l" indent="0" marL="0">
               <a:spcAft>
                 <a:spcPts val="800"/>
@@ -14853,7 +15265,7 @@
               <a:buNone/>
             </a:pPr>
             <a:r>
-              <a:rPr lang="en-US" sz="4000" dirty="0">
+              <a:rPr lang="en-US" sz="4000" b="1" dirty="0">
                 <a:solidFill>
                   <a:srgbClr val="111111"/>
                 </a:solidFill>
@@ -14861,7 +15273,24 @@
                 <a:ea typeface="Times New Roman" pitchFamily="34" charset="-122"/>
                 <a:cs typeface="Times New Roman" pitchFamily="34" charset="-120"/>
               </a:rPr>
-              <a:t>Rock type, minerals, joints and permeability control weathering. Limestone dissolves quickly, while quartz resists.</a:t>
+              <a:t>Moisture: </a:t>
+            </a:r>
+            <a:pPr algn="l" indent="0" marL="0">
+              <a:spcAft>
+                <a:spcPts val="800"/>
+              </a:spcAft>
+              <a:buNone/>
+            </a:pPr>
+            <a:r>
+              <a:rPr lang="en-US" sz="4000" dirty="0">
+                <a:solidFill>
+                  <a:srgbClr val="111111"/>
+                </a:solidFill>
+                <a:latin typeface="Times New Roman" pitchFamily="34" charset="0"/>
+                <a:ea typeface="Times New Roman" pitchFamily="34" charset="-122"/>
+                <a:cs typeface="Times New Roman" pitchFamily="34" charset="-120"/>
+              </a:rPr>
+              <a:t>Water is necessary for chemical weathering, so rainy areas weather faster.</a:t>
             </a:r>
             <a:endParaRPr lang="en-US" sz="4000" dirty="0"/>
           </a:p>
@@ -15100,7 +15529,7 @@
                 <a:ea typeface="Times New Roman" pitchFamily="34" charset="-122"/>
                 <a:cs typeface="Times New Roman" pitchFamily="34" charset="-120"/>
               </a:rPr>
-              <a:t>Compare rocks in the dry North and in the wet South of Cameroon. Where are they more deeply weathered? Why?</a:t>
+              <a:t>Name the most important factor of weathering.</a:t>
             </a:r>
             <a:endParaRPr lang="en-US" sz="4000" dirty="0"/>
           </a:p>
@@ -15235,7 +15664,7 @@
         <p:spPr>
           <a:xfrm>
             <a:off x="0" y="658368"/>
-            <a:ext cx="1463040" cy="5833872"/>
+            <a:ext cx="3840480" cy="5833872"/>
           </a:xfrm>
           <a:prstGeom prst="rect">
             <a:avLst/>
@@ -15250,8 +15679,8 @@
         </p:nvSpPr>
         <p:spPr>
           <a:xfrm>
-            <a:off x="1691640" y="1005840"/>
-            <a:ext cx="10180015" cy="731520"/>
+            <a:off x="4069080" y="1005840"/>
+            <a:ext cx="7802575" cy="731520"/>
           </a:xfrm>
           <a:prstGeom prst="rect">
             <a:avLst/>
@@ -15277,7 +15706,7 @@
                 <a:ea typeface="Times New Roman" pitchFamily="34" charset="-122"/>
                 <a:cs typeface="Times New Roman" pitchFamily="34" charset="-120"/>
               </a:rPr>
-              <a:t>1. Factors of Weathering</a:t>
+              <a:t>1. Climate (continued)</a:t>
             </a:r>
             <a:endParaRPr lang="en-US" sz="3600" dirty="0"/>
           </a:p>
@@ -15291,47 +15720,8 @@
         </p:nvSpPr>
         <p:spPr>
           <a:xfrm>
-            <a:off x="1691640" y="1737360"/>
-            <a:ext cx="10180015" cy="457200"/>
-          </a:xfrm>
-          <a:prstGeom prst="rect">
-            <a:avLst/>
-          </a:prstGeom>
-          <a:noFill/>
-          <a:ln/>
-        </p:spPr>
-        <p:txBody>
-          <a:bodyPr wrap="square" lIns="0" tIns="0" rIns="0" bIns="0" rtlCol="0" anchor="ctr"/>
-          <a:lstStyle/>
-          <a:p>
-            <a:pPr algn="l" indent="0" marL="0">
-              <a:buNone/>
-            </a:pPr>
-            <a:r>
-              <a:rPr lang="en-US" sz="3200" b="1" dirty="0">
-                <a:solidFill>
-                  <a:srgbClr val="990011"/>
-                </a:solidFill>
-                <a:latin typeface="Times New Roman" pitchFamily="34" charset="0"/>
-                <a:ea typeface="Times New Roman" pitchFamily="34" charset="-122"/>
-                <a:cs typeface="Times New Roman" pitchFamily="34" charset="-120"/>
-              </a:rPr>
-              <a:t>B) Geology, Relief, Vegetation and Man (continued)</a:t>
-            </a:r>
-            <a:endParaRPr lang="en-US" sz="3200" dirty="0"/>
-          </a:p>
-        </p:txBody>
-      </p:sp>
-      <p:sp>
-        <p:nvSpPr>
-          <p:cNvPr id="6" name="Text 3"/>
-          <p:cNvSpPr/>
-          <p:nvPr/>
-        </p:nvSpPr>
-        <p:spPr>
-          <a:xfrm>
-            <a:off x="1691640" y="2240280"/>
-            <a:ext cx="10180015" cy="4206240"/>
+            <a:off x="4069080" y="1783080"/>
+            <a:ext cx="7802575" cy="4663440"/>
           </a:xfrm>
           <a:prstGeom prst="rect">
             <a:avLst/>
@@ -15358,13 +15748,17 @@
                 <a:ea typeface="Times New Roman" pitchFamily="34" charset="-122"/>
                 <a:cs typeface="Times New Roman" pitchFamily="34" charset="-120"/>
               </a:rPr>
-              <a:t>Relief: </a:t>
-            </a:r>
-            <a:pPr algn="l" indent="0" marL="0">
+              <a:t>Peltier's diagram:</a:t>
+            </a:r>
+            <a:endParaRPr lang="en-US" sz="4000" dirty="0"/>
+          </a:p>
+          <a:p>
+            <a:pPr algn="l" marL="342900" indent="-342900">
               <a:spcAft>
                 <a:spcPts val="800"/>
               </a:spcAft>
-              <a:buNone/>
+              <a:buSzPct val="100000"/>
+              <a:buChar char="•"/>
             </a:pPr>
             <a:r>
               <a:rPr lang="en-US" sz="4000" dirty="0">
@@ -15375,19 +15769,20 @@
                 <a:ea typeface="Times New Roman" pitchFamily="34" charset="-122"/>
                 <a:cs typeface="Times New Roman" pitchFamily="34" charset="-120"/>
               </a:rPr>
-              <a:t>On steep slopes, weathered material is removed quickly, exposing fresh rock. On gentle slopes, thick regolith builds up.</a:t>
+              <a:t>Strong chemical weathering in hot, wet climates.</a:t>
             </a:r>
             <a:endParaRPr lang="en-US" sz="4000" dirty="0"/>
           </a:p>
           <a:p>
-            <a:pPr algn="l" indent="0" marL="0">
+            <a:pPr algn="l" marL="342900" indent="-342900">
               <a:spcAft>
                 <a:spcPts val="800"/>
               </a:spcAft>
-              <a:buNone/>
+              <a:buSzPct val="100000"/>
+              <a:buChar char="•"/>
             </a:pPr>
             <a:r>
-              <a:rPr lang="en-US" sz="4000" b="1" dirty="0">
+              <a:rPr lang="en-US" sz="4000" dirty="0">
                 <a:solidFill>
                   <a:srgbClr val="111111"/>
                 </a:solidFill>
@@ -15395,13 +15790,17 @@
                 <a:ea typeface="Times New Roman" pitchFamily="34" charset="-122"/>
                 <a:cs typeface="Times New Roman" pitchFamily="34" charset="-120"/>
               </a:rPr>
-              <a:t>Vegetation: </a:t>
-            </a:r>
-            <a:pPr algn="l" indent="0" marL="0">
+              <a:t>Strong frost action in cold, wet climates.</a:t>
+            </a:r>
+            <a:endParaRPr lang="en-US" sz="4000" dirty="0"/>
+          </a:p>
+          <a:p>
+            <a:pPr algn="l" marL="342900" indent="-342900">
               <a:spcAft>
                 <a:spcPts val="800"/>
               </a:spcAft>
-              <a:buNone/>
+              <a:buSzPct val="100000"/>
+              <a:buChar char="•"/>
             </a:pPr>
             <a:r>
               <a:rPr lang="en-US" sz="4000" dirty="0">
@@ -15412,7 +15811,7 @@
                 <a:ea typeface="Times New Roman" pitchFamily="34" charset="-122"/>
                 <a:cs typeface="Times New Roman" pitchFamily="34" charset="-120"/>
               </a:rPr>
-              <a:t>Roots and organic acids increase biological and chemical weathering. Plant cover also keeps the soil moist.</a:t>
+              <a:t>Weak weathering in dry areas.</a:t>
             </a:r>
             <a:endParaRPr lang="en-US" sz="4000" dirty="0"/>
           </a:p>
@@ -15530,9 +15929,109 @@
           </a:p>
         </p:txBody>
       </p:sp>
+      <p:sp>
+        <p:nvSpPr>
+          <p:cNvPr id="3" name="Text 1"/>
+          <p:cNvSpPr/>
+          <p:nvPr/>
+        </p:nvSpPr>
+        <p:spPr>
+          <a:xfrm>
+            <a:off x="365760" y="1005840"/>
+            <a:ext cx="11460175" cy="731520"/>
+          </a:xfrm>
+          <a:prstGeom prst="rect">
+            <a:avLst/>
+          </a:prstGeom>
+          <a:noFill/>
+          <a:ln/>
+        </p:spPr>
+        <p:txBody>
+          <a:bodyPr wrap="square" lIns="0" tIns="0" rIns="0" bIns="0" rtlCol="0" anchor="ctr">
+            <a:normAutofit/>
+          </a:bodyPr>
+          <a:lstStyle/>
+          <a:p>
+            <a:pPr algn="ctr" indent="0" marL="0">
+              <a:buNone/>
+            </a:pPr>
+            <a:r>
+              <a:rPr lang="en-US" sz="3600" b="1" dirty="0">
+                <a:solidFill>
+                  <a:srgbClr val="990011"/>
+                </a:solidFill>
+                <a:latin typeface="Times New Roman" pitchFamily="34" charset="0"/>
+                <a:ea typeface="Times New Roman" pitchFamily="34" charset="-122"/>
+                <a:cs typeface="Times New Roman" pitchFamily="34" charset="-120"/>
+              </a:rPr>
+              <a:t>1. Climate</a:t>
+            </a:r>
+            <a:endParaRPr lang="en-US" sz="3600" dirty="0"/>
+          </a:p>
+        </p:txBody>
+      </p:sp>
+      <p:sp>
+        <p:nvSpPr>
+          <p:cNvPr id="4" name="Text 2"/>
+          <p:cNvSpPr/>
+          <p:nvPr/>
+        </p:nvSpPr>
+        <p:spPr>
+          <a:xfrm>
+            <a:off x="365760" y="1783080"/>
+            <a:ext cx="4846320" cy="4617720"/>
+          </a:xfrm>
+          <a:prstGeom prst="rect">
+            <a:avLst/>
+          </a:prstGeom>
+          <a:noFill/>
+          <a:ln/>
+        </p:spPr>
+        <p:txBody>
+          <a:bodyPr wrap="square" lIns="0" tIns="0" rIns="0" bIns="0" rtlCol="0" anchor="t"/>
+          <a:lstStyle/>
+          <a:p>
+            <a:pPr algn="l" indent="0" marL="0">
+              <a:spcAft>
+                <a:spcPts val="800"/>
+              </a:spcAft>
+              <a:buNone/>
+            </a:pPr>
+            <a:r>
+              <a:rPr lang="en-US" sz="3600" b="1" dirty="0">
+                <a:solidFill>
+                  <a:srgbClr val="111111"/>
+                </a:solidFill>
+                <a:latin typeface="Times New Roman" pitchFamily="34" charset="0"/>
+                <a:ea typeface="Times New Roman" pitchFamily="34" charset="-122"/>
+                <a:cs typeface="Times New Roman" pitchFamily="34" charset="-120"/>
+              </a:rPr>
+              <a:t>Garoua: </a:t>
+            </a:r>
+            <a:pPr algn="l" indent="0" marL="0">
+              <a:spcAft>
+                <a:spcPts val="800"/>
+              </a:spcAft>
+              <a:buNone/>
+            </a:pPr>
+            <a:r>
+              <a:rPr lang="en-US" sz="3600" dirty="0">
+                <a:solidFill>
+                  <a:srgbClr val="111111"/>
+                </a:solidFill>
+                <a:latin typeface="Times New Roman" pitchFamily="34" charset="0"/>
+                <a:ea typeface="Times New Roman" pitchFamily="34" charset="-122"/>
+                <a:cs typeface="Times New Roman" pitchFamily="34" charset="-120"/>
+              </a:rPr>
+              <a:t>Its heat and heavy rainy-season showers give strong mechanical and chemical weathering and deep red soils.</a:t>
+            </a:r>
+            <a:endParaRPr lang="en-US" sz="3600" dirty="0"/>
+          </a:p>
+        </p:txBody>
+      </p:sp>
       <p:pic>
         <p:nvPicPr>
-          <p:cNvPr id="3" name="Image 0" descr="/home/claude/f4/img/minesec_sheet.png">    </p:cNvPr>
+          <p:cNvPr id="5" name="Image 0" descr="/home/claude/f4/img/v2/f2t_laterite.jpg">    </p:cNvPr>
           <p:cNvPicPr>
             <a:picLocks noChangeAspect="1"/>
           </p:cNvPicPr>
@@ -15546,8 +16045,8 @@
         </p:blipFill>
         <p:spPr>
           <a:xfrm>
-            <a:off x="0" y="658368"/>
-            <a:ext cx="5120640" cy="5833872"/>
+            <a:off x="5349240" y="2070172"/>
+            <a:ext cx="6659575" cy="3696064"/>
           </a:xfrm>
           <a:prstGeom prst="rect">
             <a:avLst/>
@@ -15556,14 +16055,14 @@
       </p:pic>
       <p:sp>
         <p:nvSpPr>
-          <p:cNvPr id="4" name="Text 1"/>
+          <p:cNvPr id="6" name="Text 3"/>
           <p:cNvSpPr/>
           <p:nvPr/>
         </p:nvSpPr>
         <p:spPr>
           <a:xfrm>
-            <a:off x="5349240" y="1005840"/>
-            <a:ext cx="6522415" cy="731520"/>
+            <a:off x="5349240" y="6089904"/>
+            <a:ext cx="6659575" cy="347472"/>
           </a:xfrm>
           <a:prstGeom prst="rect">
             <a:avLst/>
@@ -15572,124 +16071,24 @@
           <a:ln/>
         </p:spPr>
         <p:txBody>
-          <a:bodyPr wrap="square" lIns="0" tIns="0" rIns="0" bIns="0" rtlCol="0" anchor="ctr">
-            <a:normAutofit/>
-          </a:bodyPr>
+          <a:bodyPr wrap="square" lIns="0" tIns="0" rIns="0" bIns="0" rtlCol="0" anchor="ctr"/>
           <a:lstStyle/>
           <a:p>
             <a:pPr algn="ctr" indent="0" marL="0">
               <a:buNone/>
             </a:pPr>
             <a:r>
-              <a:rPr lang="en-US" sz="3600" b="1" dirty="0">
-                <a:solidFill>
-                  <a:srgbClr val="990011"/>
+              <a:rPr lang="en-US" sz="1600" i="1" dirty="0">
+                <a:solidFill>
+                  <a:srgbClr val="555555"/>
                 </a:solidFill>
                 <a:latin typeface="Times New Roman" pitchFamily="34" charset="0"/>
                 <a:ea typeface="Times New Roman" pitchFamily="34" charset="-122"/>
                 <a:cs typeface="Times New Roman" pitchFamily="34" charset="-120"/>
               </a:rPr>
-              <a:t>1. Factors of Weathering</a:t>
-            </a:r>
-            <a:endParaRPr lang="en-US" sz="3600" dirty="0"/>
-          </a:p>
-        </p:txBody>
-      </p:sp>
-      <p:sp>
-        <p:nvSpPr>
-          <p:cNvPr id="5" name="Text 2"/>
-          <p:cNvSpPr/>
-          <p:nvPr/>
-        </p:nvSpPr>
-        <p:spPr>
-          <a:xfrm>
-            <a:off x="5349240" y="1737360"/>
-            <a:ext cx="6522415" cy="457200"/>
-          </a:xfrm>
-          <a:prstGeom prst="rect">
-            <a:avLst/>
-          </a:prstGeom>
-          <a:noFill/>
-          <a:ln/>
-        </p:spPr>
-        <p:txBody>
-          <a:bodyPr wrap="square" lIns="0" tIns="0" rIns="0" bIns="0" rtlCol="0" anchor="ctr"/>
-          <a:lstStyle/>
-          <a:p>
-            <a:pPr algn="l" indent="0" marL="0">
-              <a:buNone/>
-            </a:pPr>
-            <a:r>
-              <a:rPr lang="en-US" sz="2000" b="1" dirty="0">
-                <a:solidFill>
-                  <a:srgbClr val="990011"/>
-                </a:solidFill>
-                <a:latin typeface="Times New Roman" pitchFamily="34" charset="0"/>
-                <a:ea typeface="Times New Roman" pitchFamily="34" charset="-122"/>
-                <a:cs typeface="Times New Roman" pitchFamily="34" charset="-120"/>
-              </a:rPr>
-              <a:t>B) Geology, Relief, Vegetation and Man (continued)</a:t>
-            </a:r>
-            <a:endParaRPr lang="en-US" sz="2000" dirty="0"/>
-          </a:p>
-        </p:txBody>
-      </p:sp>
-      <p:sp>
-        <p:nvSpPr>
-          <p:cNvPr id="6" name="Text 3"/>
-          <p:cNvSpPr/>
-          <p:nvPr/>
-        </p:nvSpPr>
-        <p:spPr>
-          <a:xfrm>
-            <a:off x="5349240" y="2240280"/>
-            <a:ext cx="6522415" cy="4206240"/>
-          </a:xfrm>
-          <a:prstGeom prst="rect">
-            <a:avLst/>
-          </a:prstGeom>
-          <a:noFill/>
-          <a:ln/>
-        </p:spPr>
-        <p:txBody>
-          <a:bodyPr wrap="square" lIns="0" tIns="0" rIns="0" bIns="0" rtlCol="0" anchor="t"/>
-          <a:lstStyle/>
-          <a:p>
-            <a:pPr algn="l" indent="0" marL="0">
-              <a:spcAft>
-                <a:spcPts val="800"/>
-              </a:spcAft>
-              <a:buNone/>
-            </a:pPr>
-            <a:r>
-              <a:rPr lang="en-US" sz="4000" b="1" dirty="0">
-                <a:solidFill>
-                  <a:srgbClr val="111111"/>
-                </a:solidFill>
-                <a:latin typeface="Times New Roman" pitchFamily="34" charset="0"/>
-                <a:ea typeface="Times New Roman" pitchFamily="34" charset="-122"/>
-                <a:cs typeface="Times New Roman" pitchFamily="34" charset="-120"/>
-              </a:rPr>
-              <a:t>Human activities: </a:t>
-            </a:r>
-            <a:pPr algn="l" indent="0" marL="0">
-              <a:spcAft>
-                <a:spcPts val="800"/>
-              </a:spcAft>
-              <a:buNone/>
-            </a:pPr>
-            <a:r>
-              <a:rPr lang="en-US" sz="4000" dirty="0">
-                <a:solidFill>
-                  <a:srgbClr val="111111"/>
-                </a:solidFill>
-                <a:latin typeface="Times New Roman" pitchFamily="34" charset="0"/>
-                <a:ea typeface="Times New Roman" pitchFamily="34" charset="-122"/>
-                <a:cs typeface="Times New Roman" pitchFamily="34" charset="-120"/>
-              </a:rPr>
-              <a:t>Mining, quarrying and road building expose rocks. Acid rain from industries speeds up the weathering of buildings.</a:t>
-            </a:r>
-            <a:endParaRPr lang="en-US" sz="4000" dirty="0"/>
+              <a:t>Illustration: red laterite</a:t>
+            </a:r>
+            <a:endParaRPr lang="en-US" sz="1600" dirty="0"/>
           </a:p>
         </p:txBody>
       </p:sp>
@@ -15799,15 +16198,135 @@
                 <a:ea typeface="Calibri" pitchFamily="34" charset="-122"/>
                 <a:cs typeface="Calibri" pitchFamily="34" charset="-120"/>
               </a:rPr>
-              <a:t>FORMATIVE EVALUATION</a:t>
+              <a:t>BOARD SUMMARY</a:t>
             </a:r>
             <a:endParaRPr lang="en-US" sz="1400" dirty="0"/>
+          </a:p>
+        </p:txBody>
+      </p:sp>
+      <p:sp>
+        <p:nvSpPr>
+          <p:cNvPr id="3" name="Text 1"/>
+          <p:cNvSpPr/>
+          <p:nvPr/>
+        </p:nvSpPr>
+        <p:spPr>
+          <a:xfrm>
+            <a:off x="365760" y="1005840"/>
+            <a:ext cx="11460175" cy="731520"/>
+          </a:xfrm>
+          <a:prstGeom prst="rect">
+            <a:avLst/>
+          </a:prstGeom>
+          <a:noFill/>
+          <a:ln/>
+        </p:spPr>
+        <p:txBody>
+          <a:bodyPr wrap="square" lIns="0" tIns="0" rIns="0" bIns="0" rtlCol="0" anchor="ctr">
+            <a:normAutofit/>
+          </a:bodyPr>
+          <a:lstStyle/>
+          <a:p>
+            <a:pPr algn="ctr" indent="0" marL="0">
+              <a:buNone/>
+            </a:pPr>
+            <a:r>
+              <a:rPr lang="en-US" sz="3600" b="1" dirty="0">
+                <a:solidFill>
+                  <a:srgbClr val="990011"/>
+                </a:solidFill>
+                <a:latin typeface="Times New Roman" pitchFamily="34" charset="0"/>
+                <a:ea typeface="Times New Roman" pitchFamily="34" charset="-122"/>
+                <a:cs typeface="Times New Roman" pitchFamily="34" charset="-120"/>
+              </a:rPr>
+              <a:t>2. Geology (Rock Characteristics)</a:t>
+            </a:r>
+            <a:endParaRPr lang="en-US" sz="3600" dirty="0"/>
+          </a:p>
+        </p:txBody>
+      </p:sp>
+      <p:sp>
+        <p:nvSpPr>
+          <p:cNvPr id="4" name="Text 2"/>
+          <p:cNvSpPr/>
+          <p:nvPr/>
+        </p:nvSpPr>
+        <p:spPr>
+          <a:xfrm>
+            <a:off x="365760" y="1783080"/>
+            <a:ext cx="4846320" cy="4617720"/>
+          </a:xfrm>
+          <a:prstGeom prst="rect">
+            <a:avLst/>
+          </a:prstGeom>
+          <a:noFill/>
+          <a:ln/>
+        </p:spPr>
+        <p:txBody>
+          <a:bodyPr wrap="square" lIns="0" tIns="0" rIns="0" bIns="0" rtlCol="0" anchor="t"/>
+          <a:lstStyle/>
+          <a:p>
+            <a:pPr algn="l" indent="0" marL="0">
+              <a:spcAft>
+                <a:spcPts val="800"/>
+              </a:spcAft>
+              <a:buNone/>
+            </a:pPr>
+            <a:r>
+              <a:rPr lang="en-US" sz="3600" i="1" dirty="0">
+                <a:solidFill>
+                  <a:srgbClr val="111111"/>
+                </a:solidFill>
+                <a:latin typeface="Times New Roman" pitchFamily="34" charset="0"/>
+                <a:ea typeface="Times New Roman" pitchFamily="34" charset="-122"/>
+                <a:cs typeface="Times New Roman" pitchFamily="34" charset="-120"/>
+              </a:rPr>
+              <a:t>Rock characteristics influence weathering as follows:</a:t>
+            </a:r>
+            <a:endParaRPr lang="en-US" sz="3600" dirty="0"/>
+          </a:p>
+          <a:p>
+            <a:pPr algn="l" indent="0" marL="0">
+              <a:spcAft>
+                <a:spcPts val="800"/>
+              </a:spcAft>
+              <a:buNone/>
+            </a:pPr>
+            <a:r>
+              <a:rPr lang="en-US" sz="3600" b="1" dirty="0">
+                <a:solidFill>
+                  <a:srgbClr val="111111"/>
+                </a:solidFill>
+                <a:latin typeface="Times New Roman" pitchFamily="34" charset="0"/>
+                <a:ea typeface="Times New Roman" pitchFamily="34" charset="-122"/>
+                <a:cs typeface="Times New Roman" pitchFamily="34" charset="-120"/>
+              </a:rPr>
+              <a:t>Hardness and minerals: </a:t>
+            </a:r>
+            <a:pPr algn="l" indent="0" marL="0">
+              <a:spcAft>
+                <a:spcPts val="800"/>
+              </a:spcAft>
+              <a:buNone/>
+            </a:pPr>
+            <a:r>
+              <a:rPr lang="en-US" sz="3600" dirty="0">
+                <a:solidFill>
+                  <a:srgbClr val="111111"/>
+                </a:solidFill>
+                <a:latin typeface="Times New Roman" pitchFamily="34" charset="0"/>
+                <a:ea typeface="Times New Roman" pitchFamily="34" charset="-122"/>
+                <a:cs typeface="Times New Roman" pitchFamily="34" charset="-120"/>
+              </a:rPr>
+              <a:t>Soft or soluble rocks such as limestone weather faster than hard granite.</a:t>
+            </a:r>
+            <a:endParaRPr lang="en-US" sz="3600" dirty="0"/>
           </a:p>
         </p:txBody>
       </p:sp>
       <p:pic>
         <p:nvPicPr>
-          <p:cNvPr id="3" name="Image 0" descr="/home/claude/f4/img/minesec_sheet.png">    </p:cNvPr>
+          <p:cNvPr id="5" name="Image 0" descr="/home/claude/f4/img/v2/f4_karst.jpg">    </p:cNvPr>
           <p:cNvPicPr>
             <a:picLocks noChangeAspect="1"/>
           </p:cNvPicPr>
@@ -15821,8 +16340,8 @@
         </p:blipFill>
         <p:spPr>
           <a:xfrm>
-            <a:off x="0" y="658368"/>
-            <a:ext cx="5120640" cy="5833872"/>
+            <a:off x="5349240" y="2071212"/>
+            <a:ext cx="6659575" cy="3693983"/>
           </a:xfrm>
           <a:prstGeom prst="rect">
             <a:avLst/>
@@ -15831,14 +16350,14 @@
       </p:pic>
       <p:sp>
         <p:nvSpPr>
-          <p:cNvPr id="4" name="Text 1"/>
+          <p:cNvPr id="6" name="Text 3"/>
           <p:cNvSpPr/>
           <p:nvPr/>
         </p:nvSpPr>
         <p:spPr>
           <a:xfrm>
-            <a:off x="5349240" y="1005840"/>
-            <a:ext cx="6522415" cy="731520"/>
+            <a:off x="5349240" y="6089904"/>
+            <a:ext cx="6659575" cy="347472"/>
           </a:xfrm>
           <a:prstGeom prst="rect">
             <a:avLst/>
@@ -15847,68 +16366,24 @@
           <a:ln/>
         </p:spPr>
         <p:txBody>
-          <a:bodyPr wrap="square" lIns="0" tIns="0" rIns="0" bIns="0" rtlCol="0" anchor="ctr">
-            <a:normAutofit/>
-          </a:bodyPr>
+          <a:bodyPr wrap="square" lIns="0" tIns="0" rIns="0" bIns="0" rtlCol="0" anchor="ctr"/>
           <a:lstStyle/>
           <a:p>
             <a:pPr algn="ctr" indent="0" marL="0">
               <a:buNone/>
             </a:pPr>
             <a:r>
-              <a:rPr lang="en-US" sz="3600" b="1" dirty="0">
-                <a:solidFill>
-                  <a:srgbClr val="990011"/>
+              <a:rPr lang="en-US" sz="1600" i="1" dirty="0">
+                <a:solidFill>
+                  <a:srgbClr val="555555"/>
                 </a:solidFill>
                 <a:latin typeface="Times New Roman" pitchFamily="34" charset="0"/>
                 <a:ea typeface="Times New Roman" pitchFamily="34" charset="-122"/>
                 <a:cs typeface="Times New Roman" pitchFamily="34" charset="-120"/>
               </a:rPr>
-              <a:t>Evaluation 1</a:t>
-            </a:r>
-            <a:endParaRPr lang="en-US" sz="3600" dirty="0"/>
-          </a:p>
-        </p:txBody>
-      </p:sp>
-      <p:sp>
-        <p:nvSpPr>
-          <p:cNvPr id="5" name="Text 2"/>
-          <p:cNvSpPr/>
-          <p:nvPr/>
-        </p:nvSpPr>
-        <p:spPr>
-          <a:xfrm>
-            <a:off x="5349240" y="1783080"/>
-            <a:ext cx="6522415" cy="4663440"/>
-          </a:xfrm>
-          <a:prstGeom prst="rect">
-            <a:avLst/>
-          </a:prstGeom>
-          <a:noFill/>
-          <a:ln/>
-        </p:spPr>
-        <p:txBody>
-          <a:bodyPr wrap="square" lIns="0" tIns="0" rIns="0" bIns="0" rtlCol="0" anchor="t"/>
-          <a:lstStyle/>
-          <a:p>
-            <a:pPr algn="l" indent="0" marL="0">
-              <a:spcAft>
-                <a:spcPts val="800"/>
-              </a:spcAft>
-              <a:buNone/>
-            </a:pPr>
-            <a:r>
-              <a:rPr lang="en-US" sz="4000" dirty="0">
-                <a:solidFill>
-                  <a:srgbClr val="111111"/>
-                </a:solidFill>
-                <a:latin typeface="Times New Roman" pitchFamily="34" charset="0"/>
-                <a:ea typeface="Times New Roman" pitchFamily="34" charset="-122"/>
-                <a:cs typeface="Times New Roman" pitchFamily="34" charset="-120"/>
-              </a:rPr>
-              <a:t>According to Peltier, where is chemical weathering strongest?</a:t>
-            </a:r>
-            <a:endParaRPr lang="en-US" sz="4000" dirty="0"/>
+              <a:t>Illustration: dissolved limestone</a:t>
+            </a:r>
+            <a:endParaRPr lang="en-US" sz="1600" dirty="0"/>
           </a:p>
         </p:txBody>
       </p:sp>
@@ -16018,7 +16493,7 @@
                 <a:ea typeface="Calibri" pitchFamily="34" charset="-122"/>
                 <a:cs typeface="Calibri" pitchFamily="34" charset="-120"/>
               </a:rPr>
-              <a:t>FORMATIVE EVALUATION</a:t>
+              <a:t>BOARD SUMMARY</a:t>
             </a:r>
             <a:endParaRPr lang="en-US" sz="1400" dirty="0"/>
           </a:p>
@@ -16083,7 +16558,7 @@
                 <a:ea typeface="Times New Roman" pitchFamily="34" charset="-122"/>
                 <a:cs typeface="Times New Roman" pitchFamily="34" charset="-120"/>
               </a:rPr>
-              <a:t>Expected Answer</a:t>
+              <a:t>2. Geology (Rock Characteristics)</a:t>
             </a:r>
             <a:endParaRPr lang="en-US" sz="3600" dirty="0"/>
           </a:p>
@@ -16117,7 +16592,7 @@
               <a:buNone/>
             </a:pPr>
             <a:r>
-              <a:rPr lang="en-US" sz="4000" dirty="0">
+              <a:rPr lang="en-US" sz="4000" b="1" dirty="0">
                 <a:solidFill>
                   <a:srgbClr val="111111"/>
                 </a:solidFill>
@@ -16125,7 +16600,61 @@
                 <a:ea typeface="Times New Roman" pitchFamily="34" charset="-122"/>
                 <a:cs typeface="Times New Roman" pitchFamily="34" charset="-120"/>
               </a:rPr>
-              <a:t>In hot and wet climates.</a:t>
+              <a:t>Structure: </a:t>
+            </a:r>
+            <a:pPr algn="l" indent="0" marL="0">
+              <a:spcAft>
+                <a:spcPts val="800"/>
+              </a:spcAft>
+              <a:buNone/>
+            </a:pPr>
+            <a:r>
+              <a:rPr lang="en-US" sz="4000" dirty="0">
+                <a:solidFill>
+                  <a:srgbClr val="111111"/>
+                </a:solidFill>
+                <a:latin typeface="Times New Roman" pitchFamily="34" charset="0"/>
+                <a:ea typeface="Times New Roman" pitchFamily="34" charset="-122"/>
+                <a:cs typeface="Times New Roman" pitchFamily="34" charset="-120"/>
+              </a:rPr>
+              <a:t>Joints, cracks and layers let water in and speed up weathering.</a:t>
+            </a:r>
+            <a:endParaRPr lang="en-US" sz="4000" dirty="0"/>
+          </a:p>
+          <a:p>
+            <a:pPr algn="l" indent="0" marL="0">
+              <a:spcAft>
+                <a:spcPts val="800"/>
+              </a:spcAft>
+              <a:buNone/>
+            </a:pPr>
+            <a:r>
+              <a:rPr lang="en-US" sz="4000" b="1" dirty="0">
+                <a:solidFill>
+                  <a:srgbClr val="111111"/>
+                </a:solidFill>
+                <a:latin typeface="Times New Roman" pitchFamily="34" charset="0"/>
+                <a:ea typeface="Times New Roman" pitchFamily="34" charset="-122"/>
+                <a:cs typeface="Times New Roman" pitchFamily="34" charset="-120"/>
+              </a:rPr>
+              <a:t>Colour: </a:t>
+            </a:r>
+            <a:pPr algn="l" indent="0" marL="0">
+              <a:spcAft>
+                <a:spcPts val="800"/>
+              </a:spcAft>
+              <a:buNone/>
+            </a:pPr>
+            <a:r>
+              <a:rPr lang="en-US" sz="4000" dirty="0">
+                <a:solidFill>
+                  <a:srgbClr val="111111"/>
+                </a:solidFill>
+                <a:latin typeface="Times New Roman" pitchFamily="34" charset="0"/>
+                <a:ea typeface="Times New Roman" pitchFamily="34" charset="-122"/>
+                <a:cs typeface="Times New Roman" pitchFamily="34" charset="-120"/>
+              </a:rPr>
+              <a:t>Dark rocks absorb more heat and expand more.</a:t>
             </a:r>
             <a:endParaRPr lang="en-US" sz="4000" dirty="0"/>
           </a:p>
@@ -16237,15 +16766,135 @@
                 <a:ea typeface="Calibri" pitchFamily="34" charset="-122"/>
                 <a:cs typeface="Calibri" pitchFamily="34" charset="-120"/>
               </a:rPr>
-              <a:t>FORMATIVE EVALUATION</a:t>
+              <a:t>BOARD SUMMARY</a:t>
             </a:r>
             <a:endParaRPr lang="en-US" sz="1400" dirty="0"/>
+          </a:p>
+        </p:txBody>
+      </p:sp>
+      <p:sp>
+        <p:nvSpPr>
+          <p:cNvPr id="3" name="Text 1"/>
+          <p:cNvSpPr/>
+          <p:nvPr/>
+        </p:nvSpPr>
+        <p:spPr>
+          <a:xfrm>
+            <a:off x="365760" y="1005840"/>
+            <a:ext cx="11460175" cy="731520"/>
+          </a:xfrm>
+          <a:prstGeom prst="rect">
+            <a:avLst/>
+          </a:prstGeom>
+          <a:noFill/>
+          <a:ln/>
+        </p:spPr>
+        <p:txBody>
+          <a:bodyPr wrap="square" lIns="0" tIns="0" rIns="0" bIns="0" rtlCol="0" anchor="ctr">
+            <a:normAutofit/>
+          </a:bodyPr>
+          <a:lstStyle/>
+          <a:p>
+            <a:pPr algn="ctr" indent="0" marL="0">
+              <a:buNone/>
+            </a:pPr>
+            <a:r>
+              <a:rPr lang="en-US" sz="3600" b="1" dirty="0">
+                <a:solidFill>
+                  <a:srgbClr val="990011"/>
+                </a:solidFill>
+                <a:latin typeface="Times New Roman" pitchFamily="34" charset="0"/>
+                <a:ea typeface="Times New Roman" pitchFamily="34" charset="-122"/>
+                <a:cs typeface="Times New Roman" pitchFamily="34" charset="-120"/>
+              </a:rPr>
+              <a:t>3. Relief, Vegetation and Human Activities</a:t>
+            </a:r>
+            <a:endParaRPr lang="en-US" sz="3600" dirty="0"/>
+          </a:p>
+        </p:txBody>
+      </p:sp>
+      <p:sp>
+        <p:nvSpPr>
+          <p:cNvPr id="4" name="Text 2"/>
+          <p:cNvSpPr/>
+          <p:nvPr/>
+        </p:nvSpPr>
+        <p:spPr>
+          <a:xfrm>
+            <a:off x="365760" y="1783080"/>
+            <a:ext cx="4846320" cy="4617720"/>
+          </a:xfrm>
+          <a:prstGeom prst="rect">
+            <a:avLst/>
+          </a:prstGeom>
+          <a:noFill/>
+          <a:ln/>
+        </p:spPr>
+        <p:txBody>
+          <a:bodyPr wrap="square" lIns="0" tIns="0" rIns="0" bIns="0" rtlCol="0" anchor="t"/>
+          <a:lstStyle/>
+          <a:p>
+            <a:pPr algn="l" indent="0" marL="0">
+              <a:spcAft>
+                <a:spcPts val="800"/>
+              </a:spcAft>
+              <a:buNone/>
+            </a:pPr>
+            <a:r>
+              <a:rPr lang="en-US" sz="3200" i="1" dirty="0">
+                <a:solidFill>
+                  <a:srgbClr val="111111"/>
+                </a:solidFill>
+                <a:latin typeface="Times New Roman" pitchFamily="34" charset="0"/>
+                <a:ea typeface="Times New Roman" pitchFamily="34" charset="-122"/>
+                <a:cs typeface="Times New Roman" pitchFamily="34" charset="-120"/>
+              </a:rPr>
+              <a:t>Relief, vegetation and human activities influence weathering as follows:</a:t>
+            </a:r>
+            <a:endParaRPr lang="en-US" sz="3200" dirty="0"/>
+          </a:p>
+          <a:p>
+            <a:pPr algn="l" indent="0" marL="0">
+              <a:spcAft>
+                <a:spcPts val="800"/>
+              </a:spcAft>
+              <a:buNone/>
+            </a:pPr>
+            <a:r>
+              <a:rPr lang="en-US" sz="3200" b="1" dirty="0">
+                <a:solidFill>
+                  <a:srgbClr val="111111"/>
+                </a:solidFill>
+                <a:latin typeface="Times New Roman" pitchFamily="34" charset="0"/>
+                <a:ea typeface="Times New Roman" pitchFamily="34" charset="-122"/>
+                <a:cs typeface="Times New Roman" pitchFamily="34" charset="-120"/>
+              </a:rPr>
+              <a:t>Steep slopes: </a:t>
+            </a:r>
+            <a:pPr algn="l" indent="0" marL="0">
+              <a:spcAft>
+                <a:spcPts val="800"/>
+              </a:spcAft>
+              <a:buNone/>
+            </a:pPr>
+            <a:r>
+              <a:rPr lang="en-US" sz="3200" dirty="0">
+                <a:solidFill>
+                  <a:srgbClr val="111111"/>
+                </a:solidFill>
+                <a:latin typeface="Times New Roman" pitchFamily="34" charset="0"/>
+                <a:ea typeface="Times New Roman" pitchFamily="34" charset="-122"/>
+                <a:cs typeface="Times New Roman" pitchFamily="34" charset="-120"/>
+              </a:rPr>
+              <a:t>In the Mandara Mountains, weathered material is washed away quickly, exposing fresh rock.</a:t>
+            </a:r>
+            <a:endParaRPr lang="en-US" sz="3200" dirty="0"/>
           </a:p>
         </p:txBody>
       </p:sp>
       <p:pic>
         <p:nvPicPr>
-          <p:cNvPr id="3" name="Image 0" descr="/home/claude/f4/img/minesec_sheet.png">    </p:cNvPr>
+          <p:cNvPr id="5" name="Image 0" descr="/home/claude/f4/img/v2/lsa_scree.jpg">    </p:cNvPr>
           <p:cNvPicPr>
             <a:picLocks noChangeAspect="1"/>
           </p:cNvPicPr>
@@ -16259,8 +16908,8 @@
         </p:blipFill>
         <p:spPr>
           <a:xfrm>
-            <a:off x="0" y="658368"/>
-            <a:ext cx="5120640" cy="5833872"/>
+            <a:off x="5349240" y="2071212"/>
+            <a:ext cx="6659575" cy="3693983"/>
           </a:xfrm>
           <a:prstGeom prst="rect">
             <a:avLst/>
@@ -16269,14 +16918,14 @@
       </p:pic>
       <p:sp>
         <p:nvSpPr>
-          <p:cNvPr id="4" name="Text 1"/>
+          <p:cNvPr id="6" name="Text 3"/>
           <p:cNvSpPr/>
           <p:nvPr/>
         </p:nvSpPr>
         <p:spPr>
           <a:xfrm>
-            <a:off x="5349240" y="1005840"/>
-            <a:ext cx="6522415" cy="731520"/>
+            <a:off x="5349240" y="6089904"/>
+            <a:ext cx="6659575" cy="347472"/>
           </a:xfrm>
           <a:prstGeom prst="rect">
             <a:avLst/>
@@ -16285,68 +16934,24 @@
           <a:ln/>
         </p:spPr>
         <p:txBody>
-          <a:bodyPr wrap="square" lIns="0" tIns="0" rIns="0" bIns="0" rtlCol="0" anchor="ctr">
-            <a:normAutofit/>
-          </a:bodyPr>
+          <a:bodyPr wrap="square" lIns="0" tIns="0" rIns="0" bIns="0" rtlCol="0" anchor="ctr"/>
           <a:lstStyle/>
           <a:p>
             <a:pPr algn="ctr" indent="0" marL="0">
               <a:buNone/>
             </a:pPr>
             <a:r>
-              <a:rPr lang="en-US" sz="3600" b="1" dirty="0">
-                <a:solidFill>
-                  <a:srgbClr val="990011"/>
+              <a:rPr lang="en-US" sz="1600" i="1" dirty="0">
+                <a:solidFill>
+                  <a:srgbClr val="555555"/>
                 </a:solidFill>
                 <a:latin typeface="Times New Roman" pitchFamily="34" charset="0"/>
                 <a:ea typeface="Times New Roman" pitchFamily="34" charset="-122"/>
                 <a:cs typeface="Times New Roman" pitchFamily="34" charset="-120"/>
               </a:rPr>
-              <a:t>Evaluation 2</a:t>
-            </a:r>
-            <a:endParaRPr lang="en-US" sz="3600" dirty="0"/>
-          </a:p>
-        </p:txBody>
-      </p:sp>
-      <p:sp>
-        <p:nvSpPr>
-          <p:cNvPr id="5" name="Text 2"/>
-          <p:cNvSpPr/>
-          <p:nvPr/>
-        </p:nvSpPr>
-        <p:spPr>
-          <a:xfrm>
-            <a:off x="5349240" y="1783080"/>
-            <a:ext cx="6522415" cy="4663440"/>
-          </a:xfrm>
-          <a:prstGeom prst="rect">
-            <a:avLst/>
-          </a:prstGeom>
-          <a:noFill/>
-          <a:ln/>
-        </p:spPr>
-        <p:txBody>
-          <a:bodyPr wrap="square" lIns="0" tIns="0" rIns="0" bIns="0" rtlCol="0" anchor="t"/>
-          <a:lstStyle/>
-          <a:p>
-            <a:pPr algn="l" indent="0" marL="0">
-              <a:spcAft>
-                <a:spcPts val="800"/>
-              </a:spcAft>
-              <a:buNone/>
-            </a:pPr>
-            <a:r>
-              <a:rPr lang="en-US" sz="4000" dirty="0">
-                <a:solidFill>
-                  <a:srgbClr val="111111"/>
-                </a:solidFill>
-                <a:latin typeface="Times New Roman" pitchFamily="34" charset="0"/>
-                <a:ea typeface="Times New Roman" pitchFamily="34" charset="-122"/>
-                <a:cs typeface="Times New Roman" pitchFamily="34" charset="-120"/>
-              </a:rPr>
-              <a:t>Give two factors of weathering other than climate.</a:t>
-            </a:r>
-            <a:endParaRPr lang="en-US" sz="4000" dirty="0"/>
+              <a:t>Illustration: scree on a slope</a:t>
+            </a:r>
+            <a:endParaRPr lang="en-US" sz="1600" dirty="0"/>
           </a:p>
         </p:txBody>
       </p:sp>
@@ -16456,7 +17061,7 @@
                 <a:ea typeface="Calibri" pitchFamily="34" charset="-122"/>
                 <a:cs typeface="Calibri" pitchFamily="34" charset="-120"/>
               </a:rPr>
-              <a:t>FORMATIVE EVALUATION</a:t>
+              <a:t>BOARD SUMMARY</a:t>
             </a:r>
             <a:endParaRPr lang="en-US" sz="1400" dirty="0"/>
           </a:p>
@@ -16521,7 +17126,7 @@
                 <a:ea typeface="Times New Roman" pitchFamily="34" charset="-122"/>
                 <a:cs typeface="Times New Roman" pitchFamily="34" charset="-120"/>
               </a:rPr>
-              <a:t>Expected Answer</a:t>
+              <a:t>3. Relief, Vegetation and Human Activities</a:t>
             </a:r>
             <a:endParaRPr lang="en-US" sz="3600" dirty="0"/>
           </a:p>
@@ -16555,7 +17160,7 @@
               <a:buNone/>
             </a:pPr>
             <a:r>
-              <a:rPr lang="en-US" sz="4000" dirty="0">
+              <a:rPr lang="en-US" sz="4000" b="1" dirty="0">
                 <a:solidFill>
                   <a:srgbClr val="111111"/>
                 </a:solidFill>
@@ -16563,7 +17168,65 @@
                 <a:ea typeface="Times New Roman" pitchFamily="34" charset="-122"/>
                 <a:cs typeface="Times New Roman" pitchFamily="34" charset="-120"/>
               </a:rPr>
-              <a:t>Rock type (geology) and vegetation.</a:t>
+              <a:t>Gentle slopes and plains: </a:t>
+            </a:r>
+            <a:pPr algn="l" indent="0" marL="0">
+              <a:spcAft>
+                <a:spcPts val="800"/>
+              </a:spcAft>
+              <a:buNone/>
+            </a:pPr>
+            <a:r>
+              <a:rPr lang="en-US" sz="4000" dirty="0">
+                <a:solidFill>
+                  <a:srgbClr val="111111"/>
+                </a:solidFill>
+                <a:latin typeface="Times New Roman" pitchFamily="34" charset="0"/>
+                <a:ea typeface="Times New Roman" pitchFamily="34" charset="-122"/>
+                <a:cs typeface="Times New Roman" pitchFamily="34" charset="-120"/>
+              </a:rPr>
+              <a:t>Water stays longer, so chemical weathering forms deep soils.</a:t>
+            </a:r>
+            <a:endParaRPr lang="en-US" sz="4000" dirty="0"/>
+          </a:p>
+          <a:p>
+            <a:pPr algn="l" indent="0" marL="0">
+              <a:spcAft>
+                <a:spcPts val="800"/>
+              </a:spcAft>
+              <a:buNone/>
+            </a:pPr>
+            <a:r>
+              <a:rPr lang="en-US" sz="4000" b="1" dirty="0">
+                <a:solidFill>
+                  <a:srgbClr val="111111"/>
+                </a:solidFill>
+                <a:latin typeface="Times New Roman" pitchFamily="34" charset="0"/>
+                <a:ea typeface="Times New Roman" pitchFamily="34" charset="-122"/>
+                <a:cs typeface="Times New Roman" pitchFamily="34" charset="-120"/>
+              </a:rPr>
+              <a:t>Vegetation:</a:t>
+            </a:r>
+            <a:endParaRPr lang="en-US" sz="4000" dirty="0"/>
+          </a:p>
+          <a:p>
+            <a:pPr algn="l" marL="342900" indent="-342900">
+              <a:spcAft>
+                <a:spcPts val="800"/>
+              </a:spcAft>
+              <a:buSzPct val="100000"/>
+              <a:buChar char="•"/>
+            </a:pPr>
+            <a:r>
+              <a:rPr lang="en-US" sz="4000" dirty="0">
+                <a:solidFill>
+                  <a:srgbClr val="111111"/>
+                </a:solidFill>
+                <a:latin typeface="Times New Roman" pitchFamily="34" charset="0"/>
+                <a:ea typeface="Times New Roman" pitchFamily="34" charset="-122"/>
+                <a:cs typeface="Times New Roman" pitchFamily="34" charset="-120"/>
+              </a:rPr>
+              <a:t>Roots split rocks and increase weathering.</a:t>
             </a:r>
             <a:endParaRPr lang="en-US" sz="4000" dirty="0"/>
           </a:p>
@@ -16675,7 +17338,7 @@
                 <a:ea typeface="Calibri" pitchFamily="34" charset="-122"/>
                 <a:cs typeface="Calibri" pitchFamily="34" charset="-120"/>
               </a:rPr>
-              <a:t>REMEDIATION</a:t>
+              <a:t>BOARD SUMMARY</a:t>
             </a:r>
             <a:endParaRPr lang="en-US" sz="1400" dirty="0"/>
           </a:p>
@@ -16740,7 +17403,7 @@
                 <a:ea typeface="Times New Roman" pitchFamily="34" charset="-122"/>
                 <a:cs typeface="Times New Roman" pitchFamily="34" charset="-120"/>
               </a:rPr>
-              <a:t>Remediation</a:t>
+              <a:t>3. Relief, Vegetation and Human Activities (continued)</a:t>
             </a:r>
             <a:endParaRPr lang="en-US" sz="3600" dirty="0"/>
           </a:p>
@@ -16766,6 +17429,27 @@
         <p:txBody>
           <a:bodyPr wrap="square" lIns="0" tIns="0" rIns="0" bIns="0" rtlCol="0" anchor="t"/>
           <a:lstStyle/>
+          <a:p>
+            <a:pPr algn="l" marL="342900" indent="-342900">
+              <a:spcAft>
+                <a:spcPts val="800"/>
+              </a:spcAft>
+              <a:buSzPct val="100000"/>
+              <a:buChar char="•"/>
+            </a:pPr>
+            <a:r>
+              <a:rPr lang="en-US" sz="4000" dirty="0">
+                <a:solidFill>
+                  <a:srgbClr val="111111"/>
+                </a:solidFill>
+                <a:latin typeface="Times New Roman" pitchFamily="34" charset="0"/>
+                <a:ea typeface="Times New Roman" pitchFamily="34" charset="-122"/>
+                <a:cs typeface="Times New Roman" pitchFamily="34" charset="-120"/>
+              </a:rPr>
+              <a:t>A dense plant cover protects rocks from sun and rain and slows weathering.</a:t>
+            </a:r>
+            <a:endParaRPr lang="en-US" sz="4000" dirty="0"/>
+          </a:p>
           <a:p>
             <a:pPr algn="l" indent="0" marL="0">
               <a:spcAft>
@@ -16782,18 +17466,13 @@
                 <a:ea typeface="Times New Roman" pitchFamily="34" charset="-122"/>
                 <a:cs typeface="Times New Roman" pitchFamily="34" charset="-120"/>
               </a:rPr>
-              <a:t>Fill in the blanks:</a:t>
-            </a:r>
-            <a:endParaRPr lang="en-US" sz="4000" dirty="0"/>
-          </a:p>
-          <a:p>
-            <a:pPr algn="l" marL="342900" indent="-342900">
+              <a:t>Human activities: </a:t>
+            </a:r>
+            <a:pPr algn="l" indent="0" marL="0">
               <a:spcAft>
                 <a:spcPts val="800"/>
               </a:spcAft>
-              <a:buSzPct val="100000"/>
-              <a:buFont typeface="+mj-lt"/>
-              <a:buAutoNum type="arabicPeriod" startAt="1"/>
+              <a:buNone/>
             </a:pPr>
             <a:r>
               <a:rPr lang="en-US" sz="4000" dirty="0">
@@ -16804,51 +17483,7 @@
                 <a:ea typeface="Times New Roman" pitchFamily="34" charset="-122"/>
                 <a:cs typeface="Times New Roman" pitchFamily="34" charset="-120"/>
               </a:rPr>
-              <a:t>The layer of loose weathered material is the ______.</a:t>
-            </a:r>
-            <a:endParaRPr lang="en-US" sz="4000" dirty="0"/>
-          </a:p>
-          <a:p>
-            <a:pPr algn="l" marL="342900" indent="-342900">
-              <a:spcAft>
-                <a:spcPts val="800"/>
-              </a:spcAft>
-              <a:buSzPct val="100000"/>
-              <a:buFont typeface="+mj-lt"/>
-              <a:buAutoNum type="arabicPeriod" startAt="1"/>
-            </a:pPr>
-            <a:r>
-              <a:rPr lang="en-US" sz="4000" dirty="0">
-                <a:solidFill>
-                  <a:srgbClr val="111111"/>
-                </a:solidFill>
-                <a:latin typeface="Times New Roman" pitchFamily="34" charset="0"/>
-                <a:ea typeface="Times New Roman" pitchFamily="34" charset="-122"/>
-                <a:cs typeface="Times New Roman" pitchFamily="34" charset="-120"/>
-              </a:rPr>
-              <a:t>Natural cracks in rocks are ______.</a:t>
-            </a:r>
-            <a:endParaRPr lang="en-US" sz="4000" dirty="0"/>
-          </a:p>
-          <a:p>
-            <a:pPr algn="l" marL="342900" indent="-342900">
-              <a:spcAft>
-                <a:spcPts val="800"/>
-              </a:spcAft>
-              <a:buSzPct val="100000"/>
-              <a:buFont typeface="+mj-lt"/>
-              <a:buAutoNum type="arabicPeriod" startAt="1"/>
-            </a:pPr>
-            <a:r>
-              <a:rPr lang="en-US" sz="4000" dirty="0">
-                <a:solidFill>
-                  <a:srgbClr val="111111"/>
-                </a:solidFill>
-                <a:latin typeface="Times New Roman" pitchFamily="34" charset="0"/>
-                <a:ea typeface="Times New Roman" pitchFamily="34" charset="-122"/>
-                <a:cs typeface="Times New Roman" pitchFamily="34" charset="-120"/>
-              </a:rPr>
-              <a:t>Limestone is weathered by ______.</a:t>
+              <a:t>Quarries around Garoua, roads and ploughing expose fresh rock, and acid rain from vehicles and industries dissolves rocks.</a:t>
             </a:r>
             <a:endParaRPr lang="en-US" sz="4000" dirty="0"/>
           </a:p>
@@ -16960,7 +17595,7 @@
                 <a:ea typeface="Calibri" pitchFamily="34" charset="-122"/>
                 <a:cs typeface="Calibri" pitchFamily="34" charset="-120"/>
               </a:rPr>
-              <a:t>HOMEWORK</a:t>
+              <a:t>FORMATIVE EVALUATION</a:t>
             </a:r>
             <a:endParaRPr lang="en-US" sz="1400" dirty="0"/>
           </a:p>
@@ -17025,7 +17660,7 @@
                 <a:ea typeface="Times New Roman" pitchFamily="34" charset="-122"/>
                 <a:cs typeface="Times New Roman" pitchFamily="34" charset="-120"/>
               </a:rPr>
-              <a:t>Homework</a:t>
+              <a:t>Evaluation 1</a:t>
             </a:r>
             <a:endParaRPr lang="en-US" sz="3600" dirty="0"/>
           </a:p>
@@ -17067,7 +17702,7 @@
                 <a:ea typeface="Times New Roman" pitchFamily="34" charset="-122"/>
                 <a:cs typeface="Times New Roman" pitchFamily="34" charset="-120"/>
               </a:rPr>
-              <a:t>List three useful materials that come from weathered rock (for example sand, clay, laterite).</a:t>
+              <a:t>Why is climate the most important factor of weathering in North Cameroon?</a:t>
             </a:r>
             <a:endParaRPr lang="en-US" sz="4000" dirty="0"/>
           </a:p>
@@ -17179,7 +17814,7 @@
                 <a:ea typeface="Calibri" pitchFamily="34" charset="-122"/>
                 <a:cs typeface="Calibri" pitchFamily="34" charset="-120"/>
               </a:rPr>
-              <a:t>NEXT LESSON</a:t>
+              <a:t>FORMATIVE EVALUATION</a:t>
             </a:r>
             <a:endParaRPr lang="en-US" sz="1400" dirty="0"/>
           </a:p>
@@ -17244,7 +17879,7 @@
                 <a:ea typeface="Times New Roman" pitchFamily="34" charset="-122"/>
                 <a:cs typeface="Times New Roman" pitchFamily="34" charset="-120"/>
               </a:rPr>
-              <a:t>Next Lesson</a:t>
+              <a:t>Expected Answer</a:t>
             </a:r>
             <a:endParaRPr lang="en-US" sz="3600" dirty="0"/>
           </a:p>
@@ -17268,17 +17903,17 @@
           <a:ln/>
         </p:spPr>
         <p:txBody>
-          <a:bodyPr wrap="square" lIns="0" tIns="0" rIns="0" bIns="0" rtlCol="0" anchor="ctr"/>
-          <a:lstStyle/>
-          <a:p>
-            <a:pPr algn="ctr" indent="0" marL="0">
+          <a:bodyPr wrap="square" lIns="0" tIns="0" rIns="0" bIns="0" rtlCol="0" anchor="t"/>
+          <a:lstStyle/>
+          <a:p>
+            <a:pPr algn="l" indent="0" marL="0">
               <a:spcAft>
                 <a:spcPts val="800"/>
               </a:spcAft>
               <a:buNone/>
             </a:pPr>
             <a:r>
-              <a:rPr lang="en-US" sz="4000" b="1" dirty="0">
+              <a:rPr lang="en-US" sz="4000" dirty="0">
                 <a:solidFill>
                   <a:srgbClr val="111111"/>
                 </a:solidFill>
@@ -17286,27 +17921,7 @@
                 <a:ea typeface="Times New Roman" pitchFamily="34" charset="-122"/>
                 <a:cs typeface="Times New Roman" pitchFamily="34" charset="-120"/>
               </a:rPr>
-              <a:t>Our next lesson will be on:</a:t>
-            </a:r>
-            <a:endParaRPr lang="en-US" sz="4000" dirty="0"/>
-          </a:p>
-          <a:p>
-            <a:pPr algn="ctr" indent="0" marL="0">
-              <a:spcAft>
-                <a:spcPts val="800"/>
-              </a:spcAft>
-              <a:buNone/>
-            </a:pPr>
-            <a:r>
-              <a:rPr lang="en-US" sz="4000" b="1" dirty="0">
-                <a:solidFill>
-                  <a:srgbClr val="990011"/>
-                </a:solidFill>
-                <a:latin typeface="Times New Roman" pitchFamily="34" charset="0"/>
-                <a:ea typeface="Times New Roman" pitchFamily="34" charset="-122"/>
-                <a:cs typeface="Times New Roman" pitchFamily="34" charset="-120"/>
-              </a:rPr>
-              <a:t>Lesson 11: The Impact of Weathering</a:t>
+              <a:t>Strong heat causes exfoliation and speeds up chemical reactions, while the heavy rains provide water for chemical weathering.</a:t>
             </a:r>
             <a:endParaRPr lang="en-US" sz="4000" dirty="0"/>
           </a:p>
@@ -17418,6 +18033,1406 @@
                 <a:ea typeface="Calibri" pitchFamily="34" charset="-122"/>
                 <a:cs typeface="Calibri" pitchFamily="34" charset="-120"/>
               </a:rPr>
+              <a:t>FORMATIVE EVALUATION</a:t>
+            </a:r>
+            <a:endParaRPr lang="en-US" sz="1400" dirty="0"/>
+          </a:p>
+        </p:txBody>
+      </p:sp>
+      <p:pic>
+        <p:nvPicPr>
+          <p:cNvPr id="3" name="Image 0" descr="/home/claude/f4/img/minesec_sheet.png">    </p:cNvPr>
+          <p:cNvPicPr>
+            <a:picLocks noChangeAspect="1"/>
+          </p:cNvPicPr>
+          <p:nvPr/>
+        </p:nvPicPr>
+        <p:blipFill>
+          <a:blip r:embed="rId1"/>
+          <a:stretch>
+            <a:fillRect/>
+          </a:stretch>
+        </p:blipFill>
+        <p:spPr>
+          <a:xfrm>
+            <a:off x="0" y="658368"/>
+            <a:ext cx="5120640" cy="5833872"/>
+          </a:xfrm>
+          <a:prstGeom prst="rect">
+            <a:avLst/>
+          </a:prstGeom>
+        </p:spPr>
+      </p:pic>
+      <p:sp>
+        <p:nvSpPr>
+          <p:cNvPr id="4" name="Text 1"/>
+          <p:cNvSpPr/>
+          <p:nvPr/>
+        </p:nvSpPr>
+        <p:spPr>
+          <a:xfrm>
+            <a:off x="5349240" y="1005840"/>
+            <a:ext cx="6522415" cy="731520"/>
+          </a:xfrm>
+          <a:prstGeom prst="rect">
+            <a:avLst/>
+          </a:prstGeom>
+          <a:noFill/>
+          <a:ln/>
+        </p:spPr>
+        <p:txBody>
+          <a:bodyPr wrap="square" lIns="0" tIns="0" rIns="0" bIns="0" rtlCol="0" anchor="ctr">
+            <a:normAutofit/>
+          </a:bodyPr>
+          <a:lstStyle/>
+          <a:p>
+            <a:pPr algn="ctr" indent="0" marL="0">
+              <a:buNone/>
+            </a:pPr>
+            <a:r>
+              <a:rPr lang="en-US" sz="3600" b="1" dirty="0">
+                <a:solidFill>
+                  <a:srgbClr val="990011"/>
+                </a:solidFill>
+                <a:latin typeface="Times New Roman" pitchFamily="34" charset="0"/>
+                <a:ea typeface="Times New Roman" pitchFamily="34" charset="-122"/>
+                <a:cs typeface="Times New Roman" pitchFamily="34" charset="-120"/>
+              </a:rPr>
+              <a:t>Evaluation 2</a:t>
+            </a:r>
+            <a:endParaRPr lang="en-US" sz="3600" dirty="0"/>
+          </a:p>
+        </p:txBody>
+      </p:sp>
+      <p:sp>
+        <p:nvSpPr>
+          <p:cNvPr id="5" name="Text 2"/>
+          <p:cNvSpPr/>
+          <p:nvPr/>
+        </p:nvSpPr>
+        <p:spPr>
+          <a:xfrm>
+            <a:off x="5349240" y="1783080"/>
+            <a:ext cx="6522415" cy="4663440"/>
+          </a:xfrm>
+          <a:prstGeom prst="rect">
+            <a:avLst/>
+          </a:prstGeom>
+          <a:noFill/>
+          <a:ln/>
+        </p:spPr>
+        <p:txBody>
+          <a:bodyPr wrap="square" lIns="0" tIns="0" rIns="0" bIns="0" rtlCol="0" anchor="t"/>
+          <a:lstStyle/>
+          <a:p>
+            <a:pPr algn="l" indent="0" marL="0">
+              <a:spcAft>
+                <a:spcPts val="800"/>
+              </a:spcAft>
+              <a:buNone/>
+            </a:pPr>
+            <a:r>
+              <a:rPr lang="en-US" sz="4000" dirty="0">
+                <a:solidFill>
+                  <a:srgbClr val="111111"/>
+                </a:solidFill>
+                <a:latin typeface="Times New Roman" pitchFamily="34" charset="0"/>
+                <a:ea typeface="Times New Roman" pitchFamily="34" charset="-122"/>
+                <a:cs typeface="Times New Roman" pitchFamily="34" charset="-120"/>
+              </a:rPr>
+              <a:t>How can vegetation both increase and reduce weathering?</a:t>
+            </a:r>
+            <a:endParaRPr lang="en-US" sz="4000" dirty="0"/>
+          </a:p>
+        </p:txBody>
+      </p:sp>
+      <p:sp>
+        <p:nvSpPr>
+          <p:cNvPr id="25" name="Slide Number Placeholder 0"/>
+          <p:cNvSpPr>
+            <a:spLocks noGrp="1"/>
+          </p:cNvSpPr>
+          <p:nvPr>
+            <p:ph type="sldNum" sz="quarter" idx="4294967295"/>
+          </p:nvPr>
+        </p:nvSpPr>
+        <p:spPr>
+          <a:xfrm>
+            <a:off x="27432" y="91440"/>
+            <a:ext cx="585216" cy="475488"/>
+          </a:xfrm>
+          <a:prstGeom prst="rect">
+            <a:avLst/>
+          </a:prstGeom>
+          <a:extLst>
+            <a:ext uri="{C572A759-6A51-4108-AA02-DFA0A04FC94B}">
+              <ma14:wrappingTextBoxFlag xmlns:ma14="http://schemas.microsoft.com/office/mac/drawingml/2011/main" val="0"/>
+            </a:ext>
+          </a:extLst>
+        </p:spPr>
+        <p:txBody>
+          <a:bodyPr/>
+          <a:lstStyle>
+            <a:lvl1pPr>
+              <a:defRPr sz="2000">
+                <a:solidFill>
+                  <a:srgbClr val="FFFFFF"/>
+                </a:solidFill>
+                <a:latin typeface="Calibri"/>
+                <a:ea typeface="Calibri"/>
+                <a:cs typeface="Calibri"/>
+              </a:defRPr>
+            </a:lvl1pPr>
+          </a:lstStyle>
+          <a:p>
+            <a:pPr algn="ctr"/>
+            <a:fld id="{F7021451-1387-4CA6-816F-3879F97B5CBC}" type="slidenum">
+              <a:rPr b="1" lang="en-US"/>
+              <a:t>49</a:t>
+            </a:fld>
+            <a:endParaRPr lang="en-US"/>
+          </a:p>
+        </p:txBody>
+      </p:sp>
+    </p:spTree>
+  </p:cSld>
+  <p:clrMapOvr>
+    <a:masterClrMapping/>
+  </p:clrMapOvr>
+</p:sld>
+</file>
+
+<file path=ppt/slides/slide5.xml><?xml version="1.0" encoding="utf-8"?>
+<p:sld xmlns:a="http://schemas.openxmlformats.org/drawingml/2006/main" xmlns:r="http://schemas.openxmlformats.org/officeDocument/2006/relationships" xmlns:p="http://schemas.openxmlformats.org/presentationml/2006/main">
+  <p:cSld name="Slide 5">
+    <p:spTree>
+      <p:nvGrpSpPr>
+        <p:cNvPr id="1" name=""/>
+        <p:cNvGrpSpPr/>
+        <p:nvPr/>
+      </p:nvGrpSpPr>
+      <p:grpSpPr>
+        <a:xfrm>
+          <a:off x="0" y="0"/>
+          <a:ext cx="0" cy="0"/>
+          <a:chOff x="0" y="0"/>
+          <a:chExt cx="0" cy="0"/>
+        </a:xfrm>
+      </p:grpSpPr>
+      <p:sp>
+        <p:nvSpPr>
+          <p:cNvPr id="2" name="Text 0"/>
+          <p:cNvSpPr/>
+          <p:nvPr/>
+        </p:nvSpPr>
+        <p:spPr>
+          <a:xfrm>
+            <a:off x="457200" y="713232"/>
+            <a:ext cx="11368735" cy="274320"/>
+          </a:xfrm>
+          <a:prstGeom prst="rect">
+            <a:avLst/>
+          </a:prstGeom>
+          <a:noFill/>
+          <a:ln/>
+        </p:spPr>
+        <p:txBody>
+          <a:bodyPr wrap="square" lIns="0" tIns="0" rIns="0" bIns="0" rtlCol="0" anchor="ctr"/>
+          <a:lstStyle/>
+          <a:p>
+            <a:pPr algn="r" indent="0" marL="0">
+              <a:buNone/>
+            </a:pPr>
+            <a:r>
+              <a:rPr lang="en-US" sz="1400" b="1" dirty="0">
+                <a:solidFill>
+                  <a:srgbClr val="1C3F6E"/>
+                </a:solidFill>
+                <a:latin typeface="Calibri" pitchFamily="34" charset="0"/>
+                <a:ea typeface="Calibri" pitchFamily="34" charset="-122"/>
+                <a:cs typeface="Calibri" pitchFamily="34" charset="-120"/>
+              </a:rPr>
+              <a:t>HOMEWORK CORRECTION</a:t>
+            </a:r>
+            <a:endParaRPr lang="en-US" sz="1400" dirty="0"/>
+          </a:p>
+        </p:txBody>
+      </p:sp>
+      <p:pic>
+        <p:nvPicPr>
+          <p:cNvPr id="3" name="Image 0" descr="/home/claude/f4/img/minesec_sheet.png">    </p:cNvPr>
+          <p:cNvPicPr>
+            <a:picLocks noChangeAspect="1"/>
+          </p:cNvPicPr>
+          <p:nvPr/>
+        </p:nvPicPr>
+        <p:blipFill>
+          <a:blip r:embed="rId1"/>
+          <a:stretch>
+            <a:fillRect/>
+          </a:stretch>
+        </p:blipFill>
+        <p:spPr>
+          <a:xfrm>
+            <a:off x="0" y="658368"/>
+            <a:ext cx="5120640" cy="5833872"/>
+          </a:xfrm>
+          <a:prstGeom prst="rect">
+            <a:avLst/>
+          </a:prstGeom>
+        </p:spPr>
+      </p:pic>
+      <p:sp>
+        <p:nvSpPr>
+          <p:cNvPr id="4" name="Text 1"/>
+          <p:cNvSpPr/>
+          <p:nvPr/>
+        </p:nvSpPr>
+        <p:spPr>
+          <a:xfrm>
+            <a:off x="5349240" y="1005840"/>
+            <a:ext cx="6522415" cy="731520"/>
+          </a:xfrm>
+          <a:prstGeom prst="rect">
+            <a:avLst/>
+          </a:prstGeom>
+          <a:noFill/>
+          <a:ln/>
+        </p:spPr>
+        <p:txBody>
+          <a:bodyPr wrap="square" lIns="0" tIns="0" rIns="0" bIns="0" rtlCol="0" anchor="ctr">
+            <a:normAutofit/>
+          </a:bodyPr>
+          <a:lstStyle/>
+          <a:p>
+            <a:pPr algn="ctr" indent="0" marL="0">
+              <a:buNone/>
+            </a:pPr>
+            <a:r>
+              <a:rPr lang="en-US" sz="3600" b="1" dirty="0">
+                <a:solidFill>
+                  <a:srgbClr val="990011"/>
+                </a:solidFill>
+                <a:latin typeface="Times New Roman" pitchFamily="34" charset="0"/>
+                <a:ea typeface="Times New Roman" pitchFamily="34" charset="-122"/>
+                <a:cs typeface="Times New Roman" pitchFamily="34" charset="-120"/>
+              </a:rPr>
+              <a:t>Correction: Possible Answer</a:t>
+            </a:r>
+            <a:endParaRPr lang="en-US" sz="3600" dirty="0"/>
+          </a:p>
+        </p:txBody>
+      </p:sp>
+      <p:sp>
+        <p:nvSpPr>
+          <p:cNvPr id="5" name="Text 2"/>
+          <p:cNvSpPr/>
+          <p:nvPr/>
+        </p:nvSpPr>
+        <p:spPr>
+          <a:xfrm>
+            <a:off x="5349240" y="1783080"/>
+            <a:ext cx="6522415" cy="4663440"/>
+          </a:xfrm>
+          <a:prstGeom prst="rect">
+            <a:avLst/>
+          </a:prstGeom>
+          <a:noFill/>
+          <a:ln/>
+        </p:spPr>
+        <p:txBody>
+          <a:bodyPr wrap="square" lIns="0" tIns="0" rIns="0" bIns="0" rtlCol="0" anchor="t"/>
+          <a:lstStyle/>
+          <a:p>
+            <a:pPr algn="l" indent="0" marL="0">
+              <a:spcAft>
+                <a:spcPts val="800"/>
+              </a:spcAft>
+              <a:buNone/>
+            </a:pPr>
+            <a:r>
+              <a:rPr lang="en-US" sz="4000" dirty="0">
+                <a:solidFill>
+                  <a:srgbClr val="111111"/>
+                </a:solidFill>
+                <a:latin typeface="Times New Roman" pitchFamily="34" charset="0"/>
+                <a:ea typeface="Times New Roman" pitchFamily="34" charset="-122"/>
+                <a:cs typeface="Times New Roman" pitchFamily="34" charset="-120"/>
+              </a:rPr>
+              <a:t>Climate (temperature and rainfall).</a:t>
+            </a:r>
+            <a:endParaRPr lang="en-US" sz="4000" dirty="0"/>
+          </a:p>
+        </p:txBody>
+      </p:sp>
+      <p:sp>
+        <p:nvSpPr>
+          <p:cNvPr id="25" name="Slide Number Placeholder 0"/>
+          <p:cNvSpPr>
+            <a:spLocks noGrp="1"/>
+          </p:cNvSpPr>
+          <p:nvPr>
+            <p:ph type="sldNum" sz="quarter" idx="4294967295"/>
+          </p:nvPr>
+        </p:nvSpPr>
+        <p:spPr>
+          <a:xfrm>
+            <a:off x="27432" y="91440"/>
+            <a:ext cx="585216" cy="475488"/>
+          </a:xfrm>
+          <a:prstGeom prst="rect">
+            <a:avLst/>
+          </a:prstGeom>
+          <a:extLst>
+            <a:ext uri="{C572A759-6A51-4108-AA02-DFA0A04FC94B}">
+              <ma14:wrappingTextBoxFlag xmlns:ma14="http://schemas.microsoft.com/office/mac/drawingml/2011/main" val="0"/>
+            </a:ext>
+          </a:extLst>
+        </p:spPr>
+        <p:txBody>
+          <a:bodyPr/>
+          <a:lstStyle>
+            <a:lvl1pPr>
+              <a:defRPr sz="2000">
+                <a:solidFill>
+                  <a:srgbClr val="FFFFFF"/>
+                </a:solidFill>
+                <a:latin typeface="Calibri"/>
+                <a:ea typeface="Calibri"/>
+                <a:cs typeface="Calibri"/>
+              </a:defRPr>
+            </a:lvl1pPr>
+          </a:lstStyle>
+          <a:p>
+            <a:pPr algn="ctr"/>
+            <a:fld id="{F7021451-1387-4CA6-816F-3879F97B5CBC}" type="slidenum">
+              <a:rPr b="1" lang="en-US"/>
+              <a:t>5</a:t>
+            </a:fld>
+            <a:endParaRPr lang="en-US"/>
+          </a:p>
+        </p:txBody>
+      </p:sp>
+    </p:spTree>
+  </p:cSld>
+  <p:clrMapOvr>
+    <a:masterClrMapping/>
+  </p:clrMapOvr>
+</p:sld>
+</file>
+
+<file path=ppt/slides/slide50.xml><?xml version="1.0" encoding="utf-8"?>
+<p:sld xmlns:a="http://schemas.openxmlformats.org/drawingml/2006/main" xmlns:r="http://schemas.openxmlformats.org/officeDocument/2006/relationships" xmlns:p="http://schemas.openxmlformats.org/presentationml/2006/main">
+  <p:cSld name="Slide 50">
+    <p:spTree>
+      <p:nvGrpSpPr>
+        <p:cNvPr id="1" name=""/>
+        <p:cNvGrpSpPr/>
+        <p:nvPr/>
+      </p:nvGrpSpPr>
+      <p:grpSpPr>
+        <a:xfrm>
+          <a:off x="0" y="0"/>
+          <a:ext cx="0" cy="0"/>
+          <a:chOff x="0" y="0"/>
+          <a:chExt cx="0" cy="0"/>
+        </a:xfrm>
+      </p:grpSpPr>
+      <p:sp>
+        <p:nvSpPr>
+          <p:cNvPr id="2" name="Text 0"/>
+          <p:cNvSpPr/>
+          <p:nvPr/>
+        </p:nvSpPr>
+        <p:spPr>
+          <a:xfrm>
+            <a:off x="457200" y="713232"/>
+            <a:ext cx="11368735" cy="274320"/>
+          </a:xfrm>
+          <a:prstGeom prst="rect">
+            <a:avLst/>
+          </a:prstGeom>
+          <a:noFill/>
+          <a:ln/>
+        </p:spPr>
+        <p:txBody>
+          <a:bodyPr wrap="square" lIns="0" tIns="0" rIns="0" bIns="0" rtlCol="0" anchor="ctr"/>
+          <a:lstStyle/>
+          <a:p>
+            <a:pPr algn="r" indent="0" marL="0">
+              <a:buNone/>
+            </a:pPr>
+            <a:r>
+              <a:rPr lang="en-US" sz="1400" b="1" dirty="0">
+                <a:solidFill>
+                  <a:srgbClr val="1C3F6E"/>
+                </a:solidFill>
+                <a:latin typeface="Calibri" pitchFamily="34" charset="0"/>
+                <a:ea typeface="Calibri" pitchFamily="34" charset="-122"/>
+                <a:cs typeface="Calibri" pitchFamily="34" charset="-120"/>
+              </a:rPr>
+              <a:t>FORMATIVE EVALUATION</a:t>
+            </a:r>
+            <a:endParaRPr lang="en-US" sz="1400" dirty="0"/>
+          </a:p>
+        </p:txBody>
+      </p:sp>
+      <p:pic>
+        <p:nvPicPr>
+          <p:cNvPr id="3" name="Image 0" descr="/home/claude/f4/img/minesec_sheet.png">    </p:cNvPr>
+          <p:cNvPicPr>
+            <a:picLocks noChangeAspect="1"/>
+          </p:cNvPicPr>
+          <p:nvPr/>
+        </p:nvPicPr>
+        <p:blipFill>
+          <a:blip r:embed="rId1"/>
+          <a:stretch>
+            <a:fillRect/>
+          </a:stretch>
+        </p:blipFill>
+        <p:spPr>
+          <a:xfrm>
+            <a:off x="0" y="658368"/>
+            <a:ext cx="5120640" cy="5833872"/>
+          </a:xfrm>
+          <a:prstGeom prst="rect">
+            <a:avLst/>
+          </a:prstGeom>
+        </p:spPr>
+      </p:pic>
+      <p:sp>
+        <p:nvSpPr>
+          <p:cNvPr id="4" name="Text 1"/>
+          <p:cNvSpPr/>
+          <p:nvPr/>
+        </p:nvSpPr>
+        <p:spPr>
+          <a:xfrm>
+            <a:off x="5349240" y="1005840"/>
+            <a:ext cx="6522415" cy="731520"/>
+          </a:xfrm>
+          <a:prstGeom prst="rect">
+            <a:avLst/>
+          </a:prstGeom>
+          <a:noFill/>
+          <a:ln/>
+        </p:spPr>
+        <p:txBody>
+          <a:bodyPr wrap="square" lIns="0" tIns="0" rIns="0" bIns="0" rtlCol="0" anchor="ctr">
+            <a:normAutofit/>
+          </a:bodyPr>
+          <a:lstStyle/>
+          <a:p>
+            <a:pPr algn="ctr" indent="0" marL="0">
+              <a:buNone/>
+            </a:pPr>
+            <a:r>
+              <a:rPr lang="en-US" sz="3600" b="1" dirty="0">
+                <a:solidFill>
+                  <a:srgbClr val="990011"/>
+                </a:solidFill>
+                <a:latin typeface="Times New Roman" pitchFamily="34" charset="0"/>
+                <a:ea typeface="Times New Roman" pitchFamily="34" charset="-122"/>
+                <a:cs typeface="Times New Roman" pitchFamily="34" charset="-120"/>
+              </a:rPr>
+              <a:t>Expected Answer</a:t>
+            </a:r>
+            <a:endParaRPr lang="en-US" sz="3600" dirty="0"/>
+          </a:p>
+        </p:txBody>
+      </p:sp>
+      <p:sp>
+        <p:nvSpPr>
+          <p:cNvPr id="5" name="Text 2"/>
+          <p:cNvSpPr/>
+          <p:nvPr/>
+        </p:nvSpPr>
+        <p:spPr>
+          <a:xfrm>
+            <a:off x="5349240" y="1783080"/>
+            <a:ext cx="6522415" cy="4663440"/>
+          </a:xfrm>
+          <a:prstGeom prst="rect">
+            <a:avLst/>
+          </a:prstGeom>
+          <a:noFill/>
+          <a:ln/>
+        </p:spPr>
+        <p:txBody>
+          <a:bodyPr wrap="square" lIns="0" tIns="0" rIns="0" bIns="0" rtlCol="0" anchor="t"/>
+          <a:lstStyle/>
+          <a:p>
+            <a:pPr algn="l" indent="0" marL="0">
+              <a:spcAft>
+                <a:spcPts val="800"/>
+              </a:spcAft>
+              <a:buNone/>
+            </a:pPr>
+            <a:r>
+              <a:rPr lang="en-US" sz="4000" dirty="0">
+                <a:solidFill>
+                  <a:srgbClr val="111111"/>
+                </a:solidFill>
+                <a:latin typeface="Times New Roman" pitchFamily="34" charset="0"/>
+                <a:ea typeface="Times New Roman" pitchFamily="34" charset="-122"/>
+                <a:cs typeface="Times New Roman" pitchFamily="34" charset="-120"/>
+              </a:rPr>
+              <a:t>Roots split rocks, but a dense cover protects rocks from sun and rain.</a:t>
+            </a:r>
+            <a:endParaRPr lang="en-US" sz="4000" dirty="0"/>
+          </a:p>
+        </p:txBody>
+      </p:sp>
+      <p:sp>
+        <p:nvSpPr>
+          <p:cNvPr id="25" name="Slide Number Placeholder 0"/>
+          <p:cNvSpPr>
+            <a:spLocks noGrp="1"/>
+          </p:cNvSpPr>
+          <p:nvPr>
+            <p:ph type="sldNum" sz="quarter" idx="4294967295"/>
+          </p:nvPr>
+        </p:nvSpPr>
+        <p:spPr>
+          <a:xfrm>
+            <a:off x="27432" y="91440"/>
+            <a:ext cx="585216" cy="475488"/>
+          </a:xfrm>
+          <a:prstGeom prst="rect">
+            <a:avLst/>
+          </a:prstGeom>
+          <a:extLst>
+            <a:ext uri="{C572A759-6A51-4108-AA02-DFA0A04FC94B}">
+              <ma14:wrappingTextBoxFlag xmlns:ma14="http://schemas.microsoft.com/office/mac/drawingml/2011/main" val="0"/>
+            </a:ext>
+          </a:extLst>
+        </p:spPr>
+        <p:txBody>
+          <a:bodyPr/>
+          <a:lstStyle>
+            <a:lvl1pPr>
+              <a:defRPr sz="2000">
+                <a:solidFill>
+                  <a:srgbClr val="FFFFFF"/>
+                </a:solidFill>
+                <a:latin typeface="Calibri"/>
+                <a:ea typeface="Calibri"/>
+                <a:cs typeface="Calibri"/>
+              </a:defRPr>
+            </a:lvl1pPr>
+          </a:lstStyle>
+          <a:p>
+            <a:pPr algn="ctr"/>
+            <a:fld id="{F7021451-1387-4CA6-816F-3879F97B5CBC}" type="slidenum">
+              <a:rPr b="1" lang="en-US"/>
+              <a:t>50</a:t>
+            </a:fld>
+            <a:endParaRPr lang="en-US"/>
+          </a:p>
+        </p:txBody>
+      </p:sp>
+    </p:spTree>
+  </p:cSld>
+  <p:clrMapOvr>
+    <a:masterClrMapping/>
+  </p:clrMapOvr>
+</p:sld>
+</file>
+
+<file path=ppt/slides/slide51.xml><?xml version="1.0" encoding="utf-8"?>
+<p:sld xmlns:a="http://schemas.openxmlformats.org/drawingml/2006/main" xmlns:r="http://schemas.openxmlformats.org/officeDocument/2006/relationships" xmlns:p="http://schemas.openxmlformats.org/presentationml/2006/main">
+  <p:cSld name="Slide 51">
+    <p:spTree>
+      <p:nvGrpSpPr>
+        <p:cNvPr id="1" name=""/>
+        <p:cNvGrpSpPr/>
+        <p:nvPr/>
+      </p:nvGrpSpPr>
+      <p:grpSpPr>
+        <a:xfrm>
+          <a:off x="0" y="0"/>
+          <a:ext cx="0" cy="0"/>
+          <a:chOff x="0" y="0"/>
+          <a:chExt cx="0" cy="0"/>
+        </a:xfrm>
+      </p:grpSpPr>
+      <p:sp>
+        <p:nvSpPr>
+          <p:cNvPr id="2" name="Text 0"/>
+          <p:cNvSpPr/>
+          <p:nvPr/>
+        </p:nvSpPr>
+        <p:spPr>
+          <a:xfrm>
+            <a:off x="457200" y="713232"/>
+            <a:ext cx="11368735" cy="274320"/>
+          </a:xfrm>
+          <a:prstGeom prst="rect">
+            <a:avLst/>
+          </a:prstGeom>
+          <a:noFill/>
+          <a:ln/>
+        </p:spPr>
+        <p:txBody>
+          <a:bodyPr wrap="square" lIns="0" tIns="0" rIns="0" bIns="0" rtlCol="0" anchor="ctr"/>
+          <a:lstStyle/>
+          <a:p>
+            <a:pPr algn="r" indent="0" marL="0">
+              <a:buNone/>
+            </a:pPr>
+            <a:r>
+              <a:rPr lang="en-US" sz="1400" b="1" dirty="0">
+                <a:solidFill>
+                  <a:srgbClr val="1C3F6E"/>
+                </a:solidFill>
+                <a:latin typeface="Calibri" pitchFamily="34" charset="0"/>
+                <a:ea typeface="Calibri" pitchFamily="34" charset="-122"/>
+                <a:cs typeface="Calibri" pitchFamily="34" charset="-120"/>
+              </a:rPr>
+              <a:t>REMEDIATION</a:t>
+            </a:r>
+            <a:endParaRPr lang="en-US" sz="1400" dirty="0"/>
+          </a:p>
+        </p:txBody>
+      </p:sp>
+      <p:pic>
+        <p:nvPicPr>
+          <p:cNvPr id="3" name="Image 0" descr="/home/claude/f4/img/minesec_sheet.png">    </p:cNvPr>
+          <p:cNvPicPr>
+            <a:picLocks noChangeAspect="1"/>
+          </p:cNvPicPr>
+          <p:nvPr/>
+        </p:nvPicPr>
+        <p:blipFill>
+          <a:blip r:embed="rId1"/>
+          <a:stretch>
+            <a:fillRect/>
+          </a:stretch>
+        </p:blipFill>
+        <p:spPr>
+          <a:xfrm>
+            <a:off x="0" y="658368"/>
+            <a:ext cx="2468880" cy="5833872"/>
+          </a:xfrm>
+          <a:prstGeom prst="rect">
+            <a:avLst/>
+          </a:prstGeom>
+        </p:spPr>
+      </p:pic>
+      <p:sp>
+        <p:nvSpPr>
+          <p:cNvPr id="4" name="Text 1"/>
+          <p:cNvSpPr/>
+          <p:nvPr/>
+        </p:nvSpPr>
+        <p:spPr>
+          <a:xfrm>
+            <a:off x="2697480" y="1005840"/>
+            <a:ext cx="9174175" cy="731520"/>
+          </a:xfrm>
+          <a:prstGeom prst="rect">
+            <a:avLst/>
+          </a:prstGeom>
+          <a:noFill/>
+          <a:ln/>
+        </p:spPr>
+        <p:txBody>
+          <a:bodyPr wrap="square" lIns="0" tIns="0" rIns="0" bIns="0" rtlCol="0" anchor="ctr">
+            <a:normAutofit/>
+          </a:bodyPr>
+          <a:lstStyle/>
+          <a:p>
+            <a:pPr algn="ctr" indent="0" marL="0">
+              <a:buNone/>
+            </a:pPr>
+            <a:r>
+              <a:rPr lang="en-US" sz="3600" b="1" dirty="0">
+                <a:solidFill>
+                  <a:srgbClr val="990011"/>
+                </a:solidFill>
+                <a:latin typeface="Times New Roman" pitchFamily="34" charset="0"/>
+                <a:ea typeface="Times New Roman" pitchFamily="34" charset="-122"/>
+                <a:cs typeface="Times New Roman" pitchFamily="34" charset="-120"/>
+              </a:rPr>
+              <a:t>Remediation</a:t>
+            </a:r>
+            <a:endParaRPr lang="en-US" sz="3600" dirty="0"/>
+          </a:p>
+        </p:txBody>
+      </p:sp>
+      <p:sp>
+        <p:nvSpPr>
+          <p:cNvPr id="5" name="Text 2"/>
+          <p:cNvSpPr/>
+          <p:nvPr/>
+        </p:nvSpPr>
+        <p:spPr>
+          <a:xfrm>
+            <a:off x="2697480" y="1783080"/>
+            <a:ext cx="9174175" cy="4663440"/>
+          </a:xfrm>
+          <a:prstGeom prst="rect">
+            <a:avLst/>
+          </a:prstGeom>
+          <a:noFill/>
+          <a:ln/>
+        </p:spPr>
+        <p:txBody>
+          <a:bodyPr wrap="square" lIns="0" tIns="0" rIns="0" bIns="0" rtlCol="0" anchor="t"/>
+          <a:lstStyle/>
+          <a:p>
+            <a:pPr algn="l" indent="0" marL="0">
+              <a:spcAft>
+                <a:spcPts val="800"/>
+              </a:spcAft>
+              <a:buNone/>
+            </a:pPr>
+            <a:r>
+              <a:rPr lang="en-US" sz="4000" b="1" dirty="0">
+                <a:solidFill>
+                  <a:srgbClr val="111111"/>
+                </a:solidFill>
+                <a:latin typeface="Times New Roman" pitchFamily="34" charset="0"/>
+                <a:ea typeface="Times New Roman" pitchFamily="34" charset="-122"/>
+                <a:cs typeface="Times New Roman" pitchFamily="34" charset="-120"/>
+              </a:rPr>
+              <a:t>Fill in the blanks:</a:t>
+            </a:r>
+            <a:endParaRPr lang="en-US" sz="4000" dirty="0"/>
+          </a:p>
+          <a:p>
+            <a:pPr algn="l" marL="342900" indent="-342900">
+              <a:spcAft>
+                <a:spcPts val="800"/>
+              </a:spcAft>
+              <a:buSzPct val="100000"/>
+              <a:buFont typeface="+mj-lt"/>
+              <a:buAutoNum type="arabicPeriod" startAt="1"/>
+            </a:pPr>
+            <a:r>
+              <a:rPr lang="en-US" sz="4000" dirty="0">
+                <a:solidFill>
+                  <a:srgbClr val="111111"/>
+                </a:solidFill>
+                <a:latin typeface="Times New Roman" pitchFamily="34" charset="0"/>
+                <a:ea typeface="Times New Roman" pitchFamily="34" charset="-122"/>
+                <a:cs typeface="Times New Roman" pitchFamily="34" charset="-120"/>
+              </a:rPr>
+              <a:t>The diagram linking climate and weathering is by ______.</a:t>
+            </a:r>
+            <a:endParaRPr lang="en-US" sz="4000" dirty="0"/>
+          </a:p>
+          <a:p>
+            <a:pPr algn="l" marL="342900" indent="-342900">
+              <a:spcAft>
+                <a:spcPts val="800"/>
+              </a:spcAft>
+              <a:buSzPct val="100000"/>
+              <a:buFont typeface="+mj-lt"/>
+              <a:buAutoNum type="arabicPeriod" startAt="1"/>
+            </a:pPr>
+            <a:r>
+              <a:rPr lang="en-US" sz="4000" dirty="0">
+                <a:solidFill>
+                  <a:srgbClr val="111111"/>
+                </a:solidFill>
+                <a:latin typeface="Times New Roman" pitchFamily="34" charset="0"/>
+                <a:ea typeface="Times New Roman" pitchFamily="34" charset="-122"/>
+                <a:cs typeface="Times New Roman" pitchFamily="34" charset="-120"/>
+              </a:rPr>
+              <a:t>Limestone weathers faster than ______.</a:t>
+            </a:r>
+            <a:endParaRPr lang="en-US" sz="4000" dirty="0"/>
+          </a:p>
+          <a:p>
+            <a:pPr algn="l" marL="342900" indent="-342900">
+              <a:spcAft>
+                <a:spcPts val="800"/>
+              </a:spcAft>
+              <a:buSzPct val="100000"/>
+              <a:buFont typeface="+mj-lt"/>
+              <a:buAutoNum type="arabicPeriod" startAt="1"/>
+            </a:pPr>
+            <a:r>
+              <a:rPr lang="en-US" sz="4000" dirty="0">
+                <a:solidFill>
+                  <a:srgbClr val="111111"/>
+                </a:solidFill>
+                <a:latin typeface="Times New Roman" pitchFamily="34" charset="0"/>
+                <a:ea typeface="Times New Roman" pitchFamily="34" charset="-122"/>
+                <a:cs typeface="Times New Roman" pitchFamily="34" charset="-120"/>
+              </a:rPr>
+              <a:t>Acid rain speeds up ______ weathering.</a:t>
+            </a:r>
+            <a:endParaRPr lang="en-US" sz="4000" dirty="0"/>
+          </a:p>
+        </p:txBody>
+      </p:sp>
+      <p:sp>
+        <p:nvSpPr>
+          <p:cNvPr id="25" name="Slide Number Placeholder 0"/>
+          <p:cNvSpPr>
+            <a:spLocks noGrp="1"/>
+          </p:cNvSpPr>
+          <p:nvPr>
+            <p:ph type="sldNum" sz="quarter" idx="4294967295"/>
+          </p:nvPr>
+        </p:nvSpPr>
+        <p:spPr>
+          <a:xfrm>
+            <a:off x="27432" y="91440"/>
+            <a:ext cx="585216" cy="475488"/>
+          </a:xfrm>
+          <a:prstGeom prst="rect">
+            <a:avLst/>
+          </a:prstGeom>
+          <a:extLst>
+            <a:ext uri="{C572A759-6A51-4108-AA02-DFA0A04FC94B}">
+              <ma14:wrappingTextBoxFlag xmlns:ma14="http://schemas.microsoft.com/office/mac/drawingml/2011/main" val="0"/>
+            </a:ext>
+          </a:extLst>
+        </p:spPr>
+        <p:txBody>
+          <a:bodyPr/>
+          <a:lstStyle>
+            <a:lvl1pPr>
+              <a:defRPr sz="2000">
+                <a:solidFill>
+                  <a:srgbClr val="FFFFFF"/>
+                </a:solidFill>
+                <a:latin typeface="Calibri"/>
+                <a:ea typeface="Calibri"/>
+                <a:cs typeface="Calibri"/>
+              </a:defRPr>
+            </a:lvl1pPr>
+          </a:lstStyle>
+          <a:p>
+            <a:pPr algn="ctr"/>
+            <a:fld id="{F7021451-1387-4CA6-816F-3879F97B5CBC}" type="slidenum">
+              <a:rPr b="1" lang="en-US"/>
+              <a:t>51</a:t>
+            </a:fld>
+            <a:endParaRPr lang="en-US"/>
+          </a:p>
+        </p:txBody>
+      </p:sp>
+    </p:spTree>
+  </p:cSld>
+  <p:clrMapOvr>
+    <a:masterClrMapping/>
+  </p:clrMapOvr>
+</p:sld>
+</file>
+
+<file path=ppt/slides/slide52.xml><?xml version="1.0" encoding="utf-8"?>
+<p:sld xmlns:a="http://schemas.openxmlformats.org/drawingml/2006/main" xmlns:r="http://schemas.openxmlformats.org/officeDocument/2006/relationships" xmlns:p="http://schemas.openxmlformats.org/presentationml/2006/main">
+  <p:cSld name="Slide 52">
+    <p:spTree>
+      <p:nvGrpSpPr>
+        <p:cNvPr id="1" name=""/>
+        <p:cNvGrpSpPr/>
+        <p:nvPr/>
+      </p:nvGrpSpPr>
+      <p:grpSpPr>
+        <a:xfrm>
+          <a:off x="0" y="0"/>
+          <a:ext cx="0" cy="0"/>
+          <a:chOff x="0" y="0"/>
+          <a:chExt cx="0" cy="0"/>
+        </a:xfrm>
+      </p:grpSpPr>
+      <p:sp>
+        <p:nvSpPr>
+          <p:cNvPr id="2" name="Text 0"/>
+          <p:cNvSpPr/>
+          <p:nvPr/>
+        </p:nvSpPr>
+        <p:spPr>
+          <a:xfrm>
+            <a:off x="457200" y="713232"/>
+            <a:ext cx="11368735" cy="274320"/>
+          </a:xfrm>
+          <a:prstGeom prst="rect">
+            <a:avLst/>
+          </a:prstGeom>
+          <a:noFill/>
+          <a:ln/>
+        </p:spPr>
+        <p:txBody>
+          <a:bodyPr wrap="square" lIns="0" tIns="0" rIns="0" bIns="0" rtlCol="0" anchor="ctr"/>
+          <a:lstStyle/>
+          <a:p>
+            <a:pPr algn="r" indent="0" marL="0">
+              <a:buNone/>
+            </a:pPr>
+            <a:r>
+              <a:rPr lang="en-US" sz="1400" b="1" dirty="0">
+                <a:solidFill>
+                  <a:srgbClr val="1C3F6E"/>
+                </a:solidFill>
+                <a:latin typeface="Calibri" pitchFamily="34" charset="0"/>
+                <a:ea typeface="Calibri" pitchFamily="34" charset="-122"/>
+                <a:cs typeface="Calibri" pitchFamily="34" charset="-120"/>
+              </a:rPr>
+              <a:t>HOMEWORK</a:t>
+            </a:r>
+            <a:endParaRPr lang="en-US" sz="1400" dirty="0"/>
+          </a:p>
+        </p:txBody>
+      </p:sp>
+      <p:pic>
+        <p:nvPicPr>
+          <p:cNvPr id="3" name="Image 0" descr="/home/claude/f4/img/minesec_sheet.png">    </p:cNvPr>
+          <p:cNvPicPr>
+            <a:picLocks noChangeAspect="1"/>
+          </p:cNvPicPr>
+          <p:nvPr/>
+        </p:nvPicPr>
+        <p:blipFill>
+          <a:blip r:embed="rId1"/>
+          <a:stretch>
+            <a:fillRect/>
+          </a:stretch>
+        </p:blipFill>
+        <p:spPr>
+          <a:xfrm>
+            <a:off x="0" y="658368"/>
+            <a:ext cx="5120640" cy="5833872"/>
+          </a:xfrm>
+          <a:prstGeom prst="rect">
+            <a:avLst/>
+          </a:prstGeom>
+        </p:spPr>
+      </p:pic>
+      <p:sp>
+        <p:nvSpPr>
+          <p:cNvPr id="4" name="Text 1"/>
+          <p:cNvSpPr/>
+          <p:nvPr/>
+        </p:nvSpPr>
+        <p:spPr>
+          <a:xfrm>
+            <a:off x="5349240" y="1005840"/>
+            <a:ext cx="6522415" cy="731520"/>
+          </a:xfrm>
+          <a:prstGeom prst="rect">
+            <a:avLst/>
+          </a:prstGeom>
+          <a:noFill/>
+          <a:ln/>
+        </p:spPr>
+        <p:txBody>
+          <a:bodyPr wrap="square" lIns="0" tIns="0" rIns="0" bIns="0" rtlCol="0" anchor="ctr">
+            <a:normAutofit/>
+          </a:bodyPr>
+          <a:lstStyle/>
+          <a:p>
+            <a:pPr algn="ctr" indent="0" marL="0">
+              <a:buNone/>
+            </a:pPr>
+            <a:r>
+              <a:rPr lang="en-US" sz="3600" b="1" dirty="0">
+                <a:solidFill>
+                  <a:srgbClr val="990011"/>
+                </a:solidFill>
+                <a:latin typeface="Times New Roman" pitchFamily="34" charset="0"/>
+                <a:ea typeface="Times New Roman" pitchFamily="34" charset="-122"/>
+                <a:cs typeface="Times New Roman" pitchFamily="34" charset="-120"/>
+              </a:rPr>
+              <a:t>Homework</a:t>
+            </a:r>
+            <a:endParaRPr lang="en-US" sz="3600" dirty="0"/>
+          </a:p>
+        </p:txBody>
+      </p:sp>
+      <p:sp>
+        <p:nvSpPr>
+          <p:cNvPr id="5" name="Text 2"/>
+          <p:cNvSpPr/>
+          <p:nvPr/>
+        </p:nvSpPr>
+        <p:spPr>
+          <a:xfrm>
+            <a:off x="5349240" y="1783080"/>
+            <a:ext cx="6522415" cy="4663440"/>
+          </a:xfrm>
+          <a:prstGeom prst="rect">
+            <a:avLst/>
+          </a:prstGeom>
+          <a:noFill/>
+          <a:ln/>
+        </p:spPr>
+        <p:txBody>
+          <a:bodyPr wrap="square" lIns="0" tIns="0" rIns="0" bIns="0" rtlCol="0" anchor="t"/>
+          <a:lstStyle/>
+          <a:p>
+            <a:pPr algn="l" indent="0" marL="0">
+              <a:spcAft>
+                <a:spcPts val="800"/>
+              </a:spcAft>
+              <a:buNone/>
+            </a:pPr>
+            <a:r>
+              <a:rPr lang="en-US" sz="4000" dirty="0">
+                <a:solidFill>
+                  <a:srgbClr val="111111"/>
+                </a:solidFill>
+                <a:latin typeface="Times New Roman" pitchFamily="34" charset="0"/>
+                <a:ea typeface="Times New Roman" pitchFamily="34" charset="-122"/>
+                <a:cs typeface="Times New Roman" pitchFamily="34" charset="-120"/>
+              </a:rPr>
+              <a:t>Define regolith.</a:t>
+            </a:r>
+            <a:endParaRPr lang="en-US" sz="4000" dirty="0"/>
+          </a:p>
+        </p:txBody>
+      </p:sp>
+      <p:sp>
+        <p:nvSpPr>
+          <p:cNvPr id="25" name="Slide Number Placeholder 0"/>
+          <p:cNvSpPr>
+            <a:spLocks noGrp="1"/>
+          </p:cNvSpPr>
+          <p:nvPr>
+            <p:ph type="sldNum" sz="quarter" idx="4294967295"/>
+          </p:nvPr>
+        </p:nvSpPr>
+        <p:spPr>
+          <a:xfrm>
+            <a:off x="27432" y="91440"/>
+            <a:ext cx="585216" cy="475488"/>
+          </a:xfrm>
+          <a:prstGeom prst="rect">
+            <a:avLst/>
+          </a:prstGeom>
+          <a:extLst>
+            <a:ext uri="{C572A759-6A51-4108-AA02-DFA0A04FC94B}">
+              <ma14:wrappingTextBoxFlag xmlns:ma14="http://schemas.microsoft.com/office/mac/drawingml/2011/main" val="0"/>
+            </a:ext>
+          </a:extLst>
+        </p:spPr>
+        <p:txBody>
+          <a:bodyPr/>
+          <a:lstStyle>
+            <a:lvl1pPr>
+              <a:defRPr sz="2000">
+                <a:solidFill>
+                  <a:srgbClr val="FFFFFF"/>
+                </a:solidFill>
+                <a:latin typeface="Calibri"/>
+                <a:ea typeface="Calibri"/>
+                <a:cs typeface="Calibri"/>
+              </a:defRPr>
+            </a:lvl1pPr>
+          </a:lstStyle>
+          <a:p>
+            <a:pPr algn="ctr"/>
+            <a:fld id="{F7021451-1387-4CA6-816F-3879F97B5CBC}" type="slidenum">
+              <a:rPr b="1" lang="en-US"/>
+              <a:t>52</a:t>
+            </a:fld>
+            <a:endParaRPr lang="en-US"/>
+          </a:p>
+        </p:txBody>
+      </p:sp>
+    </p:spTree>
+  </p:cSld>
+  <p:clrMapOvr>
+    <a:masterClrMapping/>
+  </p:clrMapOvr>
+</p:sld>
+</file>
+
+<file path=ppt/slides/slide53.xml><?xml version="1.0" encoding="utf-8"?>
+<p:sld xmlns:a="http://schemas.openxmlformats.org/drawingml/2006/main" xmlns:r="http://schemas.openxmlformats.org/officeDocument/2006/relationships" xmlns:p="http://schemas.openxmlformats.org/presentationml/2006/main">
+  <p:cSld name="Slide 53">
+    <p:spTree>
+      <p:nvGrpSpPr>
+        <p:cNvPr id="1" name=""/>
+        <p:cNvGrpSpPr/>
+        <p:nvPr/>
+      </p:nvGrpSpPr>
+      <p:grpSpPr>
+        <a:xfrm>
+          <a:off x="0" y="0"/>
+          <a:ext cx="0" cy="0"/>
+          <a:chOff x="0" y="0"/>
+          <a:chExt cx="0" cy="0"/>
+        </a:xfrm>
+      </p:grpSpPr>
+      <p:sp>
+        <p:nvSpPr>
+          <p:cNvPr id="2" name="Text 0"/>
+          <p:cNvSpPr/>
+          <p:nvPr/>
+        </p:nvSpPr>
+        <p:spPr>
+          <a:xfrm>
+            <a:off x="457200" y="713232"/>
+            <a:ext cx="11368735" cy="274320"/>
+          </a:xfrm>
+          <a:prstGeom prst="rect">
+            <a:avLst/>
+          </a:prstGeom>
+          <a:noFill/>
+          <a:ln/>
+        </p:spPr>
+        <p:txBody>
+          <a:bodyPr wrap="square" lIns="0" tIns="0" rIns="0" bIns="0" rtlCol="0" anchor="ctr"/>
+          <a:lstStyle/>
+          <a:p>
+            <a:pPr algn="r" indent="0" marL="0">
+              <a:buNone/>
+            </a:pPr>
+            <a:r>
+              <a:rPr lang="en-US" sz="1400" b="1" dirty="0">
+                <a:solidFill>
+                  <a:srgbClr val="1C3F6E"/>
+                </a:solidFill>
+                <a:latin typeface="Calibri" pitchFamily="34" charset="0"/>
+                <a:ea typeface="Calibri" pitchFamily="34" charset="-122"/>
+                <a:cs typeface="Calibri" pitchFamily="34" charset="-120"/>
+              </a:rPr>
+              <a:t>NEXT LESSON</a:t>
+            </a:r>
+            <a:endParaRPr lang="en-US" sz="1400" dirty="0"/>
+          </a:p>
+        </p:txBody>
+      </p:sp>
+      <p:pic>
+        <p:nvPicPr>
+          <p:cNvPr id="3" name="Image 0" descr="/home/claude/f4/img/minesec_sheet.png">    </p:cNvPr>
+          <p:cNvPicPr>
+            <a:picLocks noChangeAspect="1"/>
+          </p:cNvPicPr>
+          <p:nvPr/>
+        </p:nvPicPr>
+        <p:blipFill>
+          <a:blip r:embed="rId1"/>
+          <a:stretch>
+            <a:fillRect/>
+          </a:stretch>
+        </p:blipFill>
+        <p:spPr>
+          <a:xfrm>
+            <a:off x="0" y="658368"/>
+            <a:ext cx="5120640" cy="5833872"/>
+          </a:xfrm>
+          <a:prstGeom prst="rect">
+            <a:avLst/>
+          </a:prstGeom>
+        </p:spPr>
+      </p:pic>
+      <p:sp>
+        <p:nvSpPr>
+          <p:cNvPr id="4" name="Text 1"/>
+          <p:cNvSpPr/>
+          <p:nvPr/>
+        </p:nvSpPr>
+        <p:spPr>
+          <a:xfrm>
+            <a:off x="5349240" y="1005840"/>
+            <a:ext cx="6522415" cy="731520"/>
+          </a:xfrm>
+          <a:prstGeom prst="rect">
+            <a:avLst/>
+          </a:prstGeom>
+          <a:noFill/>
+          <a:ln/>
+        </p:spPr>
+        <p:txBody>
+          <a:bodyPr wrap="square" lIns="0" tIns="0" rIns="0" bIns="0" rtlCol="0" anchor="ctr">
+            <a:normAutofit/>
+          </a:bodyPr>
+          <a:lstStyle/>
+          <a:p>
+            <a:pPr algn="ctr" indent="0" marL="0">
+              <a:buNone/>
+            </a:pPr>
+            <a:r>
+              <a:rPr lang="en-US" sz="3600" b="1" dirty="0">
+                <a:solidFill>
+                  <a:srgbClr val="990011"/>
+                </a:solidFill>
+                <a:latin typeface="Times New Roman" pitchFamily="34" charset="0"/>
+                <a:ea typeface="Times New Roman" pitchFamily="34" charset="-122"/>
+                <a:cs typeface="Times New Roman" pitchFamily="34" charset="-120"/>
+              </a:rPr>
+              <a:t>Next Lesson</a:t>
+            </a:r>
+            <a:endParaRPr lang="en-US" sz="3600" dirty="0"/>
+          </a:p>
+        </p:txBody>
+      </p:sp>
+      <p:sp>
+        <p:nvSpPr>
+          <p:cNvPr id="5" name="Text 2"/>
+          <p:cNvSpPr/>
+          <p:nvPr/>
+        </p:nvSpPr>
+        <p:spPr>
+          <a:xfrm>
+            <a:off x="5349240" y="1783080"/>
+            <a:ext cx="6522415" cy="4663440"/>
+          </a:xfrm>
+          <a:prstGeom prst="rect">
+            <a:avLst/>
+          </a:prstGeom>
+          <a:noFill/>
+          <a:ln/>
+        </p:spPr>
+        <p:txBody>
+          <a:bodyPr wrap="square" lIns="0" tIns="0" rIns="0" bIns="0" rtlCol="0" anchor="ctr"/>
+          <a:lstStyle/>
+          <a:p>
+            <a:pPr algn="ctr" indent="0" marL="0">
+              <a:spcAft>
+                <a:spcPts val="800"/>
+              </a:spcAft>
+              <a:buNone/>
+            </a:pPr>
+            <a:r>
+              <a:rPr lang="en-US" sz="4000" b="1" dirty="0">
+                <a:solidFill>
+                  <a:srgbClr val="111111"/>
+                </a:solidFill>
+                <a:latin typeface="Times New Roman" pitchFamily="34" charset="0"/>
+                <a:ea typeface="Times New Roman" pitchFamily="34" charset="-122"/>
+                <a:cs typeface="Times New Roman" pitchFamily="34" charset="-120"/>
+              </a:rPr>
+              <a:t>Our next lesson will be on:</a:t>
+            </a:r>
+            <a:endParaRPr lang="en-US" sz="4000" dirty="0"/>
+          </a:p>
+          <a:p>
+            <a:pPr algn="ctr" indent="0" marL="0">
+              <a:spcAft>
+                <a:spcPts val="800"/>
+              </a:spcAft>
+              <a:buNone/>
+            </a:pPr>
+            <a:r>
+              <a:rPr lang="en-US" sz="4000" b="1" dirty="0">
+                <a:solidFill>
+                  <a:srgbClr val="990011"/>
+                </a:solidFill>
+                <a:latin typeface="Times New Roman" pitchFamily="34" charset="0"/>
+                <a:ea typeface="Times New Roman" pitchFamily="34" charset="-122"/>
+                <a:cs typeface="Times New Roman" pitchFamily="34" charset="-120"/>
+              </a:rPr>
+              <a:t>Lesson 11: The Impact of Weathering</a:t>
+            </a:r>
+            <a:endParaRPr lang="en-US" sz="4000" dirty="0"/>
+          </a:p>
+        </p:txBody>
+      </p:sp>
+      <p:sp>
+        <p:nvSpPr>
+          <p:cNvPr id="25" name="Slide Number Placeholder 0"/>
+          <p:cNvSpPr>
+            <a:spLocks noGrp="1"/>
+          </p:cNvSpPr>
+          <p:nvPr>
+            <p:ph type="sldNum" sz="quarter" idx="4294967295"/>
+          </p:nvPr>
+        </p:nvSpPr>
+        <p:spPr>
+          <a:xfrm>
+            <a:off x="27432" y="91440"/>
+            <a:ext cx="585216" cy="475488"/>
+          </a:xfrm>
+          <a:prstGeom prst="rect">
+            <a:avLst/>
+          </a:prstGeom>
+          <a:extLst>
+            <a:ext uri="{C572A759-6A51-4108-AA02-DFA0A04FC94B}">
+              <ma14:wrappingTextBoxFlag xmlns:ma14="http://schemas.microsoft.com/office/mac/drawingml/2011/main" val="0"/>
+            </a:ext>
+          </a:extLst>
+        </p:spPr>
+        <p:txBody>
+          <a:bodyPr/>
+          <a:lstStyle>
+            <a:lvl1pPr>
+              <a:defRPr sz="2000">
+                <a:solidFill>
+                  <a:srgbClr val="FFFFFF"/>
+                </a:solidFill>
+                <a:latin typeface="Calibri"/>
+                <a:ea typeface="Calibri"/>
+                <a:cs typeface="Calibri"/>
+              </a:defRPr>
+            </a:lvl1pPr>
+          </a:lstStyle>
+          <a:p>
+            <a:pPr algn="ctr"/>
+            <a:fld id="{F7021451-1387-4CA6-816F-3879F97B5CBC}" type="slidenum">
+              <a:rPr b="1" lang="en-US"/>
+              <a:t>53</a:t>
+            </a:fld>
+            <a:endParaRPr lang="en-US"/>
+          </a:p>
+        </p:txBody>
+      </p:sp>
+    </p:spTree>
+  </p:cSld>
+  <p:clrMapOvr>
+    <a:masterClrMapping/>
+  </p:clrMapOvr>
+</p:sld>
+</file>
+
+<file path=ppt/slides/slide54.xml><?xml version="1.0" encoding="utf-8"?>
+<p:sld xmlns:a="http://schemas.openxmlformats.org/drawingml/2006/main" xmlns:r="http://schemas.openxmlformats.org/officeDocument/2006/relationships" xmlns:p="http://schemas.openxmlformats.org/presentationml/2006/main">
+  <p:cSld name="Slide 54">
+    <p:spTree>
+      <p:nvGrpSpPr>
+        <p:cNvPr id="1" name=""/>
+        <p:cNvGrpSpPr/>
+        <p:nvPr/>
+      </p:nvGrpSpPr>
+      <p:grpSpPr>
+        <a:xfrm>
+          <a:off x="0" y="0"/>
+          <a:ext cx="0" cy="0"/>
+          <a:chOff x="0" y="0"/>
+          <a:chExt cx="0" cy="0"/>
+        </a:xfrm>
+      </p:grpSpPr>
+      <p:sp>
+        <p:nvSpPr>
+          <p:cNvPr id="2" name="Text 0"/>
+          <p:cNvSpPr/>
+          <p:nvPr/>
+        </p:nvSpPr>
+        <p:spPr>
+          <a:xfrm>
+            <a:off x="457200" y="713232"/>
+            <a:ext cx="11368735" cy="274320"/>
+          </a:xfrm>
+          <a:prstGeom prst="rect">
+            <a:avLst/>
+          </a:prstGeom>
+          <a:noFill/>
+          <a:ln/>
+        </p:spPr>
+        <p:txBody>
+          <a:bodyPr wrap="square" lIns="0" tIns="0" rIns="0" bIns="0" rtlCol="0" anchor="ctr"/>
+          <a:lstStyle/>
+          <a:p>
+            <a:pPr algn="r" indent="0" marL="0">
+              <a:buNone/>
+            </a:pPr>
+            <a:r>
+              <a:rPr lang="en-US" sz="1400" b="1" dirty="0">
+                <a:solidFill>
+                  <a:srgbClr val="1C3F6E"/>
+                </a:solidFill>
+                <a:latin typeface="Calibri" pitchFamily="34" charset="0"/>
+                <a:ea typeface="Calibri" pitchFamily="34" charset="-122"/>
+                <a:cs typeface="Calibri" pitchFamily="34" charset="-120"/>
+              </a:rPr>
               <a:t>BILINGUAL GAME</a:t>
             </a:r>
             <a:endParaRPr lang="en-US" sz="1400" dirty="0"/>
@@ -17465,7 +19480,7 @@
       </p:sp>
       <p:graphicFrame>
         <p:nvGraphicFramePr>
-          <p:cNvPr id="50" name="Table 0"/>
+          <p:cNvPr id="55" name="Table 0"/>
           <p:cNvGraphicFramePr>
             <a:graphicFrameLocks noGrp="1"/>
           </p:cNvGraphicFramePr>
@@ -17645,7 +19660,7 @@
                           <a:ea typeface="Calibri" pitchFamily="34" charset="-122"/>
                           <a:cs typeface="Calibri" pitchFamily="34" charset="-120"/>
                         </a:rPr>
-                        <a:t>Regolith</a:t>
+                        <a:t>Weathering</a:t>
                       </a:r>
                       <a:endParaRPr lang="en-US" sz="2200" dirty="0">
                         <a:latin typeface="Calibri" charset="0"/>
@@ -17713,283 +19728,7 @@
                           <a:ea typeface="Calibri" pitchFamily="34" charset="-122"/>
                           <a:cs typeface="Calibri" pitchFamily="34" charset="-120"/>
                         </a:rPr>
-                        <a:t>Le régolithe</a:t>
-                      </a:r>
-                      <a:endParaRPr lang="en-US" sz="2200" dirty="0">
-                        <a:latin typeface="Calibri" charset="0"/>
-                        <a:ea typeface="Calibri" charset="0"/>
-                        <a:cs typeface="Calibri" charset="0"/>
-                      </a:endParaRPr>
-                    </a:p>
-                  </a:txBody>
-                  <a:tcPr marL="73152" marR="73152" marT="73152" marB="73152" anchor="ctr">
-                    <a:lnL w="12700" cap="flat" cmpd="sng" algn="ctr">
-                      <a:solidFill>
-                        <a:srgbClr val="BBBBBB"/>
-                      </a:solidFill>
-                      <a:prstDash val="solid"/>
-                      <a:round/>
-                      <a:headEnd type="none" w="med" len="med"/>
-                      <a:tailEnd type="none" w="med" len="med"/>
-                    </a:lnL>
-                    <a:lnR w="12700" cap="flat" cmpd="sng" algn="ctr">
-                      <a:solidFill>
-                        <a:srgbClr val="BBBBBB"/>
-                      </a:solidFill>
-                      <a:prstDash val="solid"/>
-                      <a:round/>
-                      <a:headEnd type="none" w="med" len="med"/>
-                      <a:tailEnd type="none" w="med" len="med"/>
-                    </a:lnR>
-                    <a:lnT w="12700" cap="flat" cmpd="sng" algn="ctr">
-                      <a:solidFill>
-                        <a:srgbClr val="BBBBBB"/>
-                      </a:solidFill>
-                      <a:prstDash val="solid"/>
-                      <a:round/>
-                      <a:headEnd type="none" w="med" len="med"/>
-                      <a:tailEnd type="none" w="med" len="med"/>
-                    </a:lnT>
-                    <a:lnB w="12700" cap="flat" cmpd="sng" algn="ctr">
-                      <a:solidFill>
-                        <a:srgbClr val="BBBBBB"/>
-                      </a:solidFill>
-                      <a:prstDash val="solid"/>
-                      <a:round/>
-                      <a:headEnd type="none" w="med" len="med"/>
-                      <a:tailEnd type="none" w="med" len="med"/>
-                    </a:lnB>
-                    <a:solidFill>
-                      <a:srgbClr val="FFFFFF"/>
-                    </a:solidFill>
-                  </a:tcPr>
-                </a:tc>
-              </a:tr>
-              <a:tr h="0">
-                <a:tc>
-                  <a:txBody>
-                    <a:bodyPr/>
-                    <a:lstStyle/>
-                    <a:p>
-                      <a:pPr algn="ctr" indent="0" marL="0">
-                        <a:buNone/>
-                      </a:pPr>
-                      <a:r>
-                        <a:rPr lang="en-US" sz="2200" dirty="0">
-                          <a:solidFill>
-                            <a:srgbClr val="111111"/>
-                          </a:solidFill>
-                          <a:latin typeface="Calibri" pitchFamily="34" charset="0"/>
-                          <a:ea typeface="Calibri" pitchFamily="34" charset="-122"/>
-                          <a:cs typeface="Calibri" pitchFamily="34" charset="-120"/>
-                        </a:rPr>
-                        <a:t>Rock type</a:t>
-                      </a:r>
-                      <a:endParaRPr lang="en-US" sz="2200" dirty="0">
-                        <a:latin typeface="Calibri" charset="0"/>
-                        <a:ea typeface="Calibri" charset="0"/>
-                        <a:cs typeface="Calibri" charset="0"/>
-                      </a:endParaRPr>
-                    </a:p>
-                  </a:txBody>
-                  <a:tcPr marL="73152" marR="73152" marT="73152" marB="73152" anchor="ctr">
-                    <a:lnL w="12700" cap="flat" cmpd="sng" algn="ctr">
-                      <a:solidFill>
-                        <a:srgbClr val="BBBBBB"/>
-                      </a:solidFill>
-                      <a:prstDash val="solid"/>
-                      <a:round/>
-                      <a:headEnd type="none" w="med" len="med"/>
-                      <a:tailEnd type="none" w="med" len="med"/>
-                    </a:lnL>
-                    <a:lnR w="12700" cap="flat" cmpd="sng" algn="ctr">
-                      <a:solidFill>
-                        <a:srgbClr val="BBBBBB"/>
-                      </a:solidFill>
-                      <a:prstDash val="solid"/>
-                      <a:round/>
-                      <a:headEnd type="none" w="med" len="med"/>
-                      <a:tailEnd type="none" w="med" len="med"/>
-                    </a:lnR>
-                    <a:lnT w="12700" cap="flat" cmpd="sng" algn="ctr">
-                      <a:solidFill>
-                        <a:srgbClr val="BBBBBB"/>
-                      </a:solidFill>
-                      <a:prstDash val="solid"/>
-                      <a:round/>
-                      <a:headEnd type="none" w="med" len="med"/>
-                      <a:tailEnd type="none" w="med" len="med"/>
-                    </a:lnT>
-                    <a:lnB w="12700" cap="flat" cmpd="sng" algn="ctr">
-                      <a:solidFill>
-                        <a:srgbClr val="BBBBBB"/>
-                      </a:solidFill>
-                      <a:prstDash val="solid"/>
-                      <a:round/>
-                      <a:headEnd type="none" w="med" len="med"/>
-                      <a:tailEnd type="none" w="med" len="med"/>
-                    </a:lnB>
-                    <a:solidFill>
-                      <a:srgbClr val="F2F4F8"/>
-                    </a:solidFill>
-                  </a:tcPr>
-                </a:tc>
-                <a:tc>
-                  <a:txBody>
-                    <a:bodyPr/>
-                    <a:lstStyle/>
-                    <a:p>
-                      <a:pPr algn="ctr" indent="0" marL="0">
-                        <a:buNone/>
-                      </a:pPr>
-                      <a:r>
-                        <a:rPr lang="en-US" sz="2200" dirty="0">
-                          <a:solidFill>
-                            <a:srgbClr val="111111"/>
-                          </a:solidFill>
-                          <a:latin typeface="Calibri" pitchFamily="34" charset="0"/>
-                          <a:ea typeface="Calibri" pitchFamily="34" charset="-122"/>
-                          <a:cs typeface="Calibri" pitchFamily="34" charset="-120"/>
-                        </a:rPr>
-                        <a:t>Le type de roche</a:t>
-                      </a:r>
-                      <a:endParaRPr lang="en-US" sz="2200" dirty="0">
-                        <a:latin typeface="Calibri" charset="0"/>
-                        <a:ea typeface="Calibri" charset="0"/>
-                        <a:cs typeface="Calibri" charset="0"/>
-                      </a:endParaRPr>
-                    </a:p>
-                  </a:txBody>
-                  <a:tcPr marL="73152" marR="73152" marT="73152" marB="73152" anchor="ctr">
-                    <a:lnL w="12700" cap="flat" cmpd="sng" algn="ctr">
-                      <a:solidFill>
-                        <a:srgbClr val="BBBBBB"/>
-                      </a:solidFill>
-                      <a:prstDash val="solid"/>
-                      <a:round/>
-                      <a:headEnd type="none" w="med" len="med"/>
-                      <a:tailEnd type="none" w="med" len="med"/>
-                    </a:lnL>
-                    <a:lnR w="12700" cap="flat" cmpd="sng" algn="ctr">
-                      <a:solidFill>
-                        <a:srgbClr val="BBBBBB"/>
-                      </a:solidFill>
-                      <a:prstDash val="solid"/>
-                      <a:round/>
-                      <a:headEnd type="none" w="med" len="med"/>
-                      <a:tailEnd type="none" w="med" len="med"/>
-                    </a:lnR>
-                    <a:lnT w="12700" cap="flat" cmpd="sng" algn="ctr">
-                      <a:solidFill>
-                        <a:srgbClr val="BBBBBB"/>
-                      </a:solidFill>
-                      <a:prstDash val="solid"/>
-                      <a:round/>
-                      <a:headEnd type="none" w="med" len="med"/>
-                      <a:tailEnd type="none" w="med" len="med"/>
-                    </a:lnT>
-                    <a:lnB w="12700" cap="flat" cmpd="sng" algn="ctr">
-                      <a:solidFill>
-                        <a:srgbClr val="BBBBBB"/>
-                      </a:solidFill>
-                      <a:prstDash val="solid"/>
-                      <a:round/>
-                      <a:headEnd type="none" w="med" len="med"/>
-                      <a:tailEnd type="none" w="med" len="med"/>
-                    </a:lnB>
-                    <a:solidFill>
-                      <a:srgbClr val="F2F4F8"/>
-                    </a:solidFill>
-                  </a:tcPr>
-                </a:tc>
-              </a:tr>
-              <a:tr h="0">
-                <a:tc>
-                  <a:txBody>
-                    <a:bodyPr/>
-                    <a:lstStyle/>
-                    <a:p>
-                      <a:pPr algn="ctr" indent="0" marL="0">
-                        <a:buNone/>
-                      </a:pPr>
-                      <a:r>
-                        <a:rPr lang="en-US" sz="2200" dirty="0">
-                          <a:solidFill>
-                            <a:srgbClr val="111111"/>
-                          </a:solidFill>
-                          <a:latin typeface="Calibri" pitchFamily="34" charset="0"/>
-                          <a:ea typeface="Calibri" pitchFamily="34" charset="-122"/>
-                          <a:cs typeface="Calibri" pitchFamily="34" charset="-120"/>
-                        </a:rPr>
-                        <a:t>Joint</a:t>
-                      </a:r>
-                      <a:endParaRPr lang="en-US" sz="2200" dirty="0">
-                        <a:latin typeface="Calibri" charset="0"/>
-                        <a:ea typeface="Calibri" charset="0"/>
-                        <a:cs typeface="Calibri" charset="0"/>
-                      </a:endParaRPr>
-                    </a:p>
-                  </a:txBody>
-                  <a:tcPr marL="73152" marR="73152" marT="73152" marB="73152" anchor="ctr">
-                    <a:lnL w="12700" cap="flat" cmpd="sng" algn="ctr">
-                      <a:solidFill>
-                        <a:srgbClr val="BBBBBB"/>
-                      </a:solidFill>
-                      <a:prstDash val="solid"/>
-                      <a:round/>
-                      <a:headEnd type="none" w="med" len="med"/>
-                      <a:tailEnd type="none" w="med" len="med"/>
-                    </a:lnL>
-                    <a:lnR w="12700" cap="flat" cmpd="sng" algn="ctr">
-                      <a:solidFill>
-                        <a:srgbClr val="BBBBBB"/>
-                      </a:solidFill>
-                      <a:prstDash val="solid"/>
-                      <a:round/>
-                      <a:headEnd type="none" w="med" len="med"/>
-                      <a:tailEnd type="none" w="med" len="med"/>
-                    </a:lnR>
-                    <a:lnT w="12700" cap="flat" cmpd="sng" algn="ctr">
-                      <a:solidFill>
-                        <a:srgbClr val="BBBBBB"/>
-                      </a:solidFill>
-                      <a:prstDash val="solid"/>
-                      <a:round/>
-                      <a:headEnd type="none" w="med" len="med"/>
-                      <a:tailEnd type="none" w="med" len="med"/>
-                    </a:lnT>
-                    <a:lnB w="12700" cap="flat" cmpd="sng" algn="ctr">
-                      <a:solidFill>
-                        <a:srgbClr val="BBBBBB"/>
-                      </a:solidFill>
-                      <a:prstDash val="solid"/>
-                      <a:round/>
-                      <a:headEnd type="none" w="med" len="med"/>
-                      <a:tailEnd type="none" w="med" len="med"/>
-                    </a:lnB>
-                    <a:solidFill>
-                      <a:srgbClr val="FFFFFF"/>
-                    </a:solidFill>
-                  </a:tcPr>
-                </a:tc>
-                <a:tc>
-                  <a:txBody>
-                    <a:bodyPr/>
-                    <a:lstStyle/>
-                    <a:p>
-                      <a:pPr algn="ctr" indent="0" marL="0">
-                        <a:buNone/>
-                      </a:pPr>
-                      <a:r>
-                        <a:rPr lang="en-US" sz="2200" dirty="0">
-                          <a:solidFill>
-                            <a:srgbClr val="111111"/>
-                          </a:solidFill>
-                          <a:latin typeface="Calibri" pitchFamily="34" charset="0"/>
-                          <a:ea typeface="Calibri" pitchFamily="34" charset="-122"/>
-                          <a:cs typeface="Calibri" pitchFamily="34" charset="-120"/>
-                        </a:rPr>
-                        <a:t>La diaclase</a:t>
+                        <a:t>L'altération</a:t>
                       </a:r>
                       <a:endParaRPr lang="en-US" sz="2200" dirty="0">
                         <a:latin typeface="Calibri" charset="0"/>
@@ -18197,7 +19936,7 @@
                           <a:ea typeface="Calibri" pitchFamily="34" charset="-122"/>
                           <a:cs typeface="Calibri" pitchFamily="34" charset="-120"/>
                         </a:rPr>
-                        <a:t>Quarry</a:t>
+                        <a:t>Rock</a:t>
                       </a:r>
                       <a:endParaRPr lang="en-US" sz="2200" dirty="0">
                         <a:latin typeface="Calibri" charset="0"/>
@@ -18265,7 +20004,283 @@
                           <a:ea typeface="Calibri" pitchFamily="34" charset="-122"/>
                           <a:cs typeface="Calibri" pitchFamily="34" charset="-120"/>
                         </a:rPr>
-                        <a:t>La carrière</a:t>
+                        <a:t>La roche</a:t>
+                      </a:r>
+                      <a:endParaRPr lang="en-US" sz="2200" dirty="0">
+                        <a:latin typeface="Calibri" charset="0"/>
+                        <a:ea typeface="Calibri" charset="0"/>
+                        <a:cs typeface="Calibri" charset="0"/>
+                      </a:endParaRPr>
+                    </a:p>
+                  </a:txBody>
+                  <a:tcPr marL="73152" marR="73152" marT="73152" marB="73152" anchor="ctr">
+                    <a:lnL w="12700" cap="flat" cmpd="sng" algn="ctr">
+                      <a:solidFill>
+                        <a:srgbClr val="BBBBBB"/>
+                      </a:solidFill>
+                      <a:prstDash val="solid"/>
+                      <a:round/>
+                      <a:headEnd type="none" w="med" len="med"/>
+                      <a:tailEnd type="none" w="med" len="med"/>
+                    </a:lnL>
+                    <a:lnR w="12700" cap="flat" cmpd="sng" algn="ctr">
+                      <a:solidFill>
+                        <a:srgbClr val="BBBBBB"/>
+                      </a:solidFill>
+                      <a:prstDash val="solid"/>
+                      <a:round/>
+                      <a:headEnd type="none" w="med" len="med"/>
+                      <a:tailEnd type="none" w="med" len="med"/>
+                    </a:lnR>
+                    <a:lnT w="12700" cap="flat" cmpd="sng" algn="ctr">
+                      <a:solidFill>
+                        <a:srgbClr val="BBBBBB"/>
+                      </a:solidFill>
+                      <a:prstDash val="solid"/>
+                      <a:round/>
+                      <a:headEnd type="none" w="med" len="med"/>
+                      <a:tailEnd type="none" w="med" len="med"/>
+                    </a:lnT>
+                    <a:lnB w="12700" cap="flat" cmpd="sng" algn="ctr">
+                      <a:solidFill>
+                        <a:srgbClr val="BBBBBB"/>
+                      </a:solidFill>
+                      <a:prstDash val="solid"/>
+                      <a:round/>
+                      <a:headEnd type="none" w="med" len="med"/>
+                      <a:tailEnd type="none" w="med" len="med"/>
+                    </a:lnB>
+                    <a:solidFill>
+                      <a:srgbClr val="FFFFFF"/>
+                    </a:solidFill>
+                  </a:tcPr>
+                </a:tc>
+              </a:tr>
+              <a:tr h="0">
+                <a:tc>
+                  <a:txBody>
+                    <a:bodyPr/>
+                    <a:lstStyle/>
+                    <a:p>
+                      <a:pPr algn="ctr" indent="0" marL="0">
+                        <a:buNone/>
+                      </a:pPr>
+                      <a:r>
+                        <a:rPr lang="en-US" sz="2200" dirty="0">
+                          <a:solidFill>
+                            <a:srgbClr val="111111"/>
+                          </a:solidFill>
+                          <a:latin typeface="Calibri" pitchFamily="34" charset="0"/>
+                          <a:ea typeface="Calibri" pitchFamily="34" charset="-122"/>
+                          <a:cs typeface="Calibri" pitchFamily="34" charset="-120"/>
+                        </a:rPr>
+                        <a:t>Relief</a:t>
+                      </a:r>
+                      <a:endParaRPr lang="en-US" sz="2200" dirty="0">
+                        <a:latin typeface="Calibri" charset="0"/>
+                        <a:ea typeface="Calibri" charset="0"/>
+                        <a:cs typeface="Calibri" charset="0"/>
+                      </a:endParaRPr>
+                    </a:p>
+                  </a:txBody>
+                  <a:tcPr marL="73152" marR="73152" marT="73152" marB="73152" anchor="ctr">
+                    <a:lnL w="12700" cap="flat" cmpd="sng" algn="ctr">
+                      <a:solidFill>
+                        <a:srgbClr val="BBBBBB"/>
+                      </a:solidFill>
+                      <a:prstDash val="solid"/>
+                      <a:round/>
+                      <a:headEnd type="none" w="med" len="med"/>
+                      <a:tailEnd type="none" w="med" len="med"/>
+                    </a:lnL>
+                    <a:lnR w="12700" cap="flat" cmpd="sng" algn="ctr">
+                      <a:solidFill>
+                        <a:srgbClr val="BBBBBB"/>
+                      </a:solidFill>
+                      <a:prstDash val="solid"/>
+                      <a:round/>
+                      <a:headEnd type="none" w="med" len="med"/>
+                      <a:tailEnd type="none" w="med" len="med"/>
+                    </a:lnR>
+                    <a:lnT w="12700" cap="flat" cmpd="sng" algn="ctr">
+                      <a:solidFill>
+                        <a:srgbClr val="BBBBBB"/>
+                      </a:solidFill>
+                      <a:prstDash val="solid"/>
+                      <a:round/>
+                      <a:headEnd type="none" w="med" len="med"/>
+                      <a:tailEnd type="none" w="med" len="med"/>
+                    </a:lnT>
+                    <a:lnB w="12700" cap="flat" cmpd="sng" algn="ctr">
+                      <a:solidFill>
+                        <a:srgbClr val="BBBBBB"/>
+                      </a:solidFill>
+                      <a:prstDash val="solid"/>
+                      <a:round/>
+                      <a:headEnd type="none" w="med" len="med"/>
+                      <a:tailEnd type="none" w="med" len="med"/>
+                    </a:lnB>
+                    <a:solidFill>
+                      <a:srgbClr val="F2F4F8"/>
+                    </a:solidFill>
+                  </a:tcPr>
+                </a:tc>
+                <a:tc>
+                  <a:txBody>
+                    <a:bodyPr/>
+                    <a:lstStyle/>
+                    <a:p>
+                      <a:pPr algn="ctr" indent="0" marL="0">
+                        <a:buNone/>
+                      </a:pPr>
+                      <a:r>
+                        <a:rPr lang="en-US" sz="2200" dirty="0">
+                          <a:solidFill>
+                            <a:srgbClr val="111111"/>
+                          </a:solidFill>
+                          <a:latin typeface="Calibri" pitchFamily="34" charset="0"/>
+                          <a:ea typeface="Calibri" pitchFamily="34" charset="-122"/>
+                          <a:cs typeface="Calibri" pitchFamily="34" charset="-120"/>
+                        </a:rPr>
+                        <a:t>Le relief</a:t>
+                      </a:r>
+                      <a:endParaRPr lang="en-US" sz="2200" dirty="0">
+                        <a:latin typeface="Calibri" charset="0"/>
+                        <a:ea typeface="Calibri" charset="0"/>
+                        <a:cs typeface="Calibri" charset="0"/>
+                      </a:endParaRPr>
+                    </a:p>
+                  </a:txBody>
+                  <a:tcPr marL="73152" marR="73152" marT="73152" marB="73152" anchor="ctr">
+                    <a:lnL w="12700" cap="flat" cmpd="sng" algn="ctr">
+                      <a:solidFill>
+                        <a:srgbClr val="BBBBBB"/>
+                      </a:solidFill>
+                      <a:prstDash val="solid"/>
+                      <a:round/>
+                      <a:headEnd type="none" w="med" len="med"/>
+                      <a:tailEnd type="none" w="med" len="med"/>
+                    </a:lnL>
+                    <a:lnR w="12700" cap="flat" cmpd="sng" algn="ctr">
+                      <a:solidFill>
+                        <a:srgbClr val="BBBBBB"/>
+                      </a:solidFill>
+                      <a:prstDash val="solid"/>
+                      <a:round/>
+                      <a:headEnd type="none" w="med" len="med"/>
+                      <a:tailEnd type="none" w="med" len="med"/>
+                    </a:lnR>
+                    <a:lnT w="12700" cap="flat" cmpd="sng" algn="ctr">
+                      <a:solidFill>
+                        <a:srgbClr val="BBBBBB"/>
+                      </a:solidFill>
+                      <a:prstDash val="solid"/>
+                      <a:round/>
+                      <a:headEnd type="none" w="med" len="med"/>
+                      <a:tailEnd type="none" w="med" len="med"/>
+                    </a:lnT>
+                    <a:lnB w="12700" cap="flat" cmpd="sng" algn="ctr">
+                      <a:solidFill>
+                        <a:srgbClr val="BBBBBB"/>
+                      </a:solidFill>
+                      <a:prstDash val="solid"/>
+                      <a:round/>
+                      <a:headEnd type="none" w="med" len="med"/>
+                      <a:tailEnd type="none" w="med" len="med"/>
+                    </a:lnB>
+                    <a:solidFill>
+                      <a:srgbClr val="F2F4F8"/>
+                    </a:solidFill>
+                  </a:tcPr>
+                </a:tc>
+              </a:tr>
+              <a:tr h="0">
+                <a:tc>
+                  <a:txBody>
+                    <a:bodyPr/>
+                    <a:lstStyle/>
+                    <a:p>
+                      <a:pPr algn="ctr" indent="0" marL="0">
+                        <a:buNone/>
+                      </a:pPr>
+                      <a:r>
+                        <a:rPr lang="en-US" sz="2200" dirty="0">
+                          <a:solidFill>
+                            <a:srgbClr val="111111"/>
+                          </a:solidFill>
+                          <a:latin typeface="Calibri" pitchFamily="34" charset="0"/>
+                          <a:ea typeface="Calibri" pitchFamily="34" charset="-122"/>
+                          <a:cs typeface="Calibri" pitchFamily="34" charset="-120"/>
+                        </a:rPr>
+                        <a:t>Vegetation</a:t>
+                      </a:r>
+                      <a:endParaRPr lang="en-US" sz="2200" dirty="0">
+                        <a:latin typeface="Calibri" charset="0"/>
+                        <a:ea typeface="Calibri" charset="0"/>
+                        <a:cs typeface="Calibri" charset="0"/>
+                      </a:endParaRPr>
+                    </a:p>
+                  </a:txBody>
+                  <a:tcPr marL="73152" marR="73152" marT="73152" marB="73152" anchor="ctr">
+                    <a:lnL w="12700" cap="flat" cmpd="sng" algn="ctr">
+                      <a:solidFill>
+                        <a:srgbClr val="BBBBBB"/>
+                      </a:solidFill>
+                      <a:prstDash val="solid"/>
+                      <a:round/>
+                      <a:headEnd type="none" w="med" len="med"/>
+                      <a:tailEnd type="none" w="med" len="med"/>
+                    </a:lnL>
+                    <a:lnR w="12700" cap="flat" cmpd="sng" algn="ctr">
+                      <a:solidFill>
+                        <a:srgbClr val="BBBBBB"/>
+                      </a:solidFill>
+                      <a:prstDash val="solid"/>
+                      <a:round/>
+                      <a:headEnd type="none" w="med" len="med"/>
+                      <a:tailEnd type="none" w="med" len="med"/>
+                    </a:lnR>
+                    <a:lnT w="12700" cap="flat" cmpd="sng" algn="ctr">
+                      <a:solidFill>
+                        <a:srgbClr val="BBBBBB"/>
+                      </a:solidFill>
+                      <a:prstDash val="solid"/>
+                      <a:round/>
+                      <a:headEnd type="none" w="med" len="med"/>
+                      <a:tailEnd type="none" w="med" len="med"/>
+                    </a:lnT>
+                    <a:lnB w="12700" cap="flat" cmpd="sng" algn="ctr">
+                      <a:solidFill>
+                        <a:srgbClr val="BBBBBB"/>
+                      </a:solidFill>
+                      <a:prstDash val="solid"/>
+                      <a:round/>
+                      <a:headEnd type="none" w="med" len="med"/>
+                      <a:tailEnd type="none" w="med" len="med"/>
+                    </a:lnB>
+                    <a:solidFill>
+                      <a:srgbClr val="FFFFFF"/>
+                    </a:solidFill>
+                  </a:tcPr>
+                </a:tc>
+                <a:tc>
+                  <a:txBody>
+                    <a:bodyPr/>
+                    <a:lstStyle/>
+                    <a:p>
+                      <a:pPr algn="ctr" indent="0" marL="0">
+                        <a:buNone/>
+                      </a:pPr>
+                      <a:r>
+                        <a:rPr lang="en-US" sz="2200" dirty="0">
+                          <a:solidFill>
+                            <a:srgbClr val="111111"/>
+                          </a:solidFill>
+                          <a:latin typeface="Calibri" pitchFamily="34" charset="0"/>
+                          <a:ea typeface="Calibri" pitchFamily="34" charset="-122"/>
+                          <a:cs typeface="Calibri" pitchFamily="34" charset="-120"/>
+                        </a:rPr>
+                        <a:t>La végétation</a:t>
                       </a:r>
                       <a:endParaRPr lang="en-US" sz="2200" dirty="0">
                         <a:latin typeface="Calibri" charset="0"/>
@@ -18403,7 +20418,7 @@
                           <a:ea typeface="Calibri" pitchFamily="34" charset="-122"/>
                           <a:cs typeface="Calibri" pitchFamily="34" charset="-120"/>
                         </a:rPr>
-                        <a:t>La pluie acide</a:t>
+                        <a:t>Les pluies acides</a:t>
                       </a:r>
                       <a:endParaRPr lang="en-US" sz="2200" dirty="0">
                         <a:latin typeface="Calibri" charset="0"/>
@@ -18501,7 +20516,7 @@
             <a:pPr algn="ctr"/>
             <a:fld id="{F7021451-1387-4CA6-816F-3879F97B5CBC}" type="slidenum">
               <a:rPr b="1" lang="en-US"/>
-              <a:t>49</a:t>
+              <a:t>54</a:t>
             </a:fld>
             <a:endParaRPr lang="en-US"/>
           </a:p>
@@ -18515,9 +20530,9 @@
 </p:sld>
 </file>
 
-<file path=ppt/slides/slide5.xml><?xml version="1.0" encoding="utf-8"?>
+<file path=ppt/slides/slide55.xml><?xml version="1.0" encoding="utf-8"?>
 <p:sld xmlns:a="http://schemas.openxmlformats.org/drawingml/2006/main" xmlns:r="http://schemas.openxmlformats.org/officeDocument/2006/relationships" xmlns:p="http://schemas.openxmlformats.org/presentationml/2006/main">
-  <p:cSld name="Slide 5">
+  <p:cSld name="Slide 55">
     <p:spTree>
       <p:nvGrpSpPr>
         <p:cNvPr id="1" name=""/>
@@ -18565,225 +20580,6 @@
                 <a:ea typeface="Calibri" pitchFamily="34" charset="-122"/>
                 <a:cs typeface="Calibri" pitchFamily="34" charset="-120"/>
               </a:rPr>
-              <a:t>HOMEWORK CORRECTION</a:t>
-            </a:r>
-            <a:endParaRPr lang="en-US" sz="1400" dirty="0"/>
-          </a:p>
-        </p:txBody>
-      </p:sp>
-      <p:pic>
-        <p:nvPicPr>
-          <p:cNvPr id="3" name="Image 0" descr="/home/claude/f4/img/minesec_sheet.png">    </p:cNvPr>
-          <p:cNvPicPr>
-            <a:picLocks noChangeAspect="1"/>
-          </p:cNvPicPr>
-          <p:nvPr/>
-        </p:nvPicPr>
-        <p:blipFill>
-          <a:blip r:embed="rId1"/>
-          <a:stretch>
-            <a:fillRect/>
-          </a:stretch>
-        </p:blipFill>
-        <p:spPr>
-          <a:xfrm>
-            <a:off x="0" y="658368"/>
-            <a:ext cx="5120640" cy="5833872"/>
-          </a:xfrm>
-          <a:prstGeom prst="rect">
-            <a:avLst/>
-          </a:prstGeom>
-        </p:spPr>
-      </p:pic>
-      <p:sp>
-        <p:nvSpPr>
-          <p:cNvPr id="4" name="Text 1"/>
-          <p:cNvSpPr/>
-          <p:nvPr/>
-        </p:nvSpPr>
-        <p:spPr>
-          <a:xfrm>
-            <a:off x="5349240" y="1005840"/>
-            <a:ext cx="6522415" cy="731520"/>
-          </a:xfrm>
-          <a:prstGeom prst="rect">
-            <a:avLst/>
-          </a:prstGeom>
-          <a:noFill/>
-          <a:ln/>
-        </p:spPr>
-        <p:txBody>
-          <a:bodyPr wrap="square" lIns="0" tIns="0" rIns="0" bIns="0" rtlCol="0" anchor="ctr">
-            <a:normAutofit/>
-          </a:bodyPr>
-          <a:lstStyle/>
-          <a:p>
-            <a:pPr algn="ctr" indent="0" marL="0">
-              <a:buNone/>
-            </a:pPr>
-            <a:r>
-              <a:rPr lang="en-US" sz="3600" b="1" dirty="0">
-                <a:solidFill>
-                  <a:srgbClr val="990011"/>
-                </a:solidFill>
-                <a:latin typeface="Times New Roman" pitchFamily="34" charset="0"/>
-                <a:ea typeface="Times New Roman" pitchFamily="34" charset="-122"/>
-                <a:cs typeface="Times New Roman" pitchFamily="34" charset="-120"/>
-              </a:rPr>
-              <a:t>Correction: Possible Answer</a:t>
-            </a:r>
-            <a:endParaRPr lang="en-US" sz="3600" dirty="0"/>
-          </a:p>
-        </p:txBody>
-      </p:sp>
-      <p:sp>
-        <p:nvSpPr>
-          <p:cNvPr id="5" name="Text 2"/>
-          <p:cNvSpPr/>
-          <p:nvPr/>
-        </p:nvSpPr>
-        <p:spPr>
-          <a:xfrm>
-            <a:off x="5349240" y="1783080"/>
-            <a:ext cx="6522415" cy="4663440"/>
-          </a:xfrm>
-          <a:prstGeom prst="rect">
-            <a:avLst/>
-          </a:prstGeom>
-          <a:noFill/>
-          <a:ln/>
-        </p:spPr>
-        <p:txBody>
-          <a:bodyPr wrap="square" lIns="0" tIns="0" rIns="0" bIns="0" rtlCol="0" anchor="t"/>
-          <a:lstStyle/>
-          <a:p>
-            <a:pPr algn="l" indent="0" marL="0">
-              <a:spcAft>
-                <a:spcPts val="800"/>
-              </a:spcAft>
-              <a:buNone/>
-            </a:pPr>
-            <a:r>
-              <a:rPr lang="en-US" sz="4000" dirty="0">
-                <a:solidFill>
-                  <a:srgbClr val="111111"/>
-                </a:solidFill>
-                <a:latin typeface="Times New Roman" pitchFamily="34" charset="0"/>
-                <a:ea typeface="Times New Roman" pitchFamily="34" charset="-122"/>
-                <a:cs typeface="Times New Roman" pitchFamily="34" charset="-120"/>
-              </a:rPr>
-              <a:t>Rocks in the wet South are more deeply weathered, because heat and water speed up chemical weathering. In the dry North, weathering is mainly physical and shallow.</a:t>
-            </a:r>
-            <a:endParaRPr lang="en-US" sz="4000" dirty="0"/>
-          </a:p>
-        </p:txBody>
-      </p:sp>
-      <p:sp>
-        <p:nvSpPr>
-          <p:cNvPr id="25" name="Slide Number Placeholder 0"/>
-          <p:cNvSpPr>
-            <a:spLocks noGrp="1"/>
-          </p:cNvSpPr>
-          <p:nvPr>
-            <p:ph type="sldNum" sz="quarter" idx="4294967295"/>
-          </p:nvPr>
-        </p:nvSpPr>
-        <p:spPr>
-          <a:xfrm>
-            <a:off x="27432" y="91440"/>
-            <a:ext cx="585216" cy="475488"/>
-          </a:xfrm>
-          <a:prstGeom prst="rect">
-            <a:avLst/>
-          </a:prstGeom>
-          <a:extLst>
-            <a:ext uri="{C572A759-6A51-4108-AA02-DFA0A04FC94B}">
-              <ma14:wrappingTextBoxFlag xmlns:ma14="http://schemas.microsoft.com/office/mac/drawingml/2011/main" val="0"/>
-            </a:ext>
-          </a:extLst>
-        </p:spPr>
-        <p:txBody>
-          <a:bodyPr/>
-          <a:lstStyle>
-            <a:lvl1pPr>
-              <a:defRPr sz="2000">
-                <a:solidFill>
-                  <a:srgbClr val="FFFFFF"/>
-                </a:solidFill>
-                <a:latin typeface="Calibri"/>
-                <a:ea typeface="Calibri"/>
-                <a:cs typeface="Calibri"/>
-              </a:defRPr>
-            </a:lvl1pPr>
-          </a:lstStyle>
-          <a:p>
-            <a:pPr algn="ctr"/>
-            <a:fld id="{F7021451-1387-4CA6-816F-3879F97B5CBC}" type="slidenum">
-              <a:rPr b="1" lang="en-US"/>
-              <a:t>5</a:t>
-            </a:fld>
-            <a:endParaRPr lang="en-US"/>
-          </a:p>
-        </p:txBody>
-      </p:sp>
-    </p:spTree>
-  </p:cSld>
-  <p:clrMapOvr>
-    <a:masterClrMapping/>
-  </p:clrMapOvr>
-</p:sld>
-</file>
-
-<file path=ppt/slides/slide50.xml><?xml version="1.0" encoding="utf-8"?>
-<p:sld xmlns:a="http://schemas.openxmlformats.org/drawingml/2006/main" xmlns:r="http://schemas.openxmlformats.org/officeDocument/2006/relationships" xmlns:p="http://schemas.openxmlformats.org/presentationml/2006/main">
-  <p:cSld name="Slide 50">
-    <p:spTree>
-      <p:nvGrpSpPr>
-        <p:cNvPr id="1" name=""/>
-        <p:cNvGrpSpPr/>
-        <p:nvPr/>
-      </p:nvGrpSpPr>
-      <p:grpSpPr>
-        <a:xfrm>
-          <a:off x="0" y="0"/>
-          <a:ext cx="0" cy="0"/>
-          <a:chOff x="0" y="0"/>
-          <a:chExt cx="0" cy="0"/>
-        </a:xfrm>
-      </p:grpSpPr>
-      <p:sp>
-        <p:nvSpPr>
-          <p:cNvPr id="2" name="Text 0"/>
-          <p:cNvSpPr/>
-          <p:nvPr/>
-        </p:nvSpPr>
-        <p:spPr>
-          <a:xfrm>
-            <a:off x="457200" y="713232"/>
-            <a:ext cx="11368735" cy="274320"/>
-          </a:xfrm>
-          <a:prstGeom prst="rect">
-            <a:avLst/>
-          </a:prstGeom>
-          <a:noFill/>
-          <a:ln/>
-        </p:spPr>
-        <p:txBody>
-          <a:bodyPr wrap="square" lIns="0" tIns="0" rIns="0" bIns="0" rtlCol="0" anchor="ctr"/>
-          <a:lstStyle/>
-          <a:p>
-            <a:pPr algn="r" indent="0" marL="0">
-              <a:buNone/>
-            </a:pPr>
-            <a:r>
-              <a:rPr lang="en-US" sz="1400" b="1" dirty="0">
-                <a:solidFill>
-                  <a:srgbClr val="1C3F6E"/>
-                </a:solidFill>
-                <a:latin typeface="Calibri" pitchFamily="34" charset="0"/>
-                <a:ea typeface="Calibri" pitchFamily="34" charset="-122"/>
-                <a:cs typeface="Calibri" pitchFamily="34" charset="-120"/>
-              </a:rPr>
               <a:t>LOGBOOK</a:t>
             </a:r>
             <a:endParaRPr lang="en-US" sz="1400" dirty="0"/>
@@ -18831,7 +20627,7 @@
       </p:sp>
       <p:graphicFrame>
         <p:nvGraphicFramePr>
-          <p:cNvPr id="51" name="Table 0"/>
+          <p:cNvPr id="56" name="Table 0"/>
           <p:cNvGraphicFramePr>
             <a:graphicFrameLocks noGrp="1"/>
           </p:cNvGraphicFramePr>
@@ -19217,7 +21013,7 @@
                           <a:ea typeface="Calibri" pitchFamily="34" charset="-122"/>
                           <a:cs typeface="Calibri" pitchFamily="34" charset="-120"/>
                         </a:rPr>
-                        <a:t>Use Peltier's graph to explain the effect of climate. Explain the influence of rock type and relief. Explain the role of vegetation and people.</a:t>
+                        <a:t>Explain the role of climate and read Peltier's diagram. Explain the role of rock characteristics. Explain the role of relief. Explain the roles of vegetation and human activities.</a:t>
                       </a:r>
                       <a:endParaRPr lang="en-US" sz="1600" dirty="0">
                         <a:latin typeface="Calibri" charset="0"/>
@@ -19355,7 +21151,7 @@
                           <a:ea typeface="Calibri" pitchFamily="34" charset="-122"/>
                           <a:cs typeface="Calibri" pitchFamily="34" charset="-120"/>
                         </a:rPr>
-                        <a:t>Learners are able to explain why weathering is stronger in some places than in others.</a:t>
+                        <a:t>Learners are able to explain why weathering is faster in some places and apply this to Garoua.</a:t>
                       </a:r>
                       <a:endParaRPr lang="en-US" sz="1600" dirty="0">
                         <a:latin typeface="Calibri" charset="0"/>
@@ -19453,7 +21249,7 @@
             <a:pPr algn="ctr"/>
             <a:fld id="{F7021451-1387-4CA6-816F-3879F97B5CBC}" type="slidenum">
               <a:rPr b="1" lang="en-US"/>
-              <a:t>50</a:t>
+              <a:t>55</a:t>
             </a:fld>
             <a:endParaRPr lang="en-US"/>
           </a:p>
@@ -19467,9 +21263,9 @@
 </p:sld>
 </file>
 
-<file path=ppt/slides/slide51.xml><?xml version="1.0" encoding="utf-8"?>
+<file path=ppt/slides/slide56.xml><?xml version="1.0" encoding="utf-8"?>
 <p:sld xmlns:a="http://schemas.openxmlformats.org/drawingml/2006/main" xmlns:r="http://schemas.openxmlformats.org/officeDocument/2006/relationships" xmlns:p="http://schemas.openxmlformats.org/presentationml/2006/main">
-  <p:cSld name="Slide 51">
+  <p:cSld name="Slide 56">
     <p:spTree>
       <p:nvGrpSpPr>
         <p:cNvPr id="1" name=""/>
@@ -19564,7 +21360,7 @@
       </p:sp>
       <p:graphicFrame>
         <p:nvGraphicFramePr>
-          <p:cNvPr id="52" name="Table 0"/>
+          <p:cNvPr id="57" name="Table 0"/>
           <p:cNvGraphicFramePr>
             <a:graphicFrameLocks noGrp="1"/>
           </p:cNvGraphicFramePr>
@@ -19674,7 +21470,7 @@
                           <a:ea typeface="Calibri" pitchFamily="34" charset="-122"/>
                           <a:cs typeface="Calibri" pitchFamily="34" charset="-120"/>
                         </a:rPr>
-                        <a:t>DEFINITIONS; Climate; Geology, Relief, Vegetation and Man.</a:t>
+                        <a:t>DEFINITIONS; Climate; Geology (Rock Characteristics); Relief, Vegetation and Human Activities.</a:t>
                       </a:r>
                       <a:endParaRPr lang="en-US" sz="1600" dirty="0">
                         <a:latin typeface="Calibri" charset="0"/>
@@ -19950,7 +21746,7 @@
                           <a:ea typeface="Calibri" pitchFamily="34" charset="-122"/>
                           <a:cs typeface="Calibri" pitchFamily="34" charset="-120"/>
                         </a:rPr>
-                        <a:t>List three useful materials that come from weathered rock (for example sand, clay, laterite).</a:t>
+                        <a:t>Define regolith.</a:t>
                       </a:r>
                       <a:endParaRPr lang="en-US" sz="1600" dirty="0">
                         <a:latin typeface="Calibri" charset="0"/>
@@ -20324,7 +22120,7 @@
             <a:pPr algn="ctr"/>
             <a:fld id="{F7021451-1387-4CA6-816F-3879F97B5CBC}" type="slidenum">
               <a:rPr b="1" lang="en-US"/>
-              <a:t>51</a:t>
+              <a:t>56</a:t>
             </a:fld>
             <a:endParaRPr lang="en-US"/>
           </a:p>
@@ -20338,9 +22134,9 @@
 </p:sld>
 </file>
 
-<file path=ppt/slides/slide52.xml><?xml version="1.0" encoding="utf-8"?>
+<file path=ppt/slides/slide57.xml><?xml version="1.0" encoding="utf-8"?>
 <p:sld xmlns:a="http://schemas.openxmlformats.org/drawingml/2006/main" xmlns:r="http://schemas.openxmlformats.org/officeDocument/2006/relationships" xmlns:p="http://schemas.openxmlformats.org/presentationml/2006/main">
-  <p:cSld name="Slide 52">
+  <p:cSld name="Slide 57">
     <p:spTree>
       <p:nvGrpSpPr>
         <p:cNvPr id="1" name=""/>
@@ -20517,7 +22313,7 @@
                 <a:ea typeface="Calibri" pitchFamily="34" charset="-122"/>
                 <a:cs typeface="Calibri" pitchFamily="34" charset="-120"/>
               </a:rPr>
-              <a:t>Without the projector (Activity 1): draw the graph with two axes: temperature and rainfall.</a:t>
+              <a:t>Without the projector (Activity 1): draw the two axes of the diagram.</a:t>
             </a:r>
             <a:endParaRPr lang="en-US" sz="2000" dirty="0"/>
           </a:p>
@@ -20538,7 +22334,7 @@
                 <a:ea typeface="Calibri" pitchFamily="34" charset="-122"/>
                 <a:cs typeface="Calibri" pitchFamily="34" charset="-120"/>
               </a:rPr>
-              <a:t>Without the projector (Activity 2): describe road cuttings in the South.</a:t>
+              <a:t>Without the projector (Activity 2): show a handful of red soil.</a:t>
             </a:r>
             <a:endParaRPr lang="en-US" sz="2000" dirty="0"/>
           </a:p>
@@ -20559,7 +22355,7 @@
                 <a:ea typeface="Calibri" pitchFamily="34" charset="-122"/>
                 <a:cs typeface="Calibri" pitchFamily="34" charset="-120"/>
               </a:rPr>
-              <a:t>Without the projector (Activity 3): drop chalk in vinegar.</a:t>
+              <a:t>Without the projector (Activity 3): drop vinegar on chalk.</a:t>
             </a:r>
             <a:endParaRPr lang="en-US" sz="2000" dirty="0"/>
           </a:p>
@@ -20580,7 +22376,7 @@
                 <a:ea typeface="Calibri" pitchFamily="34" charset="-122"/>
                 <a:cs typeface="Calibri" pitchFamily="34" charset="-120"/>
               </a:rPr>
-              <a:t>Without the projector (Activity 4): compare a steep slope and a flat plain.</a:t>
+              <a:t>Without the projector (Activity 4): compare a hill and a plain.</a:t>
             </a:r>
             <a:endParaRPr lang="en-US" sz="2000" dirty="0"/>
           </a:p>
@@ -20601,7 +22397,7 @@
                 <a:ea typeface="Calibri" pitchFamily="34" charset="-122"/>
                 <a:cs typeface="Calibri" pitchFamily="34" charset="-120"/>
               </a:rPr>
-              <a:t>Without the projector (Activity 5): ask where stones are quarried near the school.</a:t>
+              <a:t>Without the projector (Activity 5): list human activities that expose rock.</a:t>
             </a:r>
             <a:endParaRPr lang="en-US" sz="2000" dirty="0"/>
           </a:p>
@@ -20649,7 +22445,7 @@
             <a:pPr algn="ctr"/>
             <a:fld id="{F7021451-1387-4CA6-816F-3879F97B5CBC}" type="slidenum">
               <a:rPr b="1" lang="en-US"/>
-              <a:t>52</a:t>
+              <a:t>57</a:t>
             </a:fld>
             <a:endParaRPr lang="en-US"/>
           </a:p>
@@ -20663,9 +22459,9 @@
 </p:sld>
 </file>
 
-<file path=ppt/slides/slide53.xml><?xml version="1.0" encoding="utf-8"?>
+<file path=ppt/slides/slide58.xml><?xml version="1.0" encoding="utf-8"?>
 <p:sld xmlns:a="http://schemas.openxmlformats.org/drawingml/2006/main" xmlns:r="http://schemas.openxmlformats.org/officeDocument/2006/relationships" xmlns:p="http://schemas.openxmlformats.org/presentationml/2006/main">
-  <p:cSld name="Slide 53">
+  <p:cSld name="Slide 58">
     <p:spTree>
       <p:nvGrpSpPr>
         <p:cNvPr id="1" name=""/>
@@ -20736,7 +22532,7 @@
         <p:spPr>
           <a:xfrm>
             <a:off x="0" y="658368"/>
-            <a:ext cx="3840480" cy="5833872"/>
+            <a:ext cx="2468880" cy="5833872"/>
           </a:xfrm>
           <a:prstGeom prst="rect">
             <a:avLst/>
@@ -20751,8 +22547,8 @@
         </p:nvSpPr>
         <p:spPr>
           <a:xfrm>
-            <a:off x="4069080" y="1005840"/>
-            <a:ext cx="7802575" cy="731520"/>
+            <a:off x="2697480" y="1005840"/>
+            <a:ext cx="9174175" cy="731520"/>
           </a:xfrm>
           <a:prstGeom prst="rect">
             <a:avLst/>
@@ -20792,8 +22588,8 @@
         </p:nvSpPr>
         <p:spPr>
           <a:xfrm>
-            <a:off x="4069080" y="1783080"/>
-            <a:ext cx="7802575" cy="4663440"/>
+            <a:off x="2697480" y="1783080"/>
+            <a:ext cx="9174175" cy="4663440"/>
           </a:xfrm>
           <a:prstGeom prst="rect">
             <a:avLst/>
@@ -20821,7 +22617,7 @@
                 <a:ea typeface="Calibri" pitchFamily="34" charset="-122"/>
                 <a:cs typeface="Calibri" pitchFamily="34" charset="-120"/>
               </a:rPr>
-              <a:t>National Geography Syllabus, MINESEC/IGE/IP-SS, 2019 — Module 2 (Geomorphology).</a:t>
+              <a:t>Geography Syllabus for Sixth Forms (Lower and Upper Sixth), MINESEC, 2019 — Module 2 (Geomorphology).</a:t>
             </a:r>
             <a:endParaRPr lang="en-US" sz="1800" dirty="0"/>
           </a:p>
@@ -20842,7 +22638,7 @@
                 <a:ea typeface="Calibri" pitchFamily="34" charset="-122"/>
                 <a:cs typeface="Calibri" pitchFamily="34" charset="-120"/>
               </a:rPr>
-              <a:t>Photo, Activity 2: “in the middle of nowhere, morocco” by mariusz kluzniak, CC BY-NC-ND 2.0, via Flickr (https://www.flickr.com/photos/39997856@N03/8398997251)</a:t>
+              <a:t>Teacher's course notes: Mr KAMDEM E., Geomorphology (LSA), GBHS Garoua, 2026.</a:t>
             </a:r>
             <a:endParaRPr lang="en-US" sz="1800" dirty="0"/>
           </a:p>
@@ -20863,7 +22659,7 @@
                 <a:ea typeface="Calibri" pitchFamily="34" charset="-122"/>
                 <a:cs typeface="Calibri" pitchFamily="34" charset="-120"/>
               </a:rPr>
-              <a:t>Photo, Activity 3: “Songam Cave” by D-Stanley, CC BY 2.0, via Flickr (https://www.flickr.com/photos/79721788@N00/5063216873)</a:t>
+              <a:t>Photo, Activity 2: “Laterite soil bricks in Richard Rebello's farm” by India Water Portal, CC BY-NC-SA 2.0, via Flickr (https://www.flickr.com/photos/21623815@N03/10720461943)</a:t>
             </a:r>
             <a:endParaRPr lang="en-US" sz="1800" dirty="0"/>
           </a:p>
@@ -20884,7 +22680,7 @@
                 <a:ea typeface="Calibri" pitchFamily="34" charset="-122"/>
                 <a:cs typeface="Calibri" pitchFamily="34" charset="-120"/>
               </a:rPr>
-              <a:t>Photo, Activity 4: “Full Screen Plate Tectonics” by subarcticmike, CC BY 2.0, via Flickr (https://www.flickr.com/photos/31856336@N03/3109980958)</a:t>
+              <a:t>Photo, Activity 3: “Songam Cave” by D-Stanley, CC BY 2.0, via Flickr (https://www.flickr.com/photos/79721788@N00/5063216873)</a:t>
             </a:r>
             <a:endParaRPr lang="en-US" sz="1800" dirty="0"/>
           </a:p>
@@ -20905,7 +22701,7 @@
                 <a:ea typeface="Calibri" pitchFamily="34" charset="-122"/>
                 <a:cs typeface="Calibri" pitchFamily="34" charset="-120"/>
               </a:rPr>
-              <a:t>Photo, Activity 5: “Marble quarry, Carrara” by Russell Carman, CC BY-NC-SA 2.0, via Flickr (https://www.flickr.com/photos/11328254@N02/2095886412)</a:t>
+              <a:t>Photo, Activity 4: “Full Screen Plate Tectonics” by subarcticmike, CC BY 2.0, via Flickr (https://www.flickr.com/photos/31856336@N03/3109980958)</a:t>
             </a:r>
             <a:endParaRPr lang="en-US" sz="1800" dirty="0"/>
           </a:p>
@@ -20926,6 +22722,27 @@
                 <a:ea typeface="Calibri" pitchFamily="34" charset="-122"/>
                 <a:cs typeface="Calibri" pitchFamily="34" charset="-120"/>
               </a:rPr>
+              <a:t>Photo, Activity 5: “Moisturise Daily (Statue at Palladio's Teatro Olimpico), Vicenza” by flatworldsedge, CC BY-SA 2.0, via Flickr (https://www.flickr.com/photos/53196512@N07/5624073650)</a:t>
+            </a:r>
+            <a:endParaRPr lang="en-US" sz="1800" dirty="0"/>
+          </a:p>
+          <a:p>
+            <a:pPr algn="l" marL="342900" indent="-342900">
+              <a:spcAft>
+                <a:spcPts val="800"/>
+              </a:spcAft>
+              <a:buSzPct val="100000"/>
+              <a:buChar char="•"/>
+            </a:pPr>
+            <a:r>
+              <a:rPr lang="en-US" sz="1800" dirty="0">
+                <a:solidFill>
+                  <a:srgbClr val="111111"/>
+                </a:solidFill>
+                <a:latin typeface="Calibri" pitchFamily="34" charset="0"/>
+                <a:ea typeface="Calibri" pitchFamily="34" charset="-122"/>
+                <a:cs typeface="Calibri" pitchFamily="34" charset="-120"/>
+              </a:rPr>
               <a:t>Diagrams and animations: drawn for this lesson (Geography Department).</a:t>
             </a:r>
             <a:endParaRPr lang="en-US" sz="1800" dirty="0"/>
@@ -20974,7 +22791,7 @@
             <a:pPr algn="ctr"/>
             <a:fld id="{F7021451-1387-4CA6-816F-3879F97B5CBC}" type="slidenum">
               <a:rPr b="1" lang="en-US"/>
-              <a:t>53</a:t>
+              <a:t>58</a:t>
             </a:fld>
             <a:endParaRPr lang="en-US"/>
           </a:p>
@@ -21392,7 +23209,7 @@
         <p:spPr>
           <a:xfrm>
             <a:off x="0" y="658368"/>
-            <a:ext cx="5120640" cy="5833872"/>
+            <a:ext cx="1463040" cy="5833872"/>
           </a:xfrm>
           <a:prstGeom prst="rect">
             <a:avLst/>
@@ -21407,8 +23224,8 @@
         </p:nvSpPr>
         <p:spPr>
           <a:xfrm>
-            <a:off x="5349240" y="1005840"/>
-            <a:ext cx="6522415" cy="731520"/>
+            <a:off x="1691640" y="1005840"/>
+            <a:ext cx="10180015" cy="731520"/>
           </a:xfrm>
           <a:prstGeom prst="rect">
             <a:avLst/>
@@ -21448,8 +23265,8 @@
         </p:nvSpPr>
         <p:spPr>
           <a:xfrm>
-            <a:off x="5349240" y="1783080"/>
-            <a:ext cx="6522415" cy="4663440"/>
+            <a:off x="1691640" y="1783080"/>
+            <a:ext cx="10180015" cy="4663440"/>
           </a:xfrm>
           <a:prstGeom prst="rect">
             <a:avLst/>
@@ -21498,7 +23315,7 @@
                 <a:ea typeface="Times New Roman" pitchFamily="34" charset="-122"/>
                 <a:cs typeface="Times New Roman" pitchFamily="34" charset="-120"/>
               </a:rPr>
-              <a:t>Use Peltier's graph to explain the effect of climate.</a:t>
+              <a:t>Explain the role of climate and read Peltier's diagram.</a:t>
             </a:r>
             <a:endParaRPr lang="en-US" sz="4000" dirty="0"/>
           </a:p>
@@ -21520,7 +23337,29 @@
                 <a:ea typeface="Times New Roman" pitchFamily="34" charset="-122"/>
                 <a:cs typeface="Times New Roman" pitchFamily="34" charset="-120"/>
               </a:rPr>
-              <a:t>Explain the influence of rock type and relief.</a:t>
+              <a:t>Explain the role of rock characteristics.</a:t>
+            </a:r>
+            <a:endParaRPr lang="en-US" sz="4000" dirty="0"/>
+          </a:p>
+          <a:p>
+            <a:pPr algn="l" marL="342900" indent="-342900">
+              <a:spcAft>
+                <a:spcPts val="800"/>
+              </a:spcAft>
+              <a:buSzPct val="100000"/>
+              <a:buFont typeface="+mj-lt"/>
+              <a:buAutoNum type="arabicPeriod" startAt="1"/>
+            </a:pPr>
+            <a:r>
+              <a:rPr lang="en-US" sz="4000" dirty="0">
+                <a:solidFill>
+                  <a:srgbClr val="111111"/>
+                </a:solidFill>
+                <a:latin typeface="Times New Roman" pitchFamily="34" charset="0"/>
+                <a:ea typeface="Times New Roman" pitchFamily="34" charset="-122"/>
+                <a:cs typeface="Times New Roman" pitchFamily="34" charset="-120"/>
+              </a:rPr>
+              <a:t>Explain the role of relief.</a:t>
             </a:r>
             <a:endParaRPr lang="en-US" sz="4000" dirty="0"/>
           </a:p>
@@ -21741,7 +23580,7 @@
                 <a:ea typeface="Times New Roman" pitchFamily="34" charset="-122"/>
                 <a:cs typeface="Times New Roman" pitchFamily="34" charset="-120"/>
               </a:rPr>
-              <a:t>Explain the role of vegetation and people.</a:t>
+              <a:t>Explain the roles of vegetation and human activities.</a:t>
             </a:r>
             <a:endParaRPr lang="en-US" sz="4000" dirty="0"/>
           </a:p>
@@ -21961,7 +23800,7 @@
                 <a:ea typeface="Times New Roman" pitchFamily="34" charset="-122"/>
                 <a:cs typeface="Times New Roman" pitchFamily="34" charset="-120"/>
               </a:rPr>
-              <a:t>There are physical, chemical and biological weathering.</a:t>
+              <a:t>Weathering can be mechanical, chemical or biological.</a:t>
             </a:r>
             <a:endParaRPr lang="en-US" sz="4000" dirty="0"/>
           </a:p>
@@ -21982,7 +23821,28 @@
                 <a:ea typeface="Times New Roman" pitchFamily="34" charset="-122"/>
                 <a:cs typeface="Times New Roman" pitchFamily="34" charset="-120"/>
               </a:rPr>
-              <a:t>Weathering breaks rocks in place.</a:t>
+              <a:t>Chemical weathering is fastest where it is hot and wet.</a:t>
+            </a:r>
+            <a:endParaRPr lang="en-US" sz="4000" dirty="0"/>
+          </a:p>
+          <a:p>
+            <a:pPr algn="l" marL="342900" indent="-342900">
+              <a:spcAft>
+                <a:spcPts val="800"/>
+              </a:spcAft>
+              <a:buSzPct val="100000"/>
+              <a:buChar char="•"/>
+            </a:pPr>
+            <a:r>
+              <a:rPr lang="en-US" sz="4000" dirty="0">
+                <a:solidFill>
+                  <a:srgbClr val="111111"/>
+                </a:solidFill>
+                <a:latin typeface="Times New Roman" pitchFamily="34" charset="0"/>
+                <a:ea typeface="Times New Roman" pitchFamily="34" charset="-122"/>
+                <a:cs typeface="Times New Roman" pitchFamily="34" charset="-120"/>
+              </a:rPr>
+              <a:t>Oxidation gives red soils.</a:t>
             </a:r>
             <a:endParaRPr lang="en-US" sz="4000" dirty="0"/>
           </a:p>

--- a/lecons/LSA/Geomorphology/12_LSA_GEOMO_L10_Intensity_and_Factors_of_Weathering.pptx
+++ b/lecons/LSA/Geomorphology/12_LSA_GEOMO_L10_Intensity_and_Factors_of_Weathering.pptx
@@ -63,9 +63,13 @@
     <p:sldId id="311" r:id="rId57"/>
     <p:sldId id="312" r:id="rId58"/>
     <p:sldId id="313" r:id="rId59"/>
+    <p:sldId id="314" r:id="rId60"/>
+    <p:sldId id="315" r:id="rId61"/>
+    <p:sldId id="316" r:id="rId62"/>
+    <p:sldId id="317" r:id="rId63"/>
   </p:sldIdLst>
   <p:notesMasterIdLst>
-    <p:notesMasterId r:id="rId60"/>
+    <p:notesMasterId r:id="rId64"/>
   </p:notesMasterIdLst>
   <p:sldSz cx="12192000" cy="6858000"/>
   <p:notesSz cx="6858000" cy="12192000"/>
@@ -3111,7 +3115,7 @@
           <a:p>
             <a:r>
               <a:rPr lang="en-US" dirty="0"/>
-              <a:t>Let us copy the definitions. The key terms of this lesson are defined as follows. On this slide we have Intensity of weathering and Peltier's diagram. Write each point on a new line, with the key term first, and explain it in your own words when we revise. When you finish, we go to the next slide.</a:t>
+              <a:t>Let us copy the definitions. The key terms of this lesson are defined as follows. On this slide we have Intensity of weathering and Peltier's graph. Write each point on a new line, with the key term first, and explain it in your own words when we revise. When you finish, we go to the next slide.</a:t>
             </a:r>
             <a:endParaRPr lang="en-US" dirty="0"/>
           </a:p>
@@ -3287,7 +3291,7 @@
           <a:p>
             <a:r>
               <a:rPr lang="en-US" dirty="0"/>
-              <a:t>Let us copy Climate. Climate influences weathering as follows. Copy the point on The most important factor on the left, then draw the diagram on the right: peltier's diagram. Give it a title and label it clearly.</a:t>
+              <a:t>Let us copy Climate. Climate influences weathering in the following ways. Copy the point on Temperature on the left, then draw the diagram on the right: peltier's graph. Give it a title and label it clearly.</a:t>
             </a:r>
             <a:endParaRPr lang="en-US" dirty="0"/>
           </a:p>
@@ -3375,7 +3379,7 @@
           <a:p>
             <a:r>
               <a:rPr lang="en-US" dirty="0"/>
-              <a:t>We continue with Climate. On this slide we have Temperature and Moisture. Write each point on a new line, with the key term first, and explain it in your own words when we revise. When you finish, we go to the next slide.</a:t>
+              <a:t>We continue with Climate. Copy the point on Moisture: write the key term first, then its explanation.</a:t>
             </a:r>
             <a:endParaRPr lang="en-US" dirty="0"/>
           </a:p>
@@ -3551,7 +3555,7 @@
           <a:p>
             <a:r>
               <a:rPr lang="en-US" dirty="0"/>
-              <a:t>We continue with Climate. On this slide we have Peltier's diagram. Write each point on a new line, with the key term first, and explain it in your own words when we revise.</a:t>
+              <a:t>Copy the point on Peltier's weathering regions on the left, then draw the diagram on the right: red laterite. Give it a title and label it clearly.</a:t>
             </a:r>
             <a:endParaRPr lang="en-US" dirty="0"/>
           </a:p>
@@ -3639,7 +3643,7 @@
           <a:p>
             <a:r>
               <a:rPr lang="en-US" dirty="0"/>
-              <a:t>Copy the point on Garoua on the left, then draw the diagram on the right: red laterite. Give it a title and label it clearly.</a:t>
+              <a:t>Let us copy Geology (Rock Characteristics). Rock characteristics influence weathering in the following ways. Copy the point on Mineral composition and hardness on the left, then draw the diagram on the right: weathered limestone. Give it a title and label it clearly.</a:t>
             </a:r>
             <a:endParaRPr lang="en-US" dirty="0"/>
           </a:p>
@@ -3727,7 +3731,7 @@
           <a:p>
             <a:r>
               <a:rPr lang="en-US" dirty="0"/>
-              <a:t>Let us copy Geology (Rock Characteristics). Rock characteristics influence weathering as follows. Copy the point on Hardness and minerals on the left, then draw the diagram on the right: dissolved limestone. Give it a title and label it clearly.</a:t>
+              <a:t>We continue with Geology (Rock Characteristics). Copy the point on Structure (joints and bedding): write the key term first, then its explanation.</a:t>
             </a:r>
             <a:endParaRPr lang="en-US" dirty="0"/>
           </a:p>
@@ -3815,7 +3819,7 @@
           <a:p>
             <a:r>
               <a:rPr lang="en-US" dirty="0"/>
-              <a:t>We continue with Geology (Rock Characteristics). On this slide we have Structure and Colour. Write each point on a new line, with the key term first, and explain it in your own words when we revise.</a:t>
+              <a:t>We continue with Geology (Rock Characteristics). Copy the point on Colour and grain size: write the key term first, then its explanation.</a:t>
             </a:r>
             <a:endParaRPr lang="en-US" dirty="0"/>
           </a:p>
@@ -3903,7 +3907,7 @@
           <a:p>
             <a:r>
               <a:rPr lang="en-US" dirty="0"/>
-              <a:t>Let us copy Relief, Vegetation and Human Activities. Relief, vegetation and human activities influence weathering as follows. Copy the point on Steep slopes on the left, then draw the diagram on the right: scree on a slope. Give it a title and label it clearly.</a:t>
+              <a:t>Let us copy Relief. Relief influences weathering in the following ways. Copy the point on Steep slopes on the left, then draw the diagram on the right: scree on a steep slope. Give it a title and label it clearly.</a:t>
             </a:r>
             <a:endParaRPr lang="en-US" dirty="0"/>
           </a:p>
@@ -3991,7 +3995,7 @@
           <a:p>
             <a:r>
               <a:rPr lang="en-US" dirty="0"/>
-              <a:t>We continue with Relief, Vegetation and Human Activities. On this slide we have Gentle slopes and plains and Vegetation. Write each point on a new line, with the key term first, and explain it in your own words when we revise. When you finish, we go to the next slide.</a:t>
+              <a:t>We continue with Relief. Copy the point on Gentle slopes and plains: write the key term first, then its explanation.</a:t>
             </a:r>
             <a:endParaRPr lang="en-US" dirty="0"/>
           </a:p>
@@ -4079,7 +4083,7 @@
           <a:p>
             <a:r>
               <a:rPr lang="en-US" dirty="0"/>
-              <a:t>We continue with Relief, Vegetation and Human Activities. On this slide we have Human activities. Write each point on a new line, with the key term first, and explain it in your own words when we revise.</a:t>
+              <a:t>Let us copy Vegetation. Vegetation influences weathering in the following ways. Copy the point on Increase of weathering: write the key term first, then its explanation.</a:t>
             </a:r>
             <a:endParaRPr lang="en-US" dirty="0"/>
           </a:p>
@@ -4167,7 +4171,7 @@
           <a:p>
             <a:r>
               <a:rPr lang="en-US" dirty="0"/>
-              <a:t>Now let us check what you have understood. Question 1: Why is climate the most important factor of weathering in North Cameroon? Answer in your exercise book.</a:t>
+              <a:t>Copy the point on Protection of rocks on the left, then draw the diagram on the right: the factors of weathering. Give it a title and label it clearly.</a:t>
             </a:r>
             <a:endParaRPr lang="en-US" dirty="0"/>
           </a:p>
@@ -4255,7 +4259,7 @@
           <a:p>
             <a:r>
               <a:rPr lang="en-US" dirty="0"/>
-              <a:t>The expected answer is: strong heat causes exfoliation and speeds up chemical reactions, while the heavy rains provide water for chemical weathering. If you got it right, well done.</a:t>
+              <a:t>Let us copy Human Activities. Human activities influence weathering in the following ways. Copy the point on Quarrying and construction: write the key term first, then its explanation.</a:t>
             </a:r>
             <a:endParaRPr lang="en-US" dirty="0"/>
           </a:p>
@@ -4343,7 +4347,7 @@
           <a:p>
             <a:r>
               <a:rPr lang="en-US" dirty="0"/>
-              <a:t>Now let us check what you have understood. Question 2: How can vegetation both increase and reduce weathering? Answer in your exercise book.</a:t>
+              <a:t>We continue with Human Activities. Copy the point on Agriculture and deforestation: write the key term first, then its explanation.</a:t>
             </a:r>
             <a:endParaRPr lang="en-US" dirty="0"/>
           </a:p>
@@ -4519,7 +4523,7 @@
           <a:p>
             <a:r>
               <a:rPr lang="en-US" dirty="0"/>
-              <a:t>The expected answer is: roots split rocks, but a dense cover protects rocks from sun and rain. If you got it right, well done.</a:t>
+              <a:t>We continue with Human Activities. Copy the point on Pollution: write the key term first, then its explanation.</a:t>
             </a:r>
             <a:endParaRPr lang="en-US" dirty="0"/>
           </a:p>
@@ -4607,7 +4611,7 @@
           <a:p>
             <a:r>
               <a:rPr lang="en-US" dirty="0"/>
-              <a:t>For those who need more practice, fill in the blanks in your exercise book. The answers are: number 1, Peltier; number 2, granite; number 3, chemical.</a:t>
+              <a:t>Now let us check what you have understood. Question 1: Why is climate the most important factor of weathering in North Cameroon? Answer in your exercise book.</a:t>
             </a:r>
             <a:endParaRPr lang="en-US" dirty="0"/>
           </a:p>
@@ -4695,7 +4699,7 @@
           <a:p>
             <a:r>
               <a:rPr lang="en-US" dirty="0"/>
-              <a:t>For your homework: Define regolith. We shall correct it at the beginning of our next lesson.</a:t>
+              <a:t>The expected answer is: strong heat causes exfoliation and speeds up chemical reactions, while the heavy rains provide water for chemical weathering. If you got it right, well done.</a:t>
             </a:r>
             <a:endParaRPr lang="en-US" dirty="0"/>
           </a:p>
@@ -4783,7 +4787,7 @@
           <a:p>
             <a:r>
               <a:rPr lang="en-US" dirty="0"/>
-              <a:t>Our next lesson will be on Lesson 11: The Impact of Weathering. Thank you for your attention, and see you next time.</a:t>
+              <a:t>Now let us check what you have understood. Question 2: How can vegetation both increase and reduce weathering? Answer in your exercise book.</a:t>
             </a:r>
             <a:endParaRPr lang="en-US" dirty="0"/>
           </a:p>
@@ -4871,7 +4875,7 @@
           <a:p>
             <a:r>
               <a:rPr lang="en-US" dirty="0"/>
-              <a:t>Let us play the bilingual game. I say a word in English, and you give me the French word. Then we do the reverse.</a:t>
+              <a:t>The expected answer is: roots split rocks, but a dense cover protects rocks from sun and rain. If you got it right, well done.</a:t>
             </a:r>
             <a:endParaRPr lang="en-US" dirty="0"/>
           </a:p>
@@ -4959,7 +4963,7 @@
           <a:p>
             <a:r>
               <a:rPr lang="en-US" dirty="0"/>
-              <a:t>I record this information in the official logbook of the class after the lesson.</a:t>
+              <a:t>For those who need more practice, fill in the blanks in your exercise book. The answers are: number 1, Peltier; number 2, granite; number 3, chemical.</a:t>
             </a:r>
             <a:endParaRPr lang="en-US" dirty="0"/>
           </a:p>
@@ -5047,7 +5051,7 @@
           <a:p>
             <a:r>
               <a:rPr lang="en-US" dirty="0"/>
-              <a:t>I complete the second page of the logbook: the matter taught, the evaluation, the homework and the attendance.</a:t>
+              <a:t>For your homework: Define regolith. We shall correct it at the beginning of our next lesson.</a:t>
             </a:r>
             <a:endParaRPr lang="en-US" dirty="0"/>
           </a:p>
@@ -5135,7 +5139,7 @@
           <a:p>
             <a:r>
               <a:rPr lang="en-US" dirty="0"/>
-              <a:t>This slide is for me, the teacher: it gives the timing of the lesson and what to do if the projector is not available.</a:t>
+              <a:t>Our next lesson will be on Lesson 11: The Impact of Weathering. Thank you for your attention, and see you next time.</a:t>
             </a:r>
             <a:endParaRPr lang="en-US" dirty="0"/>
           </a:p>
@@ -5223,7 +5227,7 @@
           <a:p>
             <a:r>
               <a:rPr lang="en-US" dirty="0"/>
-              <a:t>These are the references and picture credits used to prepare this lesson.</a:t>
+              <a:t>Let us play the bilingual game. I say a word in English, and you give me the French word. Then we do the reverse.</a:t>
             </a:r>
             <a:endParaRPr lang="en-US" dirty="0"/>
           </a:p>
@@ -5247,6 +5251,94 @@
             <a:fld id="{F7021451-1387-4CA6-816F-3879F97B5CBC}" type="slidenum">
               <a:rPr lang="en-US"/>
               <a:t>58</a:t>
+            </a:fld>
+            <a:endParaRPr lang="en-US"/>
+          </a:p>
+        </p:txBody>
+      </p:sp>
+    </p:spTree>
+    <p:extLst>
+      <p:ext uri="{BB962C8B-B14F-4D97-AF65-F5344CB8AC3E}">
+        <p14:creationId xmlns:p14="http://schemas.microsoft.com/office/powerpoint/2010/main" val="1024086991"/>
+      </p:ext>
+    </p:extLst>
+  </p:cSld>
+  <p:clrMapOvr>
+    <a:masterClrMapping/>
+  </p:clrMapOvr>
+</p:notes>
+</file>
+
+<file path=ppt/notesSlides/notesSlide59.xml><?xml version="1.0" encoding="utf-8"?>
+<p:notes xmlns:a="http://schemas.openxmlformats.org/drawingml/2006/main" xmlns:r="http://schemas.openxmlformats.org/officeDocument/2006/relationships" xmlns:p="http://schemas.openxmlformats.org/presentationml/2006/main">
+  <p:cSld>
+    <p:spTree>
+      <p:nvGrpSpPr>
+        <p:cNvPr id="1" name=""/>
+        <p:cNvGrpSpPr/>
+        <p:nvPr/>
+      </p:nvGrpSpPr>
+      <p:grpSpPr>
+        <a:xfrm>
+          <a:off x="0" y="0"/>
+          <a:ext cx="0" cy="0"/>
+          <a:chOff x="0" y="0"/>
+          <a:chExt cx="0" cy="0"/>
+        </a:xfrm>
+      </p:grpSpPr>
+      <p:sp>
+        <p:nvSpPr>
+          <p:cNvPr id="2" name="Slide Image Placeholder 1"/>
+          <p:cNvSpPr>
+            <a:spLocks noGrp="1" noRot="1" noChangeAspect="1"/>
+          </p:cNvSpPr>
+          <p:nvPr>
+            <p:ph type="sldImg"/>
+          </p:nvPr>
+        </p:nvSpPr>
+        <p:spPr/>
+      </p:sp>
+      <p:sp>
+        <p:nvSpPr>
+          <p:cNvPr id="3" name="Notes Placeholder 2"/>
+          <p:cNvSpPr>
+            <a:spLocks noGrp="1"/>
+          </p:cNvSpPr>
+          <p:nvPr>
+            <p:ph type="body" idx="1"/>
+          </p:nvPr>
+        </p:nvSpPr>
+        <p:spPr/>
+        <p:txBody>
+          <a:bodyPr/>
+          <a:lstStyle/>
+          <a:p>
+            <a:r>
+              <a:rPr lang="en-US" dirty="0"/>
+              <a:t>I record this information in the official logbook of the class after the lesson.</a:t>
+            </a:r>
+            <a:endParaRPr lang="en-US" dirty="0"/>
+          </a:p>
+        </p:txBody>
+      </p:sp>
+      <p:sp>
+        <p:nvSpPr>
+          <p:cNvPr id="4" name="Slide Number Placeholder 3"/>
+          <p:cNvSpPr>
+            <a:spLocks noGrp="1"/>
+          </p:cNvSpPr>
+          <p:nvPr>
+            <p:ph type="sldNum" sz="quarter" idx="10"/>
+          </p:nvPr>
+        </p:nvSpPr>
+        <p:spPr/>
+        <p:txBody>
+          <a:bodyPr/>
+          <a:lstStyle/>
+          <a:p>
+            <a:fld id="{F7021451-1387-4CA6-816F-3879F97B5CBC}" type="slidenum">
+              <a:rPr lang="en-US"/>
+              <a:t>59</a:t>
             </a:fld>
             <a:endParaRPr lang="en-US"/>
           </a:p>
@@ -5335,6 +5427,270 @@
             <a:fld id="{F7021451-1387-4CA6-816F-3879F97B5CBC}" type="slidenum">
               <a:rPr lang="en-US"/>
               <a:t>6</a:t>
+            </a:fld>
+            <a:endParaRPr lang="en-US"/>
+          </a:p>
+        </p:txBody>
+      </p:sp>
+    </p:spTree>
+    <p:extLst>
+      <p:ext uri="{BB962C8B-B14F-4D97-AF65-F5344CB8AC3E}">
+        <p14:creationId xmlns:p14="http://schemas.microsoft.com/office/powerpoint/2010/main" val="1024086991"/>
+      </p:ext>
+    </p:extLst>
+  </p:cSld>
+  <p:clrMapOvr>
+    <a:masterClrMapping/>
+  </p:clrMapOvr>
+</p:notes>
+</file>
+
+<file path=ppt/notesSlides/notesSlide60.xml><?xml version="1.0" encoding="utf-8"?>
+<p:notes xmlns:a="http://schemas.openxmlformats.org/drawingml/2006/main" xmlns:r="http://schemas.openxmlformats.org/officeDocument/2006/relationships" xmlns:p="http://schemas.openxmlformats.org/presentationml/2006/main">
+  <p:cSld>
+    <p:spTree>
+      <p:nvGrpSpPr>
+        <p:cNvPr id="1" name=""/>
+        <p:cNvGrpSpPr/>
+        <p:nvPr/>
+      </p:nvGrpSpPr>
+      <p:grpSpPr>
+        <a:xfrm>
+          <a:off x="0" y="0"/>
+          <a:ext cx="0" cy="0"/>
+          <a:chOff x="0" y="0"/>
+          <a:chExt cx="0" cy="0"/>
+        </a:xfrm>
+      </p:grpSpPr>
+      <p:sp>
+        <p:nvSpPr>
+          <p:cNvPr id="2" name="Slide Image Placeholder 1"/>
+          <p:cNvSpPr>
+            <a:spLocks noGrp="1" noRot="1" noChangeAspect="1"/>
+          </p:cNvSpPr>
+          <p:nvPr>
+            <p:ph type="sldImg"/>
+          </p:nvPr>
+        </p:nvSpPr>
+        <p:spPr/>
+      </p:sp>
+      <p:sp>
+        <p:nvSpPr>
+          <p:cNvPr id="3" name="Notes Placeholder 2"/>
+          <p:cNvSpPr>
+            <a:spLocks noGrp="1"/>
+          </p:cNvSpPr>
+          <p:nvPr>
+            <p:ph type="body" idx="1"/>
+          </p:nvPr>
+        </p:nvSpPr>
+        <p:spPr/>
+        <p:txBody>
+          <a:bodyPr/>
+          <a:lstStyle/>
+          <a:p>
+            <a:r>
+              <a:rPr lang="en-US" dirty="0"/>
+              <a:t>I complete the second page of the logbook: the matter taught, the evaluation, the homework and the attendance.</a:t>
+            </a:r>
+            <a:endParaRPr lang="en-US" dirty="0"/>
+          </a:p>
+        </p:txBody>
+      </p:sp>
+      <p:sp>
+        <p:nvSpPr>
+          <p:cNvPr id="4" name="Slide Number Placeholder 3"/>
+          <p:cNvSpPr>
+            <a:spLocks noGrp="1"/>
+          </p:cNvSpPr>
+          <p:nvPr>
+            <p:ph type="sldNum" sz="quarter" idx="10"/>
+          </p:nvPr>
+        </p:nvSpPr>
+        <p:spPr/>
+        <p:txBody>
+          <a:bodyPr/>
+          <a:lstStyle/>
+          <a:p>
+            <a:fld id="{F7021451-1387-4CA6-816F-3879F97B5CBC}" type="slidenum">
+              <a:rPr lang="en-US"/>
+              <a:t>60</a:t>
+            </a:fld>
+            <a:endParaRPr lang="en-US"/>
+          </a:p>
+        </p:txBody>
+      </p:sp>
+    </p:spTree>
+    <p:extLst>
+      <p:ext uri="{BB962C8B-B14F-4D97-AF65-F5344CB8AC3E}">
+        <p14:creationId xmlns:p14="http://schemas.microsoft.com/office/powerpoint/2010/main" val="1024086991"/>
+      </p:ext>
+    </p:extLst>
+  </p:cSld>
+  <p:clrMapOvr>
+    <a:masterClrMapping/>
+  </p:clrMapOvr>
+</p:notes>
+</file>
+
+<file path=ppt/notesSlides/notesSlide61.xml><?xml version="1.0" encoding="utf-8"?>
+<p:notes xmlns:a="http://schemas.openxmlformats.org/drawingml/2006/main" xmlns:r="http://schemas.openxmlformats.org/officeDocument/2006/relationships" xmlns:p="http://schemas.openxmlformats.org/presentationml/2006/main">
+  <p:cSld>
+    <p:spTree>
+      <p:nvGrpSpPr>
+        <p:cNvPr id="1" name=""/>
+        <p:cNvGrpSpPr/>
+        <p:nvPr/>
+      </p:nvGrpSpPr>
+      <p:grpSpPr>
+        <a:xfrm>
+          <a:off x="0" y="0"/>
+          <a:ext cx="0" cy="0"/>
+          <a:chOff x="0" y="0"/>
+          <a:chExt cx="0" cy="0"/>
+        </a:xfrm>
+      </p:grpSpPr>
+      <p:sp>
+        <p:nvSpPr>
+          <p:cNvPr id="2" name="Slide Image Placeholder 1"/>
+          <p:cNvSpPr>
+            <a:spLocks noGrp="1" noRot="1" noChangeAspect="1"/>
+          </p:cNvSpPr>
+          <p:nvPr>
+            <p:ph type="sldImg"/>
+          </p:nvPr>
+        </p:nvSpPr>
+        <p:spPr/>
+      </p:sp>
+      <p:sp>
+        <p:nvSpPr>
+          <p:cNvPr id="3" name="Notes Placeholder 2"/>
+          <p:cNvSpPr>
+            <a:spLocks noGrp="1"/>
+          </p:cNvSpPr>
+          <p:nvPr>
+            <p:ph type="body" idx="1"/>
+          </p:nvPr>
+        </p:nvSpPr>
+        <p:spPr/>
+        <p:txBody>
+          <a:bodyPr/>
+          <a:lstStyle/>
+          <a:p>
+            <a:r>
+              <a:rPr lang="en-US" dirty="0"/>
+              <a:t>This slide is for me, the teacher: it gives the timing of the lesson and what to do if the projector is not available.</a:t>
+            </a:r>
+            <a:endParaRPr lang="en-US" dirty="0"/>
+          </a:p>
+        </p:txBody>
+      </p:sp>
+      <p:sp>
+        <p:nvSpPr>
+          <p:cNvPr id="4" name="Slide Number Placeholder 3"/>
+          <p:cNvSpPr>
+            <a:spLocks noGrp="1"/>
+          </p:cNvSpPr>
+          <p:nvPr>
+            <p:ph type="sldNum" sz="quarter" idx="10"/>
+          </p:nvPr>
+        </p:nvSpPr>
+        <p:spPr/>
+        <p:txBody>
+          <a:bodyPr/>
+          <a:lstStyle/>
+          <a:p>
+            <a:fld id="{F7021451-1387-4CA6-816F-3879F97B5CBC}" type="slidenum">
+              <a:rPr lang="en-US"/>
+              <a:t>61</a:t>
+            </a:fld>
+            <a:endParaRPr lang="en-US"/>
+          </a:p>
+        </p:txBody>
+      </p:sp>
+    </p:spTree>
+    <p:extLst>
+      <p:ext uri="{BB962C8B-B14F-4D97-AF65-F5344CB8AC3E}">
+        <p14:creationId xmlns:p14="http://schemas.microsoft.com/office/powerpoint/2010/main" val="1024086991"/>
+      </p:ext>
+    </p:extLst>
+  </p:cSld>
+  <p:clrMapOvr>
+    <a:masterClrMapping/>
+  </p:clrMapOvr>
+</p:notes>
+</file>
+
+<file path=ppt/notesSlides/notesSlide62.xml><?xml version="1.0" encoding="utf-8"?>
+<p:notes xmlns:a="http://schemas.openxmlformats.org/drawingml/2006/main" xmlns:r="http://schemas.openxmlformats.org/officeDocument/2006/relationships" xmlns:p="http://schemas.openxmlformats.org/presentationml/2006/main">
+  <p:cSld>
+    <p:spTree>
+      <p:nvGrpSpPr>
+        <p:cNvPr id="1" name=""/>
+        <p:cNvGrpSpPr/>
+        <p:nvPr/>
+      </p:nvGrpSpPr>
+      <p:grpSpPr>
+        <a:xfrm>
+          <a:off x="0" y="0"/>
+          <a:ext cx="0" cy="0"/>
+          <a:chOff x="0" y="0"/>
+          <a:chExt cx="0" cy="0"/>
+        </a:xfrm>
+      </p:grpSpPr>
+      <p:sp>
+        <p:nvSpPr>
+          <p:cNvPr id="2" name="Slide Image Placeholder 1"/>
+          <p:cNvSpPr>
+            <a:spLocks noGrp="1" noRot="1" noChangeAspect="1"/>
+          </p:cNvSpPr>
+          <p:nvPr>
+            <p:ph type="sldImg"/>
+          </p:nvPr>
+        </p:nvSpPr>
+        <p:spPr/>
+      </p:sp>
+      <p:sp>
+        <p:nvSpPr>
+          <p:cNvPr id="3" name="Notes Placeholder 2"/>
+          <p:cNvSpPr>
+            <a:spLocks noGrp="1"/>
+          </p:cNvSpPr>
+          <p:nvPr>
+            <p:ph type="body" idx="1"/>
+          </p:nvPr>
+        </p:nvSpPr>
+        <p:spPr/>
+        <p:txBody>
+          <a:bodyPr/>
+          <a:lstStyle/>
+          <a:p>
+            <a:r>
+              <a:rPr lang="en-US" dirty="0"/>
+              <a:t>These are the references and picture credits used to prepare this lesson.</a:t>
+            </a:r>
+            <a:endParaRPr lang="en-US" dirty="0"/>
+          </a:p>
+        </p:txBody>
+      </p:sp>
+      <p:sp>
+        <p:nvSpPr>
+          <p:cNvPr id="4" name="Slide Number Placeholder 3"/>
+          <p:cNvSpPr>
+            <a:spLocks noGrp="1"/>
+          </p:cNvSpPr>
+          <p:nvPr>
+            <p:ph type="sldNum" sz="quarter" idx="10"/>
+          </p:nvPr>
+        </p:nvSpPr>
+        <p:spPr/>
+        <p:txBody>
+          <a:bodyPr/>
+          <a:lstStyle/>
+          <a:p>
+            <a:fld id="{F7021451-1387-4CA6-816F-3879F97B5CBC}" type="slidenum">
+              <a:rPr lang="en-US"/>
+              <a:t>62</a:t>
             </a:fld>
             <a:endParaRPr lang="en-US"/>
           </a:p>
@@ -14469,7 +14825,7 @@
                 <a:ea typeface="Times New Roman" pitchFamily="34" charset="-122"/>
                 <a:cs typeface="Times New Roman" pitchFamily="34" charset="-120"/>
               </a:rPr>
-              <a:t>Peltier's diagram: </a:t>
+              <a:t>Peltier's graph: </a:t>
             </a:r>
             <a:pPr algn="l" indent="0" marL="0">
               <a:spcAft>
@@ -14486,7 +14842,7 @@
                 <a:ea typeface="Times New Roman" pitchFamily="34" charset="-122"/>
                 <a:cs typeface="Times New Roman" pitchFamily="34" charset="-120"/>
               </a:rPr>
-              <a:t>It is a graph linking mean annual temperature and rainfall to the dominant type of weathering.</a:t>
+              <a:t>It is a graph linking mean annual temperature and rainfall to the dominant type and intensity of weathering.</a:t>
             </a:r>
             <a:endParaRPr lang="en-US" sz="4000" dirty="0"/>
           </a:p>
@@ -14890,7 +15246,7 @@
         <p:spPr>
           <a:xfrm>
             <a:off x="365760" y="1783080"/>
-            <a:ext cx="4846320" cy="4617720"/>
+            <a:ext cx="6035040" cy="4617720"/>
           </a:xfrm>
           <a:prstGeom prst="rect">
             <a:avLst/>
@@ -14909,7 +15265,7 @@
               <a:buNone/>
             </a:pPr>
             <a:r>
-              <a:rPr lang="en-US" sz="3600" i="1" dirty="0">
+              <a:rPr lang="en-US" sz="3200" i="1" dirty="0">
                 <a:solidFill>
                   <a:srgbClr val="111111"/>
                 </a:solidFill>
@@ -14917,9 +15273,9 @@
                 <a:ea typeface="Times New Roman" pitchFamily="34" charset="-122"/>
                 <a:cs typeface="Times New Roman" pitchFamily="34" charset="-120"/>
               </a:rPr>
-              <a:t>Climate influences weathering as follows:</a:t>
-            </a:r>
-            <a:endParaRPr lang="en-US" sz="3600" dirty="0"/>
+              <a:t>Climate influences weathering in the following ways:</a:t>
+            </a:r>
+            <a:endParaRPr lang="en-US" sz="3200" dirty="0"/>
           </a:p>
           <a:p>
             <a:pPr algn="l" indent="0" marL="0">
@@ -14929,7 +15285,7 @@
               <a:buNone/>
             </a:pPr>
             <a:r>
-              <a:rPr lang="en-US" sz="3600" b="1" dirty="0">
+              <a:rPr lang="en-US" sz="3200" b="1" dirty="0">
                 <a:solidFill>
                   <a:srgbClr val="111111"/>
                 </a:solidFill>
@@ -14937,7 +15293,7 @@
                 <a:ea typeface="Times New Roman" pitchFamily="34" charset="-122"/>
                 <a:cs typeface="Times New Roman" pitchFamily="34" charset="-120"/>
               </a:rPr>
-              <a:t>The most important factor: </a:t>
+              <a:t>Temperature: </a:t>
             </a:r>
             <a:pPr algn="l" indent="0" marL="0">
               <a:spcAft>
@@ -14946,7 +15302,7 @@
               <a:buNone/>
             </a:pPr>
             <a:r>
-              <a:rPr lang="en-US" sz="3600" dirty="0">
+              <a:rPr lang="en-US" sz="3200" dirty="0">
                 <a:solidFill>
                   <a:srgbClr val="111111"/>
                 </a:solidFill>
@@ -14954,9 +15310,9 @@
                 <a:ea typeface="Times New Roman" pitchFamily="34" charset="-122"/>
                 <a:cs typeface="Times New Roman" pitchFamily="34" charset="-120"/>
               </a:rPr>
-              <a:t>Temperature and rainfall control both the type and the speed of weathering.</a:t>
-            </a:r>
-            <a:endParaRPr lang="en-US" sz="3600" dirty="0"/>
+              <a:t>High temperatures speed up chemical reactions, which are about twice as fast for each rise of 10 °C. Large daily ranges of temperature, as in deserts and in Garoua in the dry season, cause exfoliation.</a:t>
+            </a:r>
+            <a:endParaRPr lang="en-US" sz="3200" dirty="0"/>
           </a:p>
         </p:txBody>
       </p:sp>
@@ -14976,8 +15332,8 @@
         </p:blipFill>
         <p:spPr>
           <a:xfrm>
-            <a:off x="5349240" y="2409394"/>
-            <a:ext cx="6659575" cy="3017620"/>
+            <a:off x="6537960" y="2678713"/>
+            <a:ext cx="5470855" cy="2478981"/>
           </a:xfrm>
           <a:prstGeom prst="rect">
             <a:avLst/>
@@ -14992,8 +15348,8 @@
         </p:nvSpPr>
         <p:spPr>
           <a:xfrm>
-            <a:off x="5349240" y="6089904"/>
-            <a:ext cx="6659575" cy="347472"/>
+            <a:off x="6537960" y="6089904"/>
+            <a:ext cx="5470855" cy="347472"/>
           </a:xfrm>
           <a:prstGeom prst="rect">
             <a:avLst/>
@@ -15017,7 +15373,7 @@
                 <a:ea typeface="Times New Roman" pitchFamily="34" charset="-122"/>
                 <a:cs typeface="Times New Roman" pitchFamily="34" charset="-120"/>
               </a:rPr>
-              <a:t>Illustration: Peltier's diagram</a:t>
+              <a:t>Illustration: Peltier's graph</a:t>
             </a:r>
             <a:endParaRPr lang="en-US" sz="1600" dirty="0"/>
           </a:p>
@@ -15152,7 +15508,7 @@
         <p:spPr>
           <a:xfrm>
             <a:off x="0" y="658368"/>
-            <a:ext cx="2468880" cy="5833872"/>
+            <a:ext cx="5120640" cy="5833872"/>
           </a:xfrm>
           <a:prstGeom prst="rect">
             <a:avLst/>
@@ -15167,8 +15523,8 @@
         </p:nvSpPr>
         <p:spPr>
           <a:xfrm>
-            <a:off x="2697480" y="1005840"/>
-            <a:ext cx="9174175" cy="731520"/>
+            <a:off x="5349240" y="1005840"/>
+            <a:ext cx="6522415" cy="731520"/>
           </a:xfrm>
           <a:prstGeom prst="rect">
             <a:avLst/>
@@ -15208,8 +15564,8 @@
         </p:nvSpPr>
         <p:spPr>
           <a:xfrm>
-            <a:off x="2697480" y="1783080"/>
-            <a:ext cx="9174175" cy="4663440"/>
+            <a:off x="5349240" y="1783080"/>
+            <a:ext cx="6522415" cy="4663440"/>
           </a:xfrm>
           <a:prstGeom prst="rect">
             <a:avLst/>
@@ -15236,7 +15592,7 @@
                 <a:ea typeface="Times New Roman" pitchFamily="34" charset="-122"/>
                 <a:cs typeface="Times New Roman" pitchFamily="34" charset="-120"/>
               </a:rPr>
-              <a:t>Temperature: </a:t>
+              <a:t>Moisture: </a:t>
             </a:r>
             <a:pPr algn="l" indent="0" marL="0">
               <a:spcAft>
@@ -15253,44 +15609,7 @@
                 <a:ea typeface="Times New Roman" pitchFamily="34" charset="-122"/>
                 <a:cs typeface="Times New Roman" pitchFamily="34" charset="-120"/>
               </a:rPr>
-              <a:t>Large daily ranges cause expansion and contraction (exfoliation), and high temperatures speed up chemical reactions.</a:t>
-            </a:r>
-            <a:endParaRPr lang="en-US" sz="4000" dirty="0"/>
-          </a:p>
-          <a:p>
-            <a:pPr algn="l" indent="0" marL="0">
-              <a:spcAft>
-                <a:spcPts val="800"/>
-              </a:spcAft>
-              <a:buNone/>
-            </a:pPr>
-            <a:r>
-              <a:rPr lang="en-US" sz="4000" b="1" dirty="0">
-                <a:solidFill>
-                  <a:srgbClr val="111111"/>
-                </a:solidFill>
-                <a:latin typeface="Times New Roman" pitchFamily="34" charset="0"/>
-                <a:ea typeface="Times New Roman" pitchFamily="34" charset="-122"/>
-                <a:cs typeface="Times New Roman" pitchFamily="34" charset="-120"/>
-              </a:rPr>
-              <a:t>Moisture: </a:t>
-            </a:r>
-            <a:pPr algn="l" indent="0" marL="0">
-              <a:spcAft>
-                <a:spcPts val="800"/>
-              </a:spcAft>
-              <a:buNone/>
-            </a:pPr>
-            <a:r>
-              <a:rPr lang="en-US" sz="4000" dirty="0">
-                <a:solidFill>
-                  <a:srgbClr val="111111"/>
-                </a:solidFill>
-                <a:latin typeface="Times New Roman" pitchFamily="34" charset="0"/>
-                <a:ea typeface="Times New Roman" pitchFamily="34" charset="-122"/>
-                <a:cs typeface="Times New Roman" pitchFamily="34" charset="-120"/>
-              </a:rPr>
-              <a:t>Water is necessary for chemical weathering, so rainy areas weather faster.</a:t>
+              <a:t>Water is needed for almost all chemical weathering and for frost action. Wet regions therefore weather faster and more deeply than dry regions.</a:t>
             </a:r>
             <a:endParaRPr lang="en-US" sz="4000" dirty="0"/>
           </a:p>
@@ -15647,9 +15966,109 @@
           </a:p>
         </p:txBody>
       </p:sp>
+      <p:sp>
+        <p:nvSpPr>
+          <p:cNvPr id="3" name="Text 1"/>
+          <p:cNvSpPr/>
+          <p:nvPr/>
+        </p:nvSpPr>
+        <p:spPr>
+          <a:xfrm>
+            <a:off x="365760" y="1005840"/>
+            <a:ext cx="11460175" cy="731520"/>
+          </a:xfrm>
+          <a:prstGeom prst="rect">
+            <a:avLst/>
+          </a:prstGeom>
+          <a:noFill/>
+          <a:ln/>
+        </p:spPr>
+        <p:txBody>
+          <a:bodyPr wrap="square" lIns="0" tIns="0" rIns="0" bIns="0" rtlCol="0" anchor="ctr">
+            <a:normAutofit/>
+          </a:bodyPr>
+          <a:lstStyle/>
+          <a:p>
+            <a:pPr algn="ctr" indent="0" marL="0">
+              <a:buNone/>
+            </a:pPr>
+            <a:r>
+              <a:rPr lang="en-US" sz="3600" b="1" dirty="0">
+                <a:solidFill>
+                  <a:srgbClr val="990011"/>
+                </a:solidFill>
+                <a:latin typeface="Times New Roman" pitchFamily="34" charset="0"/>
+                <a:ea typeface="Times New Roman" pitchFamily="34" charset="-122"/>
+                <a:cs typeface="Times New Roman" pitchFamily="34" charset="-120"/>
+              </a:rPr>
+              <a:t>1. Climate</a:t>
+            </a:r>
+            <a:endParaRPr lang="en-US" sz="3600" dirty="0"/>
+          </a:p>
+        </p:txBody>
+      </p:sp>
+      <p:sp>
+        <p:nvSpPr>
+          <p:cNvPr id="4" name="Text 2"/>
+          <p:cNvSpPr/>
+          <p:nvPr/>
+        </p:nvSpPr>
+        <p:spPr>
+          <a:xfrm>
+            <a:off x="365760" y="1783080"/>
+            <a:ext cx="6035040" cy="4617720"/>
+          </a:xfrm>
+          <a:prstGeom prst="rect">
+            <a:avLst/>
+          </a:prstGeom>
+          <a:noFill/>
+          <a:ln/>
+        </p:spPr>
+        <p:txBody>
+          <a:bodyPr wrap="square" lIns="0" tIns="0" rIns="0" bIns="0" rtlCol="0" anchor="t"/>
+          <a:lstStyle/>
+          <a:p>
+            <a:pPr algn="l" indent="0" marL="0">
+              <a:spcAft>
+                <a:spcPts val="800"/>
+              </a:spcAft>
+              <a:buNone/>
+            </a:pPr>
+            <a:r>
+              <a:rPr lang="en-US" sz="3000" b="1" dirty="0">
+                <a:solidFill>
+                  <a:srgbClr val="111111"/>
+                </a:solidFill>
+                <a:latin typeface="Times New Roman" pitchFamily="34" charset="0"/>
+                <a:ea typeface="Times New Roman" pitchFamily="34" charset="-122"/>
+                <a:cs typeface="Times New Roman" pitchFamily="34" charset="-120"/>
+              </a:rPr>
+              <a:t>Peltier's weathering regions: </a:t>
+            </a:r>
+            <a:pPr algn="l" indent="0" marL="0">
+              <a:spcAft>
+                <a:spcPts val="800"/>
+              </a:spcAft>
+              <a:buNone/>
+            </a:pPr>
+            <a:r>
+              <a:rPr lang="en-US" sz="3000" dirty="0">
+                <a:solidFill>
+                  <a:srgbClr val="111111"/>
+                </a:solidFill>
+                <a:latin typeface="Times New Roman" pitchFamily="34" charset="0"/>
+                <a:ea typeface="Times New Roman" pitchFamily="34" charset="-122"/>
+                <a:cs typeface="Times New Roman" pitchFamily="34" charset="-120"/>
+              </a:rPr>
+              <a:t>Peltier showed that chemical weathering is strongest in hot, wet climates, and frost action is strongest in cold, moist climates. In hot or cold deserts, weathering is weak and mostly mechanical, while in Garoua both types act and give deep red soils.</a:t>
+            </a:r>
+            <a:endParaRPr lang="en-US" sz="3000" dirty="0"/>
+          </a:p>
+        </p:txBody>
+      </p:sp>
       <p:pic>
         <p:nvPicPr>
-          <p:cNvPr id="3" name="Image 0" descr="/home/claude/f4/img/minesec_sheet.png">    </p:cNvPr>
+          <p:cNvPr id="5" name="Image 0" descr="/home/claude/f4/img/v2/f2t_laterite.jpg">    </p:cNvPr>
           <p:cNvPicPr>
             <a:picLocks noChangeAspect="1"/>
           </p:cNvPicPr>
@@ -15663,8 +16082,8 @@
         </p:blipFill>
         <p:spPr>
           <a:xfrm>
-            <a:off x="0" y="658368"/>
-            <a:ext cx="3840480" cy="5833872"/>
+            <a:off x="6537960" y="2400042"/>
+            <a:ext cx="5470855" cy="3036325"/>
           </a:xfrm>
           <a:prstGeom prst="rect">
             <a:avLst/>
@@ -15673,14 +16092,14 @@
       </p:pic>
       <p:sp>
         <p:nvSpPr>
-          <p:cNvPr id="4" name="Text 1"/>
+          <p:cNvPr id="6" name="Text 3"/>
           <p:cNvSpPr/>
           <p:nvPr/>
         </p:nvSpPr>
         <p:spPr>
           <a:xfrm>
-            <a:off x="4069080" y="1005840"/>
-            <a:ext cx="7802575" cy="731520"/>
+            <a:off x="6537960" y="6089904"/>
+            <a:ext cx="5470855" cy="347472"/>
           </a:xfrm>
           <a:prstGeom prst="rect">
             <a:avLst/>
@@ -15689,131 +16108,24 @@
           <a:ln/>
         </p:spPr>
         <p:txBody>
-          <a:bodyPr wrap="square" lIns="0" tIns="0" rIns="0" bIns="0" rtlCol="0" anchor="ctr">
-            <a:normAutofit/>
-          </a:bodyPr>
+          <a:bodyPr wrap="square" lIns="0" tIns="0" rIns="0" bIns="0" rtlCol="0" anchor="ctr"/>
           <a:lstStyle/>
           <a:p>
             <a:pPr algn="ctr" indent="0" marL="0">
               <a:buNone/>
             </a:pPr>
             <a:r>
-              <a:rPr lang="en-US" sz="3600" b="1" dirty="0">
-                <a:solidFill>
-                  <a:srgbClr val="990011"/>
+              <a:rPr lang="en-US" sz="1600" i="1" dirty="0">
+                <a:solidFill>
+                  <a:srgbClr val="555555"/>
                 </a:solidFill>
                 <a:latin typeface="Times New Roman" pitchFamily="34" charset="0"/>
                 <a:ea typeface="Times New Roman" pitchFamily="34" charset="-122"/>
                 <a:cs typeface="Times New Roman" pitchFamily="34" charset="-120"/>
               </a:rPr>
-              <a:t>1. Climate (continued)</a:t>
-            </a:r>
-            <a:endParaRPr lang="en-US" sz="3600" dirty="0"/>
-          </a:p>
-        </p:txBody>
-      </p:sp>
-      <p:sp>
-        <p:nvSpPr>
-          <p:cNvPr id="5" name="Text 2"/>
-          <p:cNvSpPr/>
-          <p:nvPr/>
-        </p:nvSpPr>
-        <p:spPr>
-          <a:xfrm>
-            <a:off x="4069080" y="1783080"/>
-            <a:ext cx="7802575" cy="4663440"/>
-          </a:xfrm>
-          <a:prstGeom prst="rect">
-            <a:avLst/>
-          </a:prstGeom>
-          <a:noFill/>
-          <a:ln/>
-        </p:spPr>
-        <p:txBody>
-          <a:bodyPr wrap="square" lIns="0" tIns="0" rIns="0" bIns="0" rtlCol="0" anchor="t"/>
-          <a:lstStyle/>
-          <a:p>
-            <a:pPr algn="l" indent="0" marL="0">
-              <a:spcAft>
-                <a:spcPts val="800"/>
-              </a:spcAft>
-              <a:buNone/>
-            </a:pPr>
-            <a:r>
-              <a:rPr lang="en-US" sz="4000" b="1" dirty="0">
-                <a:solidFill>
-                  <a:srgbClr val="111111"/>
-                </a:solidFill>
-                <a:latin typeface="Times New Roman" pitchFamily="34" charset="0"/>
-                <a:ea typeface="Times New Roman" pitchFamily="34" charset="-122"/>
-                <a:cs typeface="Times New Roman" pitchFamily="34" charset="-120"/>
-              </a:rPr>
-              <a:t>Peltier's diagram:</a:t>
-            </a:r>
-            <a:endParaRPr lang="en-US" sz="4000" dirty="0"/>
-          </a:p>
-          <a:p>
-            <a:pPr algn="l" marL="342900" indent="-342900">
-              <a:spcAft>
-                <a:spcPts val="800"/>
-              </a:spcAft>
-              <a:buSzPct val="100000"/>
-              <a:buChar char="•"/>
-            </a:pPr>
-            <a:r>
-              <a:rPr lang="en-US" sz="4000" dirty="0">
-                <a:solidFill>
-                  <a:srgbClr val="111111"/>
-                </a:solidFill>
-                <a:latin typeface="Times New Roman" pitchFamily="34" charset="0"/>
-                <a:ea typeface="Times New Roman" pitchFamily="34" charset="-122"/>
-                <a:cs typeface="Times New Roman" pitchFamily="34" charset="-120"/>
-              </a:rPr>
-              <a:t>Strong chemical weathering in hot, wet climates.</a:t>
-            </a:r>
-            <a:endParaRPr lang="en-US" sz="4000" dirty="0"/>
-          </a:p>
-          <a:p>
-            <a:pPr algn="l" marL="342900" indent="-342900">
-              <a:spcAft>
-                <a:spcPts val="800"/>
-              </a:spcAft>
-              <a:buSzPct val="100000"/>
-              <a:buChar char="•"/>
-            </a:pPr>
-            <a:r>
-              <a:rPr lang="en-US" sz="4000" dirty="0">
-                <a:solidFill>
-                  <a:srgbClr val="111111"/>
-                </a:solidFill>
-                <a:latin typeface="Times New Roman" pitchFamily="34" charset="0"/>
-                <a:ea typeface="Times New Roman" pitchFamily="34" charset="-122"/>
-                <a:cs typeface="Times New Roman" pitchFamily="34" charset="-120"/>
-              </a:rPr>
-              <a:t>Strong frost action in cold, wet climates.</a:t>
-            </a:r>
-            <a:endParaRPr lang="en-US" sz="4000" dirty="0"/>
-          </a:p>
-          <a:p>
-            <a:pPr algn="l" marL="342900" indent="-342900">
-              <a:spcAft>
-                <a:spcPts val="800"/>
-              </a:spcAft>
-              <a:buSzPct val="100000"/>
-              <a:buChar char="•"/>
-            </a:pPr>
-            <a:r>
-              <a:rPr lang="en-US" sz="4000" dirty="0">
-                <a:solidFill>
-                  <a:srgbClr val="111111"/>
-                </a:solidFill>
-                <a:latin typeface="Times New Roman" pitchFamily="34" charset="0"/>
-                <a:ea typeface="Times New Roman" pitchFamily="34" charset="-122"/>
-                <a:cs typeface="Times New Roman" pitchFamily="34" charset="-120"/>
-              </a:rPr>
-              <a:t>Weak weathering in dry areas.</a:t>
-            </a:r>
-            <a:endParaRPr lang="en-US" sz="4000" dirty="0"/>
+              <a:t>Illustration: red laterite</a:t>
+            </a:r>
+            <a:endParaRPr lang="en-US" sz="1600" dirty="0"/>
           </a:p>
         </p:txBody>
       </p:sp>
@@ -15964,7 +16276,7 @@
                 <a:ea typeface="Times New Roman" pitchFamily="34" charset="-122"/>
                 <a:cs typeface="Times New Roman" pitchFamily="34" charset="-120"/>
               </a:rPr>
-              <a:t>1. Climate</a:t>
+              <a:t>2. Geology (Rock Characteristics)</a:t>
             </a:r>
             <a:endParaRPr lang="en-US" sz="3600" dirty="0"/>
           </a:p>
@@ -15979,7 +16291,7 @@
         <p:spPr>
           <a:xfrm>
             <a:off x="365760" y="1783080"/>
-            <a:ext cx="4846320" cy="4617720"/>
+            <a:ext cx="6035040" cy="4617720"/>
           </a:xfrm>
           <a:prstGeom prst="rect">
             <a:avLst/>
@@ -15998,7 +16310,7 @@
               <a:buNone/>
             </a:pPr>
             <a:r>
-              <a:rPr lang="en-US" sz="3600" b="1" dirty="0">
+              <a:rPr lang="en-US" sz="3200" i="1" dirty="0">
                 <a:solidFill>
                   <a:srgbClr val="111111"/>
                 </a:solidFill>
@@ -16006,8 +16318,11 @@
                 <a:ea typeface="Times New Roman" pitchFamily="34" charset="-122"/>
                 <a:cs typeface="Times New Roman" pitchFamily="34" charset="-120"/>
               </a:rPr>
-              <a:t>Garoua: </a:t>
-            </a:r>
+              <a:t>Rock characteristics influence weathering in the following ways:</a:t>
+            </a:r>
+            <a:endParaRPr lang="en-US" sz="3200" dirty="0"/>
+          </a:p>
+          <a:p>
             <a:pPr algn="l" indent="0" marL="0">
               <a:spcAft>
                 <a:spcPts val="800"/>
@@ -16015,7 +16330,7 @@
               <a:buNone/>
             </a:pPr>
             <a:r>
-              <a:rPr lang="en-US" sz="3600" dirty="0">
+              <a:rPr lang="en-US" sz="3200" b="1" dirty="0">
                 <a:solidFill>
                   <a:srgbClr val="111111"/>
                 </a:solidFill>
@@ -16023,15 +16338,32 @@
                 <a:ea typeface="Times New Roman" pitchFamily="34" charset="-122"/>
                 <a:cs typeface="Times New Roman" pitchFamily="34" charset="-120"/>
               </a:rPr>
-              <a:t>Its heat and heavy rainy-season showers give strong mechanical and chemical weathering and deep red soils.</a:t>
-            </a:r>
-            <a:endParaRPr lang="en-US" sz="3600" dirty="0"/>
+              <a:t>Mineral composition and hardness: </a:t>
+            </a:r>
+            <a:pPr algn="l" indent="0" marL="0">
+              <a:spcAft>
+                <a:spcPts val="800"/>
+              </a:spcAft>
+              <a:buNone/>
+            </a:pPr>
+            <a:r>
+              <a:rPr lang="en-US" sz="3200" dirty="0">
+                <a:solidFill>
+                  <a:srgbClr val="111111"/>
+                </a:solidFill>
+                <a:latin typeface="Times New Roman" pitchFamily="34" charset="0"/>
+                <a:ea typeface="Times New Roman" pitchFamily="34" charset="-122"/>
+                <a:cs typeface="Times New Roman" pitchFamily="34" charset="-120"/>
+              </a:rPr>
+              <a:t>Rocks made of soluble or weak minerals, such as limestone or rocks rich in feldspar, weather quickly. Rocks rich in quartz, such as quartzite, resist weathering.</a:t>
+            </a:r>
+            <a:endParaRPr lang="en-US" sz="3200" dirty="0"/>
           </a:p>
         </p:txBody>
       </p:sp>
       <p:pic>
         <p:nvPicPr>
-          <p:cNvPr id="5" name="Image 0" descr="/home/claude/f4/img/v2/f2t_laterite.jpg">    </p:cNvPr>
+          <p:cNvPr id="5" name="Image 0" descr="/home/claude/f4/img/v2/f4_karst.jpg">    </p:cNvPr>
           <p:cNvPicPr>
             <a:picLocks noChangeAspect="1"/>
           </p:cNvPicPr>
@@ -16045,8 +16377,8 @@
         </p:blipFill>
         <p:spPr>
           <a:xfrm>
-            <a:off x="5349240" y="2070172"/>
-            <a:ext cx="6659575" cy="3696064"/>
+            <a:off x="6537960" y="2400897"/>
+            <a:ext cx="5470855" cy="3034615"/>
           </a:xfrm>
           <a:prstGeom prst="rect">
             <a:avLst/>
@@ -16061,8 +16393,8 @@
         </p:nvSpPr>
         <p:spPr>
           <a:xfrm>
-            <a:off x="5349240" y="6089904"/>
-            <a:ext cx="6659575" cy="347472"/>
+            <a:off x="6537960" y="6089904"/>
+            <a:ext cx="5470855" cy="347472"/>
           </a:xfrm>
           <a:prstGeom prst="rect">
             <a:avLst/>
@@ -16086,7 +16418,7 @@
                 <a:ea typeface="Times New Roman" pitchFamily="34" charset="-122"/>
                 <a:cs typeface="Times New Roman" pitchFamily="34" charset="-120"/>
               </a:rPr>
-              <a:t>Illustration: red laterite</a:t>
+              <a:t>Illustration: weathered limestone</a:t>
             </a:r>
             <a:endParaRPr lang="en-US" sz="1600" dirty="0"/>
           </a:p>
@@ -16204,129 +16536,9 @@
           </a:p>
         </p:txBody>
       </p:sp>
-      <p:sp>
-        <p:nvSpPr>
-          <p:cNvPr id="3" name="Text 1"/>
-          <p:cNvSpPr/>
-          <p:nvPr/>
-        </p:nvSpPr>
-        <p:spPr>
-          <a:xfrm>
-            <a:off x="365760" y="1005840"/>
-            <a:ext cx="11460175" cy="731520"/>
-          </a:xfrm>
-          <a:prstGeom prst="rect">
-            <a:avLst/>
-          </a:prstGeom>
-          <a:noFill/>
-          <a:ln/>
-        </p:spPr>
-        <p:txBody>
-          <a:bodyPr wrap="square" lIns="0" tIns="0" rIns="0" bIns="0" rtlCol="0" anchor="ctr">
-            <a:normAutofit/>
-          </a:bodyPr>
-          <a:lstStyle/>
-          <a:p>
-            <a:pPr algn="ctr" indent="0" marL="0">
-              <a:buNone/>
-            </a:pPr>
-            <a:r>
-              <a:rPr lang="en-US" sz="3600" b="1" dirty="0">
-                <a:solidFill>
-                  <a:srgbClr val="990011"/>
-                </a:solidFill>
-                <a:latin typeface="Times New Roman" pitchFamily="34" charset="0"/>
-                <a:ea typeface="Times New Roman" pitchFamily="34" charset="-122"/>
-                <a:cs typeface="Times New Roman" pitchFamily="34" charset="-120"/>
-              </a:rPr>
-              <a:t>2. Geology (Rock Characteristics)</a:t>
-            </a:r>
-            <a:endParaRPr lang="en-US" sz="3600" dirty="0"/>
-          </a:p>
-        </p:txBody>
-      </p:sp>
-      <p:sp>
-        <p:nvSpPr>
-          <p:cNvPr id="4" name="Text 2"/>
-          <p:cNvSpPr/>
-          <p:nvPr/>
-        </p:nvSpPr>
-        <p:spPr>
-          <a:xfrm>
-            <a:off x="365760" y="1783080"/>
-            <a:ext cx="4846320" cy="4617720"/>
-          </a:xfrm>
-          <a:prstGeom prst="rect">
-            <a:avLst/>
-          </a:prstGeom>
-          <a:noFill/>
-          <a:ln/>
-        </p:spPr>
-        <p:txBody>
-          <a:bodyPr wrap="square" lIns="0" tIns="0" rIns="0" bIns="0" rtlCol="0" anchor="t"/>
-          <a:lstStyle/>
-          <a:p>
-            <a:pPr algn="l" indent="0" marL="0">
-              <a:spcAft>
-                <a:spcPts val="800"/>
-              </a:spcAft>
-              <a:buNone/>
-            </a:pPr>
-            <a:r>
-              <a:rPr lang="en-US" sz="3600" i="1" dirty="0">
-                <a:solidFill>
-                  <a:srgbClr val="111111"/>
-                </a:solidFill>
-                <a:latin typeface="Times New Roman" pitchFamily="34" charset="0"/>
-                <a:ea typeface="Times New Roman" pitchFamily="34" charset="-122"/>
-                <a:cs typeface="Times New Roman" pitchFamily="34" charset="-120"/>
-              </a:rPr>
-              <a:t>Rock characteristics influence weathering as follows:</a:t>
-            </a:r>
-            <a:endParaRPr lang="en-US" sz="3600" dirty="0"/>
-          </a:p>
-          <a:p>
-            <a:pPr algn="l" indent="0" marL="0">
-              <a:spcAft>
-                <a:spcPts val="800"/>
-              </a:spcAft>
-              <a:buNone/>
-            </a:pPr>
-            <a:r>
-              <a:rPr lang="en-US" sz="3600" b="1" dirty="0">
-                <a:solidFill>
-                  <a:srgbClr val="111111"/>
-                </a:solidFill>
-                <a:latin typeface="Times New Roman" pitchFamily="34" charset="0"/>
-                <a:ea typeface="Times New Roman" pitchFamily="34" charset="-122"/>
-                <a:cs typeface="Times New Roman" pitchFamily="34" charset="-120"/>
-              </a:rPr>
-              <a:t>Hardness and minerals: </a:t>
-            </a:r>
-            <a:pPr algn="l" indent="0" marL="0">
-              <a:spcAft>
-                <a:spcPts val="800"/>
-              </a:spcAft>
-              <a:buNone/>
-            </a:pPr>
-            <a:r>
-              <a:rPr lang="en-US" sz="3600" dirty="0">
-                <a:solidFill>
-                  <a:srgbClr val="111111"/>
-                </a:solidFill>
-                <a:latin typeface="Times New Roman" pitchFamily="34" charset="0"/>
-                <a:ea typeface="Times New Roman" pitchFamily="34" charset="-122"/>
-                <a:cs typeface="Times New Roman" pitchFamily="34" charset="-120"/>
-              </a:rPr>
-              <a:t>Soft or soluble rocks such as limestone weather faster than hard granite.</a:t>
-            </a:r>
-            <a:endParaRPr lang="en-US" sz="3600" dirty="0"/>
-          </a:p>
-        </p:txBody>
-      </p:sp>
       <p:pic>
         <p:nvPicPr>
-          <p:cNvPr id="5" name="Image 0" descr="/home/claude/f4/img/v2/f4_karst.jpg">    </p:cNvPr>
+          <p:cNvPr id="3" name="Image 0" descr="/home/claude/f4/img/minesec_sheet.png">    </p:cNvPr>
           <p:cNvPicPr>
             <a:picLocks noChangeAspect="1"/>
           </p:cNvPicPr>
@@ -16340,8 +16552,8 @@
         </p:blipFill>
         <p:spPr>
           <a:xfrm>
-            <a:off x="5349240" y="2071212"/>
-            <a:ext cx="6659575" cy="3693983"/>
+            <a:off x="0" y="658368"/>
+            <a:ext cx="3840480" cy="5833872"/>
           </a:xfrm>
           <a:prstGeom prst="rect">
             <a:avLst/>
@@ -16350,14 +16562,14 @@
       </p:pic>
       <p:sp>
         <p:nvSpPr>
-          <p:cNvPr id="6" name="Text 3"/>
+          <p:cNvPr id="4" name="Text 1"/>
           <p:cNvSpPr/>
           <p:nvPr/>
         </p:nvSpPr>
         <p:spPr>
           <a:xfrm>
-            <a:off x="5349240" y="6089904"/>
-            <a:ext cx="6659575" cy="347472"/>
+            <a:off x="4069080" y="1005840"/>
+            <a:ext cx="7802575" cy="731520"/>
           </a:xfrm>
           <a:prstGeom prst="rect">
             <a:avLst/>
@@ -16366,24 +16578,85 @@
           <a:ln/>
         </p:spPr>
         <p:txBody>
-          <a:bodyPr wrap="square" lIns="0" tIns="0" rIns="0" bIns="0" rtlCol="0" anchor="ctr"/>
+          <a:bodyPr wrap="square" lIns="0" tIns="0" rIns="0" bIns="0" rtlCol="0" anchor="ctr">
+            <a:normAutofit/>
+          </a:bodyPr>
           <a:lstStyle/>
           <a:p>
             <a:pPr algn="ctr" indent="0" marL="0">
               <a:buNone/>
             </a:pPr>
             <a:r>
-              <a:rPr lang="en-US" sz="1600" i="1" dirty="0">
-                <a:solidFill>
-                  <a:srgbClr val="555555"/>
+              <a:rPr lang="en-US" sz="3600" b="1" dirty="0">
+                <a:solidFill>
+                  <a:srgbClr val="990011"/>
                 </a:solidFill>
                 <a:latin typeface="Times New Roman" pitchFamily="34" charset="0"/>
                 <a:ea typeface="Times New Roman" pitchFamily="34" charset="-122"/>
                 <a:cs typeface="Times New Roman" pitchFamily="34" charset="-120"/>
               </a:rPr>
-              <a:t>Illustration: dissolved limestone</a:t>
-            </a:r>
-            <a:endParaRPr lang="en-US" sz="1600" dirty="0"/>
+              <a:t>2. Geology (Rock Characteristics)</a:t>
+            </a:r>
+            <a:endParaRPr lang="en-US" sz="3600" dirty="0"/>
+          </a:p>
+        </p:txBody>
+      </p:sp>
+      <p:sp>
+        <p:nvSpPr>
+          <p:cNvPr id="5" name="Text 2"/>
+          <p:cNvSpPr/>
+          <p:nvPr/>
+        </p:nvSpPr>
+        <p:spPr>
+          <a:xfrm>
+            <a:off x="4069080" y="1783080"/>
+            <a:ext cx="7802575" cy="4663440"/>
+          </a:xfrm>
+          <a:prstGeom prst="rect">
+            <a:avLst/>
+          </a:prstGeom>
+          <a:noFill/>
+          <a:ln/>
+        </p:spPr>
+        <p:txBody>
+          <a:bodyPr wrap="square" lIns="0" tIns="0" rIns="0" bIns="0" rtlCol="0" anchor="t"/>
+          <a:lstStyle/>
+          <a:p>
+            <a:pPr algn="l" indent="0" marL="0">
+              <a:spcAft>
+                <a:spcPts val="800"/>
+              </a:spcAft>
+              <a:buNone/>
+            </a:pPr>
+            <a:r>
+              <a:rPr lang="en-US" sz="4000" b="1" dirty="0">
+                <a:solidFill>
+                  <a:srgbClr val="111111"/>
+                </a:solidFill>
+                <a:latin typeface="Times New Roman" pitchFamily="34" charset="0"/>
+                <a:ea typeface="Times New Roman" pitchFamily="34" charset="-122"/>
+                <a:cs typeface="Times New Roman" pitchFamily="34" charset="-120"/>
+              </a:rPr>
+              <a:t>Structure (joints and bedding): </a:t>
+            </a:r>
+            <a:pPr algn="l" indent="0" marL="0">
+              <a:spcAft>
+                <a:spcPts val="800"/>
+              </a:spcAft>
+              <a:buNone/>
+            </a:pPr>
+            <a:r>
+              <a:rPr lang="en-US" sz="4000" dirty="0">
+                <a:solidFill>
+                  <a:srgbClr val="111111"/>
+                </a:solidFill>
+                <a:latin typeface="Times New Roman" pitchFamily="34" charset="0"/>
+                <a:ea typeface="Times New Roman" pitchFamily="34" charset="-122"/>
+                <a:cs typeface="Times New Roman" pitchFamily="34" charset="-120"/>
+              </a:rPr>
+              <a:t>Joints, cracks and bedding planes let water and roots enter the rock. The more jointed a rock is, the faster it weathers, and weathering follows the joints.</a:t>
+            </a:r>
+            <a:endParaRPr lang="en-US" sz="4000" dirty="0"/>
           </a:p>
         </p:txBody>
       </p:sp>
@@ -16516,7 +16789,7 @@
         <p:spPr>
           <a:xfrm>
             <a:off x="0" y="658368"/>
-            <a:ext cx="5120640" cy="5833872"/>
+            <a:ext cx="3840480" cy="5833872"/>
           </a:xfrm>
           <a:prstGeom prst="rect">
             <a:avLst/>
@@ -16531,8 +16804,8 @@
         </p:nvSpPr>
         <p:spPr>
           <a:xfrm>
-            <a:off x="5349240" y="1005840"/>
-            <a:ext cx="6522415" cy="731520"/>
+            <a:off x="4069080" y="1005840"/>
+            <a:ext cx="7802575" cy="731520"/>
           </a:xfrm>
           <a:prstGeom prst="rect">
             <a:avLst/>
@@ -16572,8 +16845,8 @@
         </p:nvSpPr>
         <p:spPr>
           <a:xfrm>
-            <a:off x="5349240" y="1783080"/>
-            <a:ext cx="6522415" cy="4663440"/>
+            <a:off x="4069080" y="1783080"/>
+            <a:ext cx="7802575" cy="4663440"/>
           </a:xfrm>
           <a:prstGeom prst="rect">
             <a:avLst/>
@@ -16600,7 +16873,7 @@
                 <a:ea typeface="Times New Roman" pitchFamily="34" charset="-122"/>
                 <a:cs typeface="Times New Roman" pitchFamily="34" charset="-120"/>
               </a:rPr>
-              <a:t>Structure: </a:t>
+              <a:t>Colour and grain size: </a:t>
             </a:r>
             <a:pPr algn="l" indent="0" marL="0">
               <a:spcAft>
@@ -16617,44 +16890,7 @@
                 <a:ea typeface="Times New Roman" pitchFamily="34" charset="-122"/>
                 <a:cs typeface="Times New Roman" pitchFamily="34" charset="-120"/>
               </a:rPr>
-              <a:t>Joints, cracks and layers let water in and speed up weathering.</a:t>
-            </a:r>
-            <a:endParaRPr lang="en-US" sz="4000" dirty="0"/>
-          </a:p>
-          <a:p>
-            <a:pPr algn="l" indent="0" marL="0">
-              <a:spcAft>
-                <a:spcPts val="800"/>
-              </a:spcAft>
-              <a:buNone/>
-            </a:pPr>
-            <a:r>
-              <a:rPr lang="en-US" sz="4000" b="1" dirty="0">
-                <a:solidFill>
-                  <a:srgbClr val="111111"/>
-                </a:solidFill>
-                <a:latin typeface="Times New Roman" pitchFamily="34" charset="0"/>
-                <a:ea typeface="Times New Roman" pitchFamily="34" charset="-122"/>
-                <a:cs typeface="Times New Roman" pitchFamily="34" charset="-120"/>
-              </a:rPr>
-              <a:t>Colour: </a:t>
-            </a:r>
-            <a:pPr algn="l" indent="0" marL="0">
-              <a:spcAft>
-                <a:spcPts val="800"/>
-              </a:spcAft>
-              <a:buNone/>
-            </a:pPr>
-            <a:r>
-              <a:rPr lang="en-US" sz="4000" dirty="0">
-                <a:solidFill>
-                  <a:srgbClr val="111111"/>
-                </a:solidFill>
-                <a:latin typeface="Times New Roman" pitchFamily="34" charset="0"/>
-                <a:ea typeface="Times New Roman" pitchFamily="34" charset="-122"/>
-                <a:cs typeface="Times New Roman" pitchFamily="34" charset="-120"/>
-              </a:rPr>
-              <a:t>Dark rocks absorb more heat and expand more.</a:t>
+              <a:t>Dark rocks absorb more heat and expand and contract more than light rocks. Coarse-grained rocks such as granite break apart more easily into grains than fine-grained rocks.</a:t>
             </a:r>
             <a:endParaRPr lang="en-US" sz="4000" dirty="0"/>
           </a:p>
@@ -16807,7 +17043,7 @@
                 <a:ea typeface="Times New Roman" pitchFamily="34" charset="-122"/>
                 <a:cs typeface="Times New Roman" pitchFamily="34" charset="-120"/>
               </a:rPr>
-              <a:t>3. Relief, Vegetation and Human Activities</a:t>
+              <a:t>3. Relief</a:t>
             </a:r>
             <a:endParaRPr lang="en-US" sz="3600" dirty="0"/>
           </a:p>
@@ -16822,7 +17058,7 @@
         <p:spPr>
           <a:xfrm>
             <a:off x="365760" y="1783080"/>
-            <a:ext cx="4846320" cy="4617720"/>
+            <a:ext cx="6035040" cy="4617720"/>
           </a:xfrm>
           <a:prstGeom prst="rect">
             <a:avLst/>
@@ -16849,7 +17085,7 @@
                 <a:ea typeface="Times New Roman" pitchFamily="34" charset="-122"/>
                 <a:cs typeface="Times New Roman" pitchFamily="34" charset="-120"/>
               </a:rPr>
-              <a:t>Relief, vegetation and human activities influence weathering as follows:</a:t>
+              <a:t>Relief influences weathering in the following ways:</a:t>
             </a:r>
             <a:endParaRPr lang="en-US" sz="3200" dirty="0"/>
           </a:p>
@@ -16886,7 +17122,7 @@
                 <a:ea typeface="Times New Roman" pitchFamily="34" charset="-122"/>
                 <a:cs typeface="Times New Roman" pitchFamily="34" charset="-120"/>
               </a:rPr>
-              <a:t>In the Mandara Mountains, weathered material is washed away quickly, exposing fresh rock.</a:t>
+              <a:t>On steep slopes, as in the Mandara Mountains, weathered material is quickly removed by gravity and runoff. Fresh rock is constantly exposed, so mechanical weathering dominates and soils remain thin.</a:t>
             </a:r>
             <a:endParaRPr lang="en-US" sz="3200" dirty="0"/>
           </a:p>
@@ -16908,8 +17144,8 @@
         </p:blipFill>
         <p:spPr>
           <a:xfrm>
-            <a:off x="5349240" y="2071212"/>
-            <a:ext cx="6659575" cy="3693983"/>
+            <a:off x="6537960" y="2400897"/>
+            <a:ext cx="5470855" cy="3034615"/>
           </a:xfrm>
           <a:prstGeom prst="rect">
             <a:avLst/>
@@ -16924,8 +17160,8 @@
         </p:nvSpPr>
         <p:spPr>
           <a:xfrm>
-            <a:off x="5349240" y="6089904"/>
-            <a:ext cx="6659575" cy="347472"/>
+            <a:off x="6537960" y="6089904"/>
+            <a:ext cx="5470855" cy="347472"/>
           </a:xfrm>
           <a:prstGeom prst="rect">
             <a:avLst/>
@@ -16949,7 +17185,7 @@
                 <a:ea typeface="Times New Roman" pitchFamily="34" charset="-122"/>
                 <a:cs typeface="Times New Roman" pitchFamily="34" charset="-120"/>
               </a:rPr>
-              <a:t>Illustration: scree on a slope</a:t>
+              <a:t>Illustration: scree on a steep slope</a:t>
             </a:r>
             <a:endParaRPr lang="en-US" sz="1600" dirty="0"/>
           </a:p>
@@ -17084,7 +17320,7 @@
         <p:spPr>
           <a:xfrm>
             <a:off x="0" y="658368"/>
-            <a:ext cx="5120640" cy="5833872"/>
+            <a:ext cx="3840480" cy="5833872"/>
           </a:xfrm>
           <a:prstGeom prst="rect">
             <a:avLst/>
@@ -17099,8 +17335,8 @@
         </p:nvSpPr>
         <p:spPr>
           <a:xfrm>
-            <a:off x="5349240" y="1005840"/>
-            <a:ext cx="6522415" cy="731520"/>
+            <a:off x="4069080" y="1005840"/>
+            <a:ext cx="7802575" cy="731520"/>
           </a:xfrm>
           <a:prstGeom prst="rect">
             <a:avLst/>
@@ -17126,7 +17362,7 @@
                 <a:ea typeface="Times New Roman" pitchFamily="34" charset="-122"/>
                 <a:cs typeface="Times New Roman" pitchFamily="34" charset="-120"/>
               </a:rPr>
-              <a:t>3. Relief, Vegetation and Human Activities</a:t>
+              <a:t>3. Relief</a:t>
             </a:r>
             <a:endParaRPr lang="en-US" sz="3600" dirty="0"/>
           </a:p>
@@ -17140,8 +17376,8 @@
         </p:nvSpPr>
         <p:spPr>
           <a:xfrm>
-            <a:off x="5349240" y="1783080"/>
-            <a:ext cx="6522415" cy="4663440"/>
+            <a:off x="4069080" y="1783080"/>
+            <a:ext cx="7802575" cy="4663440"/>
           </a:xfrm>
           <a:prstGeom prst="rect">
             <a:avLst/>
@@ -17185,48 +17421,7 @@
                 <a:ea typeface="Times New Roman" pitchFamily="34" charset="-122"/>
                 <a:cs typeface="Times New Roman" pitchFamily="34" charset="-120"/>
               </a:rPr>
-              <a:t>Water stays longer, so chemical weathering forms deep soils.</a:t>
-            </a:r>
-            <a:endParaRPr lang="en-US" sz="4000" dirty="0"/>
-          </a:p>
-          <a:p>
-            <a:pPr algn="l" indent="0" marL="0">
-              <a:spcAft>
-                <a:spcPts val="800"/>
-              </a:spcAft>
-              <a:buNone/>
-            </a:pPr>
-            <a:r>
-              <a:rPr lang="en-US" sz="4000" b="1" dirty="0">
-                <a:solidFill>
-                  <a:srgbClr val="111111"/>
-                </a:solidFill>
-                <a:latin typeface="Times New Roman" pitchFamily="34" charset="0"/>
-                <a:ea typeface="Times New Roman" pitchFamily="34" charset="-122"/>
-                <a:cs typeface="Times New Roman" pitchFamily="34" charset="-120"/>
-              </a:rPr>
-              <a:t>Vegetation:</a:t>
-            </a:r>
-            <a:endParaRPr lang="en-US" sz="4000" dirty="0"/>
-          </a:p>
-          <a:p>
-            <a:pPr algn="l" marL="342900" indent="-342900">
-              <a:spcAft>
-                <a:spcPts val="800"/>
-              </a:spcAft>
-              <a:buSzPct val="100000"/>
-              <a:buChar char="•"/>
-            </a:pPr>
-            <a:r>
-              <a:rPr lang="en-US" sz="4000" dirty="0">
-                <a:solidFill>
-                  <a:srgbClr val="111111"/>
-                </a:solidFill>
-                <a:latin typeface="Times New Roman" pitchFamily="34" charset="0"/>
-                <a:ea typeface="Times New Roman" pitchFamily="34" charset="-122"/>
-                <a:cs typeface="Times New Roman" pitchFamily="34" charset="-120"/>
-              </a:rPr>
-              <a:t>Roots split rocks and increase weathering.</a:t>
+              <a:t>On gentle slopes and plains, water stays longer in contact with the rock and the weathered material remains in place. Chemical weathering therefore acts deeply and forms thick soils.</a:t>
             </a:r>
             <a:endParaRPr lang="en-US" sz="4000" dirty="0"/>
           </a:p>
@@ -17403,7 +17598,7 @@
                 <a:ea typeface="Times New Roman" pitchFamily="34" charset="-122"/>
                 <a:cs typeface="Times New Roman" pitchFamily="34" charset="-120"/>
               </a:rPr>
-              <a:t>3. Relief, Vegetation and Human Activities (continued)</a:t>
+              <a:t>4. Vegetation</a:t>
             </a:r>
             <a:endParaRPr lang="en-US" sz="3600" dirty="0"/>
           </a:p>
@@ -17429,27 +17624,6 @@
         <p:txBody>
           <a:bodyPr wrap="square" lIns="0" tIns="0" rIns="0" bIns="0" rtlCol="0" anchor="t"/>
           <a:lstStyle/>
-          <a:p>
-            <a:pPr algn="l" marL="342900" indent="-342900">
-              <a:spcAft>
-                <a:spcPts val="800"/>
-              </a:spcAft>
-              <a:buSzPct val="100000"/>
-              <a:buChar char="•"/>
-            </a:pPr>
-            <a:r>
-              <a:rPr lang="en-US" sz="4000" dirty="0">
-                <a:solidFill>
-                  <a:srgbClr val="111111"/>
-                </a:solidFill>
-                <a:latin typeface="Times New Roman" pitchFamily="34" charset="0"/>
-                <a:ea typeface="Times New Roman" pitchFamily="34" charset="-122"/>
-                <a:cs typeface="Times New Roman" pitchFamily="34" charset="-120"/>
-              </a:rPr>
-              <a:t>A dense plant cover protects rocks from sun and rain and slows weathering.</a:t>
-            </a:r>
-            <a:endParaRPr lang="en-US" sz="4000" dirty="0"/>
-          </a:p>
           <a:p>
             <a:pPr algn="l" indent="0" marL="0">
               <a:spcAft>
@@ -17458,7 +17632,7 @@
               <a:buNone/>
             </a:pPr>
             <a:r>
-              <a:rPr lang="en-US" sz="4000" b="1" dirty="0">
+              <a:rPr lang="en-US" sz="4000" i="1" dirty="0">
                 <a:solidFill>
                   <a:srgbClr val="111111"/>
                 </a:solidFill>
@@ -17466,8 +17640,11 @@
                 <a:ea typeface="Times New Roman" pitchFamily="34" charset="-122"/>
                 <a:cs typeface="Times New Roman" pitchFamily="34" charset="-120"/>
               </a:rPr>
-              <a:t>Human activities: </a:t>
-            </a:r>
+              <a:t>Vegetation influences weathering in the following ways:</a:t>
+            </a:r>
+            <a:endParaRPr lang="en-US" sz="4000" dirty="0"/>
+          </a:p>
+          <a:p>
             <a:pPr algn="l" indent="0" marL="0">
               <a:spcAft>
                 <a:spcPts val="800"/>
@@ -17475,7 +17652,7 @@
               <a:buNone/>
             </a:pPr>
             <a:r>
-              <a:rPr lang="en-US" sz="4000" dirty="0">
+              <a:rPr lang="en-US" sz="4000" b="1" dirty="0">
                 <a:solidFill>
                   <a:srgbClr val="111111"/>
                 </a:solidFill>
@@ -17483,7 +17660,24 @@
                 <a:ea typeface="Times New Roman" pitchFamily="34" charset="-122"/>
                 <a:cs typeface="Times New Roman" pitchFamily="34" charset="-120"/>
               </a:rPr>
-              <a:t>Quarries around Garoua, roads and ploughing expose fresh rock, and acid rain from vehicles and industries dissolves rocks.</a:t>
+              <a:t>Increase of weathering: </a:t>
+            </a:r>
+            <a:pPr algn="l" indent="0" marL="0">
+              <a:spcAft>
+                <a:spcPts val="800"/>
+              </a:spcAft>
+              <a:buNone/>
+            </a:pPr>
+            <a:r>
+              <a:rPr lang="en-US" sz="4000" dirty="0">
+                <a:solidFill>
+                  <a:srgbClr val="111111"/>
+                </a:solidFill>
+                <a:latin typeface="Times New Roman" pitchFamily="34" charset="0"/>
+                <a:ea typeface="Times New Roman" pitchFamily="34" charset="-122"/>
+                <a:cs typeface="Times New Roman" pitchFamily="34" charset="-120"/>
+              </a:rPr>
+              <a:t>Roots split rocks, and decaying leaves release humic acids and carbon dioxide into the soil water. This makes chemical weathering faster under forests.</a:t>
             </a:r>
             <a:endParaRPr lang="en-US" sz="4000" dirty="0"/>
           </a:p>
@@ -17595,15 +17789,115 @@
                 <a:ea typeface="Calibri" pitchFamily="34" charset="-122"/>
                 <a:cs typeface="Calibri" pitchFamily="34" charset="-120"/>
               </a:rPr>
-              <a:t>FORMATIVE EVALUATION</a:t>
+              <a:t>BOARD SUMMARY</a:t>
             </a:r>
             <a:endParaRPr lang="en-US" sz="1400" dirty="0"/>
+          </a:p>
+        </p:txBody>
+      </p:sp>
+      <p:sp>
+        <p:nvSpPr>
+          <p:cNvPr id="3" name="Text 1"/>
+          <p:cNvSpPr/>
+          <p:nvPr/>
+        </p:nvSpPr>
+        <p:spPr>
+          <a:xfrm>
+            <a:off x="365760" y="1005840"/>
+            <a:ext cx="11460175" cy="731520"/>
+          </a:xfrm>
+          <a:prstGeom prst="rect">
+            <a:avLst/>
+          </a:prstGeom>
+          <a:noFill/>
+          <a:ln/>
+        </p:spPr>
+        <p:txBody>
+          <a:bodyPr wrap="square" lIns="0" tIns="0" rIns="0" bIns="0" rtlCol="0" anchor="ctr">
+            <a:normAutofit/>
+          </a:bodyPr>
+          <a:lstStyle/>
+          <a:p>
+            <a:pPr algn="ctr" indent="0" marL="0">
+              <a:buNone/>
+            </a:pPr>
+            <a:r>
+              <a:rPr lang="en-US" sz="3600" b="1" dirty="0">
+                <a:solidFill>
+                  <a:srgbClr val="990011"/>
+                </a:solidFill>
+                <a:latin typeface="Times New Roman" pitchFamily="34" charset="0"/>
+                <a:ea typeface="Times New Roman" pitchFamily="34" charset="-122"/>
+                <a:cs typeface="Times New Roman" pitchFamily="34" charset="-120"/>
+              </a:rPr>
+              <a:t>4. Vegetation</a:t>
+            </a:r>
+            <a:endParaRPr lang="en-US" sz="3600" dirty="0"/>
+          </a:p>
+        </p:txBody>
+      </p:sp>
+      <p:sp>
+        <p:nvSpPr>
+          <p:cNvPr id="4" name="Text 2"/>
+          <p:cNvSpPr/>
+          <p:nvPr/>
+        </p:nvSpPr>
+        <p:spPr>
+          <a:xfrm>
+            <a:off x="365760" y="1783080"/>
+            <a:ext cx="6035040" cy="4617720"/>
+          </a:xfrm>
+          <a:prstGeom prst="rect">
+            <a:avLst/>
+          </a:prstGeom>
+          <a:noFill/>
+          <a:ln/>
+        </p:spPr>
+        <p:txBody>
+          <a:bodyPr wrap="square" lIns="0" tIns="0" rIns="0" bIns="0" rtlCol="0" anchor="t"/>
+          <a:lstStyle/>
+          <a:p>
+            <a:pPr algn="l" indent="0" marL="0">
+              <a:spcAft>
+                <a:spcPts val="800"/>
+              </a:spcAft>
+              <a:buNone/>
+            </a:pPr>
+            <a:r>
+              <a:rPr lang="en-US" sz="3600" b="1" dirty="0">
+                <a:solidFill>
+                  <a:srgbClr val="111111"/>
+                </a:solidFill>
+                <a:latin typeface="Times New Roman" pitchFamily="34" charset="0"/>
+                <a:ea typeface="Times New Roman" pitchFamily="34" charset="-122"/>
+                <a:cs typeface="Times New Roman" pitchFamily="34" charset="-120"/>
+              </a:rPr>
+              <a:t>Protection of rocks: </a:t>
+            </a:r>
+            <a:pPr algn="l" indent="0" marL="0">
+              <a:spcAft>
+                <a:spcPts val="800"/>
+              </a:spcAft>
+              <a:buNone/>
+            </a:pPr>
+            <a:r>
+              <a:rPr lang="en-US" sz="3600" dirty="0">
+                <a:solidFill>
+                  <a:srgbClr val="111111"/>
+                </a:solidFill>
+                <a:latin typeface="Times New Roman" pitchFamily="34" charset="0"/>
+                <a:ea typeface="Times New Roman" pitchFamily="34" charset="-122"/>
+                <a:cs typeface="Times New Roman" pitchFamily="34" charset="-120"/>
+              </a:rPr>
+              <a:t>A dense plant cover shades the rocks from the sun and keeps the soil moist. It therefore reduces the daily range of temperature and slows down mechanical weathering.</a:t>
+            </a:r>
+            <a:endParaRPr lang="en-US" sz="3600" dirty="0"/>
           </a:p>
         </p:txBody>
       </p:sp>
       <p:pic>
         <p:nvPicPr>
-          <p:cNvPr id="3" name="Image 0" descr="/home/claude/f4/img/minesec_sheet.png">    </p:cNvPr>
+          <p:cNvPr id="5" name="Image 0" descr="/home/claude/f4/img/v2/geo2_wfactors.png">    </p:cNvPr>
           <p:cNvPicPr>
             <a:picLocks noChangeAspect="1"/>
           </p:cNvPicPr>
@@ -17617,8 +17911,8 @@
         </p:blipFill>
         <p:spPr>
           <a:xfrm>
-            <a:off x="0" y="658368"/>
-            <a:ext cx="5120640" cy="5833872"/>
+            <a:off x="6537960" y="2849678"/>
+            <a:ext cx="5470855" cy="2137053"/>
           </a:xfrm>
           <a:prstGeom prst="rect">
             <a:avLst/>
@@ -17627,14 +17921,14 @@
       </p:pic>
       <p:sp>
         <p:nvSpPr>
-          <p:cNvPr id="4" name="Text 1"/>
+          <p:cNvPr id="6" name="Text 3"/>
           <p:cNvSpPr/>
           <p:nvPr/>
         </p:nvSpPr>
         <p:spPr>
           <a:xfrm>
-            <a:off x="5349240" y="1005840"/>
-            <a:ext cx="6522415" cy="731520"/>
+            <a:off x="6537960" y="6089904"/>
+            <a:ext cx="5470855" cy="347472"/>
           </a:xfrm>
           <a:prstGeom prst="rect">
             <a:avLst/>
@@ -17643,68 +17937,24 @@
           <a:ln/>
         </p:spPr>
         <p:txBody>
-          <a:bodyPr wrap="square" lIns="0" tIns="0" rIns="0" bIns="0" rtlCol="0" anchor="ctr">
-            <a:normAutofit/>
-          </a:bodyPr>
+          <a:bodyPr wrap="square" lIns="0" tIns="0" rIns="0" bIns="0" rtlCol="0" anchor="ctr"/>
           <a:lstStyle/>
           <a:p>
             <a:pPr algn="ctr" indent="0" marL="0">
               <a:buNone/>
             </a:pPr>
             <a:r>
-              <a:rPr lang="en-US" sz="3600" b="1" dirty="0">
-                <a:solidFill>
-                  <a:srgbClr val="990011"/>
+              <a:rPr lang="en-US" sz="1600" i="1" dirty="0">
+                <a:solidFill>
+                  <a:srgbClr val="555555"/>
                 </a:solidFill>
                 <a:latin typeface="Times New Roman" pitchFamily="34" charset="0"/>
                 <a:ea typeface="Times New Roman" pitchFamily="34" charset="-122"/>
                 <a:cs typeface="Times New Roman" pitchFamily="34" charset="-120"/>
               </a:rPr>
-              <a:t>Evaluation 1</a:t>
-            </a:r>
-            <a:endParaRPr lang="en-US" sz="3600" dirty="0"/>
-          </a:p>
-        </p:txBody>
-      </p:sp>
-      <p:sp>
-        <p:nvSpPr>
-          <p:cNvPr id="5" name="Text 2"/>
-          <p:cNvSpPr/>
-          <p:nvPr/>
-        </p:nvSpPr>
-        <p:spPr>
-          <a:xfrm>
-            <a:off x="5349240" y="1783080"/>
-            <a:ext cx="6522415" cy="4663440"/>
-          </a:xfrm>
-          <a:prstGeom prst="rect">
-            <a:avLst/>
-          </a:prstGeom>
-          <a:noFill/>
-          <a:ln/>
-        </p:spPr>
-        <p:txBody>
-          <a:bodyPr wrap="square" lIns="0" tIns="0" rIns="0" bIns="0" rtlCol="0" anchor="t"/>
-          <a:lstStyle/>
-          <a:p>
-            <a:pPr algn="l" indent="0" marL="0">
-              <a:spcAft>
-                <a:spcPts val="800"/>
-              </a:spcAft>
-              <a:buNone/>
-            </a:pPr>
-            <a:r>
-              <a:rPr lang="en-US" sz="4000" dirty="0">
-                <a:solidFill>
-                  <a:srgbClr val="111111"/>
-                </a:solidFill>
-                <a:latin typeface="Times New Roman" pitchFamily="34" charset="0"/>
-                <a:ea typeface="Times New Roman" pitchFamily="34" charset="-122"/>
-                <a:cs typeface="Times New Roman" pitchFamily="34" charset="-120"/>
-              </a:rPr>
-              <a:t>Why is climate the most important factor of weathering in North Cameroon?</a:t>
-            </a:r>
-            <a:endParaRPr lang="en-US" sz="4000" dirty="0"/>
+              <a:t>Illustration: the factors of weathering</a:t>
+            </a:r>
+            <a:endParaRPr lang="en-US" sz="1600" dirty="0"/>
           </a:p>
         </p:txBody>
       </p:sp>
@@ -17814,7 +18064,7 @@
                 <a:ea typeface="Calibri" pitchFamily="34" charset="-122"/>
                 <a:cs typeface="Calibri" pitchFamily="34" charset="-120"/>
               </a:rPr>
-              <a:t>FORMATIVE EVALUATION</a:t>
+              <a:t>BOARD SUMMARY</a:t>
             </a:r>
             <a:endParaRPr lang="en-US" sz="1400" dirty="0"/>
           </a:p>
@@ -17837,7 +18087,7 @@
         <p:spPr>
           <a:xfrm>
             <a:off x="0" y="658368"/>
-            <a:ext cx="5120640" cy="5833872"/>
+            <a:ext cx="2468880" cy="5833872"/>
           </a:xfrm>
           <a:prstGeom prst="rect">
             <a:avLst/>
@@ -17852,8 +18102,8 @@
         </p:nvSpPr>
         <p:spPr>
           <a:xfrm>
-            <a:off x="5349240" y="1005840"/>
-            <a:ext cx="6522415" cy="731520"/>
+            <a:off x="2697480" y="1005840"/>
+            <a:ext cx="9174175" cy="731520"/>
           </a:xfrm>
           <a:prstGeom prst="rect">
             <a:avLst/>
@@ -17879,7 +18129,7 @@
                 <a:ea typeface="Times New Roman" pitchFamily="34" charset="-122"/>
                 <a:cs typeface="Times New Roman" pitchFamily="34" charset="-120"/>
               </a:rPr>
-              <a:t>Expected Answer</a:t>
+              <a:t>5. Human Activities</a:t>
             </a:r>
             <a:endParaRPr lang="en-US" sz="3600" dirty="0"/>
           </a:p>
@@ -17893,8 +18143,8 @@
         </p:nvSpPr>
         <p:spPr>
           <a:xfrm>
-            <a:off x="5349240" y="1783080"/>
-            <a:ext cx="6522415" cy="4663440"/>
+            <a:off x="2697480" y="1783080"/>
+            <a:ext cx="9174175" cy="4663440"/>
           </a:xfrm>
           <a:prstGeom prst="rect">
             <a:avLst/>
@@ -17913,7 +18163,7 @@
               <a:buNone/>
             </a:pPr>
             <a:r>
-              <a:rPr lang="en-US" sz="4000" dirty="0">
+              <a:rPr lang="en-US" sz="4000" i="1" dirty="0">
                 <a:solidFill>
                   <a:srgbClr val="111111"/>
                 </a:solidFill>
@@ -17921,7 +18171,44 @@
                 <a:ea typeface="Times New Roman" pitchFamily="34" charset="-122"/>
                 <a:cs typeface="Times New Roman" pitchFamily="34" charset="-120"/>
               </a:rPr>
-              <a:t>Strong heat causes exfoliation and speeds up chemical reactions, while the heavy rains provide water for chemical weathering.</a:t>
+              <a:t>Human activities influence weathering in the following ways:</a:t>
+            </a:r>
+            <a:endParaRPr lang="en-US" sz="4000" dirty="0"/>
+          </a:p>
+          <a:p>
+            <a:pPr algn="l" indent="0" marL="0">
+              <a:spcAft>
+                <a:spcPts val="800"/>
+              </a:spcAft>
+              <a:buNone/>
+            </a:pPr>
+            <a:r>
+              <a:rPr lang="en-US" sz="4000" b="1" dirty="0">
+                <a:solidFill>
+                  <a:srgbClr val="111111"/>
+                </a:solidFill>
+                <a:latin typeface="Times New Roman" pitchFamily="34" charset="0"/>
+                <a:ea typeface="Times New Roman" pitchFamily="34" charset="-122"/>
+                <a:cs typeface="Times New Roman" pitchFamily="34" charset="-120"/>
+              </a:rPr>
+              <a:t>Quarrying and construction: </a:t>
+            </a:r>
+            <a:pPr algn="l" indent="0" marL="0">
+              <a:spcAft>
+                <a:spcPts val="800"/>
+              </a:spcAft>
+              <a:buNone/>
+            </a:pPr>
+            <a:r>
+              <a:rPr lang="en-US" sz="4000" dirty="0">
+                <a:solidFill>
+                  <a:srgbClr val="111111"/>
+                </a:solidFill>
+                <a:latin typeface="Times New Roman" pitchFamily="34" charset="0"/>
+                <a:ea typeface="Times New Roman" pitchFamily="34" charset="-122"/>
+                <a:cs typeface="Times New Roman" pitchFamily="34" charset="-120"/>
+              </a:rPr>
+              <a:t>Quarries, road cuts and building sites, as around Garoua, break rocks and expose fresh surfaces to the weather. They speed up weathering locally.</a:t>
             </a:r>
             <a:endParaRPr lang="en-US" sz="4000" dirty="0"/>
           </a:p>
@@ -18033,7 +18320,7 @@
                 <a:ea typeface="Calibri" pitchFamily="34" charset="-122"/>
                 <a:cs typeface="Calibri" pitchFamily="34" charset="-120"/>
               </a:rPr>
-              <a:t>FORMATIVE EVALUATION</a:t>
+              <a:t>BOARD SUMMARY</a:t>
             </a:r>
             <a:endParaRPr lang="en-US" sz="1400" dirty="0"/>
           </a:p>
@@ -18098,7 +18385,7 @@
                 <a:ea typeface="Times New Roman" pitchFamily="34" charset="-122"/>
                 <a:cs typeface="Times New Roman" pitchFamily="34" charset="-120"/>
               </a:rPr>
-              <a:t>Evaluation 2</a:t>
+              <a:t>5. Human Activities</a:t>
             </a:r>
             <a:endParaRPr lang="en-US" sz="3600" dirty="0"/>
           </a:p>
@@ -18132,7 +18419,7 @@
               <a:buNone/>
             </a:pPr>
             <a:r>
-              <a:rPr lang="en-US" sz="4000" dirty="0">
+              <a:rPr lang="en-US" sz="4000" b="1" dirty="0">
                 <a:solidFill>
                   <a:srgbClr val="111111"/>
                 </a:solidFill>
@@ -18140,7 +18427,24 @@
                 <a:ea typeface="Times New Roman" pitchFamily="34" charset="-122"/>
                 <a:cs typeface="Times New Roman" pitchFamily="34" charset="-120"/>
               </a:rPr>
-              <a:t>How can vegetation both increase and reduce weathering?</a:t>
+              <a:t>Agriculture and deforestation: </a:t>
+            </a:r>
+            <a:pPr algn="l" indent="0" marL="0">
+              <a:spcAft>
+                <a:spcPts val="800"/>
+              </a:spcAft>
+              <a:buNone/>
+            </a:pPr>
+            <a:r>
+              <a:rPr lang="en-US" sz="4000" dirty="0">
+                <a:solidFill>
+                  <a:srgbClr val="111111"/>
+                </a:solidFill>
+                <a:latin typeface="Times New Roman" pitchFamily="34" charset="0"/>
+                <a:ea typeface="Times New Roman" pitchFamily="34" charset="-122"/>
+                <a:cs typeface="Times New Roman" pitchFamily="34" charset="-120"/>
+              </a:rPr>
+              <a:t>Clearing forests and ploughing remove the protective plant cover. The bare rocks and soils are then exposed to strong heating and to rain.</a:t>
             </a:r>
             <a:endParaRPr lang="en-US" sz="4000" dirty="0"/>
           </a:p>
@@ -18471,7 +18775,7 @@
                 <a:ea typeface="Calibri" pitchFamily="34" charset="-122"/>
                 <a:cs typeface="Calibri" pitchFamily="34" charset="-120"/>
               </a:rPr>
-              <a:t>FORMATIVE EVALUATION</a:t>
+              <a:t>BOARD SUMMARY</a:t>
             </a:r>
             <a:endParaRPr lang="en-US" sz="1400" dirty="0"/>
           </a:p>
@@ -18536,7 +18840,7 @@
                 <a:ea typeface="Times New Roman" pitchFamily="34" charset="-122"/>
                 <a:cs typeface="Times New Roman" pitchFamily="34" charset="-120"/>
               </a:rPr>
-              <a:t>Expected Answer</a:t>
+              <a:t>5. Human Activities</a:t>
             </a:r>
             <a:endParaRPr lang="en-US" sz="3600" dirty="0"/>
           </a:p>
@@ -18570,7 +18874,7 @@
               <a:buNone/>
             </a:pPr>
             <a:r>
-              <a:rPr lang="en-US" sz="4000" dirty="0">
+              <a:rPr lang="en-US" sz="4000" b="1" dirty="0">
                 <a:solidFill>
                   <a:srgbClr val="111111"/>
                 </a:solidFill>
@@ -18578,7 +18882,24 @@
                 <a:ea typeface="Times New Roman" pitchFamily="34" charset="-122"/>
                 <a:cs typeface="Times New Roman" pitchFamily="34" charset="-120"/>
               </a:rPr>
-              <a:t>Roots split rocks, but a dense cover protects rocks from sun and rain.</a:t>
+              <a:t>Pollution: </a:t>
+            </a:r>
+            <a:pPr algn="l" indent="0" marL="0">
+              <a:spcAft>
+                <a:spcPts val="800"/>
+              </a:spcAft>
+              <a:buNone/>
+            </a:pPr>
+            <a:r>
+              <a:rPr lang="en-US" sz="4000" dirty="0">
+                <a:solidFill>
+                  <a:srgbClr val="111111"/>
+                </a:solidFill>
+                <a:latin typeface="Times New Roman" pitchFamily="34" charset="0"/>
+                <a:ea typeface="Times New Roman" pitchFamily="34" charset="-122"/>
+                <a:cs typeface="Times New Roman" pitchFamily="34" charset="-120"/>
+              </a:rPr>
+              <a:t>Smoke from vehicles, factories and power stations produces acid rain. It dissolves limestone and marble and damages buildings and monuments.</a:t>
             </a:r>
             <a:endParaRPr lang="en-US" sz="4000" dirty="0"/>
           </a:p>
@@ -18690,7 +19011,7 @@
                 <a:ea typeface="Calibri" pitchFamily="34" charset="-122"/>
                 <a:cs typeface="Calibri" pitchFamily="34" charset="-120"/>
               </a:rPr>
-              <a:t>REMEDIATION</a:t>
+              <a:t>FORMATIVE EVALUATION</a:t>
             </a:r>
             <a:endParaRPr lang="en-US" sz="1400" dirty="0"/>
           </a:p>
@@ -18713,7 +19034,7 @@
         <p:spPr>
           <a:xfrm>
             <a:off x="0" y="658368"/>
-            <a:ext cx="2468880" cy="5833872"/>
+            <a:ext cx="5120640" cy="5833872"/>
           </a:xfrm>
           <a:prstGeom prst="rect">
             <a:avLst/>
@@ -18728,8 +19049,8 @@
         </p:nvSpPr>
         <p:spPr>
           <a:xfrm>
-            <a:off x="2697480" y="1005840"/>
-            <a:ext cx="9174175" cy="731520"/>
+            <a:off x="5349240" y="1005840"/>
+            <a:ext cx="6522415" cy="731520"/>
           </a:xfrm>
           <a:prstGeom prst="rect">
             <a:avLst/>
@@ -18755,7 +19076,7 @@
                 <a:ea typeface="Times New Roman" pitchFamily="34" charset="-122"/>
                 <a:cs typeface="Times New Roman" pitchFamily="34" charset="-120"/>
               </a:rPr>
-              <a:t>Remediation</a:t>
+              <a:t>Evaluation 1</a:t>
             </a:r>
             <a:endParaRPr lang="en-US" sz="3600" dirty="0"/>
           </a:p>
@@ -18769,8 +19090,8 @@
         </p:nvSpPr>
         <p:spPr>
           <a:xfrm>
-            <a:off x="2697480" y="1783080"/>
-            <a:ext cx="9174175" cy="4663440"/>
+            <a:off x="5349240" y="1783080"/>
+            <a:ext cx="6522415" cy="4663440"/>
           </a:xfrm>
           <a:prstGeom prst="rect">
             <a:avLst/>
@@ -18789,7 +19110,7 @@
               <a:buNone/>
             </a:pPr>
             <a:r>
-              <a:rPr lang="en-US" sz="4000" b="1" dirty="0">
+              <a:rPr lang="en-US" sz="4000" dirty="0">
                 <a:solidFill>
                   <a:srgbClr val="111111"/>
                 </a:solidFill>
@@ -18797,73 +19118,7 @@
                 <a:ea typeface="Times New Roman" pitchFamily="34" charset="-122"/>
                 <a:cs typeface="Times New Roman" pitchFamily="34" charset="-120"/>
               </a:rPr>
-              <a:t>Fill in the blanks:</a:t>
-            </a:r>
-            <a:endParaRPr lang="en-US" sz="4000" dirty="0"/>
-          </a:p>
-          <a:p>
-            <a:pPr algn="l" marL="342900" indent="-342900">
-              <a:spcAft>
-                <a:spcPts val="800"/>
-              </a:spcAft>
-              <a:buSzPct val="100000"/>
-              <a:buFont typeface="+mj-lt"/>
-              <a:buAutoNum type="arabicPeriod" startAt="1"/>
-            </a:pPr>
-            <a:r>
-              <a:rPr lang="en-US" sz="4000" dirty="0">
-                <a:solidFill>
-                  <a:srgbClr val="111111"/>
-                </a:solidFill>
-                <a:latin typeface="Times New Roman" pitchFamily="34" charset="0"/>
-                <a:ea typeface="Times New Roman" pitchFamily="34" charset="-122"/>
-                <a:cs typeface="Times New Roman" pitchFamily="34" charset="-120"/>
-              </a:rPr>
-              <a:t>The diagram linking climate and weathering is by ______.</a:t>
-            </a:r>
-            <a:endParaRPr lang="en-US" sz="4000" dirty="0"/>
-          </a:p>
-          <a:p>
-            <a:pPr algn="l" marL="342900" indent="-342900">
-              <a:spcAft>
-                <a:spcPts val="800"/>
-              </a:spcAft>
-              <a:buSzPct val="100000"/>
-              <a:buFont typeface="+mj-lt"/>
-              <a:buAutoNum type="arabicPeriod" startAt="1"/>
-            </a:pPr>
-            <a:r>
-              <a:rPr lang="en-US" sz="4000" dirty="0">
-                <a:solidFill>
-                  <a:srgbClr val="111111"/>
-                </a:solidFill>
-                <a:latin typeface="Times New Roman" pitchFamily="34" charset="0"/>
-                <a:ea typeface="Times New Roman" pitchFamily="34" charset="-122"/>
-                <a:cs typeface="Times New Roman" pitchFamily="34" charset="-120"/>
-              </a:rPr>
-              <a:t>Limestone weathers faster than ______.</a:t>
-            </a:r>
-            <a:endParaRPr lang="en-US" sz="4000" dirty="0"/>
-          </a:p>
-          <a:p>
-            <a:pPr algn="l" marL="342900" indent="-342900">
-              <a:spcAft>
-                <a:spcPts val="800"/>
-              </a:spcAft>
-              <a:buSzPct val="100000"/>
-              <a:buFont typeface="+mj-lt"/>
-              <a:buAutoNum type="arabicPeriod" startAt="1"/>
-            </a:pPr>
-            <a:r>
-              <a:rPr lang="en-US" sz="4000" dirty="0">
-                <a:solidFill>
-                  <a:srgbClr val="111111"/>
-                </a:solidFill>
-                <a:latin typeface="Times New Roman" pitchFamily="34" charset="0"/>
-                <a:ea typeface="Times New Roman" pitchFamily="34" charset="-122"/>
-                <a:cs typeface="Times New Roman" pitchFamily="34" charset="-120"/>
-              </a:rPr>
-              <a:t>Acid rain speeds up ______ weathering.</a:t>
+              <a:t>Why is climate the most important factor of weathering in North Cameroon?</a:t>
             </a:r>
             <a:endParaRPr lang="en-US" sz="4000" dirty="0"/>
           </a:p>
@@ -18975,7 +19230,7 @@
                 <a:ea typeface="Calibri" pitchFamily="34" charset="-122"/>
                 <a:cs typeface="Calibri" pitchFamily="34" charset="-120"/>
               </a:rPr>
-              <a:t>HOMEWORK</a:t>
+              <a:t>FORMATIVE EVALUATION</a:t>
             </a:r>
             <a:endParaRPr lang="en-US" sz="1400" dirty="0"/>
           </a:p>
@@ -19040,7 +19295,7 @@
                 <a:ea typeface="Times New Roman" pitchFamily="34" charset="-122"/>
                 <a:cs typeface="Times New Roman" pitchFamily="34" charset="-120"/>
               </a:rPr>
-              <a:t>Homework</a:t>
+              <a:t>Expected Answer</a:t>
             </a:r>
             <a:endParaRPr lang="en-US" sz="3600" dirty="0"/>
           </a:p>
@@ -19082,7 +19337,7 @@
                 <a:ea typeface="Times New Roman" pitchFamily="34" charset="-122"/>
                 <a:cs typeface="Times New Roman" pitchFamily="34" charset="-120"/>
               </a:rPr>
-              <a:t>Define regolith.</a:t>
+              <a:t>Strong heat causes exfoliation and speeds up chemical reactions, while the heavy rains provide water for chemical weathering.</a:t>
             </a:r>
             <a:endParaRPr lang="en-US" sz="4000" dirty="0"/>
           </a:p>
@@ -19194,7 +19449,7 @@
                 <a:ea typeface="Calibri" pitchFamily="34" charset="-122"/>
                 <a:cs typeface="Calibri" pitchFamily="34" charset="-120"/>
               </a:rPr>
-              <a:t>NEXT LESSON</a:t>
+              <a:t>FORMATIVE EVALUATION</a:t>
             </a:r>
             <a:endParaRPr lang="en-US" sz="1400" dirty="0"/>
           </a:p>
@@ -19259,7 +19514,7 @@
                 <a:ea typeface="Times New Roman" pitchFamily="34" charset="-122"/>
                 <a:cs typeface="Times New Roman" pitchFamily="34" charset="-120"/>
               </a:rPr>
-              <a:t>Next Lesson</a:t>
+              <a:t>Evaluation 2</a:t>
             </a:r>
             <a:endParaRPr lang="en-US" sz="3600" dirty="0"/>
           </a:p>
@@ -19283,17 +19538,17 @@
           <a:ln/>
         </p:spPr>
         <p:txBody>
-          <a:bodyPr wrap="square" lIns="0" tIns="0" rIns="0" bIns="0" rtlCol="0" anchor="ctr"/>
-          <a:lstStyle/>
-          <a:p>
-            <a:pPr algn="ctr" indent="0" marL="0">
+          <a:bodyPr wrap="square" lIns="0" tIns="0" rIns="0" bIns="0" rtlCol="0" anchor="t"/>
+          <a:lstStyle/>
+          <a:p>
+            <a:pPr algn="l" indent="0" marL="0">
               <a:spcAft>
                 <a:spcPts val="800"/>
               </a:spcAft>
               <a:buNone/>
             </a:pPr>
             <a:r>
-              <a:rPr lang="en-US" sz="4000" b="1" dirty="0">
+              <a:rPr lang="en-US" sz="4000" dirty="0">
                 <a:solidFill>
                   <a:srgbClr val="111111"/>
                 </a:solidFill>
@@ -19301,27 +19556,7 @@
                 <a:ea typeface="Times New Roman" pitchFamily="34" charset="-122"/>
                 <a:cs typeface="Times New Roman" pitchFamily="34" charset="-120"/>
               </a:rPr>
-              <a:t>Our next lesson will be on:</a:t>
-            </a:r>
-            <a:endParaRPr lang="en-US" sz="4000" dirty="0"/>
-          </a:p>
-          <a:p>
-            <a:pPr algn="ctr" indent="0" marL="0">
-              <a:spcAft>
-                <a:spcPts val="800"/>
-              </a:spcAft>
-              <a:buNone/>
-            </a:pPr>
-            <a:r>
-              <a:rPr lang="en-US" sz="4000" b="1" dirty="0">
-                <a:solidFill>
-                  <a:srgbClr val="990011"/>
-                </a:solidFill>
-                <a:latin typeface="Times New Roman" pitchFamily="34" charset="0"/>
-                <a:ea typeface="Times New Roman" pitchFamily="34" charset="-122"/>
-                <a:cs typeface="Times New Roman" pitchFamily="34" charset="-120"/>
-              </a:rPr>
-              <a:t>Lesson 11: The Impact of Weathering</a:t>
+              <a:t>How can vegetation both increase and reduce weathering?</a:t>
             </a:r>
             <a:endParaRPr lang="en-US" sz="4000" dirty="0"/>
           </a:p>
@@ -19433,6 +19668,968 @@
                 <a:ea typeface="Calibri" pitchFamily="34" charset="-122"/>
                 <a:cs typeface="Calibri" pitchFamily="34" charset="-120"/>
               </a:rPr>
+              <a:t>FORMATIVE EVALUATION</a:t>
+            </a:r>
+            <a:endParaRPr lang="en-US" sz="1400" dirty="0"/>
+          </a:p>
+        </p:txBody>
+      </p:sp>
+      <p:pic>
+        <p:nvPicPr>
+          <p:cNvPr id="3" name="Image 0" descr="/home/claude/f4/img/minesec_sheet.png">    </p:cNvPr>
+          <p:cNvPicPr>
+            <a:picLocks noChangeAspect="1"/>
+          </p:cNvPicPr>
+          <p:nvPr/>
+        </p:nvPicPr>
+        <p:blipFill>
+          <a:blip r:embed="rId1"/>
+          <a:stretch>
+            <a:fillRect/>
+          </a:stretch>
+        </p:blipFill>
+        <p:spPr>
+          <a:xfrm>
+            <a:off x="0" y="658368"/>
+            <a:ext cx="5120640" cy="5833872"/>
+          </a:xfrm>
+          <a:prstGeom prst="rect">
+            <a:avLst/>
+          </a:prstGeom>
+        </p:spPr>
+      </p:pic>
+      <p:sp>
+        <p:nvSpPr>
+          <p:cNvPr id="4" name="Text 1"/>
+          <p:cNvSpPr/>
+          <p:nvPr/>
+        </p:nvSpPr>
+        <p:spPr>
+          <a:xfrm>
+            <a:off x="5349240" y="1005840"/>
+            <a:ext cx="6522415" cy="731520"/>
+          </a:xfrm>
+          <a:prstGeom prst="rect">
+            <a:avLst/>
+          </a:prstGeom>
+          <a:noFill/>
+          <a:ln/>
+        </p:spPr>
+        <p:txBody>
+          <a:bodyPr wrap="square" lIns="0" tIns="0" rIns="0" bIns="0" rtlCol="0" anchor="ctr">
+            <a:normAutofit/>
+          </a:bodyPr>
+          <a:lstStyle/>
+          <a:p>
+            <a:pPr algn="ctr" indent="0" marL="0">
+              <a:buNone/>
+            </a:pPr>
+            <a:r>
+              <a:rPr lang="en-US" sz="3600" b="1" dirty="0">
+                <a:solidFill>
+                  <a:srgbClr val="990011"/>
+                </a:solidFill>
+                <a:latin typeface="Times New Roman" pitchFamily="34" charset="0"/>
+                <a:ea typeface="Times New Roman" pitchFamily="34" charset="-122"/>
+                <a:cs typeface="Times New Roman" pitchFamily="34" charset="-120"/>
+              </a:rPr>
+              <a:t>Expected Answer</a:t>
+            </a:r>
+            <a:endParaRPr lang="en-US" sz="3600" dirty="0"/>
+          </a:p>
+        </p:txBody>
+      </p:sp>
+      <p:sp>
+        <p:nvSpPr>
+          <p:cNvPr id="5" name="Text 2"/>
+          <p:cNvSpPr/>
+          <p:nvPr/>
+        </p:nvSpPr>
+        <p:spPr>
+          <a:xfrm>
+            <a:off x="5349240" y="1783080"/>
+            <a:ext cx="6522415" cy="4663440"/>
+          </a:xfrm>
+          <a:prstGeom prst="rect">
+            <a:avLst/>
+          </a:prstGeom>
+          <a:noFill/>
+          <a:ln/>
+        </p:spPr>
+        <p:txBody>
+          <a:bodyPr wrap="square" lIns="0" tIns="0" rIns="0" bIns="0" rtlCol="0" anchor="t"/>
+          <a:lstStyle/>
+          <a:p>
+            <a:pPr algn="l" indent="0" marL="0">
+              <a:spcAft>
+                <a:spcPts val="800"/>
+              </a:spcAft>
+              <a:buNone/>
+            </a:pPr>
+            <a:r>
+              <a:rPr lang="en-US" sz="4000" dirty="0">
+                <a:solidFill>
+                  <a:srgbClr val="111111"/>
+                </a:solidFill>
+                <a:latin typeface="Times New Roman" pitchFamily="34" charset="0"/>
+                <a:ea typeface="Times New Roman" pitchFamily="34" charset="-122"/>
+                <a:cs typeface="Times New Roman" pitchFamily="34" charset="-120"/>
+              </a:rPr>
+              <a:t>Roots split rocks, but a dense cover protects rocks from sun and rain.</a:t>
+            </a:r>
+            <a:endParaRPr lang="en-US" sz="4000" dirty="0"/>
+          </a:p>
+        </p:txBody>
+      </p:sp>
+      <p:sp>
+        <p:nvSpPr>
+          <p:cNvPr id="25" name="Slide Number Placeholder 0"/>
+          <p:cNvSpPr>
+            <a:spLocks noGrp="1"/>
+          </p:cNvSpPr>
+          <p:nvPr>
+            <p:ph type="sldNum" sz="quarter" idx="4294967295"/>
+          </p:nvPr>
+        </p:nvSpPr>
+        <p:spPr>
+          <a:xfrm>
+            <a:off x="27432" y="91440"/>
+            <a:ext cx="585216" cy="475488"/>
+          </a:xfrm>
+          <a:prstGeom prst="rect">
+            <a:avLst/>
+          </a:prstGeom>
+          <a:extLst>
+            <a:ext uri="{C572A759-6A51-4108-AA02-DFA0A04FC94B}">
+              <ma14:wrappingTextBoxFlag xmlns:ma14="http://schemas.microsoft.com/office/mac/drawingml/2011/main" val="0"/>
+            </a:ext>
+          </a:extLst>
+        </p:spPr>
+        <p:txBody>
+          <a:bodyPr/>
+          <a:lstStyle>
+            <a:lvl1pPr>
+              <a:defRPr sz="2000">
+                <a:solidFill>
+                  <a:srgbClr val="FFFFFF"/>
+                </a:solidFill>
+                <a:latin typeface="Calibri"/>
+                <a:ea typeface="Calibri"/>
+                <a:cs typeface="Calibri"/>
+              </a:defRPr>
+            </a:lvl1pPr>
+          </a:lstStyle>
+          <a:p>
+            <a:pPr algn="ctr"/>
+            <a:fld id="{F7021451-1387-4CA6-816F-3879F97B5CBC}" type="slidenum">
+              <a:rPr b="1" lang="en-US"/>
+              <a:t>54</a:t>
+            </a:fld>
+            <a:endParaRPr lang="en-US"/>
+          </a:p>
+        </p:txBody>
+      </p:sp>
+    </p:spTree>
+  </p:cSld>
+  <p:clrMapOvr>
+    <a:masterClrMapping/>
+  </p:clrMapOvr>
+</p:sld>
+</file>
+
+<file path=ppt/slides/slide55.xml><?xml version="1.0" encoding="utf-8"?>
+<p:sld xmlns:a="http://schemas.openxmlformats.org/drawingml/2006/main" xmlns:r="http://schemas.openxmlformats.org/officeDocument/2006/relationships" xmlns:p="http://schemas.openxmlformats.org/presentationml/2006/main">
+  <p:cSld name="Slide 55">
+    <p:spTree>
+      <p:nvGrpSpPr>
+        <p:cNvPr id="1" name=""/>
+        <p:cNvGrpSpPr/>
+        <p:nvPr/>
+      </p:nvGrpSpPr>
+      <p:grpSpPr>
+        <a:xfrm>
+          <a:off x="0" y="0"/>
+          <a:ext cx="0" cy="0"/>
+          <a:chOff x="0" y="0"/>
+          <a:chExt cx="0" cy="0"/>
+        </a:xfrm>
+      </p:grpSpPr>
+      <p:sp>
+        <p:nvSpPr>
+          <p:cNvPr id="2" name="Text 0"/>
+          <p:cNvSpPr/>
+          <p:nvPr/>
+        </p:nvSpPr>
+        <p:spPr>
+          <a:xfrm>
+            <a:off x="457200" y="713232"/>
+            <a:ext cx="11368735" cy="274320"/>
+          </a:xfrm>
+          <a:prstGeom prst="rect">
+            <a:avLst/>
+          </a:prstGeom>
+          <a:noFill/>
+          <a:ln/>
+        </p:spPr>
+        <p:txBody>
+          <a:bodyPr wrap="square" lIns="0" tIns="0" rIns="0" bIns="0" rtlCol="0" anchor="ctr"/>
+          <a:lstStyle/>
+          <a:p>
+            <a:pPr algn="r" indent="0" marL="0">
+              <a:buNone/>
+            </a:pPr>
+            <a:r>
+              <a:rPr lang="en-US" sz="1400" b="1" dirty="0">
+                <a:solidFill>
+                  <a:srgbClr val="1C3F6E"/>
+                </a:solidFill>
+                <a:latin typeface="Calibri" pitchFamily="34" charset="0"/>
+                <a:ea typeface="Calibri" pitchFamily="34" charset="-122"/>
+                <a:cs typeface="Calibri" pitchFamily="34" charset="-120"/>
+              </a:rPr>
+              <a:t>REMEDIATION</a:t>
+            </a:r>
+            <a:endParaRPr lang="en-US" sz="1400" dirty="0"/>
+          </a:p>
+        </p:txBody>
+      </p:sp>
+      <p:pic>
+        <p:nvPicPr>
+          <p:cNvPr id="3" name="Image 0" descr="/home/claude/f4/img/minesec_sheet.png">    </p:cNvPr>
+          <p:cNvPicPr>
+            <a:picLocks noChangeAspect="1"/>
+          </p:cNvPicPr>
+          <p:nvPr/>
+        </p:nvPicPr>
+        <p:blipFill>
+          <a:blip r:embed="rId1"/>
+          <a:stretch>
+            <a:fillRect/>
+          </a:stretch>
+        </p:blipFill>
+        <p:spPr>
+          <a:xfrm>
+            <a:off x="0" y="658368"/>
+            <a:ext cx="2468880" cy="5833872"/>
+          </a:xfrm>
+          <a:prstGeom prst="rect">
+            <a:avLst/>
+          </a:prstGeom>
+        </p:spPr>
+      </p:pic>
+      <p:sp>
+        <p:nvSpPr>
+          <p:cNvPr id="4" name="Text 1"/>
+          <p:cNvSpPr/>
+          <p:nvPr/>
+        </p:nvSpPr>
+        <p:spPr>
+          <a:xfrm>
+            <a:off x="2697480" y="1005840"/>
+            <a:ext cx="9174175" cy="731520"/>
+          </a:xfrm>
+          <a:prstGeom prst="rect">
+            <a:avLst/>
+          </a:prstGeom>
+          <a:noFill/>
+          <a:ln/>
+        </p:spPr>
+        <p:txBody>
+          <a:bodyPr wrap="square" lIns="0" tIns="0" rIns="0" bIns="0" rtlCol="0" anchor="ctr">
+            <a:normAutofit/>
+          </a:bodyPr>
+          <a:lstStyle/>
+          <a:p>
+            <a:pPr algn="ctr" indent="0" marL="0">
+              <a:buNone/>
+            </a:pPr>
+            <a:r>
+              <a:rPr lang="en-US" sz="3600" b="1" dirty="0">
+                <a:solidFill>
+                  <a:srgbClr val="990011"/>
+                </a:solidFill>
+                <a:latin typeface="Times New Roman" pitchFamily="34" charset="0"/>
+                <a:ea typeface="Times New Roman" pitchFamily="34" charset="-122"/>
+                <a:cs typeface="Times New Roman" pitchFamily="34" charset="-120"/>
+              </a:rPr>
+              <a:t>Remediation</a:t>
+            </a:r>
+            <a:endParaRPr lang="en-US" sz="3600" dirty="0"/>
+          </a:p>
+        </p:txBody>
+      </p:sp>
+      <p:sp>
+        <p:nvSpPr>
+          <p:cNvPr id="5" name="Text 2"/>
+          <p:cNvSpPr/>
+          <p:nvPr/>
+        </p:nvSpPr>
+        <p:spPr>
+          <a:xfrm>
+            <a:off x="2697480" y="1783080"/>
+            <a:ext cx="9174175" cy="4663440"/>
+          </a:xfrm>
+          <a:prstGeom prst="rect">
+            <a:avLst/>
+          </a:prstGeom>
+          <a:noFill/>
+          <a:ln/>
+        </p:spPr>
+        <p:txBody>
+          <a:bodyPr wrap="square" lIns="0" tIns="0" rIns="0" bIns="0" rtlCol="0" anchor="t"/>
+          <a:lstStyle/>
+          <a:p>
+            <a:pPr algn="l" indent="0" marL="0">
+              <a:spcAft>
+                <a:spcPts val="800"/>
+              </a:spcAft>
+              <a:buNone/>
+            </a:pPr>
+            <a:r>
+              <a:rPr lang="en-US" sz="4000" b="1" dirty="0">
+                <a:solidFill>
+                  <a:srgbClr val="111111"/>
+                </a:solidFill>
+                <a:latin typeface="Times New Roman" pitchFamily="34" charset="0"/>
+                <a:ea typeface="Times New Roman" pitchFamily="34" charset="-122"/>
+                <a:cs typeface="Times New Roman" pitchFamily="34" charset="-120"/>
+              </a:rPr>
+              <a:t>Fill in the blanks:</a:t>
+            </a:r>
+            <a:endParaRPr lang="en-US" sz="4000" dirty="0"/>
+          </a:p>
+          <a:p>
+            <a:pPr algn="l" marL="342900" indent="-342900">
+              <a:spcAft>
+                <a:spcPts val="800"/>
+              </a:spcAft>
+              <a:buSzPct val="100000"/>
+              <a:buFont typeface="+mj-lt"/>
+              <a:buAutoNum type="arabicPeriod" startAt="1"/>
+            </a:pPr>
+            <a:r>
+              <a:rPr lang="en-US" sz="4000" dirty="0">
+                <a:solidFill>
+                  <a:srgbClr val="111111"/>
+                </a:solidFill>
+                <a:latin typeface="Times New Roman" pitchFamily="34" charset="0"/>
+                <a:ea typeface="Times New Roman" pitchFamily="34" charset="-122"/>
+                <a:cs typeface="Times New Roman" pitchFamily="34" charset="-120"/>
+              </a:rPr>
+              <a:t>The diagram linking climate and weathering is by ______.</a:t>
+            </a:r>
+            <a:endParaRPr lang="en-US" sz="4000" dirty="0"/>
+          </a:p>
+          <a:p>
+            <a:pPr algn="l" marL="342900" indent="-342900">
+              <a:spcAft>
+                <a:spcPts val="800"/>
+              </a:spcAft>
+              <a:buSzPct val="100000"/>
+              <a:buFont typeface="+mj-lt"/>
+              <a:buAutoNum type="arabicPeriod" startAt="1"/>
+            </a:pPr>
+            <a:r>
+              <a:rPr lang="en-US" sz="4000" dirty="0">
+                <a:solidFill>
+                  <a:srgbClr val="111111"/>
+                </a:solidFill>
+                <a:latin typeface="Times New Roman" pitchFamily="34" charset="0"/>
+                <a:ea typeface="Times New Roman" pitchFamily="34" charset="-122"/>
+                <a:cs typeface="Times New Roman" pitchFamily="34" charset="-120"/>
+              </a:rPr>
+              <a:t>Limestone weathers faster than ______.</a:t>
+            </a:r>
+            <a:endParaRPr lang="en-US" sz="4000" dirty="0"/>
+          </a:p>
+          <a:p>
+            <a:pPr algn="l" marL="342900" indent="-342900">
+              <a:spcAft>
+                <a:spcPts val="800"/>
+              </a:spcAft>
+              <a:buSzPct val="100000"/>
+              <a:buFont typeface="+mj-lt"/>
+              <a:buAutoNum type="arabicPeriod" startAt="1"/>
+            </a:pPr>
+            <a:r>
+              <a:rPr lang="en-US" sz="4000" dirty="0">
+                <a:solidFill>
+                  <a:srgbClr val="111111"/>
+                </a:solidFill>
+                <a:latin typeface="Times New Roman" pitchFamily="34" charset="0"/>
+                <a:ea typeface="Times New Roman" pitchFamily="34" charset="-122"/>
+                <a:cs typeface="Times New Roman" pitchFamily="34" charset="-120"/>
+              </a:rPr>
+              <a:t>Acid rain speeds up ______ weathering.</a:t>
+            </a:r>
+            <a:endParaRPr lang="en-US" sz="4000" dirty="0"/>
+          </a:p>
+        </p:txBody>
+      </p:sp>
+      <p:sp>
+        <p:nvSpPr>
+          <p:cNvPr id="25" name="Slide Number Placeholder 0"/>
+          <p:cNvSpPr>
+            <a:spLocks noGrp="1"/>
+          </p:cNvSpPr>
+          <p:nvPr>
+            <p:ph type="sldNum" sz="quarter" idx="4294967295"/>
+          </p:nvPr>
+        </p:nvSpPr>
+        <p:spPr>
+          <a:xfrm>
+            <a:off x="27432" y="91440"/>
+            <a:ext cx="585216" cy="475488"/>
+          </a:xfrm>
+          <a:prstGeom prst="rect">
+            <a:avLst/>
+          </a:prstGeom>
+          <a:extLst>
+            <a:ext uri="{C572A759-6A51-4108-AA02-DFA0A04FC94B}">
+              <ma14:wrappingTextBoxFlag xmlns:ma14="http://schemas.microsoft.com/office/mac/drawingml/2011/main" val="0"/>
+            </a:ext>
+          </a:extLst>
+        </p:spPr>
+        <p:txBody>
+          <a:bodyPr/>
+          <a:lstStyle>
+            <a:lvl1pPr>
+              <a:defRPr sz="2000">
+                <a:solidFill>
+                  <a:srgbClr val="FFFFFF"/>
+                </a:solidFill>
+                <a:latin typeface="Calibri"/>
+                <a:ea typeface="Calibri"/>
+                <a:cs typeface="Calibri"/>
+              </a:defRPr>
+            </a:lvl1pPr>
+          </a:lstStyle>
+          <a:p>
+            <a:pPr algn="ctr"/>
+            <a:fld id="{F7021451-1387-4CA6-816F-3879F97B5CBC}" type="slidenum">
+              <a:rPr b="1" lang="en-US"/>
+              <a:t>55</a:t>
+            </a:fld>
+            <a:endParaRPr lang="en-US"/>
+          </a:p>
+        </p:txBody>
+      </p:sp>
+    </p:spTree>
+  </p:cSld>
+  <p:clrMapOvr>
+    <a:masterClrMapping/>
+  </p:clrMapOvr>
+</p:sld>
+</file>
+
+<file path=ppt/slides/slide56.xml><?xml version="1.0" encoding="utf-8"?>
+<p:sld xmlns:a="http://schemas.openxmlformats.org/drawingml/2006/main" xmlns:r="http://schemas.openxmlformats.org/officeDocument/2006/relationships" xmlns:p="http://schemas.openxmlformats.org/presentationml/2006/main">
+  <p:cSld name="Slide 56">
+    <p:spTree>
+      <p:nvGrpSpPr>
+        <p:cNvPr id="1" name=""/>
+        <p:cNvGrpSpPr/>
+        <p:nvPr/>
+      </p:nvGrpSpPr>
+      <p:grpSpPr>
+        <a:xfrm>
+          <a:off x="0" y="0"/>
+          <a:ext cx="0" cy="0"/>
+          <a:chOff x="0" y="0"/>
+          <a:chExt cx="0" cy="0"/>
+        </a:xfrm>
+      </p:grpSpPr>
+      <p:sp>
+        <p:nvSpPr>
+          <p:cNvPr id="2" name="Text 0"/>
+          <p:cNvSpPr/>
+          <p:nvPr/>
+        </p:nvSpPr>
+        <p:spPr>
+          <a:xfrm>
+            <a:off x="457200" y="713232"/>
+            <a:ext cx="11368735" cy="274320"/>
+          </a:xfrm>
+          <a:prstGeom prst="rect">
+            <a:avLst/>
+          </a:prstGeom>
+          <a:noFill/>
+          <a:ln/>
+        </p:spPr>
+        <p:txBody>
+          <a:bodyPr wrap="square" lIns="0" tIns="0" rIns="0" bIns="0" rtlCol="0" anchor="ctr"/>
+          <a:lstStyle/>
+          <a:p>
+            <a:pPr algn="r" indent="0" marL="0">
+              <a:buNone/>
+            </a:pPr>
+            <a:r>
+              <a:rPr lang="en-US" sz="1400" b="1" dirty="0">
+                <a:solidFill>
+                  <a:srgbClr val="1C3F6E"/>
+                </a:solidFill>
+                <a:latin typeface="Calibri" pitchFamily="34" charset="0"/>
+                <a:ea typeface="Calibri" pitchFamily="34" charset="-122"/>
+                <a:cs typeface="Calibri" pitchFamily="34" charset="-120"/>
+              </a:rPr>
+              <a:t>HOMEWORK</a:t>
+            </a:r>
+            <a:endParaRPr lang="en-US" sz="1400" dirty="0"/>
+          </a:p>
+        </p:txBody>
+      </p:sp>
+      <p:pic>
+        <p:nvPicPr>
+          <p:cNvPr id="3" name="Image 0" descr="/home/claude/f4/img/minesec_sheet.png">    </p:cNvPr>
+          <p:cNvPicPr>
+            <a:picLocks noChangeAspect="1"/>
+          </p:cNvPicPr>
+          <p:nvPr/>
+        </p:nvPicPr>
+        <p:blipFill>
+          <a:blip r:embed="rId1"/>
+          <a:stretch>
+            <a:fillRect/>
+          </a:stretch>
+        </p:blipFill>
+        <p:spPr>
+          <a:xfrm>
+            <a:off x="0" y="658368"/>
+            <a:ext cx="5120640" cy="5833872"/>
+          </a:xfrm>
+          <a:prstGeom prst="rect">
+            <a:avLst/>
+          </a:prstGeom>
+        </p:spPr>
+      </p:pic>
+      <p:sp>
+        <p:nvSpPr>
+          <p:cNvPr id="4" name="Text 1"/>
+          <p:cNvSpPr/>
+          <p:nvPr/>
+        </p:nvSpPr>
+        <p:spPr>
+          <a:xfrm>
+            <a:off x="5349240" y="1005840"/>
+            <a:ext cx="6522415" cy="731520"/>
+          </a:xfrm>
+          <a:prstGeom prst="rect">
+            <a:avLst/>
+          </a:prstGeom>
+          <a:noFill/>
+          <a:ln/>
+        </p:spPr>
+        <p:txBody>
+          <a:bodyPr wrap="square" lIns="0" tIns="0" rIns="0" bIns="0" rtlCol="0" anchor="ctr">
+            <a:normAutofit/>
+          </a:bodyPr>
+          <a:lstStyle/>
+          <a:p>
+            <a:pPr algn="ctr" indent="0" marL="0">
+              <a:buNone/>
+            </a:pPr>
+            <a:r>
+              <a:rPr lang="en-US" sz="3600" b="1" dirty="0">
+                <a:solidFill>
+                  <a:srgbClr val="990011"/>
+                </a:solidFill>
+                <a:latin typeface="Times New Roman" pitchFamily="34" charset="0"/>
+                <a:ea typeface="Times New Roman" pitchFamily="34" charset="-122"/>
+                <a:cs typeface="Times New Roman" pitchFamily="34" charset="-120"/>
+              </a:rPr>
+              <a:t>Homework</a:t>
+            </a:r>
+            <a:endParaRPr lang="en-US" sz="3600" dirty="0"/>
+          </a:p>
+        </p:txBody>
+      </p:sp>
+      <p:sp>
+        <p:nvSpPr>
+          <p:cNvPr id="5" name="Text 2"/>
+          <p:cNvSpPr/>
+          <p:nvPr/>
+        </p:nvSpPr>
+        <p:spPr>
+          <a:xfrm>
+            <a:off x="5349240" y="1783080"/>
+            <a:ext cx="6522415" cy="4663440"/>
+          </a:xfrm>
+          <a:prstGeom prst="rect">
+            <a:avLst/>
+          </a:prstGeom>
+          <a:noFill/>
+          <a:ln/>
+        </p:spPr>
+        <p:txBody>
+          <a:bodyPr wrap="square" lIns="0" tIns="0" rIns="0" bIns="0" rtlCol="0" anchor="t"/>
+          <a:lstStyle/>
+          <a:p>
+            <a:pPr algn="l" indent="0" marL="0">
+              <a:spcAft>
+                <a:spcPts val="800"/>
+              </a:spcAft>
+              <a:buNone/>
+            </a:pPr>
+            <a:r>
+              <a:rPr lang="en-US" sz="4000" dirty="0">
+                <a:solidFill>
+                  <a:srgbClr val="111111"/>
+                </a:solidFill>
+                <a:latin typeface="Times New Roman" pitchFamily="34" charset="0"/>
+                <a:ea typeface="Times New Roman" pitchFamily="34" charset="-122"/>
+                <a:cs typeface="Times New Roman" pitchFamily="34" charset="-120"/>
+              </a:rPr>
+              <a:t>Define regolith.</a:t>
+            </a:r>
+            <a:endParaRPr lang="en-US" sz="4000" dirty="0"/>
+          </a:p>
+        </p:txBody>
+      </p:sp>
+      <p:sp>
+        <p:nvSpPr>
+          <p:cNvPr id="25" name="Slide Number Placeholder 0"/>
+          <p:cNvSpPr>
+            <a:spLocks noGrp="1"/>
+          </p:cNvSpPr>
+          <p:nvPr>
+            <p:ph type="sldNum" sz="quarter" idx="4294967295"/>
+          </p:nvPr>
+        </p:nvSpPr>
+        <p:spPr>
+          <a:xfrm>
+            <a:off x="27432" y="91440"/>
+            <a:ext cx="585216" cy="475488"/>
+          </a:xfrm>
+          <a:prstGeom prst="rect">
+            <a:avLst/>
+          </a:prstGeom>
+          <a:extLst>
+            <a:ext uri="{C572A759-6A51-4108-AA02-DFA0A04FC94B}">
+              <ma14:wrappingTextBoxFlag xmlns:ma14="http://schemas.microsoft.com/office/mac/drawingml/2011/main" val="0"/>
+            </a:ext>
+          </a:extLst>
+        </p:spPr>
+        <p:txBody>
+          <a:bodyPr/>
+          <a:lstStyle>
+            <a:lvl1pPr>
+              <a:defRPr sz="2000">
+                <a:solidFill>
+                  <a:srgbClr val="FFFFFF"/>
+                </a:solidFill>
+                <a:latin typeface="Calibri"/>
+                <a:ea typeface="Calibri"/>
+                <a:cs typeface="Calibri"/>
+              </a:defRPr>
+            </a:lvl1pPr>
+          </a:lstStyle>
+          <a:p>
+            <a:pPr algn="ctr"/>
+            <a:fld id="{F7021451-1387-4CA6-816F-3879F97B5CBC}" type="slidenum">
+              <a:rPr b="1" lang="en-US"/>
+              <a:t>56</a:t>
+            </a:fld>
+            <a:endParaRPr lang="en-US"/>
+          </a:p>
+        </p:txBody>
+      </p:sp>
+    </p:spTree>
+  </p:cSld>
+  <p:clrMapOvr>
+    <a:masterClrMapping/>
+  </p:clrMapOvr>
+</p:sld>
+</file>
+
+<file path=ppt/slides/slide57.xml><?xml version="1.0" encoding="utf-8"?>
+<p:sld xmlns:a="http://schemas.openxmlformats.org/drawingml/2006/main" xmlns:r="http://schemas.openxmlformats.org/officeDocument/2006/relationships" xmlns:p="http://schemas.openxmlformats.org/presentationml/2006/main">
+  <p:cSld name="Slide 57">
+    <p:spTree>
+      <p:nvGrpSpPr>
+        <p:cNvPr id="1" name=""/>
+        <p:cNvGrpSpPr/>
+        <p:nvPr/>
+      </p:nvGrpSpPr>
+      <p:grpSpPr>
+        <a:xfrm>
+          <a:off x="0" y="0"/>
+          <a:ext cx="0" cy="0"/>
+          <a:chOff x="0" y="0"/>
+          <a:chExt cx="0" cy="0"/>
+        </a:xfrm>
+      </p:grpSpPr>
+      <p:sp>
+        <p:nvSpPr>
+          <p:cNvPr id="2" name="Text 0"/>
+          <p:cNvSpPr/>
+          <p:nvPr/>
+        </p:nvSpPr>
+        <p:spPr>
+          <a:xfrm>
+            <a:off x="457200" y="713232"/>
+            <a:ext cx="11368735" cy="274320"/>
+          </a:xfrm>
+          <a:prstGeom prst="rect">
+            <a:avLst/>
+          </a:prstGeom>
+          <a:noFill/>
+          <a:ln/>
+        </p:spPr>
+        <p:txBody>
+          <a:bodyPr wrap="square" lIns="0" tIns="0" rIns="0" bIns="0" rtlCol="0" anchor="ctr"/>
+          <a:lstStyle/>
+          <a:p>
+            <a:pPr algn="r" indent="0" marL="0">
+              <a:buNone/>
+            </a:pPr>
+            <a:r>
+              <a:rPr lang="en-US" sz="1400" b="1" dirty="0">
+                <a:solidFill>
+                  <a:srgbClr val="1C3F6E"/>
+                </a:solidFill>
+                <a:latin typeface="Calibri" pitchFamily="34" charset="0"/>
+                <a:ea typeface="Calibri" pitchFamily="34" charset="-122"/>
+                <a:cs typeface="Calibri" pitchFamily="34" charset="-120"/>
+              </a:rPr>
+              <a:t>NEXT LESSON</a:t>
+            </a:r>
+            <a:endParaRPr lang="en-US" sz="1400" dirty="0"/>
+          </a:p>
+        </p:txBody>
+      </p:sp>
+      <p:pic>
+        <p:nvPicPr>
+          <p:cNvPr id="3" name="Image 0" descr="/home/claude/f4/img/minesec_sheet.png">    </p:cNvPr>
+          <p:cNvPicPr>
+            <a:picLocks noChangeAspect="1"/>
+          </p:cNvPicPr>
+          <p:nvPr/>
+        </p:nvPicPr>
+        <p:blipFill>
+          <a:blip r:embed="rId1"/>
+          <a:stretch>
+            <a:fillRect/>
+          </a:stretch>
+        </p:blipFill>
+        <p:spPr>
+          <a:xfrm>
+            <a:off x="0" y="658368"/>
+            <a:ext cx="5120640" cy="5833872"/>
+          </a:xfrm>
+          <a:prstGeom prst="rect">
+            <a:avLst/>
+          </a:prstGeom>
+        </p:spPr>
+      </p:pic>
+      <p:sp>
+        <p:nvSpPr>
+          <p:cNvPr id="4" name="Text 1"/>
+          <p:cNvSpPr/>
+          <p:nvPr/>
+        </p:nvSpPr>
+        <p:spPr>
+          <a:xfrm>
+            <a:off x="5349240" y="1005840"/>
+            <a:ext cx="6522415" cy="731520"/>
+          </a:xfrm>
+          <a:prstGeom prst="rect">
+            <a:avLst/>
+          </a:prstGeom>
+          <a:noFill/>
+          <a:ln/>
+        </p:spPr>
+        <p:txBody>
+          <a:bodyPr wrap="square" lIns="0" tIns="0" rIns="0" bIns="0" rtlCol="0" anchor="ctr">
+            <a:normAutofit/>
+          </a:bodyPr>
+          <a:lstStyle/>
+          <a:p>
+            <a:pPr algn="ctr" indent="0" marL="0">
+              <a:buNone/>
+            </a:pPr>
+            <a:r>
+              <a:rPr lang="en-US" sz="3600" b="1" dirty="0">
+                <a:solidFill>
+                  <a:srgbClr val="990011"/>
+                </a:solidFill>
+                <a:latin typeface="Times New Roman" pitchFamily="34" charset="0"/>
+                <a:ea typeface="Times New Roman" pitchFamily="34" charset="-122"/>
+                <a:cs typeface="Times New Roman" pitchFamily="34" charset="-120"/>
+              </a:rPr>
+              <a:t>Next Lesson</a:t>
+            </a:r>
+            <a:endParaRPr lang="en-US" sz="3600" dirty="0"/>
+          </a:p>
+        </p:txBody>
+      </p:sp>
+      <p:sp>
+        <p:nvSpPr>
+          <p:cNvPr id="5" name="Text 2"/>
+          <p:cNvSpPr/>
+          <p:nvPr/>
+        </p:nvSpPr>
+        <p:spPr>
+          <a:xfrm>
+            <a:off x="5349240" y="1783080"/>
+            <a:ext cx="6522415" cy="4663440"/>
+          </a:xfrm>
+          <a:prstGeom prst="rect">
+            <a:avLst/>
+          </a:prstGeom>
+          <a:noFill/>
+          <a:ln/>
+        </p:spPr>
+        <p:txBody>
+          <a:bodyPr wrap="square" lIns="0" tIns="0" rIns="0" bIns="0" rtlCol="0" anchor="ctr"/>
+          <a:lstStyle/>
+          <a:p>
+            <a:pPr algn="ctr" indent="0" marL="0">
+              <a:spcAft>
+                <a:spcPts val="800"/>
+              </a:spcAft>
+              <a:buNone/>
+            </a:pPr>
+            <a:r>
+              <a:rPr lang="en-US" sz="4000" b="1" dirty="0">
+                <a:solidFill>
+                  <a:srgbClr val="111111"/>
+                </a:solidFill>
+                <a:latin typeface="Times New Roman" pitchFamily="34" charset="0"/>
+                <a:ea typeface="Times New Roman" pitchFamily="34" charset="-122"/>
+                <a:cs typeface="Times New Roman" pitchFamily="34" charset="-120"/>
+              </a:rPr>
+              <a:t>Our next lesson will be on:</a:t>
+            </a:r>
+            <a:endParaRPr lang="en-US" sz="4000" dirty="0"/>
+          </a:p>
+          <a:p>
+            <a:pPr algn="ctr" indent="0" marL="0">
+              <a:spcAft>
+                <a:spcPts val="800"/>
+              </a:spcAft>
+              <a:buNone/>
+            </a:pPr>
+            <a:r>
+              <a:rPr lang="en-US" sz="4000" b="1" dirty="0">
+                <a:solidFill>
+                  <a:srgbClr val="990011"/>
+                </a:solidFill>
+                <a:latin typeface="Times New Roman" pitchFamily="34" charset="0"/>
+                <a:ea typeface="Times New Roman" pitchFamily="34" charset="-122"/>
+                <a:cs typeface="Times New Roman" pitchFamily="34" charset="-120"/>
+              </a:rPr>
+              <a:t>Lesson 11: The Impact of Weathering</a:t>
+            </a:r>
+            <a:endParaRPr lang="en-US" sz="4000" dirty="0"/>
+          </a:p>
+        </p:txBody>
+      </p:sp>
+      <p:sp>
+        <p:nvSpPr>
+          <p:cNvPr id="25" name="Slide Number Placeholder 0"/>
+          <p:cNvSpPr>
+            <a:spLocks noGrp="1"/>
+          </p:cNvSpPr>
+          <p:nvPr>
+            <p:ph type="sldNum" sz="quarter" idx="4294967295"/>
+          </p:nvPr>
+        </p:nvSpPr>
+        <p:spPr>
+          <a:xfrm>
+            <a:off x="27432" y="91440"/>
+            <a:ext cx="585216" cy="475488"/>
+          </a:xfrm>
+          <a:prstGeom prst="rect">
+            <a:avLst/>
+          </a:prstGeom>
+          <a:extLst>
+            <a:ext uri="{C572A759-6A51-4108-AA02-DFA0A04FC94B}">
+              <ma14:wrappingTextBoxFlag xmlns:ma14="http://schemas.microsoft.com/office/mac/drawingml/2011/main" val="0"/>
+            </a:ext>
+          </a:extLst>
+        </p:spPr>
+        <p:txBody>
+          <a:bodyPr/>
+          <a:lstStyle>
+            <a:lvl1pPr>
+              <a:defRPr sz="2000">
+                <a:solidFill>
+                  <a:srgbClr val="FFFFFF"/>
+                </a:solidFill>
+                <a:latin typeface="Calibri"/>
+                <a:ea typeface="Calibri"/>
+                <a:cs typeface="Calibri"/>
+              </a:defRPr>
+            </a:lvl1pPr>
+          </a:lstStyle>
+          <a:p>
+            <a:pPr algn="ctr"/>
+            <a:fld id="{F7021451-1387-4CA6-816F-3879F97B5CBC}" type="slidenum">
+              <a:rPr b="1" lang="en-US"/>
+              <a:t>57</a:t>
+            </a:fld>
+            <a:endParaRPr lang="en-US"/>
+          </a:p>
+        </p:txBody>
+      </p:sp>
+    </p:spTree>
+  </p:cSld>
+  <p:clrMapOvr>
+    <a:masterClrMapping/>
+  </p:clrMapOvr>
+</p:sld>
+</file>
+
+<file path=ppt/slides/slide58.xml><?xml version="1.0" encoding="utf-8"?>
+<p:sld xmlns:a="http://schemas.openxmlformats.org/drawingml/2006/main" xmlns:r="http://schemas.openxmlformats.org/officeDocument/2006/relationships" xmlns:p="http://schemas.openxmlformats.org/presentationml/2006/main">
+  <p:cSld name="Slide 58">
+    <p:spTree>
+      <p:nvGrpSpPr>
+        <p:cNvPr id="1" name=""/>
+        <p:cNvGrpSpPr/>
+        <p:nvPr/>
+      </p:nvGrpSpPr>
+      <p:grpSpPr>
+        <a:xfrm>
+          <a:off x="0" y="0"/>
+          <a:ext cx="0" cy="0"/>
+          <a:chOff x="0" y="0"/>
+          <a:chExt cx="0" cy="0"/>
+        </a:xfrm>
+      </p:grpSpPr>
+      <p:sp>
+        <p:nvSpPr>
+          <p:cNvPr id="2" name="Text 0"/>
+          <p:cNvSpPr/>
+          <p:nvPr/>
+        </p:nvSpPr>
+        <p:spPr>
+          <a:xfrm>
+            <a:off x="457200" y="713232"/>
+            <a:ext cx="11368735" cy="274320"/>
+          </a:xfrm>
+          <a:prstGeom prst="rect">
+            <a:avLst/>
+          </a:prstGeom>
+          <a:noFill/>
+          <a:ln/>
+        </p:spPr>
+        <p:txBody>
+          <a:bodyPr wrap="square" lIns="0" tIns="0" rIns="0" bIns="0" rtlCol="0" anchor="ctr"/>
+          <a:lstStyle/>
+          <a:p>
+            <a:pPr algn="r" indent="0" marL="0">
+              <a:buNone/>
+            </a:pPr>
+            <a:r>
+              <a:rPr lang="en-US" sz="1400" b="1" dirty="0">
+                <a:solidFill>
+                  <a:srgbClr val="1C3F6E"/>
+                </a:solidFill>
+                <a:latin typeface="Calibri" pitchFamily="34" charset="0"/>
+                <a:ea typeface="Calibri" pitchFamily="34" charset="-122"/>
+                <a:cs typeface="Calibri" pitchFamily="34" charset="-120"/>
+              </a:rPr>
               <a:t>BILINGUAL GAME</a:t>
             </a:r>
             <a:endParaRPr lang="en-US" sz="1400" dirty="0"/>
@@ -19480,7 +20677,7 @@
       </p:sp>
       <p:graphicFrame>
         <p:nvGraphicFramePr>
-          <p:cNvPr id="55" name="Table 0"/>
+          <p:cNvPr id="59" name="Table 0"/>
           <p:cNvGraphicFramePr>
             <a:graphicFrameLocks noGrp="1"/>
           </p:cNvGraphicFramePr>
@@ -20516,7 +21713,7 @@
             <a:pPr algn="ctr"/>
             <a:fld id="{F7021451-1387-4CA6-816F-3879F97B5CBC}" type="slidenum">
               <a:rPr b="1" lang="en-US"/>
-              <a:t>54</a:t>
+              <a:t>58</a:t>
             </a:fld>
             <a:endParaRPr lang="en-US"/>
           </a:p>
@@ -20530,9 +21727,9 @@
 </p:sld>
 </file>
 
-<file path=ppt/slides/slide55.xml><?xml version="1.0" encoding="utf-8"?>
+<file path=ppt/slides/slide59.xml><?xml version="1.0" encoding="utf-8"?>
 <p:sld xmlns:a="http://schemas.openxmlformats.org/drawingml/2006/main" xmlns:r="http://schemas.openxmlformats.org/officeDocument/2006/relationships" xmlns:p="http://schemas.openxmlformats.org/presentationml/2006/main">
-  <p:cSld name="Slide 55">
+  <p:cSld name="Slide 59">
     <p:spTree>
       <p:nvGrpSpPr>
         <p:cNvPr id="1" name=""/>
@@ -20627,7 +21824,7 @@
       </p:sp>
       <p:graphicFrame>
         <p:nvGraphicFramePr>
-          <p:cNvPr id="56" name="Table 0"/>
+          <p:cNvPr id="60" name="Table 0"/>
           <p:cNvGraphicFramePr>
             <a:graphicFrameLocks noGrp="1"/>
           </p:cNvGraphicFramePr>
@@ -21249,7 +22446,7 @@
             <a:pPr algn="ctr"/>
             <a:fld id="{F7021451-1387-4CA6-816F-3879F97B5CBC}" type="slidenum">
               <a:rPr b="1" lang="en-US"/>
-              <a:t>55</a:t>
+              <a:t>59</a:t>
             </a:fld>
             <a:endParaRPr lang="en-US"/>
           </a:p>
@@ -21263,9 +22460,9 @@
 </p:sld>
 </file>
 
-<file path=ppt/slides/slide56.xml><?xml version="1.0" encoding="utf-8"?>
+<file path=ppt/slides/slide6.xml><?xml version="1.0" encoding="utf-8"?>
 <p:sld xmlns:a="http://schemas.openxmlformats.org/drawingml/2006/main" xmlns:r="http://schemas.openxmlformats.org/officeDocument/2006/relationships" xmlns:p="http://schemas.openxmlformats.org/presentationml/2006/main">
-  <p:cSld name="Slide 56">
+  <p:cSld name="Slide 6">
     <p:spTree>
       <p:nvGrpSpPr>
         <p:cNvPr id="1" name=""/>
@@ -21313,6 +22510,337 @@
                 <a:ea typeface="Calibri" pitchFamily="34" charset="-122"/>
                 <a:cs typeface="Calibri" pitchFamily="34" charset="-120"/>
               </a:rPr>
+              <a:t>LESSON PLAN</a:t>
+            </a:r>
+            <a:endParaRPr lang="en-US" sz="1400" dirty="0"/>
+          </a:p>
+        </p:txBody>
+      </p:sp>
+      <p:pic>
+        <p:nvPicPr>
+          <p:cNvPr id="3" name="Image 0" descr="/home/claude/f4/img/minesec_sheet.png">    </p:cNvPr>
+          <p:cNvPicPr>
+            <a:picLocks noChangeAspect="1"/>
+          </p:cNvPicPr>
+          <p:nvPr/>
+        </p:nvPicPr>
+        <p:blipFill>
+          <a:blip r:embed="rId1"/>
+          <a:stretch>
+            <a:fillRect/>
+          </a:stretch>
+        </p:blipFill>
+        <p:spPr>
+          <a:xfrm>
+            <a:off x="0" y="658368"/>
+            <a:ext cx="2468880" cy="5833872"/>
+          </a:xfrm>
+          <a:prstGeom prst="rect">
+            <a:avLst/>
+          </a:prstGeom>
+        </p:spPr>
+      </p:pic>
+      <p:sp>
+        <p:nvSpPr>
+          <p:cNvPr id="4" name="Text 1"/>
+          <p:cNvSpPr/>
+          <p:nvPr/>
+        </p:nvSpPr>
+        <p:spPr>
+          <a:xfrm>
+            <a:off x="2697480" y="1005840"/>
+            <a:ext cx="9174175" cy="731520"/>
+          </a:xfrm>
+          <a:prstGeom prst="rect">
+            <a:avLst/>
+          </a:prstGeom>
+          <a:noFill/>
+          <a:ln/>
+        </p:spPr>
+        <p:txBody>
+          <a:bodyPr wrap="square" lIns="0" tIns="0" rIns="0" bIns="0" rtlCol="0" anchor="ctr">
+            <a:normAutofit/>
+          </a:bodyPr>
+          <a:lstStyle/>
+          <a:p>
+            <a:pPr algn="ctr" indent="0" marL="0">
+              <a:buNone/>
+            </a:pPr>
+            <a:r>
+              <a:rPr lang="en-US" sz="3600" b="1" dirty="0">
+                <a:solidFill>
+                  <a:srgbClr val="990011"/>
+                </a:solidFill>
+                <a:latin typeface="Times New Roman" pitchFamily="34" charset="0"/>
+                <a:ea typeface="Times New Roman" pitchFamily="34" charset="-122"/>
+                <a:cs typeface="Times New Roman" pitchFamily="34" charset="-120"/>
+              </a:rPr>
+              <a:t>Lesson Plan</a:t>
+            </a:r>
+            <a:endParaRPr lang="en-US" sz="3600" dirty="0"/>
+          </a:p>
+        </p:txBody>
+      </p:sp>
+      <p:sp>
+        <p:nvSpPr>
+          <p:cNvPr id="5" name="Text 2"/>
+          <p:cNvSpPr/>
+          <p:nvPr/>
+        </p:nvSpPr>
+        <p:spPr>
+          <a:xfrm>
+            <a:off x="2697480" y="1783080"/>
+            <a:ext cx="9174175" cy="4663440"/>
+          </a:xfrm>
+          <a:prstGeom prst="rect">
+            <a:avLst/>
+          </a:prstGeom>
+          <a:noFill/>
+          <a:ln/>
+        </p:spPr>
+        <p:txBody>
+          <a:bodyPr wrap="square" lIns="0" tIns="0" rIns="0" bIns="0" rtlCol="0" anchor="t"/>
+          <a:lstStyle/>
+          <a:p>
+            <a:pPr algn="l" marL="342900" indent="-342900">
+              <a:spcAft>
+                <a:spcPts val="800"/>
+              </a:spcAft>
+              <a:buSzPct val="100000"/>
+              <a:buFont typeface="+mj-lt"/>
+              <a:buAutoNum type="arabicPeriod" startAt="1"/>
+            </a:pPr>
+            <a:r>
+              <a:rPr lang="en-US" sz="4000" dirty="0">
+                <a:solidFill>
+                  <a:srgbClr val="111111"/>
+                </a:solidFill>
+                <a:latin typeface="Times New Roman" pitchFamily="34" charset="0"/>
+                <a:ea typeface="Times New Roman" pitchFamily="34" charset="-122"/>
+                <a:cs typeface="Times New Roman" pitchFamily="34" charset="-120"/>
+              </a:rPr>
+              <a:t>Correction of the homework</a:t>
+            </a:r>
+            <a:endParaRPr lang="en-US" sz="4000" dirty="0"/>
+          </a:p>
+          <a:p>
+            <a:pPr algn="l" marL="342900" indent="-342900">
+              <a:spcAft>
+                <a:spcPts val="800"/>
+              </a:spcAft>
+              <a:buSzPct val="100000"/>
+              <a:buFont typeface="+mj-lt"/>
+              <a:buAutoNum type="arabicPeriod" startAt="1"/>
+            </a:pPr>
+            <a:r>
+              <a:rPr lang="en-US" sz="4000" dirty="0">
+                <a:solidFill>
+                  <a:srgbClr val="111111"/>
+                </a:solidFill>
+                <a:latin typeface="Times New Roman" pitchFamily="34" charset="0"/>
+                <a:ea typeface="Times New Roman" pitchFamily="34" charset="-122"/>
+                <a:cs typeface="Times New Roman" pitchFamily="34" charset="-120"/>
+              </a:rPr>
+              <a:t>Objectives and recall</a:t>
+            </a:r>
+            <a:endParaRPr lang="en-US" sz="4000" dirty="0"/>
+          </a:p>
+          <a:p>
+            <a:pPr algn="l" marL="342900" indent="-342900">
+              <a:spcAft>
+                <a:spcPts val="800"/>
+              </a:spcAft>
+              <a:buSzPct val="100000"/>
+              <a:buFont typeface="+mj-lt"/>
+              <a:buAutoNum type="arabicPeriod" startAt="1"/>
+            </a:pPr>
+            <a:r>
+              <a:rPr lang="en-US" sz="4000" dirty="0">
+                <a:solidFill>
+                  <a:srgbClr val="111111"/>
+                </a:solidFill>
+                <a:latin typeface="Times New Roman" pitchFamily="34" charset="0"/>
+                <a:ea typeface="Times New Roman" pitchFamily="34" charset="-122"/>
+                <a:cs typeface="Times New Roman" pitchFamily="34" charset="-120"/>
+              </a:rPr>
+              <a:t>Real-life situation and action to take</a:t>
+            </a:r>
+            <a:endParaRPr lang="en-US" sz="4000" dirty="0"/>
+          </a:p>
+          <a:p>
+            <a:pPr algn="l" marL="342900" indent="-342900">
+              <a:spcAft>
+                <a:spcPts val="800"/>
+              </a:spcAft>
+              <a:buSzPct val="100000"/>
+              <a:buFont typeface="+mj-lt"/>
+              <a:buAutoNum type="arabicPeriod" startAt="1"/>
+            </a:pPr>
+            <a:r>
+              <a:rPr lang="en-US" sz="4000" dirty="0">
+                <a:solidFill>
+                  <a:srgbClr val="111111"/>
+                </a:solidFill>
+                <a:latin typeface="Times New Roman" pitchFamily="34" charset="0"/>
+                <a:ea typeface="Times New Roman" pitchFamily="34" charset="-122"/>
+                <a:cs typeface="Times New Roman" pitchFamily="34" charset="-120"/>
+              </a:rPr>
+              <a:t>Learning activities</a:t>
+            </a:r>
+            <a:endParaRPr lang="en-US" sz="4000" dirty="0"/>
+          </a:p>
+          <a:p>
+            <a:pPr algn="l" marL="342900" indent="-342900">
+              <a:spcAft>
+                <a:spcPts val="800"/>
+              </a:spcAft>
+              <a:buSzPct val="100000"/>
+              <a:buFont typeface="+mj-lt"/>
+              <a:buAutoNum type="arabicPeriod" startAt="1"/>
+            </a:pPr>
+            <a:r>
+              <a:rPr lang="en-US" sz="4000" dirty="0">
+                <a:solidFill>
+                  <a:srgbClr val="111111"/>
+                </a:solidFill>
+                <a:latin typeface="Times New Roman" pitchFamily="34" charset="0"/>
+                <a:ea typeface="Times New Roman" pitchFamily="34" charset="-122"/>
+                <a:cs typeface="Times New Roman" pitchFamily="34" charset="-120"/>
+              </a:rPr>
+              <a:t>Board summary</a:t>
+            </a:r>
+            <a:endParaRPr lang="en-US" sz="4000" dirty="0"/>
+          </a:p>
+          <a:p>
+            <a:pPr algn="l" marL="342900" indent="-342900">
+              <a:spcAft>
+                <a:spcPts val="800"/>
+              </a:spcAft>
+              <a:buSzPct val="100000"/>
+              <a:buFont typeface="+mj-lt"/>
+              <a:buAutoNum type="arabicPeriod" startAt="1"/>
+            </a:pPr>
+            <a:r>
+              <a:rPr lang="en-US" sz="4000" dirty="0">
+                <a:solidFill>
+                  <a:srgbClr val="111111"/>
+                </a:solidFill>
+                <a:latin typeface="Times New Roman" pitchFamily="34" charset="0"/>
+                <a:ea typeface="Times New Roman" pitchFamily="34" charset="-122"/>
+                <a:cs typeface="Times New Roman" pitchFamily="34" charset="-120"/>
+              </a:rPr>
+              <a:t>Evaluation, remediation and homework</a:t>
+            </a:r>
+            <a:endParaRPr lang="en-US" sz="4000" dirty="0"/>
+          </a:p>
+        </p:txBody>
+      </p:sp>
+      <p:sp>
+        <p:nvSpPr>
+          <p:cNvPr id="25" name="Slide Number Placeholder 0"/>
+          <p:cNvSpPr>
+            <a:spLocks noGrp="1"/>
+          </p:cNvSpPr>
+          <p:nvPr>
+            <p:ph type="sldNum" sz="quarter" idx="4294967295"/>
+          </p:nvPr>
+        </p:nvSpPr>
+        <p:spPr>
+          <a:xfrm>
+            <a:off x="27432" y="91440"/>
+            <a:ext cx="585216" cy="475488"/>
+          </a:xfrm>
+          <a:prstGeom prst="rect">
+            <a:avLst/>
+          </a:prstGeom>
+          <a:extLst>
+            <a:ext uri="{C572A759-6A51-4108-AA02-DFA0A04FC94B}">
+              <ma14:wrappingTextBoxFlag xmlns:ma14="http://schemas.microsoft.com/office/mac/drawingml/2011/main" val="0"/>
+            </a:ext>
+          </a:extLst>
+        </p:spPr>
+        <p:txBody>
+          <a:bodyPr/>
+          <a:lstStyle>
+            <a:lvl1pPr>
+              <a:defRPr sz="2000">
+                <a:solidFill>
+                  <a:srgbClr val="FFFFFF"/>
+                </a:solidFill>
+                <a:latin typeface="Calibri"/>
+                <a:ea typeface="Calibri"/>
+                <a:cs typeface="Calibri"/>
+              </a:defRPr>
+            </a:lvl1pPr>
+          </a:lstStyle>
+          <a:p>
+            <a:pPr algn="ctr"/>
+            <a:fld id="{F7021451-1387-4CA6-816F-3879F97B5CBC}" type="slidenum">
+              <a:rPr b="1" lang="en-US"/>
+              <a:t>6</a:t>
+            </a:fld>
+            <a:endParaRPr lang="en-US"/>
+          </a:p>
+        </p:txBody>
+      </p:sp>
+    </p:spTree>
+  </p:cSld>
+  <p:clrMapOvr>
+    <a:masterClrMapping/>
+  </p:clrMapOvr>
+</p:sld>
+</file>
+
+<file path=ppt/slides/slide60.xml><?xml version="1.0" encoding="utf-8"?>
+<p:sld xmlns:a="http://schemas.openxmlformats.org/drawingml/2006/main" xmlns:r="http://schemas.openxmlformats.org/officeDocument/2006/relationships" xmlns:p="http://schemas.openxmlformats.org/presentationml/2006/main">
+  <p:cSld name="Slide 60">
+    <p:spTree>
+      <p:nvGrpSpPr>
+        <p:cNvPr id="1" name=""/>
+        <p:cNvGrpSpPr/>
+        <p:nvPr/>
+      </p:nvGrpSpPr>
+      <p:grpSpPr>
+        <a:xfrm>
+          <a:off x="0" y="0"/>
+          <a:ext cx="0" cy="0"/>
+          <a:chOff x="0" y="0"/>
+          <a:chExt cx="0" cy="0"/>
+        </a:xfrm>
+      </p:grpSpPr>
+      <p:sp>
+        <p:nvSpPr>
+          <p:cNvPr id="2" name="Text 0"/>
+          <p:cNvSpPr/>
+          <p:nvPr/>
+        </p:nvSpPr>
+        <p:spPr>
+          <a:xfrm>
+            <a:off x="457200" y="713232"/>
+            <a:ext cx="11368735" cy="274320"/>
+          </a:xfrm>
+          <a:prstGeom prst="rect">
+            <a:avLst/>
+          </a:prstGeom>
+          <a:noFill/>
+          <a:ln/>
+        </p:spPr>
+        <p:txBody>
+          <a:bodyPr wrap="square" lIns="0" tIns="0" rIns="0" bIns="0" rtlCol="0" anchor="ctr"/>
+          <a:lstStyle/>
+          <a:p>
+            <a:pPr algn="r" indent="0" marL="0">
+              <a:buNone/>
+            </a:pPr>
+            <a:r>
+              <a:rPr lang="en-US" sz="1400" b="1" dirty="0">
+                <a:solidFill>
+                  <a:srgbClr val="1C3F6E"/>
+                </a:solidFill>
+                <a:latin typeface="Calibri" pitchFamily="34" charset="0"/>
+                <a:ea typeface="Calibri" pitchFamily="34" charset="-122"/>
+                <a:cs typeface="Calibri" pitchFamily="34" charset="-120"/>
+              </a:rPr>
               <a:t>LOGBOOK</a:t>
             </a:r>
             <a:endParaRPr lang="en-US" sz="1400" dirty="0"/>
@@ -21360,7 +22888,7 @@
       </p:sp>
       <p:graphicFrame>
         <p:nvGraphicFramePr>
-          <p:cNvPr id="57" name="Table 0"/>
+          <p:cNvPr id="61" name="Table 0"/>
           <p:cNvGraphicFramePr>
             <a:graphicFrameLocks noGrp="1"/>
           </p:cNvGraphicFramePr>
@@ -21470,7 +22998,7 @@
                           <a:ea typeface="Calibri" pitchFamily="34" charset="-122"/>
                           <a:cs typeface="Calibri" pitchFamily="34" charset="-120"/>
                         </a:rPr>
-                        <a:t>DEFINITIONS; Climate; Geology (Rock Characteristics); Relief, Vegetation and Human Activities.</a:t>
+                        <a:t>DEFINITIONS; Climate; Geology (Rock Characteristics); Relief; Vegetation; Human Activities.</a:t>
                       </a:r>
                       <a:endParaRPr lang="en-US" sz="1600" dirty="0">
                         <a:latin typeface="Calibri" charset="0"/>
@@ -22120,7 +23648,7 @@
             <a:pPr algn="ctr"/>
             <a:fld id="{F7021451-1387-4CA6-816F-3879F97B5CBC}" type="slidenum">
               <a:rPr b="1" lang="en-US"/>
-              <a:t>56</a:t>
+              <a:t>60</a:t>
             </a:fld>
             <a:endParaRPr lang="en-US"/>
           </a:p>
@@ -22134,9 +23662,9 @@
 </p:sld>
 </file>
 
-<file path=ppt/slides/slide57.xml><?xml version="1.0" encoding="utf-8"?>
+<file path=ppt/slides/slide61.xml><?xml version="1.0" encoding="utf-8"?>
 <p:sld xmlns:a="http://schemas.openxmlformats.org/drawingml/2006/main" xmlns:r="http://schemas.openxmlformats.org/officeDocument/2006/relationships" xmlns:p="http://schemas.openxmlformats.org/presentationml/2006/main">
-  <p:cSld name="Slide 57">
+  <p:cSld name="Slide 61">
     <p:spTree>
       <p:nvGrpSpPr>
         <p:cNvPr id="1" name=""/>
@@ -22445,7 +23973,7 @@
             <a:pPr algn="ctr"/>
             <a:fld id="{F7021451-1387-4CA6-816F-3879F97B5CBC}" type="slidenum">
               <a:rPr b="1" lang="en-US"/>
-              <a:t>57</a:t>
+              <a:t>61</a:t>
             </a:fld>
             <a:endParaRPr lang="en-US"/>
           </a:p>
@@ -22459,9 +23987,9 @@
 </p:sld>
 </file>
 
-<file path=ppt/slides/slide58.xml><?xml version="1.0" encoding="utf-8"?>
+<file path=ppt/slides/slide62.xml><?xml version="1.0" encoding="utf-8"?>
 <p:sld xmlns:a="http://schemas.openxmlformats.org/drawingml/2006/main" xmlns:r="http://schemas.openxmlformats.org/officeDocument/2006/relationships" xmlns:p="http://schemas.openxmlformats.org/presentationml/2006/main">
-  <p:cSld name="Slide 58">
+  <p:cSld name="Slide 62">
     <p:spTree>
       <p:nvGrpSpPr>
         <p:cNvPr id="1" name=""/>
@@ -22791,338 +24319,7 @@
             <a:pPr algn="ctr"/>
             <a:fld id="{F7021451-1387-4CA6-816F-3879F97B5CBC}" type="slidenum">
               <a:rPr b="1" lang="en-US"/>
-              <a:t>58</a:t>
-            </a:fld>
-            <a:endParaRPr lang="en-US"/>
-          </a:p>
-        </p:txBody>
-      </p:sp>
-    </p:spTree>
-  </p:cSld>
-  <p:clrMapOvr>
-    <a:masterClrMapping/>
-  </p:clrMapOvr>
-</p:sld>
-</file>
-
-<file path=ppt/slides/slide6.xml><?xml version="1.0" encoding="utf-8"?>
-<p:sld xmlns:a="http://schemas.openxmlformats.org/drawingml/2006/main" xmlns:r="http://schemas.openxmlformats.org/officeDocument/2006/relationships" xmlns:p="http://schemas.openxmlformats.org/presentationml/2006/main">
-  <p:cSld name="Slide 6">
-    <p:spTree>
-      <p:nvGrpSpPr>
-        <p:cNvPr id="1" name=""/>
-        <p:cNvGrpSpPr/>
-        <p:nvPr/>
-      </p:nvGrpSpPr>
-      <p:grpSpPr>
-        <a:xfrm>
-          <a:off x="0" y="0"/>
-          <a:ext cx="0" cy="0"/>
-          <a:chOff x="0" y="0"/>
-          <a:chExt cx="0" cy="0"/>
-        </a:xfrm>
-      </p:grpSpPr>
-      <p:sp>
-        <p:nvSpPr>
-          <p:cNvPr id="2" name="Text 0"/>
-          <p:cNvSpPr/>
-          <p:nvPr/>
-        </p:nvSpPr>
-        <p:spPr>
-          <a:xfrm>
-            <a:off x="457200" y="713232"/>
-            <a:ext cx="11368735" cy="274320"/>
-          </a:xfrm>
-          <a:prstGeom prst="rect">
-            <a:avLst/>
-          </a:prstGeom>
-          <a:noFill/>
-          <a:ln/>
-        </p:spPr>
-        <p:txBody>
-          <a:bodyPr wrap="square" lIns="0" tIns="0" rIns="0" bIns="0" rtlCol="0" anchor="ctr"/>
-          <a:lstStyle/>
-          <a:p>
-            <a:pPr algn="r" indent="0" marL="0">
-              <a:buNone/>
-            </a:pPr>
-            <a:r>
-              <a:rPr lang="en-US" sz="1400" b="1" dirty="0">
-                <a:solidFill>
-                  <a:srgbClr val="1C3F6E"/>
-                </a:solidFill>
-                <a:latin typeface="Calibri" pitchFamily="34" charset="0"/>
-                <a:ea typeface="Calibri" pitchFamily="34" charset="-122"/>
-                <a:cs typeface="Calibri" pitchFamily="34" charset="-120"/>
-              </a:rPr>
-              <a:t>LESSON PLAN</a:t>
-            </a:r>
-            <a:endParaRPr lang="en-US" sz="1400" dirty="0"/>
-          </a:p>
-        </p:txBody>
-      </p:sp>
-      <p:pic>
-        <p:nvPicPr>
-          <p:cNvPr id="3" name="Image 0" descr="/home/claude/f4/img/minesec_sheet.png">    </p:cNvPr>
-          <p:cNvPicPr>
-            <a:picLocks noChangeAspect="1"/>
-          </p:cNvPicPr>
-          <p:nvPr/>
-        </p:nvPicPr>
-        <p:blipFill>
-          <a:blip r:embed="rId1"/>
-          <a:stretch>
-            <a:fillRect/>
-          </a:stretch>
-        </p:blipFill>
-        <p:spPr>
-          <a:xfrm>
-            <a:off x="0" y="658368"/>
-            <a:ext cx="2468880" cy="5833872"/>
-          </a:xfrm>
-          <a:prstGeom prst="rect">
-            <a:avLst/>
-          </a:prstGeom>
-        </p:spPr>
-      </p:pic>
-      <p:sp>
-        <p:nvSpPr>
-          <p:cNvPr id="4" name="Text 1"/>
-          <p:cNvSpPr/>
-          <p:nvPr/>
-        </p:nvSpPr>
-        <p:spPr>
-          <a:xfrm>
-            <a:off x="2697480" y="1005840"/>
-            <a:ext cx="9174175" cy="731520"/>
-          </a:xfrm>
-          <a:prstGeom prst="rect">
-            <a:avLst/>
-          </a:prstGeom>
-          <a:noFill/>
-          <a:ln/>
-        </p:spPr>
-        <p:txBody>
-          <a:bodyPr wrap="square" lIns="0" tIns="0" rIns="0" bIns="0" rtlCol="0" anchor="ctr">
-            <a:normAutofit/>
-          </a:bodyPr>
-          <a:lstStyle/>
-          <a:p>
-            <a:pPr algn="ctr" indent="0" marL="0">
-              <a:buNone/>
-            </a:pPr>
-            <a:r>
-              <a:rPr lang="en-US" sz="3600" b="1" dirty="0">
-                <a:solidFill>
-                  <a:srgbClr val="990011"/>
-                </a:solidFill>
-                <a:latin typeface="Times New Roman" pitchFamily="34" charset="0"/>
-                <a:ea typeface="Times New Roman" pitchFamily="34" charset="-122"/>
-                <a:cs typeface="Times New Roman" pitchFamily="34" charset="-120"/>
-              </a:rPr>
-              <a:t>Lesson Plan</a:t>
-            </a:r>
-            <a:endParaRPr lang="en-US" sz="3600" dirty="0"/>
-          </a:p>
-        </p:txBody>
-      </p:sp>
-      <p:sp>
-        <p:nvSpPr>
-          <p:cNvPr id="5" name="Text 2"/>
-          <p:cNvSpPr/>
-          <p:nvPr/>
-        </p:nvSpPr>
-        <p:spPr>
-          <a:xfrm>
-            <a:off x="2697480" y="1783080"/>
-            <a:ext cx="9174175" cy="4663440"/>
-          </a:xfrm>
-          <a:prstGeom prst="rect">
-            <a:avLst/>
-          </a:prstGeom>
-          <a:noFill/>
-          <a:ln/>
-        </p:spPr>
-        <p:txBody>
-          <a:bodyPr wrap="square" lIns="0" tIns="0" rIns="0" bIns="0" rtlCol="0" anchor="t"/>
-          <a:lstStyle/>
-          <a:p>
-            <a:pPr algn="l" marL="342900" indent="-342900">
-              <a:spcAft>
-                <a:spcPts val="800"/>
-              </a:spcAft>
-              <a:buSzPct val="100000"/>
-              <a:buFont typeface="+mj-lt"/>
-              <a:buAutoNum type="arabicPeriod" startAt="1"/>
-            </a:pPr>
-            <a:r>
-              <a:rPr lang="en-US" sz="4000" dirty="0">
-                <a:solidFill>
-                  <a:srgbClr val="111111"/>
-                </a:solidFill>
-                <a:latin typeface="Times New Roman" pitchFamily="34" charset="0"/>
-                <a:ea typeface="Times New Roman" pitchFamily="34" charset="-122"/>
-                <a:cs typeface="Times New Roman" pitchFamily="34" charset="-120"/>
-              </a:rPr>
-              <a:t>Correction of the homework</a:t>
-            </a:r>
-            <a:endParaRPr lang="en-US" sz="4000" dirty="0"/>
-          </a:p>
-          <a:p>
-            <a:pPr algn="l" marL="342900" indent="-342900">
-              <a:spcAft>
-                <a:spcPts val="800"/>
-              </a:spcAft>
-              <a:buSzPct val="100000"/>
-              <a:buFont typeface="+mj-lt"/>
-              <a:buAutoNum type="arabicPeriod" startAt="1"/>
-            </a:pPr>
-            <a:r>
-              <a:rPr lang="en-US" sz="4000" dirty="0">
-                <a:solidFill>
-                  <a:srgbClr val="111111"/>
-                </a:solidFill>
-                <a:latin typeface="Times New Roman" pitchFamily="34" charset="0"/>
-                <a:ea typeface="Times New Roman" pitchFamily="34" charset="-122"/>
-                <a:cs typeface="Times New Roman" pitchFamily="34" charset="-120"/>
-              </a:rPr>
-              <a:t>Objectives and recall</a:t>
-            </a:r>
-            <a:endParaRPr lang="en-US" sz="4000" dirty="0"/>
-          </a:p>
-          <a:p>
-            <a:pPr algn="l" marL="342900" indent="-342900">
-              <a:spcAft>
-                <a:spcPts val="800"/>
-              </a:spcAft>
-              <a:buSzPct val="100000"/>
-              <a:buFont typeface="+mj-lt"/>
-              <a:buAutoNum type="arabicPeriod" startAt="1"/>
-            </a:pPr>
-            <a:r>
-              <a:rPr lang="en-US" sz="4000" dirty="0">
-                <a:solidFill>
-                  <a:srgbClr val="111111"/>
-                </a:solidFill>
-                <a:latin typeface="Times New Roman" pitchFamily="34" charset="0"/>
-                <a:ea typeface="Times New Roman" pitchFamily="34" charset="-122"/>
-                <a:cs typeface="Times New Roman" pitchFamily="34" charset="-120"/>
-              </a:rPr>
-              <a:t>Real-life situation and action to take</a:t>
-            </a:r>
-            <a:endParaRPr lang="en-US" sz="4000" dirty="0"/>
-          </a:p>
-          <a:p>
-            <a:pPr algn="l" marL="342900" indent="-342900">
-              <a:spcAft>
-                <a:spcPts val="800"/>
-              </a:spcAft>
-              <a:buSzPct val="100000"/>
-              <a:buFont typeface="+mj-lt"/>
-              <a:buAutoNum type="arabicPeriod" startAt="1"/>
-            </a:pPr>
-            <a:r>
-              <a:rPr lang="en-US" sz="4000" dirty="0">
-                <a:solidFill>
-                  <a:srgbClr val="111111"/>
-                </a:solidFill>
-                <a:latin typeface="Times New Roman" pitchFamily="34" charset="0"/>
-                <a:ea typeface="Times New Roman" pitchFamily="34" charset="-122"/>
-                <a:cs typeface="Times New Roman" pitchFamily="34" charset="-120"/>
-              </a:rPr>
-              <a:t>Learning activities</a:t>
-            </a:r>
-            <a:endParaRPr lang="en-US" sz="4000" dirty="0"/>
-          </a:p>
-          <a:p>
-            <a:pPr algn="l" marL="342900" indent="-342900">
-              <a:spcAft>
-                <a:spcPts val="800"/>
-              </a:spcAft>
-              <a:buSzPct val="100000"/>
-              <a:buFont typeface="+mj-lt"/>
-              <a:buAutoNum type="arabicPeriod" startAt="1"/>
-            </a:pPr>
-            <a:r>
-              <a:rPr lang="en-US" sz="4000" dirty="0">
-                <a:solidFill>
-                  <a:srgbClr val="111111"/>
-                </a:solidFill>
-                <a:latin typeface="Times New Roman" pitchFamily="34" charset="0"/>
-                <a:ea typeface="Times New Roman" pitchFamily="34" charset="-122"/>
-                <a:cs typeface="Times New Roman" pitchFamily="34" charset="-120"/>
-              </a:rPr>
-              <a:t>Board summary</a:t>
-            </a:r>
-            <a:endParaRPr lang="en-US" sz="4000" dirty="0"/>
-          </a:p>
-          <a:p>
-            <a:pPr algn="l" marL="342900" indent="-342900">
-              <a:spcAft>
-                <a:spcPts val="800"/>
-              </a:spcAft>
-              <a:buSzPct val="100000"/>
-              <a:buFont typeface="+mj-lt"/>
-              <a:buAutoNum type="arabicPeriod" startAt="1"/>
-            </a:pPr>
-            <a:r>
-              <a:rPr lang="en-US" sz="4000" dirty="0">
-                <a:solidFill>
-                  <a:srgbClr val="111111"/>
-                </a:solidFill>
-                <a:latin typeface="Times New Roman" pitchFamily="34" charset="0"/>
-                <a:ea typeface="Times New Roman" pitchFamily="34" charset="-122"/>
-                <a:cs typeface="Times New Roman" pitchFamily="34" charset="-120"/>
-              </a:rPr>
-              <a:t>Evaluation, remediation and homework</a:t>
-            </a:r>
-            <a:endParaRPr lang="en-US" sz="4000" dirty="0"/>
-          </a:p>
-        </p:txBody>
-      </p:sp>
-      <p:sp>
-        <p:nvSpPr>
-          <p:cNvPr id="25" name="Slide Number Placeholder 0"/>
-          <p:cNvSpPr>
-            <a:spLocks noGrp="1"/>
-          </p:cNvSpPr>
-          <p:nvPr>
-            <p:ph type="sldNum" sz="quarter" idx="4294967295"/>
-          </p:nvPr>
-        </p:nvSpPr>
-        <p:spPr>
-          <a:xfrm>
-            <a:off x="27432" y="91440"/>
-            <a:ext cx="585216" cy="475488"/>
-          </a:xfrm>
-          <a:prstGeom prst="rect">
-            <a:avLst/>
-          </a:prstGeom>
-          <a:extLst>
-            <a:ext uri="{C572A759-6A51-4108-AA02-DFA0A04FC94B}">
-              <ma14:wrappingTextBoxFlag xmlns:ma14="http://schemas.microsoft.com/office/mac/drawingml/2011/main" val="0"/>
-            </a:ext>
-          </a:extLst>
-        </p:spPr>
-        <p:txBody>
-          <a:bodyPr/>
-          <a:lstStyle>
-            <a:lvl1pPr>
-              <a:defRPr sz="2000">
-                <a:solidFill>
-                  <a:srgbClr val="FFFFFF"/>
-                </a:solidFill>
-                <a:latin typeface="Calibri"/>
-                <a:ea typeface="Calibri"/>
-                <a:cs typeface="Calibri"/>
-              </a:defRPr>
-            </a:lvl1pPr>
-          </a:lstStyle>
-          <a:p>
-            <a:pPr algn="ctr"/>
-            <a:fld id="{F7021451-1387-4CA6-816F-3879F97B5CBC}" type="slidenum">
-              <a:rPr b="1" lang="en-US"/>
-              <a:t>6</a:t>
+              <a:t>62</a:t>
             </a:fld>
             <a:endParaRPr lang="en-US"/>
           </a:p>
